--- a/research/ppt/progress_week2.pptx
+++ b/research/ppt/progress_week2.pptx
@@ -4,17 +4,20 @@
   <p:sldMasterIdLst>
     <p:sldMasterId id="2147483648" r:id="rId1"/>
   </p:sldMasterIdLst>
+  <p:notesMasterIdLst>
+    <p:notesMasterId r:id="rId10"/>
+  </p:notesMasterIdLst>
   <p:sldIdLst>
-    <p:sldId id="256" r:id="rId7"/>
-    <p:sldId id="257" r:id="rId9"/>
-    <p:sldId id="258" r:id="rId10"/>
-    <p:sldId id="259" r:id="rId11"/>
-    <p:sldId id="260" r:id="rId12"/>
-    <p:sldId id="261" r:id="rId13"/>
-    <p:sldId id="262" r:id="rId14"/>
-    <p:sldId id="263" r:id="rId15"/>
+    <p:sldId id="256" r:id="rId2"/>
+    <p:sldId id="257" r:id="rId3"/>
+    <p:sldId id="258" r:id="rId4"/>
+    <p:sldId id="259" r:id="rId5"/>
+    <p:sldId id="260" r:id="rId6"/>
+    <p:sldId id="261" r:id="rId7"/>
+    <p:sldId id="262" r:id="rId8"/>
+    <p:sldId id="263" r:id="rId9"/>
   </p:sldIdLst>
-  <p:sldSz cx="12188952" cy="6858000" type="screen4x3"/>
+  <p:sldSz cx="12188825" cy="6858000"/>
   <p:notesSz cx="6858000" cy="9144000"/>
   <p:defaultTextStyle>
     <a:defPPr>
@@ -111,11 +114,27 @@
       </a:defRPr>
     </a:lvl9pPr>
   </p:defaultTextStyle>
+  <p:extLst>
+    <p:ext uri="{EFAFB233-063F-42B5-8137-9DF3F51BA10A}">
+      <p15:sldGuideLst xmlns:p15="http://schemas.microsoft.com/office/powerpoint/2012/main">
+        <p15:guide id="1" orient="horz" pos="2160">
+          <p15:clr>
+            <a:srgbClr val="A4A3A4"/>
+          </p15:clr>
+        </p15:guide>
+        <p15:guide id="2" pos="2880">
+          <p15:clr>
+            <a:srgbClr val="A4A3A4"/>
+          </p15:clr>
+        </p15:guide>
+      </p15:sldGuideLst>
+    </p:ext>
+  </p:extLst>
 </p:presentation>
 </file>
 
 <file path=ppt/notesMasters/notesMaster1.xml><?xml version="1.0" encoding="utf-8"?>
-<p:notesMaster xmlns:a="http://schemas.openxmlformats.org/drawingml/2006/main" xmlns:p="http://schemas.openxmlformats.org/presentationml/2006/main" xmlns:r="http://schemas.openxmlformats.org/officeDocument/2006/relationships">
+<p:notesMaster xmlns:a="http://schemas.openxmlformats.org/drawingml/2006/main" xmlns:r="http://schemas.openxmlformats.org/officeDocument/2006/relationships" xmlns:p="http://schemas.openxmlformats.org/presentationml/2006/main">
   <p:cSld>
     <p:bg>
       <p:bgRef idx="1001">
@@ -136,241 +155,16 @@
           <a:chExt cx="0" cy="0"/>
         </a:xfrm>
       </p:grpSpPr>
-      <p:sp>
-        <p:nvSpPr>
-          <p:cNvPr id="2" name="Header Placeholder 1"/>
-          <p:cNvSpPr>
-            <a:spLocks noGrp="1"/>
-          </p:cNvSpPr>
-          <p:nvPr>
-            <p:ph type="hdr" sz="quarter"/>
-          </p:nvPr>
-        </p:nvSpPr>
-        <p:spPr>
-          <a:xfrm>
-            <a:off x="0" y="0"/>
-            <a:ext cx="2971800" cy="457200"/>
-          </a:xfrm>
-          <a:prstGeom prst="rect">
-            <a:avLst/>
-          </a:prstGeom>
-        </p:spPr>
-        <p:txBody>
-          <a:bodyPr vert="horz" lIns="91440" tIns="45720" rIns="91440" bIns="45720" rtlCol="0"/>
-          <a:lstStyle>
-            <a:lvl1pPr algn="l">
-              <a:defRPr sz="1200"/>
-            </a:lvl1pPr>
-          </a:lstStyle>
-          <a:p>
-            <a:endParaRPr lang="en-US"/>
-          </a:p>
-        </p:txBody>
-      </p:sp>
-      <p:sp>
-        <p:nvSpPr>
-          <p:cNvPr id="3" name="Date Placeholder 2"/>
-          <p:cNvSpPr>
-            <a:spLocks noGrp="1"/>
-          </p:cNvSpPr>
-          <p:nvPr>
-            <p:ph type="dt" idx="1"/>
-          </p:nvPr>
-        </p:nvSpPr>
-        <p:spPr>
-          <a:xfrm>
-            <a:off x="3884613" y="0"/>
-            <a:ext cx="2971800" cy="457200"/>
-          </a:xfrm>
-          <a:prstGeom prst="rect">
-            <a:avLst/>
-          </a:prstGeom>
-        </p:spPr>
-        <p:txBody>
-          <a:bodyPr vert="horz" lIns="91440" tIns="45720" rIns="91440" bIns="45720" rtlCol="0"/>
-          <a:lstStyle>
-            <a:lvl1pPr algn="r">
-              <a:defRPr sz="1200"/>
-            </a:lvl1pPr>
-          </a:lstStyle>
-          <a:p>
-            <a:fld id="{0F89C1C7-3DCD-1040-A9CF-14679D8B5DDD}" type="datetimeFigureOut">
-              <a:rPr lang="en-US" smtClean="0"/>
-              <a:t>10/17/16</a:t>
-            </a:fld>
-            <a:endParaRPr lang="en-US"/>
-          </a:p>
-        </p:txBody>
-      </p:sp>
-      <p:sp>
-        <p:nvSpPr>
-          <p:cNvPr id="4" name="Slide Image Placeholder 3"/>
-          <p:cNvSpPr>
-            <a:spLocks noGrp="1" noRot="1" noChangeAspect="1"/>
-          </p:cNvSpPr>
-          <p:nvPr>
-            <p:ph type="sldImg" idx="2"/>
-          </p:nvPr>
-        </p:nvSpPr>
-        <p:spPr>
-          <a:xfrm>
-            <a:off x="1143000" y="685800"/>
-            <a:ext cx="4572000" cy="3429000"/>
-          </a:xfrm>
-          <a:prstGeom prst="rect">
-            <a:avLst/>
-          </a:prstGeom>
-          <a:noFill/>
-          <a:ln w="12700">
-            <a:solidFill>
-              <a:prstClr val="black"/>
-            </a:solidFill>
-          </a:ln>
-        </p:spPr>
-        <p:txBody>
-          <a:bodyPr vert="horz" lIns="91440" tIns="45720" rIns="91440" bIns="45720" rtlCol="0" anchor="ctr"/>
-          <a:lstStyle/>
-          <a:p>
-            <a:endParaRPr lang="en-US"/>
-          </a:p>
-        </p:txBody>
-      </p:sp>
-      <p:sp>
-        <p:nvSpPr>
-          <p:cNvPr id="5" name="Notes Placeholder 4"/>
-          <p:cNvSpPr>
-            <a:spLocks noGrp="1"/>
-          </p:cNvSpPr>
-          <p:nvPr>
-            <p:ph type="body" sz="quarter" idx="3"/>
-          </p:nvPr>
-        </p:nvSpPr>
-        <p:spPr>
-          <a:xfrm>
-            <a:off x="685800" y="4343400"/>
-            <a:ext cx="5486400" cy="4114800"/>
-          </a:xfrm>
-          <a:prstGeom prst="rect">
-            <a:avLst/>
-          </a:prstGeom>
-        </p:spPr>
-        <p:txBody>
-          <a:bodyPr vert="horz" lIns="91440" tIns="45720" rIns="91440" bIns="45720" rtlCol="0"/>
-          <a:lstStyle/>
-          <a:p>
-            <a:pPr lvl="0"/>
-            <a:r>
-              <a:rPr lang="en-US" smtClean="0"/>
-              <a:t>Click to edit Master text styles</a:t>
-            </a:r>
-          </a:p>
-          <a:p>
-            <a:pPr lvl="1"/>
-            <a:r>
-              <a:rPr lang="en-US" smtClean="0"/>
-              <a:t>Second level</a:t>
-            </a:r>
-          </a:p>
-          <a:p>
-            <a:pPr lvl="2"/>
-            <a:r>
-              <a:rPr lang="en-US" smtClean="0"/>
-              <a:t>Third level</a:t>
-            </a:r>
-          </a:p>
-          <a:p>
-            <a:pPr lvl="3"/>
-            <a:r>
-              <a:rPr lang="en-US" smtClean="0"/>
-              <a:t>Fourth level</a:t>
-            </a:r>
-          </a:p>
-          <a:p>
-            <a:pPr lvl="4"/>
-            <a:r>
-              <a:rPr lang="en-US" smtClean="0"/>
-              <a:t>Fifth level</a:t>
-            </a:r>
-            <a:endParaRPr lang="en-US"/>
-          </a:p>
-        </p:txBody>
-      </p:sp>
-      <p:sp>
-        <p:nvSpPr>
-          <p:cNvPr id="6" name="Footer Placeholder 5"/>
-          <p:cNvSpPr>
-            <a:spLocks noGrp="1"/>
-          </p:cNvSpPr>
-          <p:nvPr>
-            <p:ph type="ftr" sz="quarter" idx="4"/>
-          </p:nvPr>
-        </p:nvSpPr>
-        <p:spPr>
-          <a:xfrm>
-            <a:off x="0" y="8685213"/>
-            <a:ext cx="2971800" cy="457200"/>
-          </a:xfrm>
-          <a:prstGeom prst="rect">
-            <a:avLst/>
-          </a:prstGeom>
-        </p:spPr>
-        <p:txBody>
-          <a:bodyPr vert="horz" lIns="91440" tIns="45720" rIns="91440" bIns="45720" rtlCol="0" anchor="b"/>
-          <a:lstStyle>
-            <a:lvl1pPr algn="l">
-              <a:defRPr sz="1200"/>
-            </a:lvl1pPr>
-          </a:lstStyle>
-          <a:p>
-            <a:endParaRPr lang="en-US"/>
-          </a:p>
-        </p:txBody>
-      </p:sp>
-      <p:sp>
-        <p:nvSpPr>
-          <p:cNvPr id="7" name="Slide Number Placeholder 6"/>
-          <p:cNvSpPr>
-            <a:spLocks noGrp="1"/>
-          </p:cNvSpPr>
-          <p:nvPr>
-            <p:ph type="sldNum" sz="quarter" idx="5"/>
-          </p:nvPr>
-        </p:nvSpPr>
-        <p:spPr>
-          <a:xfrm>
-            <a:off x="3884613" y="8685213"/>
-            <a:ext cx="2971800" cy="457200"/>
-          </a:xfrm>
-          <a:prstGeom prst="rect">
-            <a:avLst/>
-          </a:prstGeom>
-        </p:spPr>
-        <p:txBody>
-          <a:bodyPr vert="horz" lIns="91440" tIns="45720" rIns="91440" bIns="45720" rtlCol="0" anchor="b"/>
-          <a:lstStyle>
-            <a:lvl1pPr algn="r">
-              <a:defRPr sz="1200"/>
-            </a:lvl1pPr>
-          </a:lstStyle>
-          <a:p>
-            <a:fld id="{BB5E49A5-4136-284D-997B-48E1D791AD67}" type="slidenum">
-              <a:rPr lang="en-US" smtClean="0"/>
-              <a:t>‹#›</a:t>
-            </a:fld>
-            <a:endParaRPr lang="en-US"/>
-          </a:p>
-        </p:txBody>
-      </p:sp>
     </p:spTree>
     <p:extLst>
       <p:ext uri="{BB962C8B-B14F-4D97-AF65-F5344CB8AC3E}">
-        <p14:creationId xmlns:p14="http://schemas.microsoft.com/office/powerpoint/2010/main" val="2623252185"/>
+        <p14:creationId xmlns:p14="http://schemas.microsoft.com/office/powerpoint/2010/main" val="3737455997"/>
       </p:ext>
     </p:extLst>
   </p:cSld>
   <p:clrMap bg1="lt1" tx1="dk1" bg2="lt2" tx2="dk2" accent1="accent1" accent2="accent2" accent3="accent3" accent4="accent4" accent5="accent5" accent6="accent6" hlink="hlink" folHlink="folHlink"/>
   <p:notesStyle>
-    <a:lvl1pPr marL="0" algn="l" defTabSz="457200" rtl="0" eaLnBrk="1" latinLnBrk="0" hangingPunct="1">
+    <a:lvl1pPr marL="0" algn="l" defTabSz="914400" rtl="0" eaLnBrk="1" latinLnBrk="0" hangingPunct="1">
       <a:defRPr sz="1200" kern="1200">
         <a:solidFill>
           <a:schemeClr val="tx1"/>
@@ -380,7 +174,7 @@
         <a:cs typeface="+mn-cs"/>
       </a:defRPr>
     </a:lvl1pPr>
-    <a:lvl2pPr marL="457200" algn="l" defTabSz="457200" rtl="0" eaLnBrk="1" latinLnBrk="0" hangingPunct="1">
+    <a:lvl2pPr marL="457200" algn="l" defTabSz="914400" rtl="0" eaLnBrk="1" latinLnBrk="0" hangingPunct="1">
       <a:defRPr sz="1200" kern="1200">
         <a:solidFill>
           <a:schemeClr val="tx1"/>
@@ -390,7 +184,7 @@
         <a:cs typeface="+mn-cs"/>
       </a:defRPr>
     </a:lvl2pPr>
-    <a:lvl3pPr marL="914400" algn="l" defTabSz="457200" rtl="0" eaLnBrk="1" latinLnBrk="0" hangingPunct="1">
+    <a:lvl3pPr marL="914400" algn="l" defTabSz="914400" rtl="0" eaLnBrk="1" latinLnBrk="0" hangingPunct="1">
       <a:defRPr sz="1200" kern="1200">
         <a:solidFill>
           <a:schemeClr val="tx1"/>
@@ -400,7 +194,7 @@
         <a:cs typeface="+mn-cs"/>
       </a:defRPr>
     </a:lvl3pPr>
-    <a:lvl4pPr marL="1371600" algn="l" defTabSz="457200" rtl="0" eaLnBrk="1" latinLnBrk="0" hangingPunct="1">
+    <a:lvl4pPr marL="1371600" algn="l" defTabSz="914400" rtl="0" eaLnBrk="1" latinLnBrk="0" hangingPunct="1">
       <a:defRPr sz="1200" kern="1200">
         <a:solidFill>
           <a:schemeClr val="tx1"/>
@@ -410,7 +204,7 @@
         <a:cs typeface="+mn-cs"/>
       </a:defRPr>
     </a:lvl4pPr>
-    <a:lvl5pPr marL="1828800" algn="l" defTabSz="457200" rtl="0" eaLnBrk="1" latinLnBrk="0" hangingPunct="1">
+    <a:lvl5pPr marL="1828800" algn="l" defTabSz="914400" rtl="0" eaLnBrk="1" latinLnBrk="0" hangingPunct="1">
       <a:defRPr sz="1200" kern="1200">
         <a:solidFill>
           <a:schemeClr val="tx1"/>
@@ -420,7 +214,7 @@
         <a:cs typeface="+mn-cs"/>
       </a:defRPr>
     </a:lvl5pPr>
-    <a:lvl6pPr marL="2286000" algn="l" defTabSz="457200" rtl="0" eaLnBrk="1" latinLnBrk="0" hangingPunct="1">
+    <a:lvl6pPr marL="2286000" algn="l" defTabSz="914400" rtl="0" eaLnBrk="1" latinLnBrk="0" hangingPunct="1">
       <a:defRPr sz="1200" kern="1200">
         <a:solidFill>
           <a:schemeClr val="tx1"/>
@@ -430,7 +224,7 @@
         <a:cs typeface="+mn-cs"/>
       </a:defRPr>
     </a:lvl6pPr>
-    <a:lvl7pPr marL="2743200" algn="l" defTabSz="457200" rtl="0" eaLnBrk="1" latinLnBrk="0" hangingPunct="1">
+    <a:lvl7pPr marL="2743200" algn="l" defTabSz="914400" rtl="0" eaLnBrk="1" latinLnBrk="0" hangingPunct="1">
       <a:defRPr sz="1200" kern="1200">
         <a:solidFill>
           <a:schemeClr val="tx1"/>
@@ -440,7 +234,7 @@
         <a:cs typeface="+mn-cs"/>
       </a:defRPr>
     </a:lvl7pPr>
-    <a:lvl8pPr marL="3200400" algn="l" defTabSz="457200" rtl="0" eaLnBrk="1" latinLnBrk="0" hangingPunct="1">
+    <a:lvl8pPr marL="3200400" algn="l" defTabSz="914400" rtl="0" eaLnBrk="1" latinLnBrk="0" hangingPunct="1">
       <a:defRPr sz="1200" kern="1200">
         <a:solidFill>
           <a:schemeClr val="tx1"/>
@@ -450,7 +244,7 @@
         <a:cs typeface="+mn-cs"/>
       </a:defRPr>
     </a:lvl8pPr>
-    <a:lvl9pPr marL="3657600" algn="l" defTabSz="457200" rtl="0" eaLnBrk="1" latinLnBrk="0" hangingPunct="1">
+    <a:lvl9pPr marL="3657600" algn="l" defTabSz="914400" rtl="0" eaLnBrk="1" latinLnBrk="0" hangingPunct="1">
       <a:defRPr sz="1200" kern="1200">
         <a:solidFill>
           <a:schemeClr val="tx1"/>
@@ -465,7 +259,7 @@
 </file>
 
 <file path=ppt/notesSlides/notesSlide1.xml><?xml version="1.0" encoding="utf-8"?>
-<p:notes xmlns:a="http://schemas.openxmlformats.org/drawingml/2006/main" xmlns:p="http://schemas.openxmlformats.org/presentationml/2006/main" xmlns:r="http://schemas.openxmlformats.org/officeDocument/2006/relationships">
+<p:notes xmlns:a="http://schemas.openxmlformats.org/drawingml/2006/main" xmlns:r="http://schemas.openxmlformats.org/officeDocument/2006/relationships" xmlns:p="http://schemas.openxmlformats.org/presentationml/2006/main">
   <p:cSld>
     <p:spTree>
       <p:nvGrpSpPr>
@@ -485,7 +279,7 @@
         <p:nvSpPr>
           <p:cNvPr id="2" name="Slide Image Placeholder 1"/>
           <p:cNvSpPr>
-            <a:spLocks noGrp="1"/>
+            <a:spLocks noGrp="1" noRot="1" noChangeAspect="1"/>
           </p:cNvSpPr>
           <p:nvPr>
             <p:ph type="sldImg" idx="2"/>
@@ -500,7 +294,7 @@
             <a:spLocks noGrp="1"/>
           </p:cNvSpPr>
           <p:nvPr>
-            <p:ph type="body" idx="3" sz="quarter"/>
+            <p:ph type="body" sz="quarter" idx="3"/>
           </p:nvPr>
         </p:nvSpPr>
         <p:spPr/>
@@ -521,7 +315,7 @@
             <a:spLocks noGrp="1"/>
           </p:cNvSpPr>
           <p:nvPr>
-            <p:ph type="sldNum" idx="5" sz="quarter"/>
+            <p:ph type="sldNum" sz="quarter" idx="5"/>
           </p:nvPr>
         </p:nvSpPr>
         <p:spPr/>
@@ -535,7 +329,7 @@
 </file>
 
 <file path=ppt/notesSlides/notesSlide2.xml><?xml version="1.0" encoding="utf-8"?>
-<p:notes xmlns:a="http://schemas.openxmlformats.org/drawingml/2006/main" xmlns:p="http://schemas.openxmlformats.org/presentationml/2006/main" xmlns:r="http://schemas.openxmlformats.org/officeDocument/2006/relationships">
+<p:notes xmlns:a="http://schemas.openxmlformats.org/drawingml/2006/main" xmlns:r="http://schemas.openxmlformats.org/officeDocument/2006/relationships" xmlns:p="http://schemas.openxmlformats.org/presentationml/2006/main">
   <p:cSld>
     <p:spTree>
       <p:nvGrpSpPr>
@@ -555,7 +349,7 @@
         <p:nvSpPr>
           <p:cNvPr id="2" name="Slide Image Placeholder 1"/>
           <p:cNvSpPr>
-            <a:spLocks noGrp="1"/>
+            <a:spLocks noGrp="1" noRot="1" noChangeAspect="1"/>
           </p:cNvSpPr>
           <p:nvPr>
             <p:ph type="sldImg" idx="2"/>
@@ -570,7 +364,7 @@
             <a:spLocks noGrp="1"/>
           </p:cNvSpPr>
           <p:nvPr>
-            <p:ph type="body" idx="3" sz="quarter"/>
+            <p:ph type="body" sz="quarter" idx="3"/>
           </p:nvPr>
         </p:nvSpPr>
         <p:spPr/>
@@ -582,7 +376,9 @@
               <a:t>We pulled WDI data for all 22 countries via the World Bank API. Missing values in the WDI panel are genuine non-reporting, not data errors — for example, Turkmenistan and Tajikistan rarely report government debt to the World Bank. We preserve these gaps using a binary missingness mask rather than imputing, so the model knows explicitly which values are absent.</a:t>
             </a:r>
           </a:p>
-          <a:p/>
+          <a:p>
+            <a:endParaRPr/>
+          </a:p>
           <a:p>
             <a:r>
               <a:t>For Article IV texts, 240 real staff reports were extracted from IMF PDFs using a Coveo API query per country, with Playwright browser automation to download each PDF in memory. PyMuPDF extracts pages 1-6 — no PDFs are saved to disk.</a:t>
@@ -597,7 +393,7 @@
             <a:spLocks noGrp="1"/>
           </p:cNvSpPr>
           <p:nvPr>
-            <p:ph type="sldNum" idx="5" sz="quarter"/>
+            <p:ph type="sldNum" sz="quarter" idx="5"/>
           </p:nvPr>
         </p:nvSpPr>
         <p:spPr/>
@@ -611,7 +407,7 @@
 </file>
 
 <file path=ppt/notesSlides/notesSlide3.xml><?xml version="1.0" encoding="utf-8"?>
-<p:notes xmlns:a="http://schemas.openxmlformats.org/drawingml/2006/main" xmlns:p="http://schemas.openxmlformats.org/presentationml/2006/main" xmlns:r="http://schemas.openxmlformats.org/officeDocument/2006/relationships">
+<p:notes xmlns:a="http://schemas.openxmlformats.org/drawingml/2006/main" xmlns:r="http://schemas.openxmlformats.org/officeDocument/2006/relationships" xmlns:p="http://schemas.openxmlformats.org/presentationml/2006/main">
   <p:cSld>
     <p:spTree>
       <p:nvGrpSpPr>
@@ -631,7 +427,7 @@
         <p:nvSpPr>
           <p:cNvPr id="2" name="Slide Image Placeholder 1"/>
           <p:cNvSpPr>
-            <a:spLocks noGrp="1"/>
+            <a:spLocks noGrp="1" noRot="1" noChangeAspect="1"/>
           </p:cNvSpPr>
           <p:nvPr>
             <p:ph type="sldImg" idx="2"/>
@@ -646,7 +442,7 @@
             <a:spLocks noGrp="1"/>
           </p:cNvSpPr>
           <p:nvPr>
-            <p:ph type="body" idx="3" sz="quarter"/>
+            <p:ph type="body" sz="quarter" idx="3"/>
           </p:nvPr>
         </p:nvSpPr>
         <p:spPr/>
@@ -658,19 +454,25 @@
               <a:t>Three models are compared:</a:t>
             </a:r>
           </a:p>
-          <a:p/>
+          <a:p>
+            <a:endParaRPr/>
+          </a:p>
           <a:p>
             <a:r>
               <a:t>DLinear decomposes the 10-year WDI series into trend and seasonal components and applies a linear layer to each. It is the simplest possible baseline.</a:t>
             </a:r>
           </a:p>
-          <a:p/>
+          <a:p>
+            <a:endParaRPr/>
+          </a:p>
           <a:p>
             <a:r>
               <a:t>NumericalGRU adds temporal dynamics via a GRU encoder. It receives the value matrix and the missingness mask concatenated, so it can learn to down-weight missing time steps.</a:t>
             </a:r>
           </a:p>
-          <a:p/>
+          <a:p>
+            <a:endParaRPr/>
+          </a:p>
           <a:p>
             <a:r>
               <a:t>GR-Add MMF is the full multimodal model. The RecAvg TTF module aggregates past Article IV embeddings using a Gaussian kernel, weighting by distance from the query year with sigma=1.0 year. The GR-Add fusion layer then combines the GRU hidden state with the text context via a gated residual: the sigmoid gate decides how much of the tanh delta to add. When text is absent, the gate collapses to zero and the model is equivalent to NumericalGRU.</a:t>
@@ -685,7 +487,7 @@
             <a:spLocks noGrp="1"/>
           </p:cNvSpPr>
           <p:nvPr>
-            <p:ph type="sldNum" idx="5" sz="quarter"/>
+            <p:ph type="sldNum" sz="quarter" idx="5"/>
           </p:nvPr>
         </p:nvSpPr>
         <p:spPr/>
@@ -699,7 +501,7 @@
 </file>
 
 <file path=ppt/notesSlides/notesSlide4.xml><?xml version="1.0" encoding="utf-8"?>
-<p:notes xmlns:a="http://schemas.openxmlformats.org/drawingml/2006/main" xmlns:p="http://schemas.openxmlformats.org/presentationml/2006/main" xmlns:r="http://schemas.openxmlformats.org/officeDocument/2006/relationships">
+<p:notes xmlns:a="http://schemas.openxmlformats.org/drawingml/2006/main" xmlns:r="http://schemas.openxmlformats.org/officeDocument/2006/relationships" xmlns:p="http://schemas.openxmlformats.org/presentationml/2006/main">
   <p:cSld>
     <p:spTree>
       <p:nvGrpSpPr>
@@ -719,7 +521,7 @@
         <p:nvSpPr>
           <p:cNvPr id="2" name="Slide Image Placeholder 1"/>
           <p:cNvSpPr>
-            <a:spLocks noGrp="1"/>
+            <a:spLocks noGrp="1" noRot="1" noChangeAspect="1"/>
           </p:cNvSpPr>
           <p:nvPr>
             <p:ph type="sldImg" idx="2"/>
@@ -734,7 +536,7 @@
             <a:spLocks noGrp="1"/>
           </p:cNvSpPr>
           <p:nvPr>
-            <p:ph type="body" idx="3" sz="quarter"/>
+            <p:ph type="body" sz="quarter" idx="3"/>
           </p:nvPr>
         </p:nvSpPr>
         <p:spPr/>
@@ -746,25 +548,33 @@
               <a:t>This slide explains why we moved from BERT to OpenAI embeddings.</a:t>
             </a:r>
           </a:p>
-          <a:p/>
+          <a:p>
+            <a:endParaRPr/>
+          </a:p>
           <a:p>
             <a:r>
               <a:t>BERT-base-uncased has a hard 512-token limit. Article IV staff reports, even after extracting only pages 1-6, are typically 2,000-5,000 tokens long. BERT sees roughly the first 380 words — usually the cover page and introduction — and never reaches the Staff Appraisal section, which contains the IMF's explicit forward-looking economic assessment.</a:t>
             </a:r>
           </a:p>
-          <a:p/>
+          <a:p>
+            <a:endParaRPr/>
+          </a:p>
           <a:p>
             <a:r>
               <a:t>OpenAI's text-embedding-3-small handles up to 8,191 tokens, covering the full extracted text. We request 768 dimensions via the API to keep the model architecture unchanged. The cost for all 240 texts was approximately $0.01.</a:t>
             </a:r>
           </a:p>
-          <a:p/>
+          <a:p>
+            <a:endParaRPr/>
+          </a:p>
           <a:p>
             <a:r>
               <a:t>Additionally, we fetched real IMF publication dates from the Coveo search API (239/240 found), replacing our earlier estimated dates. More accurate publication timestamps improve the Gaussian kernel weighting in RecAvg TTF.</a:t>
             </a:r>
           </a:p>
-          <a:p/>
+          <a:p>
+            <a:endParaRPr/>
+          </a:p>
           <a:p>
             <a:r>
               <a:t>Both changes together improved GR-Add MMF from 2.872 to 2.584 overall MSE.</a:t>
@@ -779,7 +589,7 @@
             <a:spLocks noGrp="1"/>
           </p:cNvSpPr>
           <p:nvPr>
-            <p:ph type="sldNum" idx="5" sz="quarter"/>
+            <p:ph type="sldNum" sz="quarter" idx="5"/>
           </p:nvPr>
         </p:nvSpPr>
         <p:spPr/>
@@ -793,7 +603,7 @@
 </file>
 
 <file path=ppt/notesSlides/notesSlide5.xml><?xml version="1.0" encoding="utf-8"?>
-<p:notes xmlns:a="http://schemas.openxmlformats.org/drawingml/2006/main" xmlns:p="http://schemas.openxmlformats.org/presentationml/2006/main" xmlns:r="http://schemas.openxmlformats.org/officeDocument/2006/relationships">
+<p:notes xmlns:a="http://schemas.openxmlformats.org/drawingml/2006/main" xmlns:r="http://schemas.openxmlformats.org/officeDocument/2006/relationships" xmlns:p="http://schemas.openxmlformats.org/presentationml/2006/main">
   <p:cSld>
     <p:spTree>
       <p:nvGrpSpPr>
@@ -813,7 +623,7 @@
         <p:nvSpPr>
           <p:cNvPr id="2" name="Slide Image Placeholder 1"/>
           <p:cNvSpPr>
-            <a:spLocks noGrp="1"/>
+            <a:spLocks noGrp="1" noRot="1" noChangeAspect="1"/>
           </p:cNvSpPr>
           <p:nvPr>
             <p:ph type="sldImg" idx="2"/>
@@ -828,7 +638,7 @@
             <a:spLocks noGrp="1"/>
           </p:cNvSpPr>
           <p:nvPr>
-            <p:ph type="body" idx="3" sz="quarter"/>
+            <p:ph type="body" sz="quarter" idx="3"/>
           </p:nvPr>
         </p:nvSpPr>
         <p:spPr/>
@@ -840,19 +650,25 @@
               <a:t>Primary metric is MSE on the 2022-2023 held-out test set.</a:t>
             </a:r>
           </a:p>
-          <a:p/>
+          <a:p>
+            <a:endParaRPr/>
+          </a:p>
           <a:p>
             <a:r>
               <a:t>With BERT: All three models are very close. GR-Add edges out NumericalGRU (2.872 vs 2.907), but the gap is small — the truncated embeddings provide only marginal signal.</a:t>
             </a:r>
           </a:p>
-          <a:p/>
+          <a:p>
+            <a:endParaRPr/>
+          </a:p>
           <a:p>
             <a:r>
               <a:t>With OpenAI + real pub dates: GR-Add clearly leads (2.584). The main advantage comes from inflation forecasting (3.684 vs 4.228 for NumericalGRU). This makes economic sense — Article IV reports explicitly discuss price pressures, exchange rate trajectories, and monetary policy outlook that a purely numerical series would only capture with a lag.</a:t>
             </a:r>
           </a:p>
-          <a:p/>
+          <a:p>
+            <a:endParaRPr/>
+          </a:p>
           <a:p>
             <a:r>
               <a:t>NumericalGRU outperforms DLinear on GDP (1.466 vs 1.568) but not inflation (4.228 vs 4.667), suggesting GRU's temporal modeling helps for growth but not for the more volatile inflation series.</a:t>
@@ -867,7 +683,7 @@
             <a:spLocks noGrp="1"/>
           </p:cNvSpPr>
           <p:nvPr>
-            <p:ph type="sldNum" idx="5" sz="quarter"/>
+            <p:ph type="sldNum" sz="quarter" idx="5"/>
           </p:nvPr>
         </p:nvSpPr>
         <p:spPr/>
@@ -881,7 +697,7 @@
 </file>
 
 <file path=ppt/notesSlides/notesSlide6.xml><?xml version="1.0" encoding="utf-8"?>
-<p:notes xmlns:a="http://schemas.openxmlformats.org/drawingml/2006/main" xmlns:p="http://schemas.openxmlformats.org/presentationml/2006/main" xmlns:r="http://schemas.openxmlformats.org/officeDocument/2006/relationships">
+<p:notes xmlns:a="http://schemas.openxmlformats.org/drawingml/2006/main" xmlns:r="http://schemas.openxmlformats.org/officeDocument/2006/relationships" xmlns:p="http://schemas.openxmlformats.org/presentationml/2006/main">
   <p:cSld>
     <p:spTree>
       <p:nvGrpSpPr>
@@ -901,7 +717,7 @@
         <p:nvSpPr>
           <p:cNvPr id="2" name="Slide Image Placeholder 1"/>
           <p:cNvSpPr>
-            <a:spLocks noGrp="1"/>
+            <a:spLocks noGrp="1" noRot="1" noChangeAspect="1"/>
           </p:cNvSpPr>
           <p:nvPr>
             <p:ph type="sldImg" idx="2"/>
@@ -916,7 +732,7 @@
             <a:spLocks noGrp="1"/>
           </p:cNvSpPr>
           <p:nvPr>
-            <p:ph type="body" idx="3" sz="quarter"/>
+            <p:ph type="body" sz="quarter" idx="3"/>
           </p:nvPr>
         </p:nvSpPr>
         <p:spPr/>
@@ -928,19 +744,25 @@
               <a:t>The persistence baseline is the standard benchmark in macroeconomic forecasting. It says: 'my forecast for GDP growth in 2022 is whatever GDP growth was in 2021.' This is surprisingly hard to beat over short horizons.</a:t>
             </a:r>
           </a:p>
-          <a:p/>
+          <a:p>
+            <a:endParaRPr/>
+          </a:p>
           <a:p>
             <a:r>
               <a:t>Persistence MSE = 105.44 reflects the high year-to-year volatility in our dataset, especially for countries like Ukraine (-3.8 to -28.8%), Moldova (-8.3 to -4.6%), and Turkey (inflation from 19% to 72%).</a:t>
             </a:r>
           </a:p>
-          <a:p/>
+          <a:p>
+            <a:endParaRPr/>
+          </a:p>
           <a:p>
             <a:r>
               <a:t>All three models beat persistence by roughly 97-98%, which shows the numerical WDI data alone is highly informative. The gain from adding text (GR-Add over NumericalGRU) is an additional 9.2% reduction on top of that.</a:t>
             </a:r>
           </a:p>
-          <a:p/>
+          <a:p>
+            <a:endParaRPr/>
+          </a:p>
           <a:p>
             <a:r>
               <a:t>Note: true WEO vintage forecasts (Oct 2021 WEO for 2022, Oct 2022 WEO for 2023) were not accessible via public API — IMF DataMapper only serves current revised estimates. We use the persistence baseline as the primary comparison.</a:t>
@@ -955,7 +777,7 @@
             <a:spLocks noGrp="1"/>
           </p:cNvSpPr>
           <p:nvPr>
-            <p:ph type="sldNum" idx="5" sz="quarter"/>
+            <p:ph type="sldNum" sz="quarter" idx="5"/>
           </p:nvPr>
         </p:nvSpPr>
         <p:spPr/>
@@ -969,7 +791,7 @@
 </file>
 
 <file path=ppt/notesSlides/notesSlide7.xml><?xml version="1.0" encoding="utf-8"?>
-<p:notes xmlns:a="http://schemas.openxmlformats.org/drawingml/2006/main" xmlns:p="http://schemas.openxmlformats.org/presentationml/2006/main" xmlns:r="http://schemas.openxmlformats.org/officeDocument/2006/relationships">
+<p:notes xmlns:a="http://schemas.openxmlformats.org/drawingml/2006/main" xmlns:r="http://schemas.openxmlformats.org/officeDocument/2006/relationships" xmlns:p="http://schemas.openxmlformats.org/presentationml/2006/main">
   <p:cSld>
     <p:spTree>
       <p:nvGrpSpPr>
@@ -989,7 +811,7 @@
         <p:nvSpPr>
           <p:cNvPr id="2" name="Slide Image Placeholder 1"/>
           <p:cNvSpPr>
-            <a:spLocks noGrp="1"/>
+            <a:spLocks noGrp="1" noRot="1" noChangeAspect="1"/>
           </p:cNvSpPr>
           <p:nvPr>
             <p:ph type="sldImg" idx="2"/>
@@ -1004,7 +826,7 @@
             <a:spLocks noGrp="1"/>
           </p:cNvSpPr>
           <p:nvPr>
-            <p:ph type="body" idx="3" sz="quarter"/>
+            <p:ph type="body" sz="quarter" idx="3"/>
           </p:nvPr>
         </p:nvSpPr>
         <p:spPr/>
@@ -1016,25 +838,33 @@
               <a:t>The secondary analysis asks whether text helps more for countries with fewer reports.</a:t>
             </a:r>
           </a:p>
-          <a:p/>
+          <a:p>
+            <a:endParaRPr/>
+          </a:p>
           <a:p>
             <a:r>
               <a:t>Median text missingness is 37%. Countries above the median (UZB 63%, KGZ 53%, ARM 53%, GEO 68%, UKR 63%) show positive gains in 5 of 6 cases — GR-Add beats NumericalGRU, sometimes dramatically (UZB +50%, KGZ +25%).</a:t>
             </a:r>
           </a:p>
-          <a:p/>
+          <a:p>
+            <a:endParaRPr/>
+          </a:p>
           <a:p>
             <a:r>
               <a:t>Low-missingness countries are more mixed: JPN (+95%) and KAZ (+34%) benefit strongly, but well-covered EU-adjacent economies (BGR, ROU, HRV) where numerical data alone is highly predictive show degradation when text is added — the gate adds noise.</a:t>
             </a:r>
           </a:p>
-          <a:p/>
+          <a:p>
+            <a:endParaRPr/>
+          </a:p>
           <a:p>
             <a:r>
               <a:t>USA is a notable outlier: 19/19 text coverage but GR-Add hurts significantly. The US economy is so well-studied numerically that the IMF text adds little incremental signal.</a:t>
             </a:r>
           </a:p>
-          <a:p/>
+          <a:p>
+            <a:endParaRPr/>
+          </a:p>
           <a:p>
             <a:r>
               <a:t>With BERT embeddings this stratified pattern did not exist, confirming that full-context embeddings are necessary to extract the text signal.</a:t>
@@ -1049,7 +879,7 @@
             <a:spLocks noGrp="1"/>
           </p:cNvSpPr>
           <p:nvPr>
-            <p:ph type="sldNum" idx="5" sz="quarter"/>
+            <p:ph type="sldNum" sz="quarter" idx="5"/>
           </p:nvPr>
         </p:nvSpPr>
         <p:spPr/>
@@ -1063,7 +893,7 @@
 </file>
 
 <file path=ppt/notesSlides/notesSlide8.xml><?xml version="1.0" encoding="utf-8"?>
-<p:notes xmlns:a="http://schemas.openxmlformats.org/drawingml/2006/main" xmlns:p="http://schemas.openxmlformats.org/presentationml/2006/main" xmlns:r="http://schemas.openxmlformats.org/officeDocument/2006/relationships">
+<p:notes xmlns:a="http://schemas.openxmlformats.org/drawingml/2006/main" xmlns:r="http://schemas.openxmlformats.org/officeDocument/2006/relationships" xmlns:p="http://schemas.openxmlformats.org/presentationml/2006/main">
   <p:cSld>
     <p:spTree>
       <p:nvGrpSpPr>
@@ -1083,7 +913,7 @@
         <p:nvSpPr>
           <p:cNvPr id="2" name="Slide Image Placeholder 1"/>
           <p:cNvSpPr>
-            <a:spLocks noGrp="1"/>
+            <a:spLocks noGrp="1" noRot="1" noChangeAspect="1"/>
           </p:cNvSpPr>
           <p:nvPr>
             <p:ph type="sldImg" idx="2"/>
@@ -1098,7 +928,7 @@
             <a:spLocks noGrp="1"/>
           </p:cNvSpPr>
           <p:nvPr>
-            <p:ph type="body" idx="3" sz="quarter"/>
+            <p:ph type="body" sz="quarter" idx="3"/>
           </p:nvPr>
         </p:nvSpPr>
         <p:spPr/>
@@ -1110,25 +940,33 @@
               <a:t>Summary of key findings:</a:t>
             </a:r>
           </a:p>
-          <a:p/>
+          <a:p>
+            <a:endParaRPr/>
+          </a:p>
           <a:p>
             <a:r>
               <a:t>1. GR-Add MMF with OpenAI text-embedding-3-small and real publication dates achieves the best test MSE at 2.584. The advantage is concentrated in inflation forecasting, which aligns with the content of Article IV reports — they explicitly discuss price pressures, monetary policy, and exchange rate dynamics.</a:t>
             </a:r>
           </a:p>
-          <a:p/>
+          <a:p>
+            <a:endParaRPr/>
+          </a:p>
           <a:p>
             <a:r>
               <a:t>2. All models dramatically outperform the persistence baseline (105.44). The bulk of the gain comes from the numerical WDI panel. Text adds an incremental but meaningful improvement on top.</a:t>
             </a:r>
           </a:p>
-          <a:p/>
+          <a:p>
+            <a:endParaRPr/>
+          </a:p>
           <a:p>
             <a:r>
               <a:t>3. The stratified analysis confirms the hypothesis that text helps most where it is scarce. For countries with thin Article IV coverage, the IMF text compensates for sparse numerical signals.</a:t>
             </a:r>
           </a:p>
-          <a:p/>
+          <a:p>
+            <a:endParaRPr/>
+          </a:p>
           <a:p>
             <a:r>
               <a:t>4. The dataset is small. With only 2 test observations per country, conclusions must be interpreted carefully. The empirical patterns are consistent across experiments but require a larger dataset to be statistically conclusive.</a:t>
@@ -1143,7 +981,7 @@
             <a:spLocks noGrp="1"/>
           </p:cNvSpPr>
           <p:nvPr>
-            <p:ph type="sldNum" idx="5" sz="quarter"/>
+            <p:ph type="sldNum" sz="quarter" idx="5"/>
           </p:nvPr>
         </p:nvSpPr>
         <p:spPr/>
@@ -1194,10 +1032,9 @@
           <a:lstStyle/>
           <a:p>
             <a:r>
-              <a:rPr lang="en-US" smtClean="0"/>
+              <a:rPr lang="en-US"/>
               <a:t>Click to edit Master title style</a:t>
             </a:r>
-            <a:endParaRPr lang="en-US"/>
           </a:p>
         </p:txBody>
       </p:sp>
@@ -1313,10 +1150,9 @@
           </a:lstStyle>
           <a:p>
             <a:r>
-              <a:rPr lang="en-US" smtClean="0"/>
+              <a:rPr lang="en-US"/>
               <a:t>Click to edit Master subtitle style</a:t>
             </a:r>
-            <a:endParaRPr lang="en-US"/>
           </a:p>
         </p:txBody>
       </p:sp>
@@ -1337,7 +1173,7 @@
           <a:p>
             <a:fld id="{5BCAD085-E8A6-8845-BD4E-CB4CCA059FC4}" type="datetimeFigureOut">
               <a:rPr lang="en-US" smtClean="0"/>
-              <a:t>1/27/13</a:t>
+              <a:t>4/11/26</a:t>
             </a:fld>
             <a:endParaRPr lang="en-US"/>
           </a:p>
@@ -1431,10 +1267,9 @@
           <a:lstStyle/>
           <a:p>
             <a:r>
-              <a:rPr lang="en-US" smtClean="0"/>
+              <a:rPr lang="en-US"/>
               <a:t>Click to edit Master title style</a:t>
             </a:r>
-            <a:endParaRPr lang="en-US"/>
           </a:p>
         </p:txBody>
       </p:sp>
@@ -1455,38 +1290,37 @@
           <a:p>
             <a:pPr lvl="0"/>
             <a:r>
-              <a:rPr lang="en-US" smtClean="0"/>
+              <a:rPr lang="en-US"/>
               <a:t>Click to edit Master text styles</a:t>
             </a:r>
           </a:p>
           <a:p>
             <a:pPr lvl="1"/>
             <a:r>
-              <a:rPr lang="en-US" smtClean="0"/>
+              <a:rPr lang="en-US"/>
               <a:t>Second level</a:t>
             </a:r>
           </a:p>
           <a:p>
             <a:pPr lvl="2"/>
             <a:r>
-              <a:rPr lang="en-US" smtClean="0"/>
+              <a:rPr lang="en-US"/>
               <a:t>Third level</a:t>
             </a:r>
           </a:p>
           <a:p>
             <a:pPr lvl="3"/>
             <a:r>
-              <a:rPr lang="en-US" smtClean="0"/>
+              <a:rPr lang="en-US"/>
               <a:t>Fourth level</a:t>
             </a:r>
           </a:p>
           <a:p>
             <a:pPr lvl="4"/>
             <a:r>
-              <a:rPr lang="en-US" smtClean="0"/>
+              <a:rPr lang="en-US"/>
               <a:t>Fifth level</a:t>
             </a:r>
-            <a:endParaRPr lang="en-US"/>
           </a:p>
         </p:txBody>
       </p:sp>
@@ -1507,7 +1341,7 @@
           <a:p>
             <a:fld id="{5BCAD085-E8A6-8845-BD4E-CB4CCA059FC4}" type="datetimeFigureOut">
               <a:rPr lang="en-US" smtClean="0"/>
-              <a:t>1/27/13</a:t>
+              <a:t>4/11/26</a:t>
             </a:fld>
             <a:endParaRPr lang="en-US"/>
           </a:p>
@@ -1606,10 +1440,9 @@
           <a:lstStyle/>
           <a:p>
             <a:r>
-              <a:rPr lang="en-US" smtClean="0"/>
+              <a:rPr lang="en-US"/>
               <a:t>Click to edit Master title style</a:t>
             </a:r>
-            <a:endParaRPr lang="en-US"/>
           </a:p>
         </p:txBody>
       </p:sp>
@@ -1635,38 +1468,37 @@
           <a:p>
             <a:pPr lvl="0"/>
             <a:r>
-              <a:rPr lang="en-US" smtClean="0"/>
+              <a:rPr lang="en-US"/>
               <a:t>Click to edit Master text styles</a:t>
             </a:r>
           </a:p>
           <a:p>
             <a:pPr lvl="1"/>
             <a:r>
-              <a:rPr lang="en-US" smtClean="0"/>
+              <a:rPr lang="en-US"/>
               <a:t>Second level</a:t>
             </a:r>
           </a:p>
           <a:p>
             <a:pPr lvl="2"/>
             <a:r>
-              <a:rPr lang="en-US" smtClean="0"/>
+              <a:rPr lang="en-US"/>
               <a:t>Third level</a:t>
             </a:r>
           </a:p>
           <a:p>
             <a:pPr lvl="3"/>
             <a:r>
-              <a:rPr lang="en-US" smtClean="0"/>
+              <a:rPr lang="en-US"/>
               <a:t>Fourth level</a:t>
             </a:r>
           </a:p>
           <a:p>
             <a:pPr lvl="4"/>
             <a:r>
-              <a:rPr lang="en-US" smtClean="0"/>
+              <a:rPr lang="en-US"/>
               <a:t>Fifth level</a:t>
             </a:r>
-            <a:endParaRPr lang="en-US"/>
           </a:p>
         </p:txBody>
       </p:sp>
@@ -1687,7 +1519,7 @@
           <a:p>
             <a:fld id="{5BCAD085-E8A6-8845-BD4E-CB4CCA059FC4}" type="datetimeFigureOut">
               <a:rPr lang="en-US" smtClean="0"/>
-              <a:t>1/27/13</a:t>
+              <a:t>4/11/26</a:t>
             </a:fld>
             <a:endParaRPr lang="en-US"/>
           </a:p>
@@ -1781,10 +1613,9 @@
           <a:lstStyle/>
           <a:p>
             <a:r>
-              <a:rPr lang="en-US" smtClean="0"/>
+              <a:rPr lang="en-US"/>
               <a:t>Click to edit Master title style</a:t>
             </a:r>
-            <a:endParaRPr lang="en-US"/>
           </a:p>
         </p:txBody>
       </p:sp>
@@ -1805,38 +1636,37 @@
           <a:p>
             <a:pPr lvl="0"/>
             <a:r>
-              <a:rPr lang="en-US" smtClean="0"/>
+              <a:rPr lang="en-US"/>
               <a:t>Click to edit Master text styles</a:t>
             </a:r>
           </a:p>
           <a:p>
             <a:pPr lvl="1"/>
             <a:r>
-              <a:rPr lang="en-US" smtClean="0"/>
+              <a:rPr lang="en-US"/>
               <a:t>Second level</a:t>
             </a:r>
           </a:p>
           <a:p>
             <a:pPr lvl="2"/>
             <a:r>
-              <a:rPr lang="en-US" smtClean="0"/>
+              <a:rPr lang="en-US"/>
               <a:t>Third level</a:t>
             </a:r>
           </a:p>
           <a:p>
             <a:pPr lvl="3"/>
             <a:r>
-              <a:rPr lang="en-US" smtClean="0"/>
+              <a:rPr lang="en-US"/>
               <a:t>Fourth level</a:t>
             </a:r>
           </a:p>
           <a:p>
             <a:pPr lvl="4"/>
             <a:r>
-              <a:rPr lang="en-US" smtClean="0"/>
+              <a:rPr lang="en-US"/>
               <a:t>Fifth level</a:t>
             </a:r>
-            <a:endParaRPr lang="en-US"/>
           </a:p>
         </p:txBody>
       </p:sp>
@@ -1857,7 +1687,7 @@
           <a:p>
             <a:fld id="{5BCAD085-E8A6-8845-BD4E-CB4CCA059FC4}" type="datetimeFigureOut">
               <a:rPr lang="en-US" smtClean="0"/>
-              <a:t>1/27/13</a:t>
+              <a:t>4/11/26</a:t>
             </a:fld>
             <a:endParaRPr lang="en-US"/>
           </a:p>
@@ -1960,10 +1790,9 @@
           </a:lstStyle>
           <a:p>
             <a:r>
-              <a:rPr lang="en-US" smtClean="0"/>
+              <a:rPr lang="en-US"/>
               <a:t>Click to edit Master title style</a:t>
             </a:r>
-            <a:endParaRPr lang="en-US"/>
           </a:p>
         </p:txBody>
       </p:sp>
@@ -2080,7 +1909,7 @@
           <a:p>
             <a:pPr lvl="0"/>
             <a:r>
-              <a:rPr lang="en-US" smtClean="0"/>
+              <a:rPr lang="en-US"/>
               <a:t>Click to edit Master text styles</a:t>
             </a:r>
           </a:p>
@@ -2103,7 +1932,7 @@
           <a:p>
             <a:fld id="{5BCAD085-E8A6-8845-BD4E-CB4CCA059FC4}" type="datetimeFigureOut">
               <a:rPr lang="en-US" smtClean="0"/>
-              <a:t>1/27/13</a:t>
+              <a:t>4/11/26</a:t>
             </a:fld>
             <a:endParaRPr lang="en-US"/>
           </a:p>
@@ -2197,10 +2026,9 @@
           <a:lstStyle/>
           <a:p>
             <a:r>
-              <a:rPr lang="en-US" smtClean="0"/>
+              <a:rPr lang="en-US"/>
               <a:t>Click to edit Master title style</a:t>
             </a:r>
-            <a:endParaRPr lang="en-US"/>
           </a:p>
         </p:txBody>
       </p:sp>
@@ -2254,38 +2082,37 @@
           <a:p>
             <a:pPr lvl="0"/>
             <a:r>
-              <a:rPr lang="en-US" smtClean="0"/>
+              <a:rPr lang="en-US"/>
               <a:t>Click to edit Master text styles</a:t>
             </a:r>
           </a:p>
           <a:p>
             <a:pPr lvl="1"/>
             <a:r>
-              <a:rPr lang="en-US" smtClean="0"/>
+              <a:rPr lang="en-US"/>
               <a:t>Second level</a:t>
             </a:r>
           </a:p>
           <a:p>
             <a:pPr lvl="2"/>
             <a:r>
-              <a:rPr lang="en-US" smtClean="0"/>
+              <a:rPr lang="en-US"/>
               <a:t>Third level</a:t>
             </a:r>
           </a:p>
           <a:p>
             <a:pPr lvl="3"/>
             <a:r>
-              <a:rPr lang="en-US" smtClean="0"/>
+              <a:rPr lang="en-US"/>
               <a:t>Fourth level</a:t>
             </a:r>
           </a:p>
           <a:p>
             <a:pPr lvl="4"/>
             <a:r>
-              <a:rPr lang="en-US" smtClean="0"/>
+              <a:rPr lang="en-US"/>
               <a:t>Fifth level</a:t>
             </a:r>
-            <a:endParaRPr lang="en-US"/>
           </a:p>
         </p:txBody>
       </p:sp>
@@ -2339,38 +2166,37 @@
           <a:p>
             <a:pPr lvl="0"/>
             <a:r>
-              <a:rPr lang="en-US" smtClean="0"/>
+              <a:rPr lang="en-US"/>
               <a:t>Click to edit Master text styles</a:t>
             </a:r>
           </a:p>
           <a:p>
             <a:pPr lvl="1"/>
             <a:r>
-              <a:rPr lang="en-US" smtClean="0"/>
+              <a:rPr lang="en-US"/>
               <a:t>Second level</a:t>
             </a:r>
           </a:p>
           <a:p>
             <a:pPr lvl="2"/>
             <a:r>
-              <a:rPr lang="en-US" smtClean="0"/>
+              <a:rPr lang="en-US"/>
               <a:t>Third level</a:t>
             </a:r>
           </a:p>
           <a:p>
             <a:pPr lvl="3"/>
             <a:r>
-              <a:rPr lang="en-US" smtClean="0"/>
+              <a:rPr lang="en-US"/>
               <a:t>Fourth level</a:t>
             </a:r>
           </a:p>
           <a:p>
             <a:pPr lvl="4"/>
             <a:r>
-              <a:rPr lang="en-US" smtClean="0"/>
+              <a:rPr lang="en-US"/>
               <a:t>Fifth level</a:t>
             </a:r>
-            <a:endParaRPr lang="en-US"/>
           </a:p>
         </p:txBody>
       </p:sp>
@@ -2391,7 +2217,7 @@
           <a:p>
             <a:fld id="{5BCAD085-E8A6-8845-BD4E-CB4CCA059FC4}" type="datetimeFigureOut">
               <a:rPr lang="en-US" smtClean="0"/>
-              <a:t>1/27/13</a:t>
+              <a:t>4/11/26</a:t>
             </a:fld>
             <a:endParaRPr lang="en-US"/>
           </a:p>
@@ -2489,10 +2315,9 @@
           </a:lstStyle>
           <a:p>
             <a:r>
-              <a:rPr lang="en-US" smtClean="0"/>
+              <a:rPr lang="en-US"/>
               <a:t>Click to edit Master title style</a:t>
             </a:r>
-            <a:endParaRPr lang="en-US"/>
           </a:p>
         </p:txBody>
       </p:sp>
@@ -2555,7 +2380,7 @@
           <a:p>
             <a:pPr lvl="0"/>
             <a:r>
-              <a:rPr lang="en-US" smtClean="0"/>
+              <a:rPr lang="en-US"/>
               <a:t>Click to edit Master text styles</a:t>
             </a:r>
           </a:p>
@@ -2611,38 +2436,37 @@
           <a:p>
             <a:pPr lvl="0"/>
             <a:r>
-              <a:rPr lang="en-US" smtClean="0"/>
+              <a:rPr lang="en-US"/>
               <a:t>Click to edit Master text styles</a:t>
             </a:r>
           </a:p>
           <a:p>
             <a:pPr lvl="1"/>
             <a:r>
-              <a:rPr lang="en-US" smtClean="0"/>
+              <a:rPr lang="en-US"/>
               <a:t>Second level</a:t>
             </a:r>
           </a:p>
           <a:p>
             <a:pPr lvl="2"/>
             <a:r>
-              <a:rPr lang="en-US" smtClean="0"/>
+              <a:rPr lang="en-US"/>
               <a:t>Third level</a:t>
             </a:r>
           </a:p>
           <a:p>
             <a:pPr lvl="3"/>
             <a:r>
-              <a:rPr lang="en-US" smtClean="0"/>
+              <a:rPr lang="en-US"/>
               <a:t>Fourth level</a:t>
             </a:r>
           </a:p>
           <a:p>
             <a:pPr lvl="4"/>
             <a:r>
-              <a:rPr lang="en-US" smtClean="0"/>
+              <a:rPr lang="en-US"/>
               <a:t>Fifth level</a:t>
             </a:r>
-            <a:endParaRPr lang="en-US"/>
           </a:p>
         </p:txBody>
       </p:sp>
@@ -2705,7 +2529,7 @@
           <a:p>
             <a:pPr lvl="0"/>
             <a:r>
-              <a:rPr lang="en-US" smtClean="0"/>
+              <a:rPr lang="en-US"/>
               <a:t>Click to edit Master text styles</a:t>
             </a:r>
           </a:p>
@@ -2761,38 +2585,37 @@
           <a:p>
             <a:pPr lvl="0"/>
             <a:r>
-              <a:rPr lang="en-US" smtClean="0"/>
+              <a:rPr lang="en-US"/>
               <a:t>Click to edit Master text styles</a:t>
             </a:r>
           </a:p>
           <a:p>
             <a:pPr lvl="1"/>
             <a:r>
-              <a:rPr lang="en-US" smtClean="0"/>
+              <a:rPr lang="en-US"/>
               <a:t>Second level</a:t>
             </a:r>
           </a:p>
           <a:p>
             <a:pPr lvl="2"/>
             <a:r>
-              <a:rPr lang="en-US" smtClean="0"/>
+              <a:rPr lang="en-US"/>
               <a:t>Third level</a:t>
             </a:r>
           </a:p>
           <a:p>
             <a:pPr lvl="3"/>
             <a:r>
-              <a:rPr lang="en-US" smtClean="0"/>
+              <a:rPr lang="en-US"/>
               <a:t>Fourth level</a:t>
             </a:r>
           </a:p>
           <a:p>
             <a:pPr lvl="4"/>
             <a:r>
-              <a:rPr lang="en-US" smtClean="0"/>
+              <a:rPr lang="en-US"/>
               <a:t>Fifth level</a:t>
             </a:r>
-            <a:endParaRPr lang="en-US"/>
           </a:p>
         </p:txBody>
       </p:sp>
@@ -2813,7 +2636,7 @@
           <a:p>
             <a:fld id="{5BCAD085-E8A6-8845-BD4E-CB4CCA059FC4}" type="datetimeFigureOut">
               <a:rPr lang="en-US" smtClean="0"/>
-              <a:t>1/27/13</a:t>
+              <a:t>4/11/26</a:t>
             </a:fld>
             <a:endParaRPr lang="en-US"/>
           </a:p>
@@ -2907,10 +2730,9 @@
           <a:lstStyle/>
           <a:p>
             <a:r>
-              <a:rPr lang="en-US" smtClean="0"/>
+              <a:rPr lang="en-US"/>
               <a:t>Click to edit Master title style</a:t>
             </a:r>
-            <a:endParaRPr lang="en-US"/>
           </a:p>
         </p:txBody>
       </p:sp>
@@ -2931,7 +2753,7 @@
           <a:p>
             <a:fld id="{5BCAD085-E8A6-8845-BD4E-CB4CCA059FC4}" type="datetimeFigureOut">
               <a:rPr lang="en-US" smtClean="0"/>
-              <a:t>1/27/13</a:t>
+              <a:t>4/11/26</a:t>
             </a:fld>
             <a:endParaRPr lang="en-US"/>
           </a:p>
@@ -3026,7 +2848,7 @@
           <a:p>
             <a:fld id="{5BCAD085-E8A6-8845-BD4E-CB4CCA059FC4}" type="datetimeFigureOut">
               <a:rPr lang="en-US" smtClean="0"/>
-              <a:t>1/27/13</a:t>
+              <a:t>4/11/26</a:t>
             </a:fld>
             <a:endParaRPr lang="en-US"/>
           </a:p>
@@ -3129,10 +2951,9 @@
           </a:lstStyle>
           <a:p>
             <a:r>
-              <a:rPr lang="en-US" smtClean="0"/>
+              <a:rPr lang="en-US"/>
               <a:t>Click to edit Master title style</a:t>
             </a:r>
-            <a:endParaRPr lang="en-US"/>
           </a:p>
         </p:txBody>
       </p:sp>
@@ -3186,38 +3007,37 @@
           <a:p>
             <a:pPr lvl="0"/>
             <a:r>
-              <a:rPr lang="en-US" smtClean="0"/>
+              <a:rPr lang="en-US"/>
               <a:t>Click to edit Master text styles</a:t>
             </a:r>
           </a:p>
           <a:p>
             <a:pPr lvl="1"/>
             <a:r>
-              <a:rPr lang="en-US" smtClean="0"/>
+              <a:rPr lang="en-US"/>
               <a:t>Second level</a:t>
             </a:r>
           </a:p>
           <a:p>
             <a:pPr lvl="2"/>
             <a:r>
-              <a:rPr lang="en-US" smtClean="0"/>
+              <a:rPr lang="en-US"/>
               <a:t>Third level</a:t>
             </a:r>
           </a:p>
           <a:p>
             <a:pPr lvl="3"/>
             <a:r>
-              <a:rPr lang="en-US" smtClean="0"/>
+              <a:rPr lang="en-US"/>
               <a:t>Fourth level</a:t>
             </a:r>
           </a:p>
           <a:p>
             <a:pPr lvl="4"/>
             <a:r>
-              <a:rPr lang="en-US" smtClean="0"/>
+              <a:rPr lang="en-US"/>
               <a:t>Fifth level</a:t>
             </a:r>
-            <a:endParaRPr lang="en-US"/>
           </a:p>
         </p:txBody>
       </p:sp>
@@ -3280,7 +3100,7 @@
           <a:p>
             <a:pPr lvl="0"/>
             <a:r>
-              <a:rPr lang="en-US" smtClean="0"/>
+              <a:rPr lang="en-US"/>
               <a:t>Click to edit Master text styles</a:t>
             </a:r>
           </a:p>
@@ -3303,7 +3123,7 @@
           <a:p>
             <a:fld id="{5BCAD085-E8A6-8845-BD4E-CB4CCA059FC4}" type="datetimeFigureOut">
               <a:rPr lang="en-US" smtClean="0"/>
-              <a:t>1/27/13</a:t>
+              <a:t>4/11/26</a:t>
             </a:fld>
             <a:endParaRPr lang="en-US"/>
           </a:p>
@@ -3406,10 +3226,9 @@
           </a:lstStyle>
           <a:p>
             <a:r>
-              <a:rPr lang="en-US" smtClean="0"/>
+              <a:rPr lang="en-US"/>
               <a:t>Click to edit Master title style</a:t>
             </a:r>
-            <a:endParaRPr lang="en-US"/>
           </a:p>
         </p:txBody>
       </p:sp>
@@ -3533,7 +3352,7 @@
           <a:p>
             <a:pPr lvl="0"/>
             <a:r>
-              <a:rPr lang="en-US" smtClean="0"/>
+              <a:rPr lang="en-US"/>
               <a:t>Click to edit Master text styles</a:t>
             </a:r>
           </a:p>
@@ -3556,7 +3375,7 @@
           <a:p>
             <a:fld id="{5BCAD085-E8A6-8845-BD4E-CB4CCA059FC4}" type="datetimeFigureOut">
               <a:rPr lang="en-US" smtClean="0"/>
-              <a:t>1/27/13</a:t>
+              <a:t>4/11/26</a:t>
             </a:fld>
             <a:endParaRPr lang="en-US"/>
           </a:p>
@@ -3665,10 +3484,9 @@
           <a:lstStyle/>
           <a:p>
             <a:r>
-              <a:rPr lang="en-US" smtClean="0"/>
+              <a:rPr lang="en-US"/>
               <a:t>Click to edit Master title style</a:t>
             </a:r>
-            <a:endParaRPr lang="en-US"/>
           </a:p>
         </p:txBody>
       </p:sp>
@@ -3699,38 +3517,37 @@
           <a:p>
             <a:pPr lvl="0"/>
             <a:r>
-              <a:rPr lang="en-US" smtClean="0"/>
+              <a:rPr lang="en-US"/>
               <a:t>Click to edit Master text styles</a:t>
             </a:r>
           </a:p>
           <a:p>
             <a:pPr lvl="1"/>
             <a:r>
-              <a:rPr lang="en-US" smtClean="0"/>
+              <a:rPr lang="en-US"/>
               <a:t>Second level</a:t>
             </a:r>
           </a:p>
           <a:p>
             <a:pPr lvl="2"/>
             <a:r>
-              <a:rPr lang="en-US" smtClean="0"/>
+              <a:rPr lang="en-US"/>
               <a:t>Third level</a:t>
             </a:r>
           </a:p>
           <a:p>
             <a:pPr lvl="3"/>
             <a:r>
-              <a:rPr lang="en-US" smtClean="0"/>
+              <a:rPr lang="en-US"/>
               <a:t>Fourth level</a:t>
             </a:r>
           </a:p>
           <a:p>
             <a:pPr lvl="4"/>
             <a:r>
-              <a:rPr lang="en-US" smtClean="0"/>
+              <a:rPr lang="en-US"/>
               <a:t>Fifth level</a:t>
             </a:r>
-            <a:endParaRPr lang="en-US"/>
           </a:p>
         </p:txBody>
       </p:sp>
@@ -3769,7 +3586,7 @@
           <a:p>
             <a:fld id="{5BCAD085-E8A6-8845-BD4E-CB4CCA059FC4}" type="datetimeFigureOut">
               <a:rPr lang="en-US" smtClean="0"/>
-              <a:t>1/27/13</a:t>
+              <a:t>4/11/26</a:t>
             </a:fld>
             <a:endParaRPr lang="en-US"/>
           </a:p>
@@ -4128,7 +3945,7 @@
 </file>
 
 <file path=ppt/slides/slide1.xml><?xml version="1.0" encoding="utf-8"?>
-<p:sld xmlns:a="http://schemas.openxmlformats.org/drawingml/2006/main" xmlns:p="http://schemas.openxmlformats.org/presentationml/2006/main" xmlns:r="http://schemas.openxmlformats.org/officeDocument/2006/relationships">
+<p:sld xmlns:a="http://schemas.openxmlformats.org/drawingml/2006/main" xmlns:r="http://schemas.openxmlformats.org/officeDocument/2006/relationships" xmlns:p="http://schemas.openxmlformats.org/presentationml/2006/main">
   <p:cSld>
     <p:spTree>
       <p:nvGrpSpPr>
@@ -4136,7 +3953,14 @@
         <p:cNvGrpSpPr/>
         <p:nvPr/>
       </p:nvGrpSpPr>
-      <p:grpSpPr/>
+      <p:grpSpPr>
+        <a:xfrm>
+          <a:off x="0" y="0"/>
+          <a:ext cx="0" cy="0"/>
+          <a:chOff x="0" y="0"/>
+          <a:chExt cx="0" cy="0"/>
+        </a:xfrm>
+      </p:grpSpPr>
       <p:sp>
         <p:nvSpPr>
           <p:cNvPr id="2" name="Rectangle 1"/>
@@ -4177,6 +4001,7 @@
           <a:lstStyle/>
           <a:p>
             <a:pPr algn="ctr"/>
+            <a:endParaRPr/>
           </a:p>
         </p:txBody>
       </p:sp>
@@ -4220,6 +4045,7 @@
           <a:lstStyle/>
           <a:p>
             <a:pPr algn="ctr"/>
+            <a:endParaRPr/>
           </a:p>
         </p:txBody>
       </p:sp>
@@ -4331,6 +4157,7 @@
           <a:lstStyle/>
           <a:p>
             <a:pPr algn="ctr"/>
+            <a:endParaRPr/>
           </a:p>
         </p:txBody>
       </p:sp>
@@ -4408,6 +4235,7 @@
           <a:lstStyle/>
           <a:p>
             <a:pPr algn="ctr"/>
+            <a:endParaRPr/>
           </a:p>
         </p:txBody>
       </p:sp>
@@ -4553,6 +4381,7 @@
           <a:lstStyle/>
           <a:p>
             <a:pPr algn="ctr"/>
+            <a:endParaRPr/>
           </a:p>
         </p:txBody>
       </p:sp>
@@ -4698,6 +4527,7 @@
           <a:lstStyle/>
           <a:p>
             <a:pPr algn="ctr"/>
+            <a:endParaRPr/>
           </a:p>
         </p:txBody>
       </p:sp>
@@ -4799,40 +4629,6 @@
                 </a:solidFill>
               </a:rPr>
               <a:t>GR-Add MMF vs persistence baseline</a:t>
-            </a:r>
-          </a:p>
-        </p:txBody>
-      </p:sp>
-      <p:sp>
-        <p:nvSpPr>
-          <p:cNvPr id="20" name="TextBox 19"/>
-          <p:cNvSpPr txBox="1"/>
-          <p:nvPr/>
-        </p:nvSpPr>
-        <p:spPr>
-          <a:xfrm>
-            <a:off x="365760" y="6492240"/>
-            <a:ext cx="11430000" cy="256032"/>
-          </a:xfrm>
-          <a:prstGeom prst="rect">
-            <a:avLst/>
-          </a:prstGeom>
-          <a:noFill/>
-        </p:spPr>
-        <p:txBody>
-          <a:bodyPr wrap="square">
-            <a:spAutoFit/>
-          </a:bodyPr>
-          <a:lstStyle/>
-          <a:p>
-            <a:pPr algn="ctr"/>
-            <a:r>
-              <a:rPr sz="800" b="0" i="0">
-                <a:solidFill>
-                  <a:srgbClr val="555555"/>
-                </a:solidFill>
-              </a:rPr>
-              <a:t>STAT 8240 Data Mining II  ·  Kennesaw State University  ·  April 2025</a:t>
             </a:r>
           </a:p>
         </p:txBody>
@@ -4846,7 +4642,7 @@
 </file>
 
 <file path=ppt/slides/slide2.xml><?xml version="1.0" encoding="utf-8"?>
-<p:sld xmlns:a="http://schemas.openxmlformats.org/drawingml/2006/main" xmlns:p="http://schemas.openxmlformats.org/presentationml/2006/main" xmlns:r="http://schemas.openxmlformats.org/officeDocument/2006/relationships">
+<p:sld xmlns:a="http://schemas.openxmlformats.org/drawingml/2006/main" xmlns:r="http://schemas.openxmlformats.org/officeDocument/2006/relationships" xmlns:p="http://schemas.openxmlformats.org/presentationml/2006/main">
   <p:cSld>
     <p:spTree>
       <p:nvGrpSpPr>
@@ -4854,7 +4650,14 @@
         <p:cNvGrpSpPr/>
         <p:nvPr/>
       </p:nvGrpSpPr>
-      <p:grpSpPr/>
+      <p:grpSpPr>
+        <a:xfrm>
+          <a:off x="0" y="0"/>
+          <a:ext cx="0" cy="0"/>
+          <a:chOff x="0" y="0"/>
+          <a:chExt cx="0" cy="0"/>
+        </a:xfrm>
+      </p:grpSpPr>
       <p:sp>
         <p:nvSpPr>
           <p:cNvPr id="2" name="Rectangle 1"/>
@@ -4895,6 +4698,7 @@
           <a:lstStyle/>
           <a:p>
             <a:pPr algn="ctr"/>
+            <a:endParaRPr/>
           </a:p>
         </p:txBody>
       </p:sp>
@@ -4938,6 +4742,7 @@
           <a:lstStyle/>
           <a:p>
             <a:pPr algn="ctr"/>
+            <a:endParaRPr/>
           </a:p>
         </p:txBody>
       </p:sp>
@@ -5049,6 +4854,7 @@
           <a:lstStyle/>
           <a:p>
             <a:pPr algn="ctr"/>
+            <a:endParaRPr/>
           </a:p>
         </p:txBody>
       </p:sp>
@@ -5092,6 +4898,7 @@
           <a:lstStyle/>
           <a:p>
             <a:pPr algn="ctr"/>
+            <a:endParaRPr/>
           </a:p>
         </p:txBody>
       </p:sp>
@@ -5207,14 +5014,11 @@
           </a:p>
           <a:p>
             <a:pPr algn="l"/>
-            <a:r>
-              <a:rPr sz="1050">
-                <a:solidFill>
-                  <a:srgbClr val="222A3A"/>
-                </a:solidFill>
-              </a:rPr>
-              <a:t/>
-            </a:r>
+            <a:endParaRPr sz="1050">
+              <a:solidFill>
+                <a:srgbClr val="222A3A"/>
+              </a:solidFill>
+            </a:endParaRPr>
           </a:p>
           <a:p>
             <a:pPr algn="l"/>
@@ -5280,6 +5084,7 @@
           <a:lstStyle/>
           <a:p>
             <a:pPr algn="ctr"/>
+            <a:endParaRPr/>
           </a:p>
         </p:txBody>
       </p:sp>
@@ -5323,6 +5128,7 @@
           <a:lstStyle/>
           <a:p>
             <a:pPr algn="ctr"/>
+            <a:endParaRPr/>
           </a:p>
         </p:txBody>
       </p:sp>
@@ -5394,13 +5200,21 @@
           </a:p>
           <a:p>
             <a:pPr algn="l"/>
+            <a:endParaRPr sz="1050">
+              <a:solidFill>
+                <a:srgbClr val="222A3A"/>
+              </a:solidFill>
+            </a:endParaRPr>
+          </a:p>
+          <a:p>
+            <a:pPr algn="l"/>
             <a:r>
               <a:rPr sz="1050">
                 <a:solidFill>
                   <a:srgbClr val="222A3A"/>
                 </a:solidFill>
               </a:rPr>
-              <a:t/>
+              <a:t>Gaps are genuine:</a:t>
             </a:r>
           </a:p>
           <a:p>
@@ -5411,7 +5225,7 @@
                   <a:srgbClr val="222A3A"/>
                 </a:solidFill>
               </a:rPr>
-              <a:t>Gaps are genuine:</a:t>
+              <a:t>  · Turkmenistan — never publishes publicly (0/19)</a:t>
             </a:r>
           </a:p>
           <a:p>
@@ -5422,7 +5236,7 @@
                   <a:srgbClr val="222A3A"/>
                 </a:solidFill>
               </a:rPr>
-              <a:t>  · Turkmenistan — never publishes publicly (0/19)</a:t>
+              <a:t>  · Biennial IMF programs — ARM, MDA, GEO, KGZ, UZB, TJK</a:t>
             </a:r>
           </a:p>
           <a:p>
@@ -5433,30 +5247,16 @@
                   <a:srgbClr val="222A3A"/>
                 </a:solidFill>
               </a:rPr>
-              <a:t>  · Biennial IMF programs — ARM, MDA, GEO, KGZ, UZB, TJK</a:t>
-            </a:r>
-          </a:p>
-          <a:p>
-            <a:pPr algn="l"/>
-            <a:r>
-              <a:rPr sz="1050">
-                <a:solidFill>
-                  <a:srgbClr val="222A3A"/>
-                </a:solidFill>
-              </a:rPr>
               <a:t>  · Political: BLR &amp; UKR suspended in recent years</a:t>
             </a:r>
           </a:p>
           <a:p>
             <a:pPr algn="l"/>
-            <a:r>
-              <a:rPr sz="1050">
-                <a:solidFill>
-                  <a:srgbClr val="222A3A"/>
-                </a:solidFill>
-              </a:rPr>
-              <a:t/>
-            </a:r>
+            <a:endParaRPr sz="1050">
+              <a:solidFill>
+                <a:srgbClr val="222A3A"/>
+              </a:solidFill>
+            </a:endParaRPr>
           </a:p>
           <a:p>
             <a:pPr algn="l"/>
@@ -5511,6 +5311,7 @@
           <a:lstStyle/>
           <a:p>
             <a:pPr algn="ctr"/>
+            <a:endParaRPr/>
           </a:p>
         </p:txBody>
       </p:sp>
@@ -5554,6 +5355,7 @@
           <a:lstStyle/>
           <a:p>
             <a:pPr algn="ctr"/>
+            <a:endParaRPr/>
           </a:p>
         </p:txBody>
       </p:sp>
@@ -5647,58 +5449,21 @@
           </a:p>
           <a:p>
             <a:pPr algn="l"/>
+            <a:endParaRPr sz="1050">
+              <a:solidFill>
+                <a:srgbClr val="222A3A"/>
+              </a:solidFill>
+            </a:endParaRPr>
+          </a:p>
+          <a:p>
+            <a:pPr algn="l"/>
             <a:r>
               <a:rPr sz="1050">
                 <a:solidFill>
                   <a:srgbClr val="222A3A"/>
                 </a:solidFill>
               </a:rPr>
-              <a:t/>
-            </a:r>
-          </a:p>
-          <a:p>
-            <a:pPr algn="l"/>
-            <a:r>
-              <a:rPr sz="1050">
-                <a:solidFill>
-                  <a:srgbClr val="222A3A"/>
-                </a:solidFill>
-              </a:rPr>
               <a:t>Train 2005–2019 (102 samples)  ·  Val 2020–2021 (40)  ·  Test 2022–2023 (40)</a:t>
-            </a:r>
-          </a:p>
-        </p:txBody>
-      </p:sp>
-      <p:sp>
-        <p:nvSpPr>
-          <p:cNvPr id="18" name="TextBox 17"/>
-          <p:cNvSpPr txBox="1"/>
-          <p:nvPr/>
-        </p:nvSpPr>
-        <p:spPr>
-          <a:xfrm>
-            <a:off x="365760" y="6492240"/>
-            <a:ext cx="11430000" cy="256032"/>
-          </a:xfrm>
-          <a:prstGeom prst="rect">
-            <a:avLst/>
-          </a:prstGeom>
-          <a:noFill/>
-        </p:spPr>
-        <p:txBody>
-          <a:bodyPr wrap="square">
-            <a:spAutoFit/>
-          </a:bodyPr>
-          <a:lstStyle/>
-          <a:p>
-            <a:pPr algn="ctr"/>
-            <a:r>
-              <a:rPr sz="800" b="0" i="0">
-                <a:solidFill>
-                  <a:srgbClr val="555555"/>
-                </a:solidFill>
-              </a:rPr>
-              <a:t>STAT 8240 Data Mining II  ·  Kennesaw State University  ·  April 2025</a:t>
             </a:r>
           </a:p>
         </p:txBody>
@@ -5712,7 +5477,7 @@
 </file>
 
 <file path=ppt/slides/slide3.xml><?xml version="1.0" encoding="utf-8"?>
-<p:sld xmlns:a="http://schemas.openxmlformats.org/drawingml/2006/main" xmlns:p="http://schemas.openxmlformats.org/presentationml/2006/main" xmlns:r="http://schemas.openxmlformats.org/officeDocument/2006/relationships">
+<p:sld xmlns:a="http://schemas.openxmlformats.org/drawingml/2006/main" xmlns:r="http://schemas.openxmlformats.org/officeDocument/2006/relationships" xmlns:p="http://schemas.openxmlformats.org/presentationml/2006/main">
   <p:cSld>
     <p:spTree>
       <p:nvGrpSpPr>
@@ -5720,7 +5485,14 @@
         <p:cNvGrpSpPr/>
         <p:nvPr/>
       </p:nvGrpSpPr>
-      <p:grpSpPr/>
+      <p:grpSpPr>
+        <a:xfrm>
+          <a:off x="0" y="0"/>
+          <a:ext cx="0" cy="0"/>
+          <a:chOff x="0" y="0"/>
+          <a:chExt cx="0" cy="0"/>
+        </a:xfrm>
+      </p:grpSpPr>
       <p:sp>
         <p:nvSpPr>
           <p:cNvPr id="2" name="Rectangle 1"/>
@@ -5761,6 +5533,7 @@
           <a:lstStyle/>
           <a:p>
             <a:pPr algn="ctr"/>
+            <a:endParaRPr/>
           </a:p>
         </p:txBody>
       </p:sp>
@@ -5804,6 +5577,7 @@
           <a:lstStyle/>
           <a:p>
             <a:pPr algn="ctr"/>
+            <a:endParaRPr/>
           </a:p>
         </p:txBody>
       </p:sp>
@@ -5915,6 +5689,7 @@
           <a:lstStyle/>
           <a:p>
             <a:pPr algn="ctr"/>
+            <a:endParaRPr/>
           </a:p>
         </p:txBody>
       </p:sp>
@@ -5958,6 +5733,7 @@
           <a:lstStyle/>
           <a:p>
             <a:pPr algn="ctr"/>
+            <a:endParaRPr/>
           </a:p>
         </p:txBody>
       </p:sp>
@@ -6016,7 +5792,9 @@
             <a:spAutoFit/>
           </a:bodyPr>
           <a:lstStyle/>
-          <a:p/>
+          <a:p>
+            <a:endParaRPr/>
+          </a:p>
         </p:txBody>
       </p:sp>
       <p:sp>
@@ -6138,6 +5916,7 @@
           <a:lstStyle/>
           <a:p>
             <a:pPr algn="ctr"/>
+            <a:endParaRPr/>
           </a:p>
         </p:txBody>
       </p:sp>
@@ -6181,6 +5960,7 @@
           <a:lstStyle/>
           <a:p>
             <a:pPr algn="ctr"/>
+            <a:endParaRPr/>
           </a:p>
         </p:txBody>
       </p:sp>
@@ -6239,7 +6019,9 @@
             <a:spAutoFit/>
           </a:bodyPr>
           <a:lstStyle/>
-          <a:p/>
+          <a:p>
+            <a:endParaRPr/>
+          </a:p>
         </p:txBody>
       </p:sp>
       <p:sp>
@@ -6361,6 +6143,7 @@
           <a:lstStyle/>
           <a:p>
             <a:pPr algn="ctr"/>
+            <a:endParaRPr/>
           </a:p>
         </p:txBody>
       </p:sp>
@@ -6404,6 +6187,7 @@
           <a:lstStyle/>
           <a:p>
             <a:pPr algn="ctr"/>
+            <a:endParaRPr/>
           </a:p>
         </p:txBody>
       </p:sp>
@@ -6462,7 +6246,9 @@
             <a:spAutoFit/>
           </a:bodyPr>
           <a:lstStyle/>
-          <a:p/>
+          <a:p>
+            <a:endParaRPr/>
+          </a:p>
         </p:txBody>
       </p:sp>
       <p:sp>
@@ -6489,13 +6275,125 @@
           <a:p>
             <a:pPr algn="l"/>
             <a:r>
-              <a:rPr sz="1100" b="0" i="0">
+              <a:rPr sz="1100" b="0" i="0" dirty="0">
                 <a:solidFill>
                   <a:srgbClr val="B88600"/>
                 </a:solidFill>
               </a:rPr>
-              <a:t>c(t*)  =  Sum_i w_i * e_i  /  Sum_i w_i
-w_i    =  exp( -(t* - t_i)^2 / 2*sigma^2 )     sigma = 1.0 year</a:t>
+              <a:t>c(t*)  =  </a:t>
+            </a:r>
+            <a:r>
+              <a:rPr sz="1100" b="0" i="0" dirty="0" err="1">
+                <a:solidFill>
+                  <a:srgbClr val="B88600"/>
+                </a:solidFill>
+              </a:rPr>
+              <a:t>Sum_i</a:t>
+            </a:r>
+            <a:r>
+              <a:rPr sz="1100" b="0" i="0" dirty="0">
+                <a:solidFill>
+                  <a:srgbClr val="B88600"/>
+                </a:solidFill>
+              </a:rPr>
+              <a:t> </a:t>
+            </a:r>
+            <a:r>
+              <a:rPr sz="1100" b="0" i="0" dirty="0" err="1">
+                <a:solidFill>
+                  <a:srgbClr val="B88600"/>
+                </a:solidFill>
+              </a:rPr>
+              <a:t>w_i</a:t>
+            </a:r>
+            <a:r>
+              <a:rPr sz="1100" b="0" i="0" dirty="0">
+                <a:solidFill>
+                  <a:srgbClr val="B88600"/>
+                </a:solidFill>
+              </a:rPr>
+              <a:t> * </a:t>
+            </a:r>
+            <a:r>
+              <a:rPr sz="1100" b="0" i="0" dirty="0" err="1">
+                <a:solidFill>
+                  <a:srgbClr val="B88600"/>
+                </a:solidFill>
+              </a:rPr>
+              <a:t>e_i</a:t>
+            </a:r>
+            <a:r>
+              <a:rPr sz="1100" b="0" i="0" dirty="0">
+                <a:solidFill>
+                  <a:srgbClr val="B88600"/>
+                </a:solidFill>
+              </a:rPr>
+              <a:t>  /  </a:t>
+            </a:r>
+            <a:r>
+              <a:rPr sz="1100" b="0" i="0" dirty="0" err="1">
+                <a:solidFill>
+                  <a:srgbClr val="B88600"/>
+                </a:solidFill>
+              </a:rPr>
+              <a:t>Sum_i</a:t>
+            </a:r>
+            <a:r>
+              <a:rPr sz="1100" b="0" i="0" dirty="0">
+                <a:solidFill>
+                  <a:srgbClr val="B88600"/>
+                </a:solidFill>
+              </a:rPr>
+              <a:t> </a:t>
+            </a:r>
+            <a:r>
+              <a:rPr sz="1100" b="0" i="0" dirty="0" err="1">
+                <a:solidFill>
+                  <a:srgbClr val="B88600"/>
+                </a:solidFill>
+              </a:rPr>
+              <a:t>w_i</a:t>
+            </a:r>
+            <a:r>
+              <a:rPr sz="1100" b="0" i="0" dirty="0">
+                <a:solidFill>
+                  <a:srgbClr val="B88600"/>
+                </a:solidFill>
+              </a:rPr>
+              <a:t>
+</a:t>
+            </a:r>
+            <a:r>
+              <a:rPr sz="1100" b="0" i="0" dirty="0" err="1">
+                <a:solidFill>
+                  <a:srgbClr val="B88600"/>
+                </a:solidFill>
+              </a:rPr>
+              <a:t>w_i</a:t>
+            </a:r>
+            <a:r>
+              <a:rPr sz="1100" b="0" i="0" dirty="0">
+                <a:solidFill>
+                  <a:srgbClr val="B88600"/>
+                </a:solidFill>
+              </a:rPr>
+              <a:t>    =  exp( -(t* - </a:t>
+            </a:r>
+            <a:r>
+              <a:rPr sz="1100" b="0" i="0" dirty="0" err="1">
+                <a:solidFill>
+                  <a:srgbClr val="B88600"/>
+                </a:solidFill>
+              </a:rPr>
+              <a:t>t_i</a:t>
+            </a:r>
+            <a:r>
+              <a:rPr sz="1100" b="0" i="0" dirty="0">
+                <a:solidFill>
+                  <a:srgbClr val="B88600"/>
+                </a:solidFill>
+              </a:rPr>
+              <a:t>)^2 / 2*sigma^2 )     sigma = 1.0 year</a:t>
             </a:r>
           </a:p>
         </p:txBody>
@@ -6596,6 +6494,7 @@
           <a:lstStyle/>
           <a:p>
             <a:pPr algn="ctr"/>
+            <a:endParaRPr/>
           </a:p>
         </p:txBody>
       </p:sp>
@@ -6639,6 +6538,7 @@
           <a:lstStyle/>
           <a:p>
             <a:pPr algn="ctr"/>
+            <a:endParaRPr/>
           </a:p>
         </p:txBody>
       </p:sp>
@@ -6697,7 +6597,9 @@
             <a:spAutoFit/>
           </a:bodyPr>
           <a:lstStyle/>
-          <a:p/>
+          <a:p>
+            <a:endParaRPr/>
+          </a:p>
         </p:txBody>
       </p:sp>
       <p:sp>
@@ -6777,40 +6679,6 @@
                 </a:solidFill>
               </a:rPr>
               <a:t>delta (tanh) = direction + size of text correction.  65,222 parameters.</a:t>
-            </a:r>
-          </a:p>
-        </p:txBody>
-      </p:sp>
-      <p:sp>
-        <p:nvSpPr>
-          <p:cNvPr id="30" name="TextBox 29"/>
-          <p:cNvSpPr txBox="1"/>
-          <p:nvPr/>
-        </p:nvSpPr>
-        <p:spPr>
-          <a:xfrm>
-            <a:off x="365760" y="6492240"/>
-            <a:ext cx="11430000" cy="256032"/>
-          </a:xfrm>
-          <a:prstGeom prst="rect">
-            <a:avLst/>
-          </a:prstGeom>
-          <a:noFill/>
-        </p:spPr>
-        <p:txBody>
-          <a:bodyPr wrap="square">
-            <a:spAutoFit/>
-          </a:bodyPr>
-          <a:lstStyle/>
-          <a:p>
-            <a:pPr algn="ctr"/>
-            <a:r>
-              <a:rPr sz="800" b="0" i="0">
-                <a:solidFill>
-                  <a:srgbClr val="555555"/>
-                </a:solidFill>
-              </a:rPr>
-              <a:t>STAT 8240 Data Mining II  ·  Kennesaw State University  ·  April 2025</a:t>
             </a:r>
           </a:p>
         </p:txBody>
@@ -6824,7 +6692,7 @@
 </file>
 
 <file path=ppt/slides/slide4.xml><?xml version="1.0" encoding="utf-8"?>
-<p:sld xmlns:a="http://schemas.openxmlformats.org/drawingml/2006/main" xmlns:p="http://schemas.openxmlformats.org/presentationml/2006/main" xmlns:r="http://schemas.openxmlformats.org/officeDocument/2006/relationships">
+<p:sld xmlns:a="http://schemas.openxmlformats.org/drawingml/2006/main" xmlns:r="http://schemas.openxmlformats.org/officeDocument/2006/relationships" xmlns:p="http://schemas.openxmlformats.org/presentationml/2006/main">
   <p:cSld>
     <p:spTree>
       <p:nvGrpSpPr>
@@ -6832,7 +6700,14 @@
         <p:cNvGrpSpPr/>
         <p:nvPr/>
       </p:nvGrpSpPr>
-      <p:grpSpPr/>
+      <p:grpSpPr>
+        <a:xfrm>
+          <a:off x="0" y="0"/>
+          <a:ext cx="0" cy="0"/>
+          <a:chOff x="0" y="0"/>
+          <a:chExt cx="0" cy="0"/>
+        </a:xfrm>
+      </p:grpSpPr>
       <p:sp>
         <p:nvSpPr>
           <p:cNvPr id="2" name="Rectangle 1"/>
@@ -6873,6 +6748,7 @@
           <a:lstStyle/>
           <a:p>
             <a:pPr algn="ctr"/>
+            <a:endParaRPr/>
           </a:p>
         </p:txBody>
       </p:sp>
@@ -6916,6 +6792,7 @@
           <a:lstStyle/>
           <a:p>
             <a:pPr algn="ctr"/>
+            <a:endParaRPr/>
           </a:p>
         </p:txBody>
       </p:sp>
@@ -7027,6 +6904,7 @@
           <a:lstStyle/>
           <a:p>
             <a:pPr algn="ctr"/>
+            <a:endParaRPr/>
           </a:p>
         </p:txBody>
       </p:sp>
@@ -7070,6 +6948,7 @@
           <a:lstStyle/>
           <a:p>
             <a:pPr algn="ctr"/>
+            <a:endParaRPr/>
           </a:p>
         </p:txBody>
       </p:sp>
@@ -7128,7 +7007,9 @@
             <a:spAutoFit/>
           </a:bodyPr>
           <a:lstStyle/>
-          <a:p/>
+          <a:p>
+            <a:endParaRPr/>
+          </a:p>
         </p:txBody>
       </p:sp>
       <p:sp>
@@ -7187,13 +7068,21 @@
           </a:p>
           <a:p>
             <a:pPr algn="l"/>
+            <a:endParaRPr sz="1100">
+              <a:solidFill>
+                <a:srgbClr val="222A3A"/>
+              </a:solidFill>
+            </a:endParaRPr>
+          </a:p>
+          <a:p>
+            <a:pPr algn="l"/>
             <a:r>
               <a:rPr sz="1100">
                 <a:solidFill>
                   <a:srgbClr val="222A3A"/>
                 </a:solidFill>
               </a:rPr>
-              <a:t/>
+              <a:t>Problem: Article IV reports are 2,000-5,000 tokens.</a:t>
             </a:r>
           </a:p>
           <a:p>
@@ -7204,7 +7093,7 @@
                   <a:srgbClr val="222A3A"/>
                 </a:solidFill>
               </a:rPr>
-              <a:t>Problem: Article IV reports are 2,000-5,000 tokens.</a:t>
+              <a:t>BERT truncates after ~380 words — the Staff Appraisal</a:t>
             </a:r>
           </a:p>
           <a:p>
@@ -7215,7 +7104,7 @@
                   <a:srgbClr val="222A3A"/>
                 </a:solidFill>
               </a:rPr>
-              <a:t>BERT truncates after ~380 words — the Staff Appraisal</a:t>
+              <a:t>section (most forward-looking content) appears later</a:t>
             </a:r>
           </a:p>
           <a:p>
@@ -7226,30 +7115,16 @@
                   <a:srgbClr val="222A3A"/>
                 </a:solidFill>
               </a:rPr>
-              <a:t>section (most forward-looking content) appears later</a:t>
-            </a:r>
-          </a:p>
-          <a:p>
-            <a:pPr algn="l"/>
-            <a:r>
-              <a:rPr sz="1100">
-                <a:solidFill>
-                  <a:srgbClr val="222A3A"/>
-                </a:solidFill>
-              </a:rPr>
               <a:t>in the document and is entirely discarded.</a:t>
             </a:r>
           </a:p>
           <a:p>
             <a:pPr algn="l"/>
-            <a:r>
-              <a:rPr sz="1100">
-                <a:solidFill>
-                  <a:srgbClr val="222A3A"/>
-                </a:solidFill>
-              </a:rPr>
-              <a:t/>
-            </a:r>
+            <a:endParaRPr sz="1100">
+              <a:solidFill>
+                <a:srgbClr val="222A3A"/>
+              </a:solidFill>
+            </a:endParaRPr>
           </a:p>
           <a:p>
             <a:pPr algn="l"/>
@@ -7315,6 +7190,7 @@
           <a:lstStyle/>
           <a:p>
             <a:pPr algn="ctr"/>
+            <a:endParaRPr/>
           </a:p>
         </p:txBody>
       </p:sp>
@@ -7358,6 +7234,7 @@
           <a:lstStyle/>
           <a:p>
             <a:pPr algn="ctr"/>
+            <a:endParaRPr/>
           </a:p>
         </p:txBody>
       </p:sp>
@@ -7416,7 +7293,9 @@
             <a:spAutoFit/>
           </a:bodyPr>
           <a:lstStyle/>
-          <a:p/>
+          <a:p>
+            <a:endParaRPr/>
+          </a:p>
         </p:txBody>
       </p:sp>
       <p:sp>
@@ -7475,13 +7354,21 @@
           </a:p>
           <a:p>
             <a:pPr algn="l"/>
+            <a:endParaRPr sz="1100">
+              <a:solidFill>
+                <a:srgbClr val="222A3A"/>
+              </a:solidFill>
+            </a:endParaRPr>
+          </a:p>
+          <a:p>
+            <a:pPr algn="l"/>
             <a:r>
               <a:rPr sz="1100">
                 <a:solidFill>
                   <a:srgbClr val="222A3A"/>
                 </a:solidFill>
               </a:rPr>
-              <a:t/>
+              <a:t>Reads the full extracted text — both Executive</a:t>
             </a:r>
           </a:p>
           <a:p>
@@ -7492,7 +7379,7 @@
                   <a:srgbClr val="222A3A"/>
                 </a:solidFill>
               </a:rPr>
-              <a:t>Reads the full extracted text — both Executive</a:t>
+              <a:t>Summary and Staff Appraisal sections captured.</a:t>
             </a:r>
           </a:p>
           <a:p>
@@ -7503,7 +7390,7 @@
                   <a:srgbClr val="222A3A"/>
                 </a:solidFill>
               </a:rPr>
-              <a:t>Summary and Staff Appraisal sections captured.</a:t>
+              <a:t>Real publication dates from Coveo API used</a:t>
             </a:r>
           </a:p>
           <a:p>
@@ -7514,30 +7401,16 @@
                   <a:srgbClr val="222A3A"/>
                 </a:solidFill>
               </a:rPr>
-              <a:t>Real publication dates from Coveo API used</a:t>
-            </a:r>
-          </a:p>
-          <a:p>
-            <a:pPr algn="l"/>
-            <a:r>
-              <a:rPr sz="1100">
-                <a:solidFill>
-                  <a:srgbClr val="222A3A"/>
-                </a:solidFill>
-              </a:rPr>
               <a:t>for accurate temporal weighting (239/240 found).</a:t>
             </a:r>
           </a:p>
           <a:p>
             <a:pPr algn="l"/>
-            <a:r>
-              <a:rPr sz="1100">
-                <a:solidFill>
-                  <a:srgbClr val="222A3A"/>
-                </a:solidFill>
-              </a:rPr>
-              <a:t/>
-            </a:r>
+            <a:endParaRPr sz="1100">
+              <a:solidFill>
+                <a:srgbClr val="222A3A"/>
+              </a:solidFill>
+            </a:endParaRPr>
           </a:p>
           <a:p>
             <a:pPr algn="l"/>
@@ -7637,6 +7510,7 @@
           <a:lstStyle/>
           <a:p>
             <a:pPr algn="ctr"/>
+            <a:endParaRPr/>
           </a:p>
         </p:txBody>
       </p:sp>
@@ -7670,40 +7544,6 @@
                 </a:solidFill>
               </a:rPr>
               <a:t>Switching to full-context embeddings improved GR-Add from 2.872 to 2.584 — a 11.3% MSE reduction.</a:t>
-            </a:r>
-          </a:p>
-        </p:txBody>
-      </p:sp>
-      <p:sp>
-        <p:nvSpPr>
-          <p:cNvPr id="19" name="TextBox 18"/>
-          <p:cNvSpPr txBox="1"/>
-          <p:nvPr/>
-        </p:nvSpPr>
-        <p:spPr>
-          <a:xfrm>
-            <a:off x="365760" y="6492240"/>
-            <a:ext cx="11430000" cy="256032"/>
-          </a:xfrm>
-          <a:prstGeom prst="rect">
-            <a:avLst/>
-          </a:prstGeom>
-          <a:noFill/>
-        </p:spPr>
-        <p:txBody>
-          <a:bodyPr wrap="square">
-            <a:spAutoFit/>
-          </a:bodyPr>
-          <a:lstStyle/>
-          <a:p>
-            <a:pPr algn="ctr"/>
-            <a:r>
-              <a:rPr sz="800" b="0" i="0">
-                <a:solidFill>
-                  <a:srgbClr val="555555"/>
-                </a:solidFill>
-              </a:rPr>
-              <a:t>STAT 8240 Data Mining II  ·  Kennesaw State University  ·  April 2025</a:t>
             </a:r>
           </a:p>
         </p:txBody>
@@ -7717,7 +7557,7 @@
 </file>
 
 <file path=ppt/slides/slide5.xml><?xml version="1.0" encoding="utf-8"?>
-<p:sld xmlns:a="http://schemas.openxmlformats.org/drawingml/2006/main" xmlns:p="http://schemas.openxmlformats.org/presentationml/2006/main" xmlns:r="http://schemas.openxmlformats.org/officeDocument/2006/relationships">
+<p:sld xmlns:a="http://schemas.openxmlformats.org/drawingml/2006/main" xmlns:r="http://schemas.openxmlformats.org/officeDocument/2006/relationships" xmlns:p="http://schemas.openxmlformats.org/presentationml/2006/main">
   <p:cSld>
     <p:spTree>
       <p:nvGrpSpPr>
@@ -7725,50 +7565,14 @@
         <p:cNvGrpSpPr/>
         <p:nvPr/>
       </p:nvGrpSpPr>
-      <p:grpSpPr/>
-      <p:sp>
-        <p:nvSpPr>
-          <p:cNvPr id="2" name="Rectangle 1"/>
-          <p:cNvSpPr/>
-          <p:nvPr/>
-        </p:nvSpPr>
-        <p:spPr>
-          <a:xfrm>
-            <a:off x="0" y="0"/>
-            <a:ext cx="12188952" cy="6858000"/>
-          </a:xfrm>
-          <a:prstGeom prst="rect">
-            <a:avLst/>
-          </a:prstGeom>
-          <a:solidFill>
-            <a:srgbClr val="FFFFFF"/>
-          </a:solidFill>
-          <a:ln>
-            <a:noFill/>
-          </a:ln>
-        </p:spPr>
-        <p:style>
-          <a:lnRef idx="1">
-            <a:schemeClr val="accent1"/>
-          </a:lnRef>
-          <a:fillRef idx="3">
-            <a:schemeClr val="accent1"/>
-          </a:fillRef>
-          <a:effectRef idx="2">
-            <a:schemeClr val="accent1"/>
-          </a:effectRef>
-          <a:fontRef idx="minor">
-            <a:schemeClr val="lt1"/>
-          </a:fontRef>
-        </p:style>
-        <p:txBody>
-          <a:bodyPr rtlCol="0" anchor="ctr"/>
-          <a:lstStyle/>
-          <a:p>
-            <a:pPr algn="ctr"/>
-          </a:p>
-        </p:txBody>
-      </p:sp>
+      <p:grpSpPr>
+        <a:xfrm>
+          <a:off x="0" y="0"/>
+          <a:ext cx="0" cy="0"/>
+          <a:chOff x="0" y="0"/>
+          <a:chExt cx="0" cy="0"/>
+        </a:xfrm>
+      </p:grpSpPr>
       <p:sp>
         <p:nvSpPr>
           <p:cNvPr id="3" name="Rectangle 2"/>
@@ -7809,6 +7613,7 @@
           <a:lstStyle/>
           <a:p>
             <a:pPr algn="ctr"/>
+            <a:endParaRPr/>
           </a:p>
         </p:txBody>
       </p:sp>
@@ -7920,6 +7725,7 @@
           <a:lstStyle/>
           <a:p>
             <a:pPr algn="ctr"/>
+            <a:endParaRPr/>
           </a:p>
         </p:txBody>
       </p:sp>
@@ -7963,6 +7769,7 @@
           <a:lstStyle/>
           <a:p>
             <a:pPr algn="ctr"/>
+            <a:endParaRPr/>
           </a:p>
         </p:txBody>
       </p:sp>
@@ -8021,7 +7828,9 @@
             <a:spAutoFit/>
           </a:bodyPr>
           <a:lstStyle/>
-          <a:p/>
+          <a:p>
+            <a:endParaRPr/>
+          </a:p>
         </p:txBody>
       </p:sp>
       <p:sp>
@@ -8150,7 +7959,7 @@
           <a:p>
             <a:pPr algn="l"/>
             <a:r>
-              <a:rPr sz="1050">
+              <a:rPr sz="1050" dirty="0">
                 <a:solidFill>
                   <a:srgbClr val="88FFAA"/>
                 </a:solidFill>
@@ -8200,6 +8009,7 @@
           <a:lstStyle/>
           <a:p>
             <a:pPr algn="ctr"/>
+            <a:endParaRPr/>
           </a:p>
         </p:txBody>
       </p:sp>
@@ -8243,6 +8053,7 @@
           <a:lstStyle/>
           <a:p>
             <a:pPr algn="ctr"/>
+            <a:endParaRPr/>
           </a:p>
         </p:txBody>
       </p:sp>
@@ -8301,7 +8112,9 @@
             <a:spAutoFit/>
           </a:bodyPr>
           <a:lstStyle/>
-          <a:p/>
+          <a:p>
+            <a:endParaRPr/>
+          </a:p>
         </p:txBody>
       </p:sp>
       <p:sp>
@@ -8480,6 +8293,7 @@
           <a:lstStyle/>
           <a:p>
             <a:pPr algn="ctr"/>
+            <a:endParaRPr/>
           </a:p>
         </p:txBody>
       </p:sp>
@@ -8557,6 +8371,7 @@
           <a:lstStyle/>
           <a:p>
             <a:pPr algn="ctr"/>
+            <a:endParaRPr/>
           </a:p>
         </p:txBody>
       </p:sp>
@@ -8640,7 +8455,7 @@
           <a:p>
             <a:pPr algn="ctr"/>
             <a:r>
-              <a:rPr sz="800" b="0" i="0">
+              <a:rPr sz="800" b="0" i="0" dirty="0">
                 <a:solidFill>
                   <a:srgbClr val="555555"/>
                 </a:solidFill>
@@ -8659,7 +8474,7 @@
 </file>
 
 <file path=ppt/slides/slide6.xml><?xml version="1.0" encoding="utf-8"?>
-<p:sld xmlns:a="http://schemas.openxmlformats.org/drawingml/2006/main" xmlns:p="http://schemas.openxmlformats.org/presentationml/2006/main" xmlns:r="http://schemas.openxmlformats.org/officeDocument/2006/relationships">
+<p:sld xmlns:a="http://schemas.openxmlformats.org/drawingml/2006/main" xmlns:r="http://schemas.openxmlformats.org/officeDocument/2006/relationships" xmlns:p="http://schemas.openxmlformats.org/presentationml/2006/main">
   <p:cSld>
     <p:spTree>
       <p:nvGrpSpPr>
@@ -8667,7 +8482,14 @@
         <p:cNvGrpSpPr/>
         <p:nvPr/>
       </p:nvGrpSpPr>
-      <p:grpSpPr/>
+      <p:grpSpPr>
+        <a:xfrm>
+          <a:off x="0" y="0"/>
+          <a:ext cx="0" cy="0"/>
+          <a:chOff x="0" y="0"/>
+          <a:chExt cx="0" cy="0"/>
+        </a:xfrm>
+      </p:grpSpPr>
       <p:sp>
         <p:nvSpPr>
           <p:cNvPr id="2" name="Rectangle 1"/>
@@ -8708,6 +8530,7 @@
           <a:lstStyle/>
           <a:p>
             <a:pPr algn="ctr"/>
+            <a:endParaRPr/>
           </a:p>
         </p:txBody>
       </p:sp>
@@ -8751,6 +8574,7 @@
           <a:lstStyle/>
           <a:p>
             <a:pPr algn="ctr"/>
+            <a:endParaRPr/>
           </a:p>
         </p:txBody>
       </p:sp>
@@ -8831,7 +8655,7 @@
           <p:nvPr/>
         </p:nvPicPr>
         <p:blipFill>
-          <a:blip r:embed="rId2"/>
+          <a:blip r:embed="rId3"/>
           <a:stretch>
             <a:fillRect/>
           </a:stretch>
@@ -8886,6 +8710,7 @@
           <a:lstStyle/>
           <a:p>
             <a:pPr algn="ctr"/>
+            <a:endParaRPr/>
           </a:p>
         </p:txBody>
       </p:sp>
@@ -8929,6 +8754,7 @@
           <a:lstStyle/>
           <a:p>
             <a:pPr algn="ctr"/>
+            <a:endParaRPr/>
           </a:p>
         </p:txBody>
       </p:sp>
@@ -8987,7 +8813,9 @@
             <a:spAutoFit/>
           </a:bodyPr>
           <a:lstStyle/>
-          <a:p/>
+          <a:p>
+            <a:endParaRPr/>
+          </a:p>
         </p:txBody>
       </p:sp>
       <p:sp>
@@ -9200,6 +9028,7 @@
           <a:lstStyle/>
           <a:p>
             <a:pPr algn="ctr"/>
+            <a:endParaRPr/>
           </a:p>
         </p:txBody>
       </p:sp>
@@ -9288,6 +9117,7 @@
           <a:lstStyle/>
           <a:p>
             <a:pPr algn="ctr"/>
+            <a:endParaRPr/>
           </a:p>
         </p:txBody>
       </p:sp>
@@ -9332,40 +9162,6 @@
                 </a:solidFill>
               </a:rPr>
               <a:t>GR-Add MMF (2.584) beats persistence (105.44) by 97.6% — a strong result given only 102 training samples.</a:t>
-            </a:r>
-          </a:p>
-        </p:txBody>
-      </p:sp>
-      <p:sp>
-        <p:nvSpPr>
-          <p:cNvPr id="20" name="TextBox 19"/>
-          <p:cNvSpPr txBox="1"/>
-          <p:nvPr/>
-        </p:nvSpPr>
-        <p:spPr>
-          <a:xfrm>
-            <a:off x="365760" y="6492240"/>
-            <a:ext cx="11430000" cy="256032"/>
-          </a:xfrm>
-          <a:prstGeom prst="rect">
-            <a:avLst/>
-          </a:prstGeom>
-          <a:noFill/>
-        </p:spPr>
-        <p:txBody>
-          <a:bodyPr wrap="square">
-            <a:spAutoFit/>
-          </a:bodyPr>
-          <a:lstStyle/>
-          <a:p>
-            <a:pPr algn="ctr"/>
-            <a:r>
-              <a:rPr sz="800" b="0" i="0">
-                <a:solidFill>
-                  <a:srgbClr val="555555"/>
-                </a:solidFill>
-              </a:rPr>
-              <a:t>STAT 8240 Data Mining II  ·  Kennesaw State University  ·  April 2025</a:t>
             </a:r>
           </a:p>
         </p:txBody>
@@ -9379,7 +9175,7 @@
 </file>
 
 <file path=ppt/slides/slide7.xml><?xml version="1.0" encoding="utf-8"?>
-<p:sld xmlns:a="http://schemas.openxmlformats.org/drawingml/2006/main" xmlns:p="http://schemas.openxmlformats.org/presentationml/2006/main" xmlns:r="http://schemas.openxmlformats.org/officeDocument/2006/relationships">
+<p:sld xmlns:a="http://schemas.openxmlformats.org/drawingml/2006/main" xmlns:r="http://schemas.openxmlformats.org/officeDocument/2006/relationships" xmlns:p="http://schemas.openxmlformats.org/presentationml/2006/main">
   <p:cSld>
     <p:spTree>
       <p:nvGrpSpPr>
@@ -9387,7 +9183,14 @@
         <p:cNvGrpSpPr/>
         <p:nvPr/>
       </p:nvGrpSpPr>
-      <p:grpSpPr/>
+      <p:grpSpPr>
+        <a:xfrm>
+          <a:off x="0" y="0"/>
+          <a:ext cx="0" cy="0"/>
+          <a:chOff x="0" y="0"/>
+          <a:chExt cx="0" cy="0"/>
+        </a:xfrm>
+      </p:grpSpPr>
       <p:sp>
         <p:nvSpPr>
           <p:cNvPr id="2" name="Rectangle 1"/>
@@ -9428,6 +9231,7 @@
           <a:lstStyle/>
           <a:p>
             <a:pPr algn="ctr"/>
+            <a:endParaRPr/>
           </a:p>
         </p:txBody>
       </p:sp>
@@ -9471,6 +9275,7 @@
           <a:lstStyle/>
           <a:p>
             <a:pPr algn="ctr"/>
+            <a:endParaRPr/>
           </a:p>
         </p:txBody>
       </p:sp>
@@ -9582,6 +9387,7 @@
           <a:lstStyle/>
           <a:p>
             <a:pPr algn="ctr"/>
+            <a:endParaRPr/>
           </a:p>
         </p:txBody>
       </p:sp>
@@ -9659,6 +9465,7 @@
           <a:lstStyle/>
           <a:p>
             <a:pPr algn="ctr"/>
+            <a:endParaRPr/>
           </a:p>
         </p:txBody>
       </p:sp>
@@ -9702,6 +9509,7 @@
           <a:lstStyle/>
           <a:p>
             <a:pPr algn="ctr"/>
+            <a:endParaRPr/>
           </a:p>
         </p:txBody>
       </p:sp>
@@ -9760,7 +9568,9 @@
             <a:spAutoFit/>
           </a:bodyPr>
           <a:lstStyle/>
-          <a:p/>
+          <a:p>
+            <a:endParaRPr/>
+          </a:p>
         </p:txBody>
       </p:sp>
       <p:sp>
@@ -10041,6 +9851,7 @@
           <a:lstStyle/>
           <a:p>
             <a:pPr algn="ctr"/>
+            <a:endParaRPr/>
           </a:p>
         </p:txBody>
       </p:sp>
@@ -10084,6 +9895,7 @@
           <a:lstStyle/>
           <a:p>
             <a:pPr algn="ctr"/>
+            <a:endParaRPr/>
           </a:p>
         </p:txBody>
       </p:sp>
@@ -10142,7 +9954,9 @@
             <a:spAutoFit/>
           </a:bodyPr>
           <a:lstStyle/>
-          <a:p/>
+          <a:p>
+            <a:endParaRPr/>
+          </a:p>
         </p:txBody>
       </p:sp>
       <p:sp>
@@ -10423,6 +10237,7 @@
           <a:lstStyle/>
           <a:p>
             <a:pPr algn="ctr"/>
+            <a:endParaRPr/>
           </a:p>
         </p:txBody>
       </p:sp>
@@ -10467,40 +10282,6 @@
                 </a:solidFill>
               </a:rPr>
               <a:t>Hypothesis confirmed with OpenAI embeddings. With BERT the pattern was absent.</a:t>
-            </a:r>
-          </a:p>
-        </p:txBody>
-      </p:sp>
-      <p:sp>
-        <p:nvSpPr>
-          <p:cNvPr id="32" name="TextBox 31"/>
-          <p:cNvSpPr txBox="1"/>
-          <p:nvPr/>
-        </p:nvSpPr>
-        <p:spPr>
-          <a:xfrm>
-            <a:off x="365760" y="6492240"/>
-            <a:ext cx="11430000" cy="256032"/>
-          </a:xfrm>
-          <a:prstGeom prst="rect">
-            <a:avLst/>
-          </a:prstGeom>
-          <a:noFill/>
-        </p:spPr>
-        <p:txBody>
-          <a:bodyPr wrap="square">
-            <a:spAutoFit/>
-          </a:bodyPr>
-          <a:lstStyle/>
-          <a:p>
-            <a:pPr algn="ctr"/>
-            <a:r>
-              <a:rPr sz="800" b="0" i="0">
-                <a:solidFill>
-                  <a:srgbClr val="555555"/>
-                </a:solidFill>
-              </a:rPr>
-              <a:t>STAT 8240 Data Mining II  ·  Kennesaw State University  ·  April 2025</a:t>
             </a:r>
           </a:p>
         </p:txBody>
@@ -10514,7 +10295,7 @@
 </file>
 
 <file path=ppt/slides/slide8.xml><?xml version="1.0" encoding="utf-8"?>
-<p:sld xmlns:a="http://schemas.openxmlformats.org/drawingml/2006/main" xmlns:p="http://schemas.openxmlformats.org/presentationml/2006/main" xmlns:r="http://schemas.openxmlformats.org/officeDocument/2006/relationships">
+<p:sld xmlns:a="http://schemas.openxmlformats.org/drawingml/2006/main" xmlns:r="http://schemas.openxmlformats.org/officeDocument/2006/relationships" xmlns:p="http://schemas.openxmlformats.org/presentationml/2006/main">
   <p:cSld>
     <p:spTree>
       <p:nvGrpSpPr>
@@ -10522,7 +10303,14 @@
         <p:cNvGrpSpPr/>
         <p:nvPr/>
       </p:nvGrpSpPr>
-      <p:grpSpPr/>
+      <p:grpSpPr>
+        <a:xfrm>
+          <a:off x="0" y="0"/>
+          <a:ext cx="0" cy="0"/>
+          <a:chOff x="0" y="0"/>
+          <a:chExt cx="0" cy="0"/>
+        </a:xfrm>
+      </p:grpSpPr>
       <p:sp>
         <p:nvSpPr>
           <p:cNvPr id="2" name="Rectangle 1"/>
@@ -10563,6 +10351,7 @@
           <a:lstStyle/>
           <a:p>
             <a:pPr algn="ctr"/>
+            <a:endParaRPr/>
           </a:p>
         </p:txBody>
       </p:sp>
@@ -10606,6 +10395,7 @@
           <a:lstStyle/>
           <a:p>
             <a:pPr algn="ctr"/>
+            <a:endParaRPr/>
           </a:p>
         </p:txBody>
       </p:sp>
@@ -10683,6 +10473,7 @@
           <a:lstStyle/>
           <a:p>
             <a:pPr algn="ctr"/>
+            <a:endParaRPr/>
           </a:p>
         </p:txBody>
       </p:sp>
@@ -10794,6 +10585,7 @@
           <a:lstStyle/>
           <a:p>
             <a:pPr algn="ctr"/>
+            <a:endParaRPr/>
           </a:p>
         </p:txBody>
       </p:sp>
@@ -10905,6 +10697,7 @@
           <a:lstStyle/>
           <a:p>
             <a:pPr algn="ctr"/>
+            <a:endParaRPr/>
           </a:p>
         </p:txBody>
       </p:sp>
@@ -11016,6 +10809,7 @@
           <a:lstStyle/>
           <a:p>
             <a:pPr algn="ctr"/>
+            <a:endParaRPr/>
           </a:p>
         </p:txBody>
       </p:sp>
@@ -11083,40 +10877,6 @@
                 </a:solidFill>
               </a:rPr>
               <a:t>102 training samples, 40 test samples, 2 per country. Results are directionally meaningful but variance is high. Future work: larger coverage, domain-adapted embeddings, longer evaluation windows.</a:t>
-            </a:r>
-          </a:p>
-        </p:txBody>
-      </p:sp>
-      <p:sp>
-        <p:nvSpPr>
-          <p:cNvPr id="17" name="TextBox 16"/>
-          <p:cNvSpPr txBox="1"/>
-          <p:nvPr/>
-        </p:nvSpPr>
-        <p:spPr>
-          <a:xfrm>
-            <a:off x="365760" y="6492240"/>
-            <a:ext cx="11430000" cy="256032"/>
-          </a:xfrm>
-          <a:prstGeom prst="rect">
-            <a:avLst/>
-          </a:prstGeom>
-          <a:noFill/>
-        </p:spPr>
-        <p:txBody>
-          <a:bodyPr wrap="square">
-            <a:spAutoFit/>
-          </a:bodyPr>
-          <a:lstStyle/>
-          <a:p>
-            <a:pPr algn="ctr"/>
-            <a:r>
-              <a:rPr sz="800" b="0" i="0">
-                <a:solidFill>
-                  <a:srgbClr val="555555"/>
-                </a:solidFill>
-              </a:rPr>
-              <a:t>STAT 8240 Data Mining II  ·  Kennesaw State University  ·  April 2025</a:t>
             </a:r>
           </a:p>
         </p:txBody>
@@ -11460,44 +11220,44 @@
         <a:sysClr val="window" lastClr="FFFFFF"/>
       </a:lt1>
       <a:dk2>
-        <a:srgbClr val="1F497D"/>
+        <a:srgbClr val="0E2841"/>
       </a:dk2>
       <a:lt2>
-        <a:srgbClr val="EEECE1"/>
+        <a:srgbClr val="E8E8E8"/>
       </a:lt2>
       <a:accent1>
-        <a:srgbClr val="4F81BD"/>
+        <a:srgbClr val="156082"/>
       </a:accent1>
       <a:accent2>
-        <a:srgbClr val="C0504D"/>
+        <a:srgbClr val="E97132"/>
       </a:accent2>
       <a:accent3>
-        <a:srgbClr val="9BBB59"/>
+        <a:srgbClr val="196B24"/>
       </a:accent3>
       <a:accent4>
-        <a:srgbClr val="8064A2"/>
+        <a:srgbClr val="0F9ED5"/>
       </a:accent4>
       <a:accent5>
-        <a:srgbClr val="4BACC6"/>
+        <a:srgbClr val="A02B93"/>
       </a:accent5>
       <a:accent6>
-        <a:srgbClr val="F79646"/>
+        <a:srgbClr val="4EA72E"/>
       </a:accent6>
       <a:hlink>
-        <a:srgbClr val="0000FF"/>
+        <a:srgbClr val="467886"/>
       </a:hlink>
       <a:folHlink>
-        <a:srgbClr val="800080"/>
+        <a:srgbClr val="96607D"/>
       </a:folHlink>
     </a:clrScheme>
     <a:fontScheme name="Office">
       <a:majorFont>
-        <a:latin typeface="Calibri"/>
+        <a:latin typeface="Aptos Display" panose="02110004020202020204"/>
         <a:ea typeface=""/>
         <a:cs typeface=""/>
-        <a:font script="Jpan" typeface="ＭＳ Ｐゴシック"/>
+        <a:font script="Jpan" typeface="游ゴシック Light"/>
         <a:font script="Hang" typeface="맑은 고딕"/>
-        <a:font script="Hans" typeface="宋体"/>
+        <a:font script="Hans" typeface="等线 Light"/>
         <a:font script="Hant" typeface="新細明體"/>
         <a:font script="Arab" typeface="Times New Roman"/>
         <a:font script="Hebr" typeface="Times New Roman"/>
@@ -11525,14 +11285,31 @@
         <a:font script="Viet" typeface="Times New Roman"/>
         <a:font script="Uigh" typeface="Microsoft Uighur"/>
         <a:font script="Geor" typeface="Sylfaen"/>
+        <a:font script="Armn" typeface="Arial"/>
+        <a:font script="Bugi" typeface="Leelawadee UI"/>
+        <a:font script="Bopo" typeface="Microsoft JhengHei"/>
+        <a:font script="Java" typeface="Javanese Text"/>
+        <a:font script="Lisu" typeface="Segoe UI"/>
+        <a:font script="Mymr" typeface="Myanmar Text"/>
+        <a:font script="Nkoo" typeface="Ebrima"/>
+        <a:font script="Olck" typeface="Nirmala UI"/>
+        <a:font script="Osma" typeface="Ebrima"/>
+        <a:font script="Phag" typeface="Phagspa"/>
+        <a:font script="Syrn" typeface="Estrangelo Edessa"/>
+        <a:font script="Syrj" typeface="Estrangelo Edessa"/>
+        <a:font script="Syre" typeface="Estrangelo Edessa"/>
+        <a:font script="Sora" typeface="Nirmala UI"/>
+        <a:font script="Tale" typeface="Microsoft Tai Le"/>
+        <a:font script="Talu" typeface="Microsoft New Tai Lue"/>
+        <a:font script="Tfng" typeface="Ebrima"/>
       </a:majorFont>
       <a:minorFont>
-        <a:latin typeface="Calibri"/>
+        <a:latin typeface="Aptos" panose="02110004020202020204"/>
         <a:ea typeface=""/>
         <a:cs typeface=""/>
-        <a:font script="Jpan" typeface="ＭＳ Ｐゴシック"/>
+        <a:font script="Jpan" typeface="游ゴシック"/>
         <a:font script="Hang" typeface="맑은 고딕"/>
-        <a:font script="Hans" typeface="宋体"/>
+        <a:font script="Hans" typeface="等线"/>
         <a:font script="Hant" typeface="新細明體"/>
         <a:font script="Arab" typeface="Arial"/>
         <a:font script="Hebr" typeface="Arial"/>
@@ -11560,6 +11337,23 @@
         <a:font script="Viet" typeface="Arial"/>
         <a:font script="Uigh" typeface="Microsoft Uighur"/>
         <a:font script="Geor" typeface="Sylfaen"/>
+        <a:font script="Armn" typeface="Arial"/>
+        <a:font script="Bugi" typeface="Leelawadee UI"/>
+        <a:font script="Bopo" typeface="Microsoft JhengHei"/>
+        <a:font script="Java" typeface="Javanese Text"/>
+        <a:font script="Lisu" typeface="Segoe UI"/>
+        <a:font script="Mymr" typeface="Myanmar Text"/>
+        <a:font script="Nkoo" typeface="Ebrima"/>
+        <a:font script="Olck" typeface="Nirmala UI"/>
+        <a:font script="Osma" typeface="Ebrima"/>
+        <a:font script="Phag" typeface="Phagspa"/>
+        <a:font script="Syrn" typeface="Estrangelo Edessa"/>
+        <a:font script="Syrj" typeface="Estrangelo Edessa"/>
+        <a:font script="Syre" typeface="Estrangelo Edessa"/>
+        <a:font script="Sora" typeface="Nirmala UI"/>
+        <a:font script="Tale" typeface="Microsoft Tai Le"/>
+        <a:font script="Talu" typeface="Microsoft New Tai Lue"/>
+        <a:font script="Tfng" typeface="Ebrima"/>
       </a:minorFont>
     </a:fontScheme>
     <a:fmtScheme name="Office">
@@ -11571,180 +11365,136 @@
           <a:gsLst>
             <a:gs pos="0">
               <a:schemeClr val="phClr">
-                <a:tint val="50000"/>
-                <a:satMod val="300000"/>
+                <a:lumMod val="110000"/>
+                <a:satMod val="105000"/>
+                <a:tint val="67000"/>
               </a:schemeClr>
             </a:gs>
-            <a:gs pos="35000">
+            <a:gs pos="50000">
               <a:schemeClr val="phClr">
-                <a:tint val="37000"/>
-                <a:satMod val="300000"/>
+                <a:lumMod val="105000"/>
+                <a:satMod val="103000"/>
+                <a:tint val="73000"/>
               </a:schemeClr>
             </a:gs>
             <a:gs pos="100000">
               <a:schemeClr val="phClr">
-                <a:tint val="15000"/>
-                <a:satMod val="350000"/>
+                <a:lumMod val="105000"/>
+                <a:satMod val="109000"/>
+                <a:tint val="81000"/>
               </a:schemeClr>
             </a:gs>
           </a:gsLst>
-          <a:lin ang="16200000" scaled="1"/>
+          <a:lin ang="5400000" scaled="0"/>
         </a:gradFill>
         <a:gradFill rotWithShape="1">
           <a:gsLst>
             <a:gs pos="0">
               <a:schemeClr val="phClr">
-                <a:tint val="100000"/>
+                <a:satMod val="103000"/>
+                <a:lumMod val="102000"/>
+                <a:tint val="94000"/>
+              </a:schemeClr>
+            </a:gs>
+            <a:gs pos="50000">
+              <a:schemeClr val="phClr">
+                <a:satMod val="110000"/>
+                <a:lumMod val="100000"/>
                 <a:shade val="100000"/>
-                <a:satMod val="130000"/>
               </a:schemeClr>
             </a:gs>
             <a:gs pos="100000">
               <a:schemeClr val="phClr">
-                <a:tint val="50000"/>
-                <a:shade val="100000"/>
-                <a:satMod val="350000"/>
+                <a:lumMod val="99000"/>
+                <a:satMod val="120000"/>
+                <a:shade val="78000"/>
               </a:schemeClr>
             </a:gs>
           </a:gsLst>
-          <a:lin ang="16200000" scaled="0"/>
+          <a:lin ang="5400000" scaled="0"/>
         </a:gradFill>
       </a:fillStyleLst>
       <a:lnStyleLst>
-        <a:ln w="9525" cap="flat" cmpd="sng" algn="ctr">
+        <a:ln w="12700" cap="flat" cmpd="sng" algn="ctr">
           <a:solidFill>
-            <a:schemeClr val="phClr">
-              <a:shade val="95000"/>
-              <a:satMod val="105000"/>
-            </a:schemeClr>
+            <a:schemeClr val="phClr"/>
           </a:solidFill>
           <a:prstDash val="solid"/>
+          <a:miter lim="800000"/>
+        </a:ln>
+        <a:ln w="19050" cap="flat" cmpd="sng" algn="ctr">
+          <a:solidFill>
+            <a:schemeClr val="phClr"/>
+          </a:solidFill>
+          <a:prstDash val="solid"/>
+          <a:miter lim="800000"/>
         </a:ln>
         <a:ln w="25400" cap="flat" cmpd="sng" algn="ctr">
           <a:solidFill>
             <a:schemeClr val="phClr"/>
           </a:solidFill>
           <a:prstDash val="solid"/>
-        </a:ln>
-        <a:ln w="38100" cap="flat" cmpd="sng" algn="ctr">
-          <a:solidFill>
-            <a:schemeClr val="phClr"/>
-          </a:solidFill>
-          <a:prstDash val="solid"/>
+          <a:miter lim="800000"/>
         </a:ln>
       </a:lnStyleLst>
       <a:effectStyleLst>
         <a:effectStyle>
+          <a:effectLst/>
+        </a:effectStyle>
+        <a:effectStyle>
+          <a:effectLst/>
+        </a:effectStyle>
+        <a:effectStyle>
           <a:effectLst>
-            <a:outerShdw blurRad="40000" dist="20000" dir="5400000" rotWithShape="0">
+            <a:outerShdw blurRad="57150" dist="19050" dir="5400000" algn="ctr" rotWithShape="0">
               <a:srgbClr val="000000">
-                <a:alpha val="38000"/>
+                <a:alpha val="63000"/>
               </a:srgbClr>
             </a:outerShdw>
           </a:effectLst>
-        </a:effectStyle>
-        <a:effectStyle>
-          <a:effectLst>
-            <a:outerShdw blurRad="40000" dist="23000" dir="5400000" rotWithShape="0">
-              <a:srgbClr val="000000">
-                <a:alpha val="35000"/>
-              </a:srgbClr>
-            </a:outerShdw>
-          </a:effectLst>
-        </a:effectStyle>
-        <a:effectStyle>
-          <a:effectLst>
-            <a:outerShdw blurRad="40000" dist="23000" dir="5400000" rotWithShape="0">
-              <a:srgbClr val="000000">
-                <a:alpha val="35000"/>
-              </a:srgbClr>
-            </a:outerShdw>
-          </a:effectLst>
-          <a:scene3d>
-            <a:camera prst="orthographicFront">
-              <a:rot lat="0" lon="0" rev="0"/>
-            </a:camera>
-            <a:lightRig rig="threePt" dir="t">
-              <a:rot lat="0" lon="0" rev="1200000"/>
-            </a:lightRig>
-          </a:scene3d>
-          <a:sp3d>
-            <a:bevelT w="63500" h="25400"/>
-          </a:sp3d>
         </a:effectStyle>
       </a:effectStyleLst>
       <a:bgFillStyleLst>
         <a:solidFill>
           <a:schemeClr val="phClr"/>
         </a:solidFill>
+        <a:solidFill>
+          <a:schemeClr val="phClr">
+            <a:tint val="95000"/>
+            <a:satMod val="170000"/>
+          </a:schemeClr>
+        </a:solidFill>
         <a:gradFill rotWithShape="1">
           <a:gsLst>
             <a:gs pos="0">
               <a:schemeClr val="phClr">
-                <a:tint val="40000"/>
-                <a:satMod val="350000"/>
+                <a:tint val="93000"/>
+                <a:satMod val="150000"/>
+                <a:shade val="98000"/>
+                <a:lumMod val="102000"/>
               </a:schemeClr>
             </a:gs>
-            <a:gs pos="40000">
+            <a:gs pos="50000">
               <a:schemeClr val="phClr">
-                <a:tint val="45000"/>
-                <a:shade val="99000"/>
-                <a:satMod val="350000"/>
+                <a:tint val="98000"/>
+                <a:satMod val="130000"/>
+                <a:shade val="90000"/>
+                <a:lumMod val="103000"/>
               </a:schemeClr>
             </a:gs>
             <a:gs pos="100000">
               <a:schemeClr val="phClr">
-                <a:shade val="20000"/>
-                <a:satMod val="255000"/>
+                <a:shade val="63000"/>
+                <a:satMod val="120000"/>
               </a:schemeClr>
             </a:gs>
           </a:gsLst>
-          <a:path path="circle">
-            <a:fillToRect l="50000" t="-80000" r="50000" b="180000"/>
-          </a:path>
-        </a:gradFill>
-        <a:gradFill rotWithShape="1">
-          <a:gsLst>
-            <a:gs pos="0">
-              <a:schemeClr val="phClr">
-                <a:tint val="80000"/>
-                <a:satMod val="300000"/>
-              </a:schemeClr>
-            </a:gs>
-            <a:gs pos="100000">
-              <a:schemeClr val="phClr">
-                <a:shade val="30000"/>
-                <a:satMod val="200000"/>
-              </a:schemeClr>
-            </a:gs>
-          </a:gsLst>
-          <a:path path="circle">
-            <a:fillToRect l="50000" t="50000" r="50000" b="50000"/>
-          </a:path>
+          <a:lin ang="5400000" scaled="0"/>
         </a:gradFill>
       </a:bgFillStyleLst>
     </a:fmtScheme>
   </a:themeElements>
   <a:objectDefaults>
-    <a:spDef>
-      <a:spPr/>
-      <a:bodyPr/>
-      <a:lstStyle/>
-      <a:style>
-        <a:lnRef idx="1">
-          <a:schemeClr val="accent1"/>
-        </a:lnRef>
-        <a:fillRef idx="3">
-          <a:schemeClr val="accent1"/>
-        </a:fillRef>
-        <a:effectRef idx="2">
-          <a:schemeClr val="accent1"/>
-        </a:effectRef>
-        <a:fontRef idx="minor">
-          <a:schemeClr val="lt1"/>
-        </a:fontRef>
-      </a:style>
-    </a:spDef>
     <a:lnDef>
       <a:spPr/>
       <a:bodyPr/>
@@ -11766,5 +11516,10 @@
     </a:lnDef>
   </a:objectDefaults>
   <a:extraClrSchemeLst/>
+  <a:extLst>
+    <a:ext uri="{05A4C25C-085E-4340-85A3-A5531E510DB2}">
+      <thm15:themeFamily xmlns:thm15="http://schemas.microsoft.com/office/thememl/2012/main" name="Office Theme" id="{2E142A2C-CD16-42D6-873A-C26D2A0506FA}" vid="{1BDDFF52-6CD6-40A5-AB3C-68EB2F1E4D0A}"/>
+    </a:ext>
+  </a:extLst>
 </a:theme>
 </file>
--- a/research/ppt/progress_week2.pptx
+++ b/research/ppt/progress_week2.pptx
@@ -545,38 +545,59 @@
           <a:lstStyle/>
           <a:p>
             <a:r>
+              <a:rPr dirty="0"/>
               <a:t>This slide explains why we moved from BERT to OpenAI embeddings.</a:t>
             </a:r>
           </a:p>
           <a:p>
-            <a:endParaRPr/>
-          </a:p>
-          <a:p>
-            <a:r>
+            <a:endParaRPr dirty="0"/>
+          </a:p>
+          <a:p>
+            <a:r>
+              <a:rPr dirty="0"/>
               <a:t>BERT-base-uncased has a hard 512-token limit. Article IV staff reports, even after extracting only pages 1-6, are typically 2,000-5,000 tokens long. BERT sees roughly the first 380 words — usually the cover page and introduction — and never reaches the Staff Appraisal section, which contains the IMF's explicit forward-looking economic assessment.</a:t>
             </a:r>
           </a:p>
           <a:p>
-            <a:endParaRPr/>
-          </a:p>
-          <a:p>
-            <a:r>
+            <a:endParaRPr dirty="0"/>
+          </a:p>
+          <a:p>
+            <a:r>
+              <a:rPr dirty="0"/>
               <a:t>OpenAI's text-embedding-3-small handles up to 8,191 tokens, covering the full extracted text. We request 768 dimensions via the API to keep the model architecture unchanged. The cost for all 240 texts was approximately $0.01.</a:t>
             </a:r>
           </a:p>
           <a:p>
-            <a:endParaRPr/>
-          </a:p>
-          <a:p>
-            <a:r>
-              <a:t>Additionally, we fetched real IMF publication dates from the Coveo search API (239/240 found), replacing our earlier estimated dates. More accurate publication timestamps improve the Gaussian kernel weighting in RecAvg TTF.</a:t>
-            </a:r>
-          </a:p>
-          <a:p>
-            <a:endParaRPr/>
-          </a:p>
-          <a:p>
-            <a:r>
+            <a:endParaRPr dirty="0"/>
+          </a:p>
+          <a:p>
+            <a:r>
+              <a:rPr dirty="0"/>
+              <a:t>Additionally, we fetched real IMF publication dates from the </a:t>
+            </a:r>
+            <a:r>
+              <a:rPr dirty="0" err="1"/>
+              <a:t>Coveo</a:t>
+            </a:r>
+            <a:r>
+              <a:rPr dirty="0"/>
+              <a:t> search API (239/240 found), replacing our earlier estimated dates. More accurate publication timestamps improve the Gaussian kernel weighting in </a:t>
+            </a:r>
+            <a:r>
+              <a:rPr dirty="0" err="1"/>
+              <a:t>RecAvg</a:t>
+            </a:r>
+            <a:r>
+              <a:rPr dirty="0"/>
+              <a:t> TTF.</a:t>
+            </a:r>
+          </a:p>
+          <a:p>
+            <a:endParaRPr dirty="0"/>
+          </a:p>
+          <a:p>
+            <a:r>
+              <a:rPr dirty="0"/>
               <a:t>Both changes together improved GR-Add MMF from 2.872 to 2.584 overall MSE.</a:t>
             </a:r>
           </a:p>
@@ -1173,7 +1194,7 @@
           <a:p>
             <a:fld id="{5BCAD085-E8A6-8845-BD4E-CB4CCA059FC4}" type="datetimeFigureOut">
               <a:rPr lang="en-US" smtClean="0"/>
-              <a:t>4/11/26</a:t>
+              <a:t>4/15/26</a:t>
             </a:fld>
             <a:endParaRPr lang="en-US"/>
           </a:p>
@@ -1341,7 +1362,7 @@
           <a:p>
             <a:fld id="{5BCAD085-E8A6-8845-BD4E-CB4CCA059FC4}" type="datetimeFigureOut">
               <a:rPr lang="en-US" smtClean="0"/>
-              <a:t>4/11/26</a:t>
+              <a:t>4/15/26</a:t>
             </a:fld>
             <a:endParaRPr lang="en-US"/>
           </a:p>
@@ -1519,7 +1540,7 @@
           <a:p>
             <a:fld id="{5BCAD085-E8A6-8845-BD4E-CB4CCA059FC4}" type="datetimeFigureOut">
               <a:rPr lang="en-US" smtClean="0"/>
-              <a:t>4/11/26</a:t>
+              <a:t>4/15/26</a:t>
             </a:fld>
             <a:endParaRPr lang="en-US"/>
           </a:p>
@@ -1687,7 +1708,7 @@
           <a:p>
             <a:fld id="{5BCAD085-E8A6-8845-BD4E-CB4CCA059FC4}" type="datetimeFigureOut">
               <a:rPr lang="en-US" smtClean="0"/>
-              <a:t>4/11/26</a:t>
+              <a:t>4/15/26</a:t>
             </a:fld>
             <a:endParaRPr lang="en-US"/>
           </a:p>
@@ -1932,7 +1953,7 @@
           <a:p>
             <a:fld id="{5BCAD085-E8A6-8845-BD4E-CB4CCA059FC4}" type="datetimeFigureOut">
               <a:rPr lang="en-US" smtClean="0"/>
-              <a:t>4/11/26</a:t>
+              <a:t>4/15/26</a:t>
             </a:fld>
             <a:endParaRPr lang="en-US"/>
           </a:p>
@@ -2217,7 +2238,7 @@
           <a:p>
             <a:fld id="{5BCAD085-E8A6-8845-BD4E-CB4CCA059FC4}" type="datetimeFigureOut">
               <a:rPr lang="en-US" smtClean="0"/>
-              <a:t>4/11/26</a:t>
+              <a:t>4/15/26</a:t>
             </a:fld>
             <a:endParaRPr lang="en-US"/>
           </a:p>
@@ -2636,7 +2657,7 @@
           <a:p>
             <a:fld id="{5BCAD085-E8A6-8845-BD4E-CB4CCA059FC4}" type="datetimeFigureOut">
               <a:rPr lang="en-US" smtClean="0"/>
-              <a:t>4/11/26</a:t>
+              <a:t>4/15/26</a:t>
             </a:fld>
             <a:endParaRPr lang="en-US"/>
           </a:p>
@@ -2753,7 +2774,7 @@
           <a:p>
             <a:fld id="{5BCAD085-E8A6-8845-BD4E-CB4CCA059FC4}" type="datetimeFigureOut">
               <a:rPr lang="en-US" smtClean="0"/>
-              <a:t>4/11/26</a:t>
+              <a:t>4/15/26</a:t>
             </a:fld>
             <a:endParaRPr lang="en-US"/>
           </a:p>
@@ -2848,7 +2869,7 @@
           <a:p>
             <a:fld id="{5BCAD085-E8A6-8845-BD4E-CB4CCA059FC4}" type="datetimeFigureOut">
               <a:rPr lang="en-US" smtClean="0"/>
-              <a:t>4/11/26</a:t>
+              <a:t>4/15/26</a:t>
             </a:fld>
             <a:endParaRPr lang="en-US"/>
           </a:p>
@@ -3123,7 +3144,7 @@
           <a:p>
             <a:fld id="{5BCAD085-E8A6-8845-BD4E-CB4CCA059FC4}" type="datetimeFigureOut">
               <a:rPr lang="en-US" smtClean="0"/>
-              <a:t>4/11/26</a:t>
+              <a:t>4/15/26</a:t>
             </a:fld>
             <a:endParaRPr lang="en-US"/>
           </a:p>
@@ -3375,7 +3396,7 @@
           <a:p>
             <a:fld id="{5BCAD085-E8A6-8845-BD4E-CB4CCA059FC4}" type="datetimeFigureOut">
               <a:rPr lang="en-US" smtClean="0"/>
-              <a:t>4/11/26</a:t>
+              <a:t>4/15/26</a:t>
             </a:fld>
             <a:endParaRPr lang="en-US"/>
           </a:p>
@@ -3586,7 +3607,7 @@
           <a:p>
             <a:fld id="{5BCAD085-E8A6-8845-BD4E-CB4CCA059FC4}" type="datetimeFigureOut">
               <a:rPr lang="en-US" smtClean="0"/>
-              <a:t>4/11/26</a:t>
+              <a:t>4/15/26</a:t>
             </a:fld>
             <a:endParaRPr lang="en-US"/>
           </a:p>
@@ -5501,7 +5522,7 @@
         </p:nvSpPr>
         <p:spPr>
           <a:xfrm>
-            <a:off x="0" y="0"/>
+            <a:off x="-127" y="0"/>
             <a:ext cx="12188952" cy="6858000"/>
           </a:xfrm>
           <a:prstGeom prst="rect">
@@ -5797,40 +5818,312 @@
           </a:p>
         </p:txBody>
       </p:sp>
-      <p:sp>
-        <p:nvSpPr>
-          <p:cNvPr id="10" name="TextBox 9"/>
-          <p:cNvSpPr txBox="1"/>
-          <p:nvPr/>
-        </p:nvSpPr>
-        <p:spPr>
-          <a:xfrm>
-            <a:off x="502920" y="1737360"/>
-            <a:ext cx="5029200" cy="320040"/>
-          </a:xfrm>
-          <a:prstGeom prst="rect">
-            <a:avLst/>
-          </a:prstGeom>
-          <a:noFill/>
-        </p:spPr>
-        <p:txBody>
-          <a:bodyPr wrap="square">
-            <a:spAutoFit/>
-          </a:bodyPr>
-          <a:lstStyle/>
-          <a:p>
-            <a:pPr algn="l"/>
-            <a:r>
-              <a:rPr sz="1100" b="0" i="0">
-                <a:solidFill>
-                  <a:srgbClr val="B88600"/>
-                </a:solidFill>
-              </a:rPr>
-              <a:t>y_hat  =  W_trend * trend(X)  +  W_season * season(X)</a:t>
-            </a:r>
-          </a:p>
-        </p:txBody>
-      </p:sp>
+      <mc:AlternateContent xmlns:mc="http://schemas.openxmlformats.org/markup-compatibility/2006">
+        <mc:Choice xmlns:a14="http://schemas.microsoft.com/office/drawing/2010/main" Requires="a14">
+          <p:sp>
+            <p:nvSpPr>
+              <p:cNvPr id="10" name="TextBox 9"/>
+              <p:cNvSpPr txBox="1"/>
+              <p:nvPr/>
+            </p:nvSpPr>
+            <p:spPr>
+              <a:xfrm>
+                <a:off x="502920" y="1737360"/>
+                <a:ext cx="5029200" cy="261610"/>
+              </a:xfrm>
+              <a:prstGeom prst="rect">
+                <a:avLst/>
+              </a:prstGeom>
+              <a:noFill/>
+            </p:spPr>
+            <p:txBody>
+              <a:bodyPr wrap="square">
+                <a:spAutoFit/>
+              </a:bodyPr>
+              <a:lstStyle/>
+              <a:p>
+                <a:pPr algn="l"/>
+                <a14:m>
+                  <m:oMathPara xmlns:m="http://schemas.openxmlformats.org/officeDocument/2006/math">
+                    <m:oMathParaPr>
+                      <m:jc m:val="centerGroup"/>
+                    </m:oMathParaPr>
+                    <m:oMath xmlns:m="http://schemas.openxmlformats.org/officeDocument/2006/math">
+                      <m:sSub>
+                        <m:sSubPr>
+                          <m:ctrlPr>
+                            <a:rPr lang="en-US" sz="1100" b="0" i="1" dirty="0" smtClean="0">
+                              <a:solidFill>
+                                <a:srgbClr val="B88600"/>
+                              </a:solidFill>
+                              <a:latin typeface="Cambria Math" panose="02040503050406030204" pitchFamily="18" charset="0"/>
+                            </a:rPr>
+                          </m:ctrlPr>
+                        </m:sSubPr>
+                        <m:e>
+                          <m:r>
+                            <a:rPr lang="en-US" sz="1100" b="0" i="1" dirty="0" smtClean="0">
+                              <a:solidFill>
+                                <a:srgbClr val="B88600"/>
+                              </a:solidFill>
+                              <a:latin typeface="Cambria Math" panose="02040503050406030204" pitchFamily="18" charset="0"/>
+                            </a:rPr>
+                            <m:t>𝑦</m:t>
+                          </m:r>
+                        </m:e>
+                        <m:sub>
+                          <m:r>
+                            <a:rPr lang="en-US" sz="1100" b="0" i="1" dirty="0" smtClean="0">
+                              <a:solidFill>
+                                <a:srgbClr val="B88600"/>
+                              </a:solidFill>
+                              <a:latin typeface="Cambria Math" panose="02040503050406030204" pitchFamily="18" charset="0"/>
+                            </a:rPr>
+                            <m:t>h</m:t>
+                          </m:r>
+                        </m:sub>
+                      </m:sSub>
+                      <m:r>
+                        <a:rPr lang="en-US" sz="1100" b="0" i="1" dirty="0" smtClean="0">
+                          <a:solidFill>
+                            <a:srgbClr val="B88600"/>
+                          </a:solidFill>
+                          <a:latin typeface="Cambria Math" panose="02040503050406030204" pitchFamily="18" charset="0"/>
+                        </a:rPr>
+                        <m:t>𝑎𝑡</m:t>
+                      </m:r>
+                      <m:r>
+                        <a:rPr lang="en-US" sz="1100" b="0" i="1" dirty="0">
+                          <a:solidFill>
+                            <a:srgbClr val="B88600"/>
+                          </a:solidFill>
+                          <a:latin typeface="Cambria Math" panose="02040503050406030204" pitchFamily="18" charset="0"/>
+                        </a:rPr>
+                        <m:t>=</m:t>
+                      </m:r>
+                      <m:sSub>
+                        <m:sSubPr>
+                          <m:ctrlPr>
+                            <a:rPr lang="en-US" sz="1100" b="0" i="1" dirty="0" err="1">
+                              <a:solidFill>
+                                <a:srgbClr val="B88600"/>
+                              </a:solidFill>
+                              <a:latin typeface="Cambria Math" panose="02040503050406030204" pitchFamily="18" charset="0"/>
+                            </a:rPr>
+                          </m:ctrlPr>
+                        </m:sSubPr>
+                        <m:e>
+                          <m:r>
+                            <a:rPr lang="en-US" sz="1100" b="0" i="1" dirty="0" err="1">
+                              <a:solidFill>
+                                <a:srgbClr val="B88600"/>
+                              </a:solidFill>
+                              <a:latin typeface="Cambria Math" panose="02040503050406030204" pitchFamily="18" charset="0"/>
+                            </a:rPr>
+                            <m:t>𝑊</m:t>
+                          </m:r>
+                        </m:e>
+                        <m:sub>
+                          <m:r>
+                            <a:rPr lang="en-US" sz="1100" b="0" i="1" dirty="0" err="1">
+                              <a:solidFill>
+                                <a:srgbClr val="B88600"/>
+                              </a:solidFill>
+                              <a:latin typeface="Cambria Math" panose="02040503050406030204" pitchFamily="18" charset="0"/>
+                            </a:rPr>
+                            <m:t>𝑡</m:t>
+                          </m:r>
+                        </m:sub>
+                      </m:sSub>
+                      <m:r>
+                        <a:rPr lang="en-US" sz="1100" b="0" i="1" dirty="0" err="1">
+                          <a:solidFill>
+                            <a:srgbClr val="B88600"/>
+                          </a:solidFill>
+                          <a:latin typeface="Cambria Math" panose="02040503050406030204" pitchFamily="18" charset="0"/>
+                        </a:rPr>
+                        <m:t>𝑟𝑒𝑛𝑑</m:t>
+                      </m:r>
+                      <m:r>
+                        <a:rPr lang="en-US" sz="1100" b="0" i="1" dirty="0">
+                          <a:solidFill>
+                            <a:srgbClr val="B88600"/>
+                          </a:solidFill>
+                          <a:latin typeface="Cambria Math" panose="02040503050406030204" pitchFamily="18" charset="0"/>
+                        </a:rPr>
+                        <m:t>∗</m:t>
+                      </m:r>
+                      <m:r>
+                        <a:rPr lang="en-US" sz="1100" b="0" i="1" dirty="0">
+                          <a:solidFill>
+                            <a:srgbClr val="B88600"/>
+                          </a:solidFill>
+                          <a:latin typeface="Cambria Math" panose="02040503050406030204" pitchFamily="18" charset="0"/>
+                        </a:rPr>
+                        <m:t>𝑡𝑟𝑒𝑛𝑑</m:t>
+                      </m:r>
+                      <m:d>
+                        <m:dPr>
+                          <m:ctrlPr>
+                            <a:rPr lang="en-US" sz="1100" b="0" i="1" dirty="0">
+                              <a:solidFill>
+                                <a:srgbClr val="B88600"/>
+                              </a:solidFill>
+                              <a:latin typeface="Cambria Math" panose="02040503050406030204" pitchFamily="18" charset="0"/>
+                            </a:rPr>
+                          </m:ctrlPr>
+                        </m:dPr>
+                        <m:e>
+                          <m:r>
+                            <a:rPr lang="en-US" sz="1100" b="0" i="1" dirty="0">
+                              <a:solidFill>
+                                <a:srgbClr val="B88600"/>
+                              </a:solidFill>
+                              <a:latin typeface="Cambria Math" panose="02040503050406030204" pitchFamily="18" charset="0"/>
+                            </a:rPr>
+                            <m:t>𝑋</m:t>
+                          </m:r>
+                        </m:e>
+                      </m:d>
+                      <m:r>
+                        <a:rPr lang="en-US" sz="1100" b="0" i="1" dirty="0">
+                          <a:solidFill>
+                            <a:srgbClr val="B88600"/>
+                          </a:solidFill>
+                          <a:latin typeface="Cambria Math" panose="02040503050406030204" pitchFamily="18" charset="0"/>
+                        </a:rPr>
+                        <m:t>+</m:t>
+                      </m:r>
+                      <m:sSub>
+                        <m:sSubPr>
+                          <m:ctrlPr>
+                            <a:rPr lang="en-US" sz="1100" b="0" i="1" dirty="0" err="1">
+                              <a:solidFill>
+                                <a:srgbClr val="B88600"/>
+                              </a:solidFill>
+                              <a:latin typeface="Cambria Math" panose="02040503050406030204" pitchFamily="18" charset="0"/>
+                            </a:rPr>
+                          </m:ctrlPr>
+                        </m:sSubPr>
+                        <m:e>
+                          <m:r>
+                            <a:rPr lang="en-US" sz="1100" b="0" i="1" dirty="0" err="1">
+                              <a:solidFill>
+                                <a:srgbClr val="B88600"/>
+                              </a:solidFill>
+                              <a:latin typeface="Cambria Math" panose="02040503050406030204" pitchFamily="18" charset="0"/>
+                            </a:rPr>
+                            <m:t>𝑊</m:t>
+                          </m:r>
+                        </m:e>
+                        <m:sub>
+                          <m:r>
+                            <a:rPr lang="en-US" sz="1100" b="0" i="1" dirty="0" err="1">
+                              <a:solidFill>
+                                <a:srgbClr val="B88600"/>
+                              </a:solidFill>
+                              <a:latin typeface="Cambria Math" panose="02040503050406030204" pitchFamily="18" charset="0"/>
+                            </a:rPr>
+                            <m:t>𝑠</m:t>
+                          </m:r>
+                        </m:sub>
+                      </m:sSub>
+                      <m:r>
+                        <a:rPr lang="en-US" sz="1100" b="0" i="1" dirty="0" err="1">
+                          <a:solidFill>
+                            <a:srgbClr val="B88600"/>
+                          </a:solidFill>
+                          <a:latin typeface="Cambria Math" panose="02040503050406030204" pitchFamily="18" charset="0"/>
+                        </a:rPr>
+                        <m:t>𝑒𝑎𝑠𝑜𝑛</m:t>
+                      </m:r>
+                      <m:r>
+                        <a:rPr lang="en-US" sz="1100" b="0" i="1" dirty="0">
+                          <a:solidFill>
+                            <a:srgbClr val="B88600"/>
+                          </a:solidFill>
+                          <a:latin typeface="Cambria Math" panose="02040503050406030204" pitchFamily="18" charset="0"/>
+                        </a:rPr>
+                        <m:t>∗</m:t>
+                      </m:r>
+                      <m:r>
+                        <a:rPr lang="en-US" sz="1100" b="0" i="1" dirty="0">
+                          <a:solidFill>
+                            <a:srgbClr val="B88600"/>
+                          </a:solidFill>
+                          <a:latin typeface="Cambria Math" panose="02040503050406030204" pitchFamily="18" charset="0"/>
+                        </a:rPr>
+                        <m:t>𝑠𝑒𝑎𝑠𝑜𝑛</m:t>
+                      </m:r>
+                      <m:d>
+                        <m:dPr>
+                          <m:ctrlPr>
+                            <a:rPr lang="en-US" sz="1100" b="0" i="1" dirty="0">
+                              <a:solidFill>
+                                <a:srgbClr val="B88600"/>
+                              </a:solidFill>
+                              <a:latin typeface="Cambria Math" panose="02040503050406030204" pitchFamily="18" charset="0"/>
+                            </a:rPr>
+                          </m:ctrlPr>
+                        </m:dPr>
+                        <m:e>
+                          <m:r>
+                            <a:rPr lang="en-US" sz="1100" b="0" i="1" dirty="0">
+                              <a:solidFill>
+                                <a:srgbClr val="B88600"/>
+                              </a:solidFill>
+                              <a:latin typeface="Cambria Math" panose="02040503050406030204" pitchFamily="18" charset="0"/>
+                            </a:rPr>
+                            <m:t>𝑋</m:t>
+                          </m:r>
+                        </m:e>
+                      </m:d>
+                    </m:oMath>
+                  </m:oMathPara>
+                </a14:m>
+              </a:p>
+            </p:txBody>
+          </p:sp>
+        </mc:Choice>
+        <mc:Fallback>
+          <p:sp>
+            <p:nvSpPr>
+              <p:cNvPr id="10" name="TextBox 9"/>
+              <p:cNvSpPr txBox="1">
+                <a:spLocks noRot="1" noChangeAspect="1" noMove="1" noResize="1" noEditPoints="1" noAdjustHandles="1" noChangeArrowheads="1" noChangeShapeType="1" noTextEdit="1"/>
+              </p:cNvSpPr>
+              <p:nvPr/>
+            </p:nvSpPr>
+            <p:spPr>
+              <a:xfrm>
+                <a:off x="502920" y="1737360"/>
+                <a:ext cx="5029200" cy="261610"/>
+              </a:xfrm>
+              <a:prstGeom prst="rect">
+                <a:avLst/>
+              </a:prstGeom>
+              <a:blipFill>
+                <a:blip r:embed="rId3"/>
+                <a:stretch>
+                  <a:fillRect b="-13636"/>
+                </a:stretch>
+              </a:blipFill>
+            </p:spPr>
+            <p:txBody>
+              <a:bodyPr/>
+              <a:lstStyle/>
+              <a:p>
+                <a:r>
+                  <a:rPr lang="en-US">
+                    <a:noFill/>
+                  </a:rPr>
+                  <a:t> </a:t>
+                </a:r>
+              </a:p>
+            </p:txBody>
+          </p:sp>
+        </mc:Fallback>
+      </mc:AlternateContent>
       <p:sp>
         <p:nvSpPr>
           <p:cNvPr id="11" name="TextBox 10"/>
@@ -6024,40 +6317,398 @@
           </a:p>
         </p:txBody>
       </p:sp>
-      <p:sp>
-        <p:nvSpPr>
-          <p:cNvPr id="16" name="TextBox 15"/>
-          <p:cNvSpPr txBox="1"/>
-          <p:nvPr/>
-        </p:nvSpPr>
-        <p:spPr>
-          <a:xfrm>
-            <a:off x="6172200" y="1737360"/>
-            <a:ext cx="5486400" cy="320040"/>
-          </a:xfrm>
-          <a:prstGeom prst="rect">
-            <a:avLst/>
-          </a:prstGeom>
-          <a:noFill/>
-        </p:spPr>
-        <p:txBody>
-          <a:bodyPr wrap="square">
-            <a:spAutoFit/>
-          </a:bodyPr>
-          <a:lstStyle/>
-          <a:p>
-            <a:pPr algn="l"/>
-            <a:r>
-              <a:rPr sz="1100" b="0" i="0">
-                <a:solidFill>
-                  <a:srgbClr val="B88600"/>
-                </a:solidFill>
-              </a:rPr>
-              <a:t>h_t = GRU([x_t ; m_t], h_{t-1})       y_hat = W * h_T</a:t>
-            </a:r>
-          </a:p>
-        </p:txBody>
-      </p:sp>
+      <mc:AlternateContent xmlns:mc="http://schemas.openxmlformats.org/markup-compatibility/2006">
+        <mc:Choice xmlns:a14="http://schemas.microsoft.com/office/drawing/2010/main" Requires="a14">
+          <p:sp>
+            <p:nvSpPr>
+              <p:cNvPr id="16" name="TextBox 15"/>
+              <p:cNvSpPr txBox="1"/>
+              <p:nvPr/>
+            </p:nvSpPr>
+            <p:spPr>
+              <a:xfrm>
+                <a:off x="6172200" y="1737360"/>
+                <a:ext cx="5486400" cy="261610"/>
+              </a:xfrm>
+              <a:prstGeom prst="rect">
+                <a:avLst/>
+              </a:prstGeom>
+              <a:noFill/>
+            </p:spPr>
+            <p:txBody>
+              <a:bodyPr wrap="square">
+                <a:spAutoFit/>
+              </a:bodyPr>
+              <a:lstStyle/>
+              <a:p>
+                <a:pPr algn="l"/>
+                <a14:m>
+                  <m:oMathPara xmlns:m="http://schemas.openxmlformats.org/officeDocument/2006/math">
+                    <m:oMathParaPr>
+                      <m:jc m:val="centerGroup"/>
+                    </m:oMathParaPr>
+                    <m:oMath xmlns:m="http://schemas.openxmlformats.org/officeDocument/2006/math">
+                      <m:sSub>
+                        <m:sSubPr>
+                          <m:ctrlPr>
+                            <a:rPr lang="en-US" sz="1100" b="0" i="1" dirty="0" smtClean="0">
+                              <a:solidFill>
+                                <a:srgbClr val="B88600"/>
+                              </a:solidFill>
+                              <a:latin typeface="Cambria Math" panose="02040503050406030204" pitchFamily="18" charset="0"/>
+                            </a:rPr>
+                          </m:ctrlPr>
+                        </m:sSubPr>
+                        <m:e>
+                          <m:r>
+                            <a:rPr lang="en-US" sz="1100" b="0" i="1" dirty="0" smtClean="0">
+                              <a:solidFill>
+                                <a:srgbClr val="B88600"/>
+                              </a:solidFill>
+                              <a:latin typeface="Cambria Math" panose="02040503050406030204" pitchFamily="18" charset="0"/>
+                            </a:rPr>
+                            <m:t>h</m:t>
+                          </m:r>
+                        </m:e>
+                        <m:sub>
+                          <m:r>
+                            <a:rPr lang="en-US" sz="1100" b="0" i="1" dirty="0" err="1">
+                              <a:solidFill>
+                                <a:srgbClr val="B88600"/>
+                              </a:solidFill>
+                              <a:latin typeface="Cambria Math" panose="02040503050406030204" pitchFamily="18" charset="0"/>
+                            </a:rPr>
+                            <m:t>𝑡</m:t>
+                          </m:r>
+                        </m:sub>
+                      </m:sSub>
+                      <m:r>
+                        <a:rPr lang="en-US" sz="1100" b="0" i="1" dirty="0">
+                          <a:solidFill>
+                            <a:srgbClr val="B88600"/>
+                          </a:solidFill>
+                          <a:latin typeface="Cambria Math" panose="02040503050406030204" pitchFamily="18" charset="0"/>
+                        </a:rPr>
+                        <m:t>=</m:t>
+                      </m:r>
+                      <m:r>
+                        <a:rPr lang="en-US" sz="1100" b="0" i="1" dirty="0">
+                          <a:solidFill>
+                            <a:srgbClr val="B88600"/>
+                          </a:solidFill>
+                          <a:latin typeface="Cambria Math" panose="02040503050406030204" pitchFamily="18" charset="0"/>
+                        </a:rPr>
+                        <m:t>𝐺𝑅𝑈</m:t>
+                      </m:r>
+                      <m:d>
+                        <m:dPr>
+                          <m:ctrlPr>
+                            <a:rPr lang="en-US" sz="1100" b="0" i="1" dirty="0">
+                              <a:solidFill>
+                                <a:srgbClr val="B88600"/>
+                              </a:solidFill>
+                              <a:latin typeface="Cambria Math" panose="02040503050406030204" pitchFamily="18" charset="0"/>
+                            </a:rPr>
+                          </m:ctrlPr>
+                        </m:dPr>
+                        <m:e>
+                          <m:d>
+                            <m:dPr>
+                              <m:begChr m:val="["/>
+                              <m:endChr m:val="]"/>
+                              <m:ctrlPr>
+                                <a:rPr lang="en-US" sz="1100" b="0" i="1" dirty="0">
+                                  <a:solidFill>
+                                    <a:srgbClr val="B88600"/>
+                                  </a:solidFill>
+                                  <a:latin typeface="Cambria Math" panose="02040503050406030204" pitchFamily="18" charset="0"/>
+                                </a:rPr>
+                              </m:ctrlPr>
+                            </m:dPr>
+                            <m:e>
+                              <m:sSub>
+                                <m:sSubPr>
+                                  <m:ctrlPr>
+                                    <a:rPr lang="en-US" sz="1100" b="0" i="1" dirty="0" err="1">
+                                      <a:solidFill>
+                                        <a:srgbClr val="B88600"/>
+                                      </a:solidFill>
+                                      <a:latin typeface="Cambria Math" panose="02040503050406030204" pitchFamily="18" charset="0"/>
+                                    </a:rPr>
+                                  </m:ctrlPr>
+                                </m:sSubPr>
+                                <m:e>
+                                  <m:r>
+                                    <a:rPr lang="en-US" sz="1100" b="0" i="1" dirty="0" err="1">
+                                      <a:solidFill>
+                                        <a:srgbClr val="B88600"/>
+                                      </a:solidFill>
+                                      <a:latin typeface="Cambria Math" panose="02040503050406030204" pitchFamily="18" charset="0"/>
+                                    </a:rPr>
+                                    <m:t>𝑥</m:t>
+                                  </m:r>
+                                </m:e>
+                                <m:sub>
+                                  <m:r>
+                                    <a:rPr lang="en-US" sz="1100" b="0" i="1" dirty="0" err="1">
+                                      <a:solidFill>
+                                        <a:srgbClr val="B88600"/>
+                                      </a:solidFill>
+                                      <a:latin typeface="Cambria Math" panose="02040503050406030204" pitchFamily="18" charset="0"/>
+                                    </a:rPr>
+                                    <m:t>𝑡</m:t>
+                                  </m:r>
+                                </m:sub>
+                              </m:sSub>
+                              <m:r>
+                                <a:rPr lang="en-US" sz="1100" b="0" i="1" dirty="0">
+                                  <a:solidFill>
+                                    <a:srgbClr val="B88600"/>
+                                  </a:solidFill>
+                                  <a:latin typeface="Cambria Math" panose="02040503050406030204" pitchFamily="18" charset="0"/>
+                                </a:rPr>
+                                <m:t>;</m:t>
+                              </m:r>
+                              <m:sSub>
+                                <m:sSubPr>
+                                  <m:ctrlPr>
+                                    <a:rPr lang="en-US" sz="1100" b="0" i="1" dirty="0" err="1">
+                                      <a:solidFill>
+                                        <a:srgbClr val="B88600"/>
+                                      </a:solidFill>
+                                      <a:latin typeface="Cambria Math" panose="02040503050406030204" pitchFamily="18" charset="0"/>
+                                    </a:rPr>
+                                  </m:ctrlPr>
+                                </m:sSubPr>
+                                <m:e>
+                                  <m:r>
+                                    <a:rPr lang="en-US" sz="1100" b="0" i="1" dirty="0" err="1">
+                                      <a:solidFill>
+                                        <a:srgbClr val="B88600"/>
+                                      </a:solidFill>
+                                      <a:latin typeface="Cambria Math" panose="02040503050406030204" pitchFamily="18" charset="0"/>
+                                    </a:rPr>
+                                    <m:t>𝑚</m:t>
+                                  </m:r>
+                                </m:e>
+                                <m:sub>
+                                  <m:r>
+                                    <a:rPr lang="en-US" sz="1100" b="0" i="1" dirty="0" err="1">
+                                      <a:solidFill>
+                                        <a:srgbClr val="B88600"/>
+                                      </a:solidFill>
+                                      <a:latin typeface="Cambria Math" panose="02040503050406030204" pitchFamily="18" charset="0"/>
+                                    </a:rPr>
+                                    <m:t>𝑡</m:t>
+                                  </m:r>
+                                </m:sub>
+                              </m:sSub>
+                            </m:e>
+                          </m:d>
+                          <m:r>
+                            <a:rPr lang="en-US" sz="1100" b="0" i="1" dirty="0">
+                              <a:solidFill>
+                                <a:srgbClr val="B88600"/>
+                              </a:solidFill>
+                              <a:latin typeface="Cambria Math" panose="02040503050406030204" pitchFamily="18" charset="0"/>
+                            </a:rPr>
+                            <m:t>,</m:t>
+                          </m:r>
+                          <m:sSub>
+                            <m:sSubPr>
+                              <m:ctrlPr>
+                                <a:rPr lang="en-US" sz="1100" b="0" i="1" dirty="0">
+                                  <a:solidFill>
+                                    <a:srgbClr val="B88600"/>
+                                  </a:solidFill>
+                                  <a:latin typeface="Cambria Math" panose="02040503050406030204" pitchFamily="18" charset="0"/>
+                                </a:rPr>
+                              </m:ctrlPr>
+                            </m:sSubPr>
+                            <m:e>
+                              <m:r>
+                                <a:rPr lang="en-US" sz="1100" b="0" i="1" dirty="0">
+                                  <a:solidFill>
+                                    <a:srgbClr val="B88600"/>
+                                  </a:solidFill>
+                                  <a:latin typeface="Cambria Math" panose="02040503050406030204" pitchFamily="18" charset="0"/>
+                                </a:rPr>
+                                <m:t>h</m:t>
+                              </m:r>
+                            </m:e>
+                            <m:sub>
+                              <m:r>
+                                <a:rPr lang="en-US" sz="1100" b="0" i="1" dirty="0">
+                                  <a:solidFill>
+                                    <a:srgbClr val="B88600"/>
+                                  </a:solidFill>
+                                  <a:latin typeface="Cambria Math" panose="02040503050406030204" pitchFamily="18" charset="0"/>
+                                </a:rPr>
+                                <m:t>𝑡</m:t>
+                              </m:r>
+                              <m:r>
+                                <a:rPr lang="en-US" sz="1100" b="0" i="1" dirty="0">
+                                  <a:solidFill>
+                                    <a:srgbClr val="B88600"/>
+                                  </a:solidFill>
+                                  <a:latin typeface="Cambria Math" panose="02040503050406030204" pitchFamily="18" charset="0"/>
+                                </a:rPr>
+                                <m:t>−1</m:t>
+                              </m:r>
+                            </m:sub>
+                          </m:sSub>
+                        </m:e>
+                      </m:d>
+                      <m:sSub>
+                        <m:sSubPr>
+                          <m:ctrlPr>
+                            <a:rPr lang="en-US" sz="1100" b="0" i="1" dirty="0" err="1">
+                              <a:solidFill>
+                                <a:srgbClr val="B88600"/>
+                              </a:solidFill>
+                              <a:latin typeface="Cambria Math" panose="02040503050406030204" pitchFamily="18" charset="0"/>
+                            </a:rPr>
+                          </m:ctrlPr>
+                        </m:sSubPr>
+                        <m:e>
+                          <m:r>
+                            <a:rPr lang="en-US" sz="1100" b="0" i="1" dirty="0" err="1">
+                              <a:solidFill>
+                                <a:srgbClr val="B88600"/>
+                              </a:solidFill>
+                              <a:latin typeface="Cambria Math" panose="02040503050406030204" pitchFamily="18" charset="0"/>
+                            </a:rPr>
+                            <m:t>𝑦</m:t>
+                          </m:r>
+                        </m:e>
+                        <m:sub>
+                          <m:r>
+                            <a:rPr lang="en-US" sz="1100" b="0" i="1" dirty="0" err="1">
+                              <a:solidFill>
+                                <a:srgbClr val="B88600"/>
+                              </a:solidFill>
+                              <a:latin typeface="Cambria Math" panose="02040503050406030204" pitchFamily="18" charset="0"/>
+                            </a:rPr>
+                            <m:t>h</m:t>
+                          </m:r>
+                        </m:sub>
+                      </m:sSub>
+                      <m:r>
+                        <a:rPr lang="en-US" sz="1100" b="0" i="1" dirty="0" err="1">
+                          <a:solidFill>
+                            <a:srgbClr val="B88600"/>
+                          </a:solidFill>
+                          <a:latin typeface="Cambria Math" panose="02040503050406030204" pitchFamily="18" charset="0"/>
+                        </a:rPr>
+                        <m:t>𝑎𝑡</m:t>
+                      </m:r>
+                      <m:r>
+                        <a:rPr lang="en-US" sz="1100" b="0" i="1" dirty="0">
+                          <a:solidFill>
+                            <a:srgbClr val="B88600"/>
+                          </a:solidFill>
+                          <a:latin typeface="Cambria Math" panose="02040503050406030204" pitchFamily="18" charset="0"/>
+                        </a:rPr>
+                        <m:t>=</m:t>
+                      </m:r>
+                      <m:r>
+                        <a:rPr lang="en-US" sz="1100" b="0" i="1" dirty="0">
+                          <a:solidFill>
+                            <a:srgbClr val="B88600"/>
+                          </a:solidFill>
+                          <a:latin typeface="Cambria Math" panose="02040503050406030204" pitchFamily="18" charset="0"/>
+                        </a:rPr>
+                        <m:t>𝑊</m:t>
+                      </m:r>
+                      <m:r>
+                        <a:rPr lang="en-US" sz="1100" b="0" i="1" dirty="0">
+                          <a:solidFill>
+                            <a:srgbClr val="B88600"/>
+                          </a:solidFill>
+                          <a:latin typeface="Cambria Math" panose="02040503050406030204" pitchFamily="18" charset="0"/>
+                        </a:rPr>
+                        <m:t>∗</m:t>
+                      </m:r>
+                      <m:sSub>
+                        <m:sSubPr>
+                          <m:ctrlPr>
+                            <a:rPr lang="en-US" sz="1100" b="0" i="1" dirty="0" err="1">
+                              <a:solidFill>
+                                <a:srgbClr val="B88600"/>
+                              </a:solidFill>
+                              <a:latin typeface="Cambria Math" panose="02040503050406030204" pitchFamily="18" charset="0"/>
+                            </a:rPr>
+                          </m:ctrlPr>
+                        </m:sSubPr>
+                        <m:e>
+                          <m:r>
+                            <a:rPr lang="en-US" sz="1100" b="0" i="1" dirty="0" err="1">
+                              <a:solidFill>
+                                <a:srgbClr val="B88600"/>
+                              </a:solidFill>
+                              <a:latin typeface="Cambria Math" panose="02040503050406030204" pitchFamily="18" charset="0"/>
+                            </a:rPr>
+                            <m:t>h</m:t>
+                          </m:r>
+                        </m:e>
+                        <m:sub>
+                          <m:r>
+                            <a:rPr lang="en-US" sz="1100" b="0" i="1" dirty="0" err="1">
+                              <a:solidFill>
+                                <a:srgbClr val="B88600"/>
+                              </a:solidFill>
+                              <a:latin typeface="Cambria Math" panose="02040503050406030204" pitchFamily="18" charset="0"/>
+                            </a:rPr>
+                            <m:t>𝑇</m:t>
+                          </m:r>
+                        </m:sub>
+                      </m:sSub>
+                    </m:oMath>
+                  </m:oMathPara>
+                </a14:m>
+              </a:p>
+            </p:txBody>
+          </p:sp>
+        </mc:Choice>
+        <mc:Fallback>
+          <p:sp>
+            <p:nvSpPr>
+              <p:cNvPr id="16" name="TextBox 15"/>
+              <p:cNvSpPr txBox="1">
+                <a:spLocks noRot="1" noChangeAspect="1" noMove="1" noResize="1" noEditPoints="1" noAdjustHandles="1" noChangeArrowheads="1" noChangeShapeType="1" noTextEdit="1"/>
+              </p:cNvSpPr>
+              <p:nvPr/>
+            </p:nvSpPr>
+            <p:spPr>
+              <a:xfrm>
+                <a:off x="6172200" y="1737360"/>
+                <a:ext cx="5486400" cy="261610"/>
+              </a:xfrm>
+              <a:prstGeom prst="rect">
+                <a:avLst/>
+              </a:prstGeom>
+              <a:blipFill>
+                <a:blip r:embed="rId4"/>
+                <a:stretch>
+                  <a:fillRect b="-13636"/>
+                </a:stretch>
+              </a:blipFill>
+            </p:spPr>
+            <p:txBody>
+              <a:bodyPr/>
+              <a:lstStyle/>
+              <a:p>
+                <a:r>
+                  <a:rPr lang="en-US">
+                    <a:noFill/>
+                  </a:rPr>
+                  <a:t> </a:t>
+                </a:r>
+              </a:p>
+            </p:txBody>
+          </p:sp>
+        </mc:Fallback>
+      </mc:AlternateContent>
       <p:sp>
         <p:nvSpPr>
           <p:cNvPr id="17" name="TextBox 16"/>
@@ -6251,153 +6902,624 @@
           </a:p>
         </p:txBody>
       </p:sp>
-      <p:sp>
-        <p:nvSpPr>
-          <p:cNvPr id="22" name="TextBox 21"/>
-          <p:cNvSpPr txBox="1"/>
-          <p:nvPr/>
-        </p:nvSpPr>
-        <p:spPr>
-          <a:xfrm>
-            <a:off x="502920" y="3429000"/>
-            <a:ext cx="5029200" cy="822960"/>
-          </a:xfrm>
-          <a:prstGeom prst="rect">
-            <a:avLst/>
-          </a:prstGeom>
-          <a:noFill/>
-        </p:spPr>
-        <p:txBody>
-          <a:bodyPr wrap="square">
-            <a:spAutoFit/>
-          </a:bodyPr>
-          <a:lstStyle/>
-          <a:p>
-            <a:pPr algn="l"/>
-            <a:r>
-              <a:rPr sz="1100" b="0" i="0" dirty="0">
-                <a:solidFill>
-                  <a:srgbClr val="B88600"/>
-                </a:solidFill>
-              </a:rPr>
-              <a:t>c(t*)  =  </a:t>
-            </a:r>
-            <a:r>
-              <a:rPr sz="1100" b="0" i="0" dirty="0" err="1">
-                <a:solidFill>
-                  <a:srgbClr val="B88600"/>
-                </a:solidFill>
-              </a:rPr>
-              <a:t>Sum_i</a:t>
-            </a:r>
-            <a:r>
-              <a:rPr sz="1100" b="0" i="0" dirty="0">
-                <a:solidFill>
-                  <a:srgbClr val="B88600"/>
-                </a:solidFill>
-              </a:rPr>
-              <a:t> </a:t>
-            </a:r>
-            <a:r>
-              <a:rPr sz="1100" b="0" i="0" dirty="0" err="1">
-                <a:solidFill>
-                  <a:srgbClr val="B88600"/>
-                </a:solidFill>
-              </a:rPr>
-              <a:t>w_i</a:t>
-            </a:r>
-            <a:r>
-              <a:rPr sz="1100" b="0" i="0" dirty="0">
-                <a:solidFill>
-                  <a:srgbClr val="B88600"/>
-                </a:solidFill>
-              </a:rPr>
-              <a:t> * </a:t>
-            </a:r>
-            <a:r>
-              <a:rPr sz="1100" b="0" i="0" dirty="0" err="1">
-                <a:solidFill>
-                  <a:srgbClr val="B88600"/>
-                </a:solidFill>
-              </a:rPr>
-              <a:t>e_i</a:t>
-            </a:r>
-            <a:r>
-              <a:rPr sz="1100" b="0" i="0" dirty="0">
-                <a:solidFill>
-                  <a:srgbClr val="B88600"/>
-                </a:solidFill>
-              </a:rPr>
-              <a:t>  /  </a:t>
-            </a:r>
-            <a:r>
-              <a:rPr sz="1100" b="0" i="0" dirty="0" err="1">
-                <a:solidFill>
-                  <a:srgbClr val="B88600"/>
-                </a:solidFill>
-              </a:rPr>
-              <a:t>Sum_i</a:t>
-            </a:r>
-            <a:r>
-              <a:rPr sz="1100" b="0" i="0" dirty="0">
-                <a:solidFill>
-                  <a:srgbClr val="B88600"/>
-                </a:solidFill>
-              </a:rPr>
-              <a:t> </a:t>
-            </a:r>
-            <a:r>
-              <a:rPr sz="1100" b="0" i="0" dirty="0" err="1">
-                <a:solidFill>
-                  <a:srgbClr val="B88600"/>
-                </a:solidFill>
-              </a:rPr>
-              <a:t>w_i</a:t>
-            </a:r>
-            <a:r>
-              <a:rPr sz="1100" b="0" i="0" dirty="0">
-                <a:solidFill>
-                  <a:srgbClr val="B88600"/>
-                </a:solidFill>
-              </a:rPr>
-              <a:t>
-</a:t>
-            </a:r>
-            <a:r>
-              <a:rPr sz="1100" b="0" i="0" dirty="0" err="1">
-                <a:solidFill>
-                  <a:srgbClr val="B88600"/>
-                </a:solidFill>
-              </a:rPr>
-              <a:t>w_i</a:t>
-            </a:r>
-            <a:r>
-              <a:rPr sz="1100" b="0" i="0" dirty="0">
-                <a:solidFill>
-                  <a:srgbClr val="B88600"/>
-                </a:solidFill>
-              </a:rPr>
-              <a:t>    =  exp( -(t* - </a:t>
-            </a:r>
-            <a:r>
-              <a:rPr sz="1100" b="0" i="0" dirty="0" err="1">
-                <a:solidFill>
-                  <a:srgbClr val="B88600"/>
-                </a:solidFill>
-              </a:rPr>
-              <a:t>t_i</a:t>
-            </a:r>
-            <a:r>
-              <a:rPr sz="1100" b="0" i="0" dirty="0">
-                <a:solidFill>
-                  <a:srgbClr val="B88600"/>
-                </a:solidFill>
-              </a:rPr>
-              <a:t>)^2 / 2*sigma^2 )     sigma = 1.0 year</a:t>
-            </a:r>
-          </a:p>
-        </p:txBody>
-      </p:sp>
+      <mc:AlternateContent xmlns:mc="http://schemas.openxmlformats.org/markup-compatibility/2006">
+        <mc:Choice xmlns:a14="http://schemas.microsoft.com/office/drawing/2010/main" Requires="a14">
+          <p:sp>
+            <p:nvSpPr>
+              <p:cNvPr id="22" name="TextBox 21"/>
+              <p:cNvSpPr txBox="1"/>
+              <p:nvPr/>
+            </p:nvSpPr>
+            <p:spPr>
+              <a:xfrm>
+                <a:off x="989154" y="3569612"/>
+                <a:ext cx="4056731" cy="430887"/>
+              </a:xfrm>
+              <a:prstGeom prst="rect">
+                <a:avLst/>
+              </a:prstGeom>
+              <a:noFill/>
+            </p:spPr>
+            <p:txBody>
+              <a:bodyPr wrap="square">
+                <a:spAutoFit/>
+              </a:bodyPr>
+              <a:lstStyle/>
+              <a:p>
+                <a:pPr algn="l"/>
+                <a14:m>
+                  <m:oMathPara xmlns:m="http://schemas.openxmlformats.org/officeDocument/2006/math">
+                    <m:oMathParaPr>
+                      <m:jc m:val="centerGroup"/>
+                    </m:oMathParaPr>
+                    <m:oMath xmlns:m="http://schemas.openxmlformats.org/officeDocument/2006/math">
+                      <m:r>
+                        <a:rPr lang="en-US" sz="1100" b="0" i="1" dirty="0" smtClean="0">
+                          <a:solidFill>
+                            <a:srgbClr val="B88600"/>
+                          </a:solidFill>
+                          <a:latin typeface="Cambria Math" panose="02040503050406030204" pitchFamily="18" charset="0"/>
+                        </a:rPr>
+                        <m:t>𝑐</m:t>
+                      </m:r>
+                      <m:d>
+                        <m:dPr>
+                          <m:ctrlPr>
+                            <a:rPr lang="en-US" sz="1100" b="0" i="1" dirty="0" smtClean="0">
+                              <a:solidFill>
+                                <a:srgbClr val="B88600"/>
+                              </a:solidFill>
+                              <a:latin typeface="Cambria Math" panose="02040503050406030204" pitchFamily="18" charset="0"/>
+                            </a:rPr>
+                          </m:ctrlPr>
+                        </m:dPr>
+                        <m:e>
+                          <m:r>
+                            <a:rPr lang="en-US" sz="1100" b="0" i="1" dirty="0" smtClean="0">
+                              <a:solidFill>
+                                <a:srgbClr val="B88600"/>
+                              </a:solidFill>
+                              <a:latin typeface="Cambria Math" panose="02040503050406030204" pitchFamily="18" charset="0"/>
+                            </a:rPr>
+                            <m:t>𝑡</m:t>
+                          </m:r>
+                          <m:r>
+                            <a:rPr lang="en-US" sz="1100" b="0" i="1" dirty="0" smtClean="0">
+                              <a:solidFill>
+                                <a:srgbClr val="B88600"/>
+                              </a:solidFill>
+                              <a:latin typeface="Cambria Math" panose="02040503050406030204" pitchFamily="18" charset="0"/>
+                            </a:rPr>
+                            <m:t>∗</m:t>
+                          </m:r>
+                        </m:e>
+                      </m:d>
+                      <m:r>
+                        <a:rPr lang="en-US" sz="1100" b="0" i="1" dirty="0" smtClean="0">
+                          <a:solidFill>
+                            <a:srgbClr val="B88600"/>
+                          </a:solidFill>
+                          <a:latin typeface="Cambria Math" panose="02040503050406030204" pitchFamily="18" charset="0"/>
+                        </a:rPr>
+                        <m:t>=</m:t>
+                      </m:r>
+                      <m:r>
+                        <a:rPr lang="en-US" sz="1100" b="0" i="1" dirty="0" err="1">
+                          <a:solidFill>
+                            <a:srgbClr val="B88600"/>
+                          </a:solidFill>
+                          <a:latin typeface="Cambria Math" panose="02040503050406030204" pitchFamily="18" charset="0"/>
+                        </a:rPr>
+                        <m:t>𝑆𝑢</m:t>
+                      </m:r>
+                      <m:sSub>
+                        <m:sSubPr>
+                          <m:ctrlPr>
+                            <a:rPr lang="en-US" sz="1100" b="0" i="1" dirty="0" err="1">
+                              <a:solidFill>
+                                <a:srgbClr val="B88600"/>
+                              </a:solidFill>
+                              <a:latin typeface="Cambria Math" panose="02040503050406030204" pitchFamily="18" charset="0"/>
+                            </a:rPr>
+                          </m:ctrlPr>
+                        </m:sSubPr>
+                        <m:e>
+                          <m:r>
+                            <a:rPr lang="en-US" sz="1100" b="0" i="1" dirty="0" err="1">
+                              <a:solidFill>
+                                <a:srgbClr val="B88600"/>
+                              </a:solidFill>
+                              <a:latin typeface="Cambria Math" panose="02040503050406030204" pitchFamily="18" charset="0"/>
+                            </a:rPr>
+                            <m:t>𝑚</m:t>
+                          </m:r>
+                        </m:e>
+                        <m:sub>
+                          <m:r>
+                            <a:rPr lang="en-US" sz="1100" b="0" i="1" dirty="0" err="1">
+                              <a:solidFill>
+                                <a:srgbClr val="B88600"/>
+                              </a:solidFill>
+                              <a:latin typeface="Cambria Math" panose="02040503050406030204" pitchFamily="18" charset="0"/>
+                            </a:rPr>
+                            <m:t>𝑖</m:t>
+                          </m:r>
+                        </m:sub>
+                      </m:sSub>
+                      <m:sSub>
+                        <m:sSubPr>
+                          <m:ctrlPr>
+                            <a:rPr lang="en-US" sz="1100" b="0" i="1" dirty="0" err="1">
+                              <a:solidFill>
+                                <a:srgbClr val="B88600"/>
+                              </a:solidFill>
+                              <a:latin typeface="Cambria Math" panose="02040503050406030204" pitchFamily="18" charset="0"/>
+                            </a:rPr>
+                          </m:ctrlPr>
+                        </m:sSubPr>
+                        <m:e>
+                          <m:r>
+                            <a:rPr lang="en-US" sz="1100" b="0" i="1" dirty="0" err="1">
+                              <a:solidFill>
+                                <a:srgbClr val="B88600"/>
+                              </a:solidFill>
+                              <a:latin typeface="Cambria Math" panose="02040503050406030204" pitchFamily="18" charset="0"/>
+                            </a:rPr>
+                            <m:t>𝑤</m:t>
+                          </m:r>
+                        </m:e>
+                        <m:sub>
+                          <m:r>
+                            <a:rPr lang="en-US" sz="1100" b="0" i="1" dirty="0" err="1">
+                              <a:solidFill>
+                                <a:srgbClr val="B88600"/>
+                              </a:solidFill>
+                              <a:latin typeface="Cambria Math" panose="02040503050406030204" pitchFamily="18" charset="0"/>
+                            </a:rPr>
+                            <m:t>𝑖</m:t>
+                          </m:r>
+                        </m:sub>
+                      </m:sSub>
+                      <m:r>
+                        <a:rPr lang="en-US" sz="1100" b="0" i="1" dirty="0">
+                          <a:solidFill>
+                            <a:srgbClr val="B88600"/>
+                          </a:solidFill>
+                          <a:latin typeface="Cambria Math" panose="02040503050406030204" pitchFamily="18" charset="0"/>
+                        </a:rPr>
+                        <m:t>∗</m:t>
+                      </m:r>
+                      <m:sSub>
+                        <m:sSubPr>
+                          <m:ctrlPr>
+                            <a:rPr lang="en-US" sz="1100" b="0" i="1" dirty="0" err="1">
+                              <a:solidFill>
+                                <a:srgbClr val="B88600"/>
+                              </a:solidFill>
+                              <a:latin typeface="Cambria Math" panose="02040503050406030204" pitchFamily="18" charset="0"/>
+                            </a:rPr>
+                          </m:ctrlPr>
+                        </m:sSubPr>
+                        <m:e>
+                          <m:r>
+                            <a:rPr lang="en-US" sz="1100" b="0" i="1" dirty="0" err="1">
+                              <a:solidFill>
+                                <a:srgbClr val="B88600"/>
+                              </a:solidFill>
+                              <a:latin typeface="Cambria Math" panose="02040503050406030204" pitchFamily="18" charset="0"/>
+                            </a:rPr>
+                            <m:t>𝑒</m:t>
+                          </m:r>
+                        </m:e>
+                        <m:sub>
+                          <m:r>
+                            <a:rPr lang="en-US" sz="1100" b="0" i="1" dirty="0" err="1">
+                              <a:solidFill>
+                                <a:srgbClr val="B88600"/>
+                              </a:solidFill>
+                              <a:latin typeface="Cambria Math" panose="02040503050406030204" pitchFamily="18" charset="0"/>
+                            </a:rPr>
+                            <m:t>𝑖</m:t>
+                          </m:r>
+                        </m:sub>
+                      </m:sSub>
+                      <m:r>
+                        <m:rPr>
+                          <m:lit/>
+                        </m:rPr>
+                        <a:rPr lang="en-US" sz="1100" b="0" i="1" dirty="0">
+                          <a:solidFill>
+                            <a:srgbClr val="B88600"/>
+                          </a:solidFill>
+                          <a:latin typeface="Cambria Math" panose="02040503050406030204" pitchFamily="18" charset="0"/>
+                        </a:rPr>
+                        <m:t>/</m:t>
+                      </m:r>
+                      <m:r>
+                        <a:rPr lang="en-US" sz="1100" b="0" i="1" dirty="0" err="1">
+                          <a:solidFill>
+                            <a:srgbClr val="B88600"/>
+                          </a:solidFill>
+                          <a:latin typeface="Cambria Math" panose="02040503050406030204" pitchFamily="18" charset="0"/>
+                        </a:rPr>
+                        <m:t>𝑆𝑢</m:t>
+                      </m:r>
+                      <m:sSub>
+                        <m:sSubPr>
+                          <m:ctrlPr>
+                            <a:rPr lang="en-US" sz="1100" b="0" i="1" dirty="0" err="1">
+                              <a:solidFill>
+                                <a:srgbClr val="B88600"/>
+                              </a:solidFill>
+                              <a:latin typeface="Cambria Math" panose="02040503050406030204" pitchFamily="18" charset="0"/>
+                            </a:rPr>
+                          </m:ctrlPr>
+                        </m:sSubPr>
+                        <m:e>
+                          <m:r>
+                            <a:rPr lang="en-US" sz="1100" b="0" i="1" dirty="0" err="1">
+                              <a:solidFill>
+                                <a:srgbClr val="B88600"/>
+                              </a:solidFill>
+                              <a:latin typeface="Cambria Math" panose="02040503050406030204" pitchFamily="18" charset="0"/>
+                            </a:rPr>
+                            <m:t>𝑚</m:t>
+                          </m:r>
+                        </m:e>
+                        <m:sub>
+                          <m:r>
+                            <a:rPr lang="en-US" sz="1100" b="0" i="1" dirty="0" err="1">
+                              <a:solidFill>
+                                <a:srgbClr val="B88600"/>
+                              </a:solidFill>
+                              <a:latin typeface="Cambria Math" panose="02040503050406030204" pitchFamily="18" charset="0"/>
+                            </a:rPr>
+                            <m:t>𝑖</m:t>
+                          </m:r>
+                        </m:sub>
+                      </m:sSub>
+                      <m:sSub>
+                        <m:sSubPr>
+                          <m:ctrlPr>
+                            <a:rPr lang="en-US" sz="1100" b="0" i="1" dirty="0" err="1">
+                              <a:solidFill>
+                                <a:srgbClr val="B88600"/>
+                              </a:solidFill>
+                              <a:latin typeface="Cambria Math" panose="02040503050406030204" pitchFamily="18" charset="0"/>
+                            </a:rPr>
+                          </m:ctrlPr>
+                        </m:sSubPr>
+                        <m:e>
+                          <m:r>
+                            <a:rPr lang="en-US" sz="1100" b="0" i="1" dirty="0" err="1">
+                              <a:solidFill>
+                                <a:srgbClr val="B88600"/>
+                              </a:solidFill>
+                              <a:latin typeface="Cambria Math" panose="02040503050406030204" pitchFamily="18" charset="0"/>
+                            </a:rPr>
+                            <m:t>𝑤</m:t>
+                          </m:r>
+                        </m:e>
+                        <m:sub>
+                          <m:r>
+                            <a:rPr lang="en-US" sz="1100" b="0" i="1" dirty="0" err="1">
+                              <a:solidFill>
+                                <a:srgbClr val="B88600"/>
+                              </a:solidFill>
+                              <a:latin typeface="Cambria Math" panose="02040503050406030204" pitchFamily="18" charset="0"/>
+                            </a:rPr>
+                            <m:t>𝑖</m:t>
+                          </m:r>
+                        </m:sub>
+                      </m:sSub>
+                      <m:sSub>
+                        <m:sSubPr>
+                          <m:ctrlPr>
+                            <a:rPr lang="en-US" sz="1100" b="0" i="1" dirty="0" err="1">
+                              <a:solidFill>
+                                <a:srgbClr val="B88600"/>
+                              </a:solidFill>
+                              <a:latin typeface="Cambria Math" panose="02040503050406030204" pitchFamily="18" charset="0"/>
+                            </a:rPr>
+                          </m:ctrlPr>
+                        </m:sSubPr>
+                        <m:e>
+                          <m:r>
+                            <a:rPr lang="en-US" sz="1100" b="0" i="1" dirty="0" err="1">
+                              <a:solidFill>
+                                <a:srgbClr val="B88600"/>
+                              </a:solidFill>
+                              <a:latin typeface="Cambria Math" panose="02040503050406030204" pitchFamily="18" charset="0"/>
+                            </a:rPr>
+                            <m:t>𝑤</m:t>
+                          </m:r>
+                        </m:e>
+                        <m:sub>
+                          <m:r>
+                            <a:rPr lang="en-US" sz="1100" b="0" i="1" dirty="0" err="1">
+                              <a:solidFill>
+                                <a:srgbClr val="B88600"/>
+                              </a:solidFill>
+                              <a:latin typeface="Cambria Math" panose="02040503050406030204" pitchFamily="18" charset="0"/>
+                            </a:rPr>
+                            <m:t>𝑖</m:t>
+                          </m:r>
+                        </m:sub>
+                      </m:sSub>
+                      <m:r>
+                        <a:rPr lang="en-US" sz="1100" b="0" i="1" dirty="0">
+                          <a:solidFill>
+                            <a:srgbClr val="B88600"/>
+                          </a:solidFill>
+                          <a:latin typeface="Cambria Math" panose="02040503050406030204" pitchFamily="18" charset="0"/>
+                        </a:rPr>
+                        <m:t>=</m:t>
+                      </m:r>
+                      <m:r>
+                        <a:rPr lang="en-US" sz="1100" b="0" i="1" dirty="0">
+                          <a:solidFill>
+                            <a:srgbClr val="B88600"/>
+                          </a:solidFill>
+                          <a:latin typeface="Cambria Math" panose="02040503050406030204" pitchFamily="18" charset="0"/>
+                        </a:rPr>
+                        <m:t>𝑒𝑥</m:t>
+                      </m:r>
+                      <m:func>
+                        <m:funcPr>
+                          <m:ctrlPr>
+                            <a:rPr lang="en-US" sz="1100" b="0" i="1" dirty="0">
+                              <a:solidFill>
+                                <a:srgbClr val="B88600"/>
+                              </a:solidFill>
+                              <a:latin typeface="Cambria Math" panose="02040503050406030204" pitchFamily="18" charset="0"/>
+                            </a:rPr>
+                          </m:ctrlPr>
+                        </m:funcPr>
+                        <m:fName>
+                          <m:r>
+                            <a:rPr lang="en-US" sz="1100" b="0" i="1" dirty="0">
+                              <a:solidFill>
+                                <a:srgbClr val="B88600"/>
+                              </a:solidFill>
+                              <a:latin typeface="Cambria Math" panose="02040503050406030204" pitchFamily="18" charset="0"/>
+                            </a:rPr>
+                            <m:t>𝑝</m:t>
+                          </m:r>
+                        </m:fName>
+                        <m:e>
+                          <m:d>
+                            <m:dPr>
+                              <m:ctrlPr>
+                                <a:rPr lang="en-US" sz="1100" b="0" i="1" dirty="0">
+                                  <a:solidFill>
+                                    <a:srgbClr val="B88600"/>
+                                  </a:solidFill>
+                                  <a:latin typeface="Cambria Math" panose="02040503050406030204" pitchFamily="18" charset="0"/>
+                                </a:rPr>
+                              </m:ctrlPr>
+                            </m:dPr>
+                            <m:e>
+                              <m:r>
+                                <a:rPr lang="en-US" sz="1100" b="0" i="1" dirty="0">
+                                  <a:solidFill>
+                                    <a:srgbClr val="B88600"/>
+                                  </a:solidFill>
+                                  <a:latin typeface="Cambria Math" panose="02040503050406030204" pitchFamily="18" charset="0"/>
+                                </a:rPr>
+                                <m:t>−</m:t>
+                              </m:r>
+                              <m:sSup>
+                                <m:sSupPr>
+                                  <m:ctrlPr>
+                                    <a:rPr lang="en-US" sz="1100" b="0" i="1" dirty="0">
+                                      <a:solidFill>
+                                        <a:srgbClr val="B88600"/>
+                                      </a:solidFill>
+                                      <a:latin typeface="Cambria Math" panose="02040503050406030204" pitchFamily="18" charset="0"/>
+                                    </a:rPr>
+                                  </m:ctrlPr>
+                                </m:sSupPr>
+                                <m:e>
+                                  <m:d>
+                                    <m:dPr>
+                                      <m:ctrlPr>
+                                        <a:rPr lang="en-US" sz="1100" b="0" i="1" dirty="0">
+                                          <a:solidFill>
+                                            <a:srgbClr val="B88600"/>
+                                          </a:solidFill>
+                                          <a:latin typeface="Cambria Math" panose="02040503050406030204" pitchFamily="18" charset="0"/>
+                                        </a:rPr>
+                                      </m:ctrlPr>
+                                    </m:dPr>
+                                    <m:e>
+                                      <m:r>
+                                        <a:rPr lang="en-US" sz="1100" b="0" i="1" dirty="0">
+                                          <a:solidFill>
+                                            <a:srgbClr val="B88600"/>
+                                          </a:solidFill>
+                                          <a:latin typeface="Cambria Math" panose="02040503050406030204" pitchFamily="18" charset="0"/>
+                                        </a:rPr>
+                                        <m:t>𝑡</m:t>
+                                      </m:r>
+                                      <m:r>
+                                        <a:rPr lang="en-US" sz="1100" b="0" i="1" dirty="0">
+                                          <a:solidFill>
+                                            <a:srgbClr val="B88600"/>
+                                          </a:solidFill>
+                                          <a:latin typeface="Cambria Math" panose="02040503050406030204" pitchFamily="18" charset="0"/>
+                                        </a:rPr>
+                                        <m:t>∗−</m:t>
+                                      </m:r>
+                                      <m:sSub>
+                                        <m:sSubPr>
+                                          <m:ctrlPr>
+                                            <a:rPr lang="en-US" sz="1100" b="0" i="1" dirty="0" err="1">
+                                              <a:solidFill>
+                                                <a:srgbClr val="B88600"/>
+                                              </a:solidFill>
+                                              <a:latin typeface="Cambria Math" panose="02040503050406030204" pitchFamily="18" charset="0"/>
+                                            </a:rPr>
+                                          </m:ctrlPr>
+                                        </m:sSubPr>
+                                        <m:e>
+                                          <m:r>
+                                            <a:rPr lang="en-US" sz="1100" b="0" i="1" dirty="0" err="1">
+                                              <a:solidFill>
+                                                <a:srgbClr val="B88600"/>
+                                              </a:solidFill>
+                                              <a:latin typeface="Cambria Math" panose="02040503050406030204" pitchFamily="18" charset="0"/>
+                                            </a:rPr>
+                                            <m:t>𝑡</m:t>
+                                          </m:r>
+                                        </m:e>
+                                        <m:sub>
+                                          <m:r>
+                                            <a:rPr lang="en-US" sz="1100" b="0" i="1" dirty="0" err="1">
+                                              <a:solidFill>
+                                                <a:srgbClr val="B88600"/>
+                                              </a:solidFill>
+                                              <a:latin typeface="Cambria Math" panose="02040503050406030204" pitchFamily="18" charset="0"/>
+                                            </a:rPr>
+                                            <m:t>𝑖</m:t>
+                                          </m:r>
+                                        </m:sub>
+                                      </m:sSub>
+                                    </m:e>
+                                  </m:d>
+                                </m:e>
+                                <m:sup>
+                                  <m:r>
+                                    <a:rPr lang="en-US" sz="1100" b="0" i="1" dirty="0">
+                                      <a:solidFill>
+                                        <a:srgbClr val="B88600"/>
+                                      </a:solidFill>
+                                      <a:latin typeface="Cambria Math" panose="02040503050406030204" pitchFamily="18" charset="0"/>
+                                    </a:rPr>
+                                    <m:t>2</m:t>
+                                  </m:r>
+                                </m:sup>
+                              </m:sSup>
+                              <m:r>
+                                <m:rPr>
+                                  <m:lit/>
+                                </m:rPr>
+                                <a:rPr lang="en-US" sz="1100" b="0" i="1" dirty="0">
+                                  <a:solidFill>
+                                    <a:srgbClr val="B88600"/>
+                                  </a:solidFill>
+                                  <a:latin typeface="Cambria Math" panose="02040503050406030204" pitchFamily="18" charset="0"/>
+                                </a:rPr>
+                                <m:t>/</m:t>
+                              </m:r>
+                              <m:r>
+                                <a:rPr lang="en-US" sz="1100" b="0" i="1" dirty="0">
+                                  <a:solidFill>
+                                    <a:srgbClr val="B88600"/>
+                                  </a:solidFill>
+                                  <a:latin typeface="Cambria Math" panose="02040503050406030204" pitchFamily="18" charset="0"/>
+                                </a:rPr>
+                                <m:t>2∗</m:t>
+                              </m:r>
+                              <m:r>
+                                <a:rPr lang="en-US" sz="1100" b="0" i="1" dirty="0">
+                                  <a:solidFill>
+                                    <a:srgbClr val="B88600"/>
+                                  </a:solidFill>
+                                  <a:latin typeface="Cambria Math" panose="02040503050406030204" pitchFamily="18" charset="0"/>
+                                </a:rPr>
+                                <m:t>𝑠𝑖𝑔𝑚</m:t>
+                              </m:r>
+                              <m:sSup>
+                                <m:sSupPr>
+                                  <m:ctrlPr>
+                                    <a:rPr lang="en-US" sz="1100" b="0" i="1" dirty="0">
+                                      <a:solidFill>
+                                        <a:srgbClr val="B88600"/>
+                                      </a:solidFill>
+                                      <a:latin typeface="Cambria Math" panose="02040503050406030204" pitchFamily="18" charset="0"/>
+                                    </a:rPr>
+                                  </m:ctrlPr>
+                                </m:sSupPr>
+                                <m:e>
+                                  <m:r>
+                                    <a:rPr lang="en-US" sz="1100" b="0" i="1" dirty="0">
+                                      <a:solidFill>
+                                        <a:srgbClr val="B88600"/>
+                                      </a:solidFill>
+                                      <a:latin typeface="Cambria Math" panose="02040503050406030204" pitchFamily="18" charset="0"/>
+                                    </a:rPr>
+                                    <m:t>𝑎</m:t>
+                                  </m:r>
+                                </m:e>
+                                <m:sup>
+                                  <m:r>
+                                    <a:rPr lang="en-US" sz="1100" b="0" i="1" dirty="0">
+                                      <a:solidFill>
+                                        <a:srgbClr val="B88600"/>
+                                      </a:solidFill>
+                                      <a:latin typeface="Cambria Math" panose="02040503050406030204" pitchFamily="18" charset="0"/>
+                                    </a:rPr>
+                                    <m:t>2</m:t>
+                                  </m:r>
+                                </m:sup>
+                              </m:sSup>
+                            </m:e>
+                          </m:d>
+                        </m:e>
+                      </m:func>
+                      <m:r>
+                        <a:rPr lang="en-US" sz="1100" b="0" i="1" dirty="0">
+                          <a:solidFill>
+                            <a:srgbClr val="B88600"/>
+                          </a:solidFill>
+                          <a:latin typeface="Cambria Math" panose="02040503050406030204" pitchFamily="18" charset="0"/>
+                        </a:rPr>
+                        <m:t>𝑠𝑖𝑔𝑚𝑎</m:t>
+                      </m:r>
+                      <m:r>
+                        <a:rPr lang="en-US" sz="1100" b="0" i="1" dirty="0">
+                          <a:solidFill>
+                            <a:srgbClr val="B88600"/>
+                          </a:solidFill>
+                          <a:latin typeface="Cambria Math" panose="02040503050406030204" pitchFamily="18" charset="0"/>
+                        </a:rPr>
+                        <m:t>=1.0</m:t>
+                      </m:r>
+                      <m:r>
+                        <a:rPr lang="en-US" sz="1100" b="0" i="1" dirty="0">
+                          <a:solidFill>
+                            <a:srgbClr val="B88600"/>
+                          </a:solidFill>
+                          <a:latin typeface="Cambria Math" panose="02040503050406030204" pitchFamily="18" charset="0"/>
+                        </a:rPr>
+                        <m:t>𝑦𝑒𝑎𝑟</m:t>
+                      </m:r>
+                    </m:oMath>
+                  </m:oMathPara>
+                </a14:m>
+              </a:p>
+            </p:txBody>
+          </p:sp>
+        </mc:Choice>
+        <mc:Fallback>
+          <p:sp>
+            <p:nvSpPr>
+              <p:cNvPr id="22" name="TextBox 21"/>
+              <p:cNvSpPr txBox="1">
+                <a:spLocks noRot="1" noChangeAspect="1" noMove="1" noResize="1" noEditPoints="1" noAdjustHandles="1" noChangeArrowheads="1" noChangeShapeType="1" noTextEdit="1"/>
+              </p:cNvSpPr>
+              <p:nvPr/>
+            </p:nvSpPr>
+            <p:spPr>
+              <a:xfrm>
+                <a:off x="989154" y="3569612"/>
+                <a:ext cx="4056731" cy="430887"/>
+              </a:xfrm>
+              <a:prstGeom prst="rect">
+                <a:avLst/>
+              </a:prstGeom>
+              <a:blipFill>
+                <a:blip r:embed="rId5"/>
+                <a:stretch>
+                  <a:fillRect b="-8824"/>
+                </a:stretch>
+              </a:blipFill>
+            </p:spPr>
+            <p:txBody>
+              <a:bodyPr/>
+              <a:lstStyle/>
+              <a:p>
+                <a:r>
+                  <a:rPr lang="en-US">
+                    <a:noFill/>
+                  </a:rPr>
+                  <a:t> </a:t>
+                </a:r>
+              </a:p>
+            </p:txBody>
+          </p:sp>
+        </mc:Fallback>
+      </mc:AlternateContent>
       <p:sp>
         <p:nvSpPr>
           <p:cNvPr id="23" name="TextBox 22"/>
@@ -6602,42 +7724,523 @@
           </a:p>
         </p:txBody>
       </p:sp>
-      <p:sp>
-        <p:nvSpPr>
-          <p:cNvPr id="28" name="TextBox 27"/>
-          <p:cNvSpPr txBox="1"/>
-          <p:nvPr/>
-        </p:nvSpPr>
-        <p:spPr>
-          <a:xfrm>
-            <a:off x="6172200" y="3429000"/>
-            <a:ext cx="5486400" cy="1051560"/>
-          </a:xfrm>
-          <a:prstGeom prst="rect">
-            <a:avLst/>
-          </a:prstGeom>
-          <a:noFill/>
-        </p:spPr>
-        <p:txBody>
-          <a:bodyPr wrap="square">
-            <a:spAutoFit/>
-          </a:bodyPr>
-          <a:lstStyle/>
-          <a:p>
-            <a:pPr algn="l"/>
-            <a:r>
-              <a:rPr sz="1100" b="0" i="0">
-                <a:solidFill>
-                  <a:srgbClr val="B88600"/>
-                </a:solidFill>
-              </a:rPr>
-              <a:t>g      =  sigmoid( W_g * [h_gru ; c] + b_g )
-delta  =  tanh( W_d * [h_gru ; c] + b_d )
-h_out  =  h_gru  +  g * delta</a:t>
-            </a:r>
-          </a:p>
-        </p:txBody>
-      </p:sp>
+      <mc:AlternateContent xmlns:mc="http://schemas.openxmlformats.org/markup-compatibility/2006">
+        <mc:Choice xmlns:a14="http://schemas.microsoft.com/office/drawing/2010/main" Requires="a14">
+          <p:sp>
+            <p:nvSpPr>
+              <p:cNvPr id="28" name="TextBox 27"/>
+              <p:cNvSpPr txBox="1"/>
+              <p:nvPr/>
+            </p:nvSpPr>
+            <p:spPr>
+              <a:xfrm>
+                <a:off x="6172200" y="3429000"/>
+                <a:ext cx="5486400" cy="600164"/>
+              </a:xfrm>
+              <a:prstGeom prst="rect">
+                <a:avLst/>
+              </a:prstGeom>
+              <a:noFill/>
+            </p:spPr>
+            <p:txBody>
+              <a:bodyPr wrap="square">
+                <a:spAutoFit/>
+              </a:bodyPr>
+              <a:lstStyle/>
+              <a:p>
+                <a:pPr algn="l"/>
+                <a14:m>
+                  <m:oMathPara xmlns:m="http://schemas.openxmlformats.org/officeDocument/2006/math">
+                    <m:oMathParaPr>
+                      <m:jc m:val="centerGroup"/>
+                    </m:oMathParaPr>
+                    <m:oMath xmlns:m="http://schemas.openxmlformats.org/officeDocument/2006/math">
+                      <m:r>
+                        <a:rPr lang="en-US" sz="1100" b="0" i="1" dirty="0" smtClean="0">
+                          <a:solidFill>
+                            <a:srgbClr val="B88600"/>
+                          </a:solidFill>
+                          <a:latin typeface="Cambria Math" panose="02040503050406030204" pitchFamily="18" charset="0"/>
+                        </a:rPr>
+                        <m:t>𝑔</m:t>
+                      </m:r>
+                      <m:r>
+                        <a:rPr lang="en-US" sz="1100" b="0" i="1" dirty="0" smtClean="0">
+                          <a:solidFill>
+                            <a:srgbClr val="B88600"/>
+                          </a:solidFill>
+                          <a:latin typeface="Cambria Math" panose="02040503050406030204" pitchFamily="18" charset="0"/>
+                        </a:rPr>
+                        <m:t>      =  </m:t>
+                      </m:r>
+                      <m:r>
+                        <a:rPr lang="en-US" sz="1100" b="0" i="1" dirty="0" smtClean="0">
+                          <a:solidFill>
+                            <a:srgbClr val="B88600"/>
+                          </a:solidFill>
+                          <a:latin typeface="Cambria Math" panose="02040503050406030204" pitchFamily="18" charset="0"/>
+                        </a:rPr>
+                        <m:t>𝑠𝑖𝑔𝑚𝑜𝑖𝑑</m:t>
+                      </m:r>
+                      <m:r>
+                        <a:rPr lang="en-US" sz="1100" b="0" i="1" dirty="0" smtClean="0">
+                          <a:solidFill>
+                            <a:srgbClr val="B88600"/>
+                          </a:solidFill>
+                          <a:latin typeface="Cambria Math" panose="02040503050406030204" pitchFamily="18" charset="0"/>
+                        </a:rPr>
+                        <m:t>( </m:t>
+                      </m:r>
+                      <m:r>
+                        <a:rPr lang="en-US" sz="1100" b="0" i="1" dirty="0" err="1">
+                          <a:solidFill>
+                            <a:srgbClr val="B88600"/>
+                          </a:solidFill>
+                          <a:latin typeface="Cambria Math" panose="02040503050406030204" pitchFamily="18" charset="0"/>
+                        </a:rPr>
+                        <m:t>𝑊</m:t>
+                      </m:r>
+                      <m:r>
+                        <a:rPr lang="en-US" sz="1100" b="0" i="1" dirty="0" err="1">
+                          <a:solidFill>
+                            <a:srgbClr val="B88600"/>
+                          </a:solidFill>
+                          <a:latin typeface="Cambria Math" panose="02040503050406030204" pitchFamily="18" charset="0"/>
+                        </a:rPr>
+                        <m:t>_</m:t>
+                      </m:r>
+                      <m:r>
+                        <a:rPr lang="en-US" sz="1100" b="0" i="1" dirty="0" err="1">
+                          <a:solidFill>
+                            <a:srgbClr val="B88600"/>
+                          </a:solidFill>
+                          <a:latin typeface="Cambria Math" panose="02040503050406030204" pitchFamily="18" charset="0"/>
+                        </a:rPr>
+                        <m:t>𝑔</m:t>
+                      </m:r>
+                      <m:r>
+                        <a:rPr lang="en-US" sz="1100" b="0" i="1" dirty="0">
+                          <a:solidFill>
+                            <a:srgbClr val="B88600"/>
+                          </a:solidFill>
+                          <a:latin typeface="Cambria Math" panose="02040503050406030204" pitchFamily="18" charset="0"/>
+                        </a:rPr>
+                        <m:t> ∗ [</m:t>
+                      </m:r>
+                      <m:r>
+                        <a:rPr lang="en-US" sz="1100" b="0" i="1" dirty="0" err="1">
+                          <a:solidFill>
+                            <a:srgbClr val="B88600"/>
+                          </a:solidFill>
+                          <a:latin typeface="Cambria Math" panose="02040503050406030204" pitchFamily="18" charset="0"/>
+                        </a:rPr>
+                        <m:t>h</m:t>
+                      </m:r>
+                      <m:r>
+                        <a:rPr lang="en-US" sz="1100" b="0" i="1" dirty="0" err="1">
+                          <a:solidFill>
+                            <a:srgbClr val="B88600"/>
+                          </a:solidFill>
+                          <a:latin typeface="Cambria Math" panose="02040503050406030204" pitchFamily="18" charset="0"/>
+                        </a:rPr>
+                        <m:t>_</m:t>
+                      </m:r>
+                      <m:r>
+                        <a:rPr lang="en-US" sz="1100" b="0" i="1" dirty="0" err="1">
+                          <a:solidFill>
+                            <a:srgbClr val="B88600"/>
+                          </a:solidFill>
+                          <a:latin typeface="Cambria Math" panose="02040503050406030204" pitchFamily="18" charset="0"/>
+                        </a:rPr>
+                        <m:t>𝑔𝑟𝑢</m:t>
+                      </m:r>
+                      <m:r>
+                        <a:rPr lang="en-US" sz="1100" b="0" i="1" dirty="0">
+                          <a:solidFill>
+                            <a:srgbClr val="B88600"/>
+                          </a:solidFill>
+                          <a:latin typeface="Cambria Math" panose="02040503050406030204" pitchFamily="18" charset="0"/>
+                        </a:rPr>
+                        <m:t> ; </m:t>
+                      </m:r>
+                      <m:r>
+                        <a:rPr lang="en-US" sz="1100" b="0" i="1" dirty="0">
+                          <a:solidFill>
+                            <a:srgbClr val="B88600"/>
+                          </a:solidFill>
+                          <a:latin typeface="Cambria Math" panose="02040503050406030204" pitchFamily="18" charset="0"/>
+                        </a:rPr>
+                        <m:t>𝑐</m:t>
+                      </m:r>
+                      <m:r>
+                        <a:rPr lang="en-US" sz="1100" b="0" i="1" dirty="0">
+                          <a:solidFill>
+                            <a:srgbClr val="B88600"/>
+                          </a:solidFill>
+                          <a:latin typeface="Cambria Math" panose="02040503050406030204" pitchFamily="18" charset="0"/>
+                        </a:rPr>
+                        <m:t>] + </m:t>
+                      </m:r>
+                      <m:r>
+                        <a:rPr lang="en-US" sz="1100" b="0" i="1" dirty="0" err="1">
+                          <a:solidFill>
+                            <a:srgbClr val="B88600"/>
+                          </a:solidFill>
+                          <a:latin typeface="Cambria Math" panose="02040503050406030204" pitchFamily="18" charset="0"/>
+                        </a:rPr>
+                        <m:t>𝑏</m:t>
+                      </m:r>
+                      <m:r>
+                        <a:rPr lang="en-US" sz="1100" b="0" i="1" dirty="0" err="1">
+                          <a:solidFill>
+                            <a:srgbClr val="B88600"/>
+                          </a:solidFill>
+                          <a:latin typeface="Cambria Math" panose="02040503050406030204" pitchFamily="18" charset="0"/>
+                        </a:rPr>
+                        <m:t>_</m:t>
+                      </m:r>
+                      <m:r>
+                        <a:rPr lang="en-US" sz="1100" b="0" i="1" dirty="0" err="1">
+                          <a:solidFill>
+                            <a:srgbClr val="B88600"/>
+                          </a:solidFill>
+                          <a:latin typeface="Cambria Math" panose="02040503050406030204" pitchFamily="18" charset="0"/>
+                        </a:rPr>
+                        <m:t>𝑔</m:t>
+                      </m:r>
+                      <m:r>
+                        <a:rPr lang="en-US" sz="1100" b="0" i="1" dirty="0">
+                          <a:solidFill>
+                            <a:srgbClr val="B88600"/>
+                          </a:solidFill>
+                          <a:latin typeface="Cambria Math" panose="02040503050406030204" pitchFamily="18" charset="0"/>
+                        </a:rPr>
+                        <m:t> )</m:t>
+                      </m:r>
+                    </m:oMath>
+                  </m:oMathPara>
+                  <m:oMathPara xmlns:m="http://schemas.openxmlformats.org/officeDocument/2006/math">
+                    <m:oMathParaPr>
+                      <m:jc m:val="centerGroup"/>
+                    </m:oMathParaPr>
+                    <m:oMath xmlns:m="http://schemas.openxmlformats.org/officeDocument/2006/math">
+                      <m:r>
+                        <a:rPr lang="en-US" sz="1100" b="0" i="1" dirty="0">
+                          <a:solidFill>
+                            <a:srgbClr val="B88600"/>
+                          </a:solidFill>
+                          <a:latin typeface="Cambria Math" panose="02040503050406030204" pitchFamily="18" charset="0"/>
+                        </a:rPr>
+                        <m:t>𝑑𝑒𝑙𝑡𝑎</m:t>
+                      </m:r>
+                      <m:r>
+                        <a:rPr lang="en-US" sz="1100" b="0" i="1" dirty="0">
+                          <a:solidFill>
+                            <a:srgbClr val="B88600"/>
+                          </a:solidFill>
+                          <a:latin typeface="Cambria Math" panose="02040503050406030204" pitchFamily="18" charset="0"/>
+                        </a:rPr>
+                        <m:t>  =  </m:t>
+                      </m:r>
+                      <m:r>
+                        <m:rPr>
+                          <m:sty m:val="p"/>
+                        </m:rPr>
+                        <a:rPr lang="en-US" sz="1100" b="0" i="1" dirty="0">
+                          <a:solidFill>
+                            <a:srgbClr val="B88600"/>
+                          </a:solidFill>
+                          <a:latin typeface="Cambria Math" panose="02040503050406030204" pitchFamily="18" charset="0"/>
+                        </a:rPr>
+                        <m:t>tanh</m:t>
+                      </m:r>
+                      <m:r>
+                        <a:rPr lang="en-US" sz="1100" b="0" i="1" dirty="0">
+                          <a:solidFill>
+                            <a:srgbClr val="B88600"/>
+                          </a:solidFill>
+                          <a:latin typeface="Cambria Math" panose="02040503050406030204" pitchFamily="18" charset="0"/>
+                        </a:rPr>
+                        <m:t>⁡( </m:t>
+                      </m:r>
+                      <m:r>
+                        <a:rPr lang="en-US" sz="1100" b="0" i="1" dirty="0" err="1">
+                          <a:solidFill>
+                            <a:srgbClr val="B88600"/>
+                          </a:solidFill>
+                          <a:latin typeface="Cambria Math" panose="02040503050406030204" pitchFamily="18" charset="0"/>
+                        </a:rPr>
+                        <m:t>𝑊</m:t>
+                      </m:r>
+                      <m:r>
+                        <a:rPr lang="en-US" sz="1100" b="0" i="1" dirty="0" err="1">
+                          <a:solidFill>
+                            <a:srgbClr val="B88600"/>
+                          </a:solidFill>
+                          <a:latin typeface="Cambria Math" panose="02040503050406030204" pitchFamily="18" charset="0"/>
+                        </a:rPr>
+                        <m:t>_</m:t>
+                      </m:r>
+                      <m:r>
+                        <a:rPr lang="en-US" sz="1100" b="0" i="1" dirty="0" err="1">
+                          <a:solidFill>
+                            <a:srgbClr val="B88600"/>
+                          </a:solidFill>
+                          <a:latin typeface="Cambria Math" panose="02040503050406030204" pitchFamily="18" charset="0"/>
+                        </a:rPr>
+                        <m:t>𝑑</m:t>
+                      </m:r>
+                      <m:r>
+                        <a:rPr lang="en-US" sz="1100" b="0" i="1" dirty="0">
+                          <a:solidFill>
+                            <a:srgbClr val="B88600"/>
+                          </a:solidFill>
+                          <a:latin typeface="Cambria Math" panose="02040503050406030204" pitchFamily="18" charset="0"/>
+                        </a:rPr>
+                        <m:t> ∗ [</m:t>
+                      </m:r>
+                      <m:r>
+                        <a:rPr lang="en-US" sz="1100" b="0" i="1" dirty="0" err="1">
+                          <a:solidFill>
+                            <a:srgbClr val="B88600"/>
+                          </a:solidFill>
+                          <a:latin typeface="Cambria Math" panose="02040503050406030204" pitchFamily="18" charset="0"/>
+                        </a:rPr>
+                        <m:t>h</m:t>
+                      </m:r>
+                      <m:r>
+                        <a:rPr lang="en-US" sz="1100" b="0" i="1" dirty="0" err="1">
+                          <a:solidFill>
+                            <a:srgbClr val="B88600"/>
+                          </a:solidFill>
+                          <a:latin typeface="Cambria Math" panose="02040503050406030204" pitchFamily="18" charset="0"/>
+                        </a:rPr>
+                        <m:t>_</m:t>
+                      </m:r>
+                      <m:r>
+                        <a:rPr lang="en-US" sz="1100" b="0" i="1" dirty="0" err="1">
+                          <a:solidFill>
+                            <a:srgbClr val="B88600"/>
+                          </a:solidFill>
+                          <a:latin typeface="Cambria Math" panose="02040503050406030204" pitchFamily="18" charset="0"/>
+                        </a:rPr>
+                        <m:t>𝑔𝑟𝑢</m:t>
+                      </m:r>
+                      <m:r>
+                        <a:rPr lang="en-US" sz="1100" b="0" i="1" dirty="0">
+                          <a:solidFill>
+                            <a:srgbClr val="B88600"/>
+                          </a:solidFill>
+                          <a:latin typeface="Cambria Math" panose="02040503050406030204" pitchFamily="18" charset="0"/>
+                        </a:rPr>
+                        <m:t> ; </m:t>
+                      </m:r>
+                      <m:r>
+                        <a:rPr lang="en-US" sz="1100" b="0" i="1" dirty="0">
+                          <a:solidFill>
+                            <a:srgbClr val="B88600"/>
+                          </a:solidFill>
+                          <a:latin typeface="Cambria Math" panose="02040503050406030204" pitchFamily="18" charset="0"/>
+                        </a:rPr>
+                        <m:t>𝑐</m:t>
+                      </m:r>
+                      <m:r>
+                        <a:rPr lang="en-US" sz="1100" b="0" i="1" dirty="0">
+                          <a:solidFill>
+                            <a:srgbClr val="B88600"/>
+                          </a:solidFill>
+                          <a:latin typeface="Cambria Math" panose="02040503050406030204" pitchFamily="18" charset="0"/>
+                        </a:rPr>
+                        <m:t>] + </m:t>
+                      </m:r>
+                      <m:r>
+                        <a:rPr lang="en-US" sz="1100" b="0" i="1" dirty="0" err="1">
+                          <a:solidFill>
+                            <a:srgbClr val="B88600"/>
+                          </a:solidFill>
+                          <a:latin typeface="Cambria Math" panose="02040503050406030204" pitchFamily="18" charset="0"/>
+                        </a:rPr>
+                        <m:t>𝑏</m:t>
+                      </m:r>
+                      <m:r>
+                        <a:rPr lang="en-US" sz="1100" b="0" i="1" dirty="0" err="1">
+                          <a:solidFill>
+                            <a:srgbClr val="B88600"/>
+                          </a:solidFill>
+                          <a:latin typeface="Cambria Math" panose="02040503050406030204" pitchFamily="18" charset="0"/>
+                        </a:rPr>
+                        <m:t>_</m:t>
+                      </m:r>
+                      <m:r>
+                        <a:rPr lang="en-US" sz="1100" b="0" i="1" dirty="0" err="1">
+                          <a:solidFill>
+                            <a:srgbClr val="B88600"/>
+                          </a:solidFill>
+                          <a:latin typeface="Cambria Math" panose="02040503050406030204" pitchFamily="18" charset="0"/>
+                        </a:rPr>
+                        <m:t>𝑑</m:t>
+                      </m:r>
+                      <m:r>
+                        <a:rPr lang="en-US" sz="1100" b="0" i="1" dirty="0">
+                          <a:solidFill>
+                            <a:srgbClr val="B88600"/>
+                          </a:solidFill>
+                          <a:latin typeface="Cambria Math" panose="02040503050406030204" pitchFamily="18" charset="0"/>
+                        </a:rPr>
+                        <m:t> )</m:t>
+                      </m:r>
+                    </m:oMath>
+                  </m:oMathPara>
+                  <m:oMathPara xmlns:m="http://schemas.openxmlformats.org/officeDocument/2006/math">
+                    <m:oMathParaPr>
+                      <m:jc m:val="centerGroup"/>
+                    </m:oMathParaPr>
+                    <m:oMath xmlns:m="http://schemas.openxmlformats.org/officeDocument/2006/math">
+                      <m:r>
+                        <a:rPr lang="en-US" sz="1100" b="0" i="1" dirty="0" err="1">
+                          <a:solidFill>
+                            <a:srgbClr val="B88600"/>
+                          </a:solidFill>
+                          <a:latin typeface="Cambria Math" panose="02040503050406030204" pitchFamily="18" charset="0"/>
+                        </a:rPr>
+                        <m:t>h</m:t>
+                      </m:r>
+                      <m:r>
+                        <a:rPr lang="en-US" sz="1100" b="0" i="1" dirty="0" err="1">
+                          <a:solidFill>
+                            <a:srgbClr val="B88600"/>
+                          </a:solidFill>
+                          <a:latin typeface="Cambria Math" panose="02040503050406030204" pitchFamily="18" charset="0"/>
+                        </a:rPr>
+                        <m:t>_</m:t>
+                      </m:r>
+                      <m:r>
+                        <a:rPr lang="en-US" sz="1100" b="0" i="1" dirty="0" err="1">
+                          <a:solidFill>
+                            <a:srgbClr val="B88600"/>
+                          </a:solidFill>
+                          <a:latin typeface="Cambria Math" panose="02040503050406030204" pitchFamily="18" charset="0"/>
+                        </a:rPr>
+                        <m:t>𝑜𝑢𝑡</m:t>
+                      </m:r>
+                      <m:r>
+                        <a:rPr lang="en-US" sz="1100" b="0" i="1" dirty="0">
+                          <a:solidFill>
+                            <a:srgbClr val="B88600"/>
+                          </a:solidFill>
+                          <a:latin typeface="Cambria Math" panose="02040503050406030204" pitchFamily="18" charset="0"/>
+                        </a:rPr>
+                        <m:t>  =  </m:t>
+                      </m:r>
+                      <m:r>
+                        <a:rPr lang="en-US" sz="1100" b="0" i="1" dirty="0" err="1">
+                          <a:solidFill>
+                            <a:srgbClr val="B88600"/>
+                          </a:solidFill>
+                          <a:latin typeface="Cambria Math" panose="02040503050406030204" pitchFamily="18" charset="0"/>
+                        </a:rPr>
+                        <m:t>h</m:t>
+                      </m:r>
+                      <m:r>
+                        <a:rPr lang="en-US" sz="1100" b="0" i="1" dirty="0" err="1">
+                          <a:solidFill>
+                            <a:srgbClr val="B88600"/>
+                          </a:solidFill>
+                          <a:latin typeface="Cambria Math" panose="02040503050406030204" pitchFamily="18" charset="0"/>
+                        </a:rPr>
+                        <m:t>_</m:t>
+                      </m:r>
+                      <m:r>
+                        <a:rPr lang="en-US" sz="1100" b="0" i="1" dirty="0" err="1">
+                          <a:solidFill>
+                            <a:srgbClr val="B88600"/>
+                          </a:solidFill>
+                          <a:latin typeface="Cambria Math" panose="02040503050406030204" pitchFamily="18" charset="0"/>
+                        </a:rPr>
+                        <m:t>𝑔𝑟𝑢</m:t>
+                      </m:r>
+                      <m:r>
+                        <a:rPr lang="en-US" sz="1100" b="0" i="1" dirty="0">
+                          <a:solidFill>
+                            <a:srgbClr val="B88600"/>
+                          </a:solidFill>
+                          <a:latin typeface="Cambria Math" panose="02040503050406030204" pitchFamily="18" charset="0"/>
+                        </a:rPr>
+                        <m:t>  +  </m:t>
+                      </m:r>
+                      <m:r>
+                        <a:rPr lang="en-US" sz="1100" b="0" i="1" dirty="0">
+                          <a:solidFill>
+                            <a:srgbClr val="B88600"/>
+                          </a:solidFill>
+                          <a:latin typeface="Cambria Math" panose="02040503050406030204" pitchFamily="18" charset="0"/>
+                        </a:rPr>
+                        <m:t>𝑔</m:t>
+                      </m:r>
+                      <m:r>
+                        <a:rPr lang="en-US" sz="1100" b="0" i="1" dirty="0">
+                          <a:solidFill>
+                            <a:srgbClr val="B88600"/>
+                          </a:solidFill>
+                          <a:latin typeface="Cambria Math" panose="02040503050406030204" pitchFamily="18" charset="0"/>
+                        </a:rPr>
+                        <m:t> ∗ </m:t>
+                      </m:r>
+                      <m:r>
+                        <a:rPr lang="en-US" sz="1100" b="0" i="1" dirty="0">
+                          <a:solidFill>
+                            <a:srgbClr val="B88600"/>
+                          </a:solidFill>
+                          <a:latin typeface="Cambria Math" panose="02040503050406030204" pitchFamily="18" charset="0"/>
+                        </a:rPr>
+                        <m:t>𝑑𝑒𝑙𝑡𝑎</m:t>
+                      </m:r>
+                    </m:oMath>
+                  </m:oMathPara>
+                </a14:m>
+              </a:p>
+            </p:txBody>
+          </p:sp>
+        </mc:Choice>
+        <mc:Fallback>
+          <p:sp>
+            <p:nvSpPr>
+              <p:cNvPr id="28" name="TextBox 27"/>
+              <p:cNvSpPr txBox="1">
+                <a:spLocks noRot="1" noChangeAspect="1" noMove="1" noResize="1" noEditPoints="1" noAdjustHandles="1" noChangeArrowheads="1" noChangeShapeType="1" noTextEdit="1"/>
+              </p:cNvSpPr>
+              <p:nvPr/>
+            </p:nvSpPr>
+            <p:spPr>
+              <a:xfrm>
+                <a:off x="6172200" y="3429000"/>
+                <a:ext cx="5486400" cy="600164"/>
+              </a:xfrm>
+              <a:prstGeom prst="rect">
+                <a:avLst/>
+              </a:prstGeom>
+              <a:blipFill>
+                <a:blip r:embed="rId6"/>
+                <a:stretch>
+                  <a:fillRect b="-6250"/>
+                </a:stretch>
+              </a:blipFill>
+            </p:spPr>
+            <p:txBody>
+              <a:bodyPr/>
+              <a:lstStyle/>
+              <a:p>
+                <a:r>
+                  <a:rPr lang="en-US">
+                    <a:noFill/>
+                  </a:rPr>
+                  <a:t> </a:t>
+                </a:r>
+              </a:p>
+            </p:txBody>
+          </p:sp>
+        </mc:Fallback>
+      </mc:AlternateContent>
       <p:sp>
         <p:nvSpPr>
           <p:cNvPr id="29" name="TextBox 28"/>
@@ -7961,7 +9564,7 @@
             <a:r>
               <a:rPr sz="1050" dirty="0">
                 <a:solidFill>
-                  <a:srgbClr val="88FFAA"/>
+                  <a:srgbClr val="00B050"/>
                 </a:solidFill>
               </a:rPr>
               <a:t>GR-Add MMF        1.495     4.250     2.872  &lt;-- best</a:t>
@@ -8243,9 +9846,9 @@
           <a:p>
             <a:pPr algn="l"/>
             <a:r>
-              <a:rPr sz="1050">
-                <a:solidFill>
-                  <a:srgbClr val="88FFAA"/>
+              <a:rPr sz="1050" dirty="0">
+                <a:solidFill>
+                  <a:srgbClr val="00B050"/>
                 </a:solidFill>
               </a:rPr>
               <a:t>GR-Add MMF        1.484     3.684     2.584  &lt;-- best</a:t>
@@ -8963,7 +10566,7 @@
         <p:spPr>
           <a:xfrm>
             <a:off x="7909560" y="3218688"/>
-            <a:ext cx="3794760" cy="365760"/>
+            <a:ext cx="3794760" cy="253916"/>
           </a:xfrm>
           <a:prstGeom prst="rect">
             <a:avLst/>
@@ -8978,9 +10581,9 @@
           <a:p>
             <a:pPr algn="l"/>
             <a:r>
-              <a:rPr sz="1050">
-                <a:solidFill>
-                  <a:srgbClr val="88FFAA"/>
+              <a:rPr sz="1050" dirty="0">
+                <a:solidFill>
+                  <a:srgbClr val="00B050"/>
                 </a:solidFill>
               </a:rPr>
               <a:t>GR-Add MMF       2.58</a:t>
@@ -9616,7 +11219,7 @@
         <p:spPr>
           <a:xfrm>
             <a:off x="502920" y="2670048"/>
-            <a:ext cx="5120640" cy="274320"/>
+            <a:ext cx="5120640" cy="238527"/>
           </a:xfrm>
           <a:prstGeom prst="rect">
             <a:avLst/>
@@ -9633,7 +11236,7 @@
             <a:r>
               <a:rPr sz="950">
                 <a:solidFill>
-                  <a:srgbClr val="88FFAA"/>
+                  <a:srgbClr val="00B050"/>
                 </a:solidFill>
               </a:rPr>
               <a:t>JPN       16%     16    0.123    0.006   +94.9%</a:t>
@@ -9650,7 +11253,7 @@
         <p:spPr>
           <a:xfrm>
             <a:off x="502920" y="3008376"/>
-            <a:ext cx="5120640" cy="274320"/>
+            <a:ext cx="5120640" cy="238527"/>
           </a:xfrm>
           <a:prstGeom prst="rect">
             <a:avLst/>
@@ -9667,7 +11270,7 @@
             <a:r>
               <a:rPr sz="950">
                 <a:solidFill>
-                  <a:srgbClr val="88FFAA"/>
+                  <a:srgbClr val="00B050"/>
                 </a:solidFill>
               </a:rPr>
               <a:t>KAZ       11%     17    0.650    0.426   +34.4%</a:t>
@@ -10002,7 +11605,7 @@
         <p:spPr>
           <a:xfrm>
             <a:off x="6355080" y="2670048"/>
-            <a:ext cx="5303520" cy="274320"/>
+            <a:ext cx="5303520" cy="238527"/>
           </a:xfrm>
           <a:prstGeom prst="rect">
             <a:avLst/>
@@ -10017,9 +11620,9 @@
           <a:p>
             <a:pPr algn="l"/>
             <a:r>
-              <a:rPr sz="950">
-                <a:solidFill>
-                  <a:srgbClr val="88FFAA"/>
+              <a:rPr sz="950" dirty="0">
+                <a:solidFill>
+                  <a:srgbClr val="00B050"/>
                 </a:solidFill>
               </a:rPr>
               <a:t>UZB       63%      7    0.310    0.153   +50.4%</a:t>
@@ -10036,7 +11639,7 @@
         <p:spPr>
           <a:xfrm>
             <a:off x="6355080" y="3008376"/>
-            <a:ext cx="5303520" cy="274320"/>
+            <a:ext cx="5303520" cy="238527"/>
           </a:xfrm>
           <a:prstGeom prst="rect">
             <a:avLst/>
@@ -10051,9 +11654,9 @@
           <a:p>
             <a:pPr algn="l"/>
             <a:r>
-              <a:rPr sz="950">
-                <a:solidFill>
-                  <a:srgbClr val="88FFAA"/>
+              <a:rPr sz="950" dirty="0">
+                <a:solidFill>
+                  <a:srgbClr val="00B050"/>
                 </a:solidFill>
               </a:rPr>
               <a:t>KGZ       53%      9    1.168    0.881   +24.6%</a:t>
@@ -10070,7 +11673,7 @@
         <p:spPr>
           <a:xfrm>
             <a:off x="6355080" y="3346704"/>
-            <a:ext cx="5303520" cy="274320"/>
+            <a:ext cx="5303520" cy="238527"/>
           </a:xfrm>
           <a:prstGeom prst="rect">
             <a:avLst/>
@@ -10085,9 +11688,9 @@
           <a:p>
             <a:pPr algn="l"/>
             <a:r>
-              <a:rPr sz="950">
-                <a:solidFill>
-                  <a:srgbClr val="88FFAA"/>
+              <a:rPr sz="950" dirty="0">
+                <a:solidFill>
+                  <a:srgbClr val="00B050"/>
                 </a:solidFill>
               </a:rPr>
               <a:t>ARM       53%      9    1.297    1.232    +5.0%</a:t>
@@ -10104,7 +11707,7 @@
         <p:spPr>
           <a:xfrm>
             <a:off x="6355080" y="3685031"/>
-            <a:ext cx="5303520" cy="274320"/>
+            <a:ext cx="5303520" cy="238527"/>
           </a:xfrm>
           <a:prstGeom prst="rect">
             <a:avLst/>
@@ -10121,7 +11724,7 @@
             <a:r>
               <a:rPr sz="950">
                 <a:solidFill>
-                  <a:srgbClr val="88FFAA"/>
+                  <a:srgbClr val="00B050"/>
                 </a:solidFill>
               </a:rPr>
               <a:t>GEO       68%      6    1.054    0.956    +9.2%</a:t>
@@ -10138,7 +11741,7 @@
         <p:spPr>
           <a:xfrm>
             <a:off x="6355080" y="4023360"/>
-            <a:ext cx="5303520" cy="274320"/>
+            <a:ext cx="5303520" cy="238527"/>
           </a:xfrm>
           <a:prstGeom prst="rect">
             <a:avLst/>
@@ -10155,7 +11758,7 @@
             <a:r>
               <a:rPr sz="950">
                 <a:solidFill>
-                  <a:srgbClr val="88FFAA"/>
+                  <a:srgbClr val="00B050"/>
                 </a:solidFill>
               </a:rPr>
               <a:t>UKR       63%      7   11.359   11.163    +1.7%</a:t>

--- a/research/ppt/progress_week2.pptx
+++ b/research/ppt/progress_week2.pptx
@@ -158,7 +158,7 @@
     </p:spTree>
     <p:extLst>
       <p:ext uri="{BB962C8B-B14F-4D97-AF65-F5344CB8AC3E}">
-        <p14:creationId xmlns:p14="http://schemas.microsoft.com/office/powerpoint/2010/main" val="3737455997"/>
+        <p14:creationId xmlns:p14="http://schemas.microsoft.com/office/powerpoint/2010/main" val="2296074623"/>
       </p:ext>
     </p:extLst>
   </p:cSld>
@@ -475,7 +475,7 @@
           </a:p>
           <a:p>
             <a:r>
-              <a:t>GR-Add MMF is the full multimodal model. The RecAvg TTF module aggregates past Article IV embeddings using a Gaussian kernel, weighting by distance from the query year with sigma=1.0 year. The GR-Add fusion layer then combines the GRU hidden state with the text context via a gated residual: the sigmoid gate decides how much of the tanh delta to add. When text is absent, the gate collapses to zero and the model is equivalent to NumericalGRU.</a:t>
+              <a:t>GR-Add MMF is the full multimodal model. The RecAvg TTF module aggregates past Article IV embeddings using a Gaussian kernel (paper eq. 6: exp(-((t-tau)/sigma)^2)), weighting by distance from the query year with sigma=1.0. A separate fusion GRU then ingests z=[y_ts; e] — the concatenation of the base numerical forecast and the text context vector — following paper eq. 12-13. The linear correction delta = W_delta * H is gated by G = sigmoid(W_g * z), blending base and text-corrected forecasts per eq. 16: y_out = G*y_ts + (1-G)*(y_ts+delta). When text is absent (e=0), delta and G become functions of y_ts alone.</a:t>
             </a:r>
           </a:p>
         </p:txBody>
@@ -778,7 +778,7 @@
           </a:p>
           <a:p>
             <a:r>
-              <a:t>All three models beat persistence by roughly 97-98%, which shows the numerical WDI data alone is highly informative. The gain from adding text (GR-Add over NumericalGRU) is an additional 9.2% reduction on top of that.</a:t>
+              <a:t>All three models beat persistence by roughly 97-98%, which shows the numerical WDI data alone is highly informative. The gain from adding text (GR-Add over NumericalGRU) is an additional 6.9% reduction in inflation MSE on top of that.</a:t>
             </a:r>
           </a:p>
           <a:p>
@@ -856,39 +856,71 @@
           <a:lstStyle/>
           <a:p>
             <a:r>
-              <a:t>The secondary analysis asks whether text helps more for countries with fewer reports.</a:t>
-            </a:r>
-          </a:p>
-          <a:p>
-            <a:endParaRPr/>
-          </a:p>
-          <a:p>
-            <a:r>
-              <a:t>Median text missingness is 37%. Countries above the median (UZB 63%, KGZ 53%, ARM 53%, GEO 68%, UKR 63%) show positive gains in 5 of 6 cases — GR-Add beats NumericalGRU, sometimes dramatically (UZB +50%, KGZ +25%).</a:t>
-            </a:r>
-          </a:p>
-          <a:p>
-            <a:endParaRPr/>
-          </a:p>
-          <a:p>
-            <a:r>
-              <a:t>Low-missingness countries are more mixed: JPN (+95%) and KAZ (+34%) benefit strongly, but well-covered EU-adjacent economies (BGR, ROU, HRV) where numerical data alone is highly predictive show degradation when text is added — the gate adds noise.</a:t>
-            </a:r>
-          </a:p>
-          <a:p>
-            <a:endParaRPr/>
-          </a:p>
-          <a:p>
-            <a:r>
-              <a:t>USA is a notable outlier: 19/19 text coverage but GR-Add hurts significantly. The US economy is so well-studied numerically that the IMF text adds little incremental signal.</a:t>
-            </a:r>
-          </a:p>
-          <a:p>
-            <a:endParaRPr/>
-          </a:p>
-          <a:p>
-            <a:r>
-              <a:t>With BERT embeddings this stratified pattern did not exist, confirming that full-context embeddings are necessary to extract the text signal.</a:t>
+              <a:rPr dirty="0"/>
+              <a:t>Two distinct definitions of 'gappy' give opposite answers.</a:t>
+            </a:r>
+          </a:p>
+          <a:p>
+            <a:endParaRPr dirty="0"/>
+          </a:p>
+          <a:p>
+            <a:r>
+              <a:rPr dirty="0"/>
+              <a:t>Definition 1 — WDI numerical missingness (from </a:t>
+            </a:r>
+            <a:r>
+              <a:rPr dirty="0" err="1"/>
+              <a:t>evaluate.py</a:t>
+            </a:r>
+            <a:r>
+              <a:rPr dirty="0"/>
+              <a:t>):</a:t>
+            </a:r>
+          </a:p>
+          <a:p>
+            <a:r>
+              <a:rPr dirty="0"/>
+              <a:t>Samples are split at the median WDI mask fill rate. HIGH-miss samples (sparse WDI data) show a +9.4% GR-Add improvement over </a:t>
+            </a:r>
+            <a:r>
+              <a:rPr dirty="0" err="1"/>
+              <a:t>DLinear</a:t>
+            </a:r>
+            <a:r>
+              <a:rPr dirty="0"/>
+              <a:t>, while LOW-miss samples (complete WDI data) show a -0.8% change. The hypothesis is confirmed: when numerical indicators are missing, text from Article IV reports compensates and improves accuracy.</a:t>
+            </a:r>
+          </a:p>
+          <a:p>
+            <a:endParaRPr dirty="0"/>
+          </a:p>
+          <a:p>
+            <a:r>
+              <a:rPr dirty="0"/>
+              <a:t>Definition 2 — Article IV text coverage (from </a:t>
+            </a:r>
+            <a:r>
+              <a:rPr dirty="0" err="1"/>
+              <a:t>stratified_analysis.py</a:t>
+            </a:r>
+            <a:r>
+              <a:rPr dirty="0"/>
+              <a:t>):</a:t>
+            </a:r>
+          </a:p>
+          <a:p>
+            <a:r>
+              <a:rPr dirty="0"/>
+              <a:t>Median text missingness is 36.8%. Only 3/6 HIGH-miss countries benefit from GR-Add (UZB +38.8%, UKR +6.5%, SRB +7.3%) vs 4/6 LOW-miss (JPN +86.3%, KAZ +45.5%). The hypothesis is NOT confirmed for text coverage gaps. The biggest gains are in anchor economies with rich text, not in data-sparse countries.</a:t>
+            </a:r>
+          </a:p>
+          <a:p>
+            <a:endParaRPr dirty="0"/>
+          </a:p>
+          <a:p>
+            <a:r>
+              <a:rPr dirty="0"/>
+              <a:t>Key insight: the two definitions are independent. A country can have good WDI coverage but few Article IV reports (e.g. TKM), or vice versa. The WDI gap is the more direct test of the hypothesis — and it confirms that text fills the numerical data gap.</a:t>
             </a:r>
           </a:p>
         </p:txBody>
@@ -958,40 +990,221 @@
           <a:lstStyle/>
           <a:p>
             <a:r>
+              <a:rPr dirty="0"/>
               <a:t>Summary of key findings:</a:t>
             </a:r>
           </a:p>
           <a:p>
-            <a:endParaRPr/>
-          </a:p>
-          <a:p>
-            <a:r>
-              <a:t>1. GR-Add MMF with OpenAI text-embedding-3-small and real publication dates achieves the best test MSE at 2.584. The advantage is concentrated in inflation forecasting, which aligns with the content of Article IV reports — they explicitly discuss price pressures, monetary policy, and exchange rate dynamics.</a:t>
-            </a:r>
-          </a:p>
-          <a:p>
-            <a:endParaRPr/>
-          </a:p>
-          <a:p>
-            <a:r>
-              <a:t>2. All models dramatically outperform the persistence baseline (105.44). The bulk of the gain comes from the numerical WDI panel. Text adds an incremental but meaningful improvement on top.</a:t>
-            </a:r>
-          </a:p>
-          <a:p>
-            <a:endParaRPr/>
-          </a:p>
-          <a:p>
-            <a:r>
-              <a:t>3. The stratified analysis confirms the hypothesis that text helps most where it is scarce. For countries with thin Article IV coverage, the IMF text compensates for sparse numerical signals.</a:t>
-            </a:r>
-          </a:p>
-          <a:p>
-            <a:endParaRPr/>
-          </a:p>
-          <a:p>
-            <a:r>
+            <a:endParaRPr dirty="0"/>
+          </a:p>
+          <a:p>
+            <a:r>
+              <a:rPr dirty="0"/>
+              <a:t>1. GR-Add MMF with OpenAI text-embedding-3-small and real publication dates achieves the best test MSE at 2.678. The advantage is concentrated in inflation forecasting (3.909 vs 4.198 for </a:t>
+            </a:r>
+            <a:r>
+              <a:rPr dirty="0" err="1"/>
+              <a:t>NumericalGRU</a:t>
+            </a:r>
+            <a:r>
+              <a:rPr dirty="0"/>
+              <a:t>, a 6.9% reduction), which aligns with the content of Article IV reports — they explicitly discuss price pressures, monetary policy, and exchange rate dynamics.</a:t>
+            </a:r>
+          </a:p>
+          <a:p>
+            <a:endParaRPr dirty="0"/>
+          </a:p>
+          <a:p>
+            <a:r>
+              <a:rPr dirty="0"/>
+              <a:t>2. All models dramatically outperform the persistence baseline (105.44). The bulk of the gain comes from the numerical WDI panel. Text adds an incremental but meaningful improvement on top (6.9% in inflation MSE).</a:t>
+            </a:r>
+          </a:p>
+          <a:p>
+            <a:endParaRPr dirty="0"/>
+          </a:p>
+          <a:p>
+            <a:r>
+              <a:rPr dirty="0"/>
+              <a:t>3. The answer depends on how you define 'gappy'. When stratifying by WDI numerical missingness (</a:t>
+            </a:r>
+            <a:r>
+              <a:rPr dirty="0" err="1"/>
+              <a:t>evaluate.py</a:t>
+            </a:r>
+            <a:r>
+              <a:rPr dirty="0"/>
+              <a:t>), HIGH-miss samples show +9.4% GR-Add improvement over </a:t>
+            </a:r>
+            <a:r>
+              <a:rPr dirty="0" err="1"/>
+              <a:t>DLinear</a:t>
+            </a:r>
+            <a:r>
+              <a:rPr dirty="0"/>
+              <a:t> while LOW-miss samples show -0.8% — the hypothesis is confirmed. When stratifying by Article IV text coverage (</a:t>
+            </a:r>
+            <a:r>
+              <a:rPr dirty="0" err="1"/>
+              <a:t>stratified_analysis.py</a:t>
+            </a:r>
+            <a:r>
+              <a:rPr dirty="0"/>
+              <a:t>), results are mixed (4/6 LOW-miss positive vs 3/6 HIGH-miss positive). Text compensates for missing WDI indicators but does not compensate for missing reports — these are two different mechanisms.</a:t>
+            </a:r>
+          </a:p>
+          <a:p>
+            <a:endParaRPr dirty="0"/>
+          </a:p>
+          <a:p>
+            <a:r>
+              <a:rPr dirty="0"/>
               <a:t>4. The dataset is small. With only 2 test observations per country, conclusions must be interpreted carefully. The empirical patterns are consistent across experiments but require a larger dataset to be statistically conclusive.</a:t>
             </a:r>
+            <a:endParaRPr lang="en-US" dirty="0"/>
+          </a:p>
+          <a:p>
+            <a:endParaRPr lang="en-US" dirty="0"/>
+          </a:p>
+          <a:p>
+            <a:endParaRPr lang="en-US" dirty="0"/>
+          </a:p>
+          <a:p>
+            <a:r>
+              <a:rPr lang="en-US" dirty="0"/>
+              <a:t>Point 4 --  It depends on the comparison point.                                                                                                                                          </a:t>
+            </a:r>
+          </a:p>
+          <a:p>
+            <a:r>
+              <a:rPr lang="en-US" dirty="0"/>
+              <a:t>                                                                                                                                                                               </a:t>
+            </a:r>
+          </a:p>
+          <a:p>
+            <a:r>
+              <a:rPr lang="en-US" dirty="0"/>
+              <a:t>  By machine learning standards — yes, small. 102 training samples is tiny for neural networks. The architecture choices reflect this: </a:t>
+            </a:r>
+            <a:r>
+              <a:rPr lang="en-US" dirty="0" err="1"/>
+              <a:t>RecAvg</a:t>
+            </a:r>
+            <a:r>
+              <a:rPr lang="en-US" dirty="0"/>
+              <a:t> TTF has zero learnable parameters</a:t>
+            </a:r>
+          </a:p>
+          <a:p>
+            <a:r>
+              <a:rPr lang="en-US" dirty="0"/>
+              <a:t>   specifically to avoid overfitting on text, and the GRU hidden dimension is capped at 64. </a:t>
+            </a:r>
+            <a:r>
+              <a:rPr lang="en-US" dirty="0" err="1"/>
+              <a:t>NumericalGRU's</a:t>
+            </a:r>
+            <a:r>
+              <a:rPr lang="en-US" dirty="0"/>
+              <a:t> </a:t>
+            </a:r>
+            <a:r>
+              <a:rPr lang="en-US" dirty="0" err="1"/>
+              <a:t>generalisation</a:t>
+            </a:r>
+            <a:r>
+              <a:rPr lang="en-US" dirty="0"/>
+              <a:t> gap (better </a:t>
+            </a:r>
+            <a:r>
+              <a:rPr lang="en-US" dirty="0" err="1"/>
+              <a:t>val</a:t>
+            </a:r>
+            <a:r>
+              <a:rPr lang="en-US" dirty="0"/>
+              <a:t>, worse test than </a:t>
+            </a:r>
+            <a:r>
+              <a:rPr lang="en-US" dirty="0" err="1"/>
+              <a:t>DLinear</a:t>
+            </a:r>
+            <a:r>
+              <a:rPr lang="en-US" dirty="0"/>
+              <a:t>) is a direct</a:t>
+            </a:r>
+          </a:p>
+          <a:p>
+            <a:r>
+              <a:rPr lang="en-US" dirty="0"/>
+              <a:t>   symptom of the small sample.                                                                                                                                                </a:t>
+            </a:r>
+          </a:p>
+          <a:p>
+            <a:r>
+              <a:rPr lang="en-US" dirty="0"/>
+              <a:t>                                                                                                                                                                               </a:t>
+            </a:r>
+          </a:p>
+          <a:p>
+            <a:r>
+              <a:rPr lang="en-US" dirty="0"/>
+              <a:t>  By macroeconomic panel forecasting standards — not particularly. IMF working papers and World Bank studies routinely use panels of 15–30 countries over 10–20 years. 22      </a:t>
+            </a:r>
+          </a:p>
+          <a:p>
+            <a:r>
+              <a:rPr lang="en-US" dirty="0"/>
+              <a:t>  countries × 19 years is a standard-sized panel in that literature. The models also aren't being asked to learn from scratch — WDI indicators are well-structured, low-noise  </a:t>
+            </a:r>
+          </a:p>
+          <a:p>
+            <a:r>
+              <a:rPr lang="en-US" dirty="0"/>
+              <a:t>  inputs.                                                                                                                                                                      </a:t>
+            </a:r>
+          </a:p>
+          <a:p>
+            <a:r>
+              <a:rPr lang="en-US" dirty="0"/>
+              <a:t>                                                            </a:t>
+            </a:r>
+          </a:p>
+          <a:p>
+            <a:r>
+              <a:rPr lang="en-US" dirty="0"/>
+              <a:t>  The real constraint is the test set. 40 test samples, 2 per country, is the actual problem. With 2 observations per country you can't make statistically confident           </a:t>
+            </a:r>
+          </a:p>
+          <a:p>
+            <a:r>
+              <a:rPr lang="en-US" dirty="0"/>
+              <a:t>  per-country claims — one unusual year (e.g. TUR 2022 with 80% inflation) dominates that country's MSE entirely. The overall test metrics are directionally meaningful but the</a:t>
+            </a:r>
+          </a:p>
+          <a:p>
+            <a:r>
+              <a:rPr lang="en-US" dirty="0"/>
+              <a:t>   variance is high.                                                                                                                                                           </a:t>
+            </a:r>
+          </a:p>
+          <a:p>
+            <a:r>
+              <a:rPr lang="en-US" dirty="0"/>
+              <a:t>                                                            </a:t>
+            </a:r>
+          </a:p>
+          <a:p>
+            <a:r>
+              <a:rPr lang="en-US" dirty="0"/>
+              <a:t>  So the more precise framing for the slides — which is already in Finding #4 — is: not that the dataset is small in absolute terms, but that 2 test years per country limits  </a:t>
+            </a:r>
+          </a:p>
+          <a:p>
+            <a:r>
+              <a:rPr lang="en-US" dirty="0"/>
+              <a:t>  statistical conclusiveness. That's a more specific and defensible statement than just calling it "small."</a:t>
+            </a:r>
+            <a:endParaRPr dirty="0"/>
           </a:p>
         </p:txBody>
       </p:sp>
@@ -1194,7 +1407,7 @@
           <a:p>
             <a:fld id="{5BCAD085-E8A6-8845-BD4E-CB4CCA059FC4}" type="datetimeFigureOut">
               <a:rPr lang="en-US" smtClean="0"/>
-              <a:t>4/15/26</a:t>
+              <a:t>4/16/26</a:t>
             </a:fld>
             <a:endParaRPr lang="en-US"/>
           </a:p>
@@ -1362,7 +1575,7 @@
           <a:p>
             <a:fld id="{5BCAD085-E8A6-8845-BD4E-CB4CCA059FC4}" type="datetimeFigureOut">
               <a:rPr lang="en-US" smtClean="0"/>
-              <a:t>4/15/26</a:t>
+              <a:t>4/16/26</a:t>
             </a:fld>
             <a:endParaRPr lang="en-US"/>
           </a:p>
@@ -1540,7 +1753,7 @@
           <a:p>
             <a:fld id="{5BCAD085-E8A6-8845-BD4E-CB4CCA059FC4}" type="datetimeFigureOut">
               <a:rPr lang="en-US" smtClean="0"/>
-              <a:t>4/15/26</a:t>
+              <a:t>4/16/26</a:t>
             </a:fld>
             <a:endParaRPr lang="en-US"/>
           </a:p>
@@ -1708,7 +1921,7 @@
           <a:p>
             <a:fld id="{5BCAD085-E8A6-8845-BD4E-CB4CCA059FC4}" type="datetimeFigureOut">
               <a:rPr lang="en-US" smtClean="0"/>
-              <a:t>4/15/26</a:t>
+              <a:t>4/16/26</a:t>
             </a:fld>
             <a:endParaRPr lang="en-US"/>
           </a:p>
@@ -1953,7 +2166,7 @@
           <a:p>
             <a:fld id="{5BCAD085-E8A6-8845-BD4E-CB4CCA059FC4}" type="datetimeFigureOut">
               <a:rPr lang="en-US" smtClean="0"/>
-              <a:t>4/15/26</a:t>
+              <a:t>4/16/26</a:t>
             </a:fld>
             <a:endParaRPr lang="en-US"/>
           </a:p>
@@ -2238,7 +2451,7 @@
           <a:p>
             <a:fld id="{5BCAD085-E8A6-8845-BD4E-CB4CCA059FC4}" type="datetimeFigureOut">
               <a:rPr lang="en-US" smtClean="0"/>
-              <a:t>4/15/26</a:t>
+              <a:t>4/16/26</a:t>
             </a:fld>
             <a:endParaRPr lang="en-US"/>
           </a:p>
@@ -2657,7 +2870,7 @@
           <a:p>
             <a:fld id="{5BCAD085-E8A6-8845-BD4E-CB4CCA059FC4}" type="datetimeFigureOut">
               <a:rPr lang="en-US" smtClean="0"/>
-              <a:t>4/15/26</a:t>
+              <a:t>4/16/26</a:t>
             </a:fld>
             <a:endParaRPr lang="en-US"/>
           </a:p>
@@ -2774,7 +2987,7 @@
           <a:p>
             <a:fld id="{5BCAD085-E8A6-8845-BD4E-CB4CCA059FC4}" type="datetimeFigureOut">
               <a:rPr lang="en-US" smtClean="0"/>
-              <a:t>4/15/26</a:t>
+              <a:t>4/16/26</a:t>
             </a:fld>
             <a:endParaRPr lang="en-US"/>
           </a:p>
@@ -2869,7 +3082,7 @@
           <a:p>
             <a:fld id="{5BCAD085-E8A6-8845-BD4E-CB4CCA059FC4}" type="datetimeFigureOut">
               <a:rPr lang="en-US" smtClean="0"/>
-              <a:t>4/15/26</a:t>
+              <a:t>4/16/26</a:t>
             </a:fld>
             <a:endParaRPr lang="en-US"/>
           </a:p>
@@ -3144,7 +3357,7 @@
           <a:p>
             <a:fld id="{5BCAD085-E8A6-8845-BD4E-CB4CCA059FC4}" type="datetimeFigureOut">
               <a:rPr lang="en-US" smtClean="0"/>
-              <a:t>4/15/26</a:t>
+              <a:t>4/16/26</a:t>
             </a:fld>
             <a:endParaRPr lang="en-US"/>
           </a:p>
@@ -3396,7 +3609,7 @@
           <a:p>
             <a:fld id="{5BCAD085-E8A6-8845-BD4E-CB4CCA059FC4}" type="datetimeFigureOut">
               <a:rPr lang="en-US" smtClean="0"/>
-              <a:t>4/15/26</a:t>
+              <a:t>4/16/26</a:t>
             </a:fld>
             <a:endParaRPr lang="en-US"/>
           </a:p>
@@ -3607,7 +3820,7 @@
           <a:p>
             <a:fld id="{5BCAD085-E8A6-8845-BD4E-CB4CCA059FC4}" type="datetimeFigureOut">
               <a:rPr lang="en-US" smtClean="0"/>
-              <a:t>4/15/26</a:t>
+              <a:t>4/16/26</a:t>
             </a:fld>
             <a:endParaRPr lang="en-US"/>
           </a:p>
@@ -4581,7 +4794,7 @@
                   <a:srgbClr val="2D4A7A"/>
                 </a:solidFill>
               </a:rPr>
-              <a:t>98%</a:t>
+              <a:t>97%</a:t>
             </a:r>
           </a:p>
         </p:txBody>
@@ -5522,7 +5735,7 @@
         </p:nvSpPr>
         <p:spPr>
           <a:xfrm>
-            <a:off x="-127" y="0"/>
+            <a:off x="0" y="0"/>
             <a:ext cx="12188952" cy="6858000"/>
           </a:xfrm>
           <a:prstGeom prst="rect">
@@ -6164,7 +6377,7 @@
                   <a:srgbClr val="222A3A"/>
                 </a:solidFill>
               </a:rPr>
-              <a:t>Unimodal — numerical only.  284 parameters.</a:t>
+              <a:t>Unimodal — numerical only.  664 parameters.</a:t>
             </a:r>
           </a:p>
         </p:txBody>
@@ -6372,7 +6585,7 @@
                         </m:e>
                         <m:sub>
                           <m:r>
-                            <a:rPr lang="en-US" sz="1100" b="0" i="1" dirty="0" err="1">
+                            <a:rPr lang="en-US" sz="1100" b="0" i="1" dirty="0" smtClean="0">
                               <a:solidFill>
                                 <a:srgbClr val="B88600"/>
                               </a:solidFill>
@@ -6489,6 +6702,58 @@
                                       <a:latin typeface="Cambria Math" panose="02040503050406030204" pitchFamily="18" charset="0"/>
                                     </a:rPr>
                                     <m:t>𝑚</m:t>
+                                  </m:r>
+                                </m:e>
+                                <m:sub>
+                                  <m:r>
+                                    <a:rPr lang="en-US" sz="1100" b="0" i="1" dirty="0" err="1">
+                                      <a:solidFill>
+                                        <a:srgbClr val="B88600"/>
+                                      </a:solidFill>
+                                      <a:latin typeface="Cambria Math" panose="02040503050406030204" pitchFamily="18" charset="0"/>
+                                    </a:rPr>
+                                    <m:t>𝑡</m:t>
+                                  </m:r>
+                                </m:sub>
+                              </m:sSub>
+                              <m:r>
+                                <a:rPr lang="en-US" sz="1100" b="0" i="1" dirty="0">
+                                  <a:solidFill>
+                                    <a:srgbClr val="B88600"/>
+                                  </a:solidFill>
+                                  <a:latin typeface="Cambria Math" panose="02040503050406030204" pitchFamily="18" charset="0"/>
+                                </a:rPr>
+                                <m:t>;</m:t>
+                              </m:r>
+                              <m:r>
+                                <a:rPr lang="en-US" sz="1100" b="0" i="1" dirty="0" err="1">
+                                  <a:solidFill>
+                                    <a:srgbClr val="B88600"/>
+                                  </a:solidFill>
+                                  <a:latin typeface="Cambria Math" panose="02040503050406030204" pitchFamily="18" charset="0"/>
+                                </a:rPr>
+                                <m:t>𝑡𝑎</m:t>
+                              </m:r>
+                              <m:sSub>
+                                <m:sSubPr>
+                                  <m:ctrlPr>
+                                    <a:rPr lang="en-US" sz="1100" b="0" i="1" dirty="0" err="1">
+                                      <a:solidFill>
+                                        <a:srgbClr val="B88600"/>
+                                      </a:solidFill>
+                                      <a:latin typeface="Cambria Math" panose="02040503050406030204" pitchFamily="18" charset="0"/>
+                                    </a:rPr>
+                                  </m:ctrlPr>
+                                </m:sSubPr>
+                                <m:e>
+                                  <m:r>
+                                    <a:rPr lang="en-US" sz="1100" b="0" i="1" dirty="0" err="1">
+                                      <a:solidFill>
+                                        <a:srgbClr val="B88600"/>
+                                      </a:solidFill>
+                                      <a:latin typeface="Cambria Math" panose="02040503050406030204" pitchFamily="18" charset="0"/>
+                                    </a:rPr>
+                                    <m:t>𝑢</m:t>
                                   </m:r>
                                 </m:e>
                                 <m:sub>
@@ -6738,7 +7003,7 @@
                   <a:srgbClr val="222A3A"/>
                 </a:solidFill>
               </a:rPr>
-              <a:t>GRU over masked WDI series. Receives values + mask concatenated.</a:t>
+              <a:t>GRU over pre-aligned series (values + mask + timestamp, T+1 steps).</a:t>
             </a:r>
           </a:p>
           <a:p>
@@ -6749,7 +7014,7 @@
                   <a:srgbClr val="222A3A"/>
                 </a:solidFill>
               </a:rPr>
-              <a:t>Unimodal ablation.  15,490 parameters.</a:t>
+              <a:t>Unimodal ablation.  15,682 parameters.</a:t>
             </a:r>
           </a:p>
         </p:txBody>
@@ -6912,8 +7177,8 @@
             </p:nvSpPr>
             <p:spPr>
               <a:xfrm>
-                <a:off x="989154" y="3569612"/>
-                <a:ext cx="4056731" cy="430887"/>
+                <a:off x="1049887" y="3621023"/>
+                <a:ext cx="3935265" cy="517321"/>
               </a:xfrm>
               <a:prstGeom prst="rect">
                 <a:avLst/>
@@ -7312,14 +7577,83 @@
                                       </m:ctrlPr>
                                     </m:dPr>
                                     <m:e>
+                                      <m:d>
+                                        <m:dPr>
+                                          <m:ctrlPr>
+                                            <a:rPr lang="en-US" sz="1100" b="0" i="1" dirty="0">
+                                              <a:solidFill>
+                                                <a:srgbClr val="B88600"/>
+                                              </a:solidFill>
+                                              <a:latin typeface="Cambria Math" panose="02040503050406030204" pitchFamily="18" charset="0"/>
+                                            </a:rPr>
+                                          </m:ctrlPr>
+                                        </m:dPr>
+                                        <m:e>
+                                          <m:r>
+                                            <a:rPr lang="en-US" sz="1100" b="0" i="1" dirty="0">
+                                              <a:solidFill>
+                                                <a:srgbClr val="B88600"/>
+                                              </a:solidFill>
+                                              <a:latin typeface="Cambria Math" panose="02040503050406030204" pitchFamily="18" charset="0"/>
+                                            </a:rPr>
+                                            <m:t>𝑡</m:t>
+                                          </m:r>
+                                          <m:r>
+                                            <a:rPr lang="en-US" sz="1100" b="0" i="1" dirty="0">
+                                              <a:solidFill>
+                                                <a:srgbClr val="B88600"/>
+                                              </a:solidFill>
+                                              <a:latin typeface="Cambria Math" panose="02040503050406030204" pitchFamily="18" charset="0"/>
+                                            </a:rPr>
+                                            <m:t>∗−</m:t>
+                                          </m:r>
+                                          <m:sSub>
+                                            <m:sSubPr>
+                                              <m:ctrlPr>
+                                                <a:rPr lang="en-US" sz="1100" b="0" i="1" dirty="0" err="1">
+                                                  <a:solidFill>
+                                                    <a:srgbClr val="B88600"/>
+                                                  </a:solidFill>
+                                                  <a:latin typeface="Cambria Math" panose="02040503050406030204" pitchFamily="18" charset="0"/>
+                                                </a:rPr>
+                                              </m:ctrlPr>
+                                            </m:sSubPr>
+                                            <m:e>
+                                              <m:r>
+                                                <a:rPr lang="en-US" sz="1100" b="0" i="1" dirty="0" err="1">
+                                                  <a:solidFill>
+                                                    <a:srgbClr val="B88600"/>
+                                                  </a:solidFill>
+                                                  <a:latin typeface="Cambria Math" panose="02040503050406030204" pitchFamily="18" charset="0"/>
+                                                </a:rPr>
+                                                <m:t>𝑡</m:t>
+                                              </m:r>
+                                            </m:e>
+                                            <m:sub>
+                                              <m:r>
+                                                <a:rPr lang="en-US" sz="1100" b="0" i="1" dirty="0" err="1">
+                                                  <a:solidFill>
+                                                    <a:srgbClr val="B88600"/>
+                                                  </a:solidFill>
+                                                  <a:latin typeface="Cambria Math" panose="02040503050406030204" pitchFamily="18" charset="0"/>
+                                                </a:rPr>
+                                                <m:t>𝑖</m:t>
+                                              </m:r>
+                                            </m:sub>
+                                          </m:sSub>
+                                        </m:e>
+                                      </m:d>
                                       <m:r>
+                                        <m:rPr>
+                                          <m:lit/>
+                                        </m:rPr>
                                         <a:rPr lang="en-US" sz="1100" b="0" i="1" dirty="0">
                                           <a:solidFill>
                                             <a:srgbClr val="B88600"/>
                                           </a:solidFill>
                                           <a:latin typeface="Cambria Math" panose="02040503050406030204" pitchFamily="18" charset="0"/>
                                         </a:rPr>
-                                        <m:t>𝑡</m:t>
+                                        <m:t>/</m:t>
                                       </m:r>
                                       <m:r>
                                         <a:rPr lang="en-US" sz="1100" b="0" i="1" dirty="0">
@@ -7328,108 +7662,10 @@
                                           </a:solidFill>
                                           <a:latin typeface="Cambria Math" panose="02040503050406030204" pitchFamily="18" charset="0"/>
                                         </a:rPr>
-                                        <m:t>∗−</m:t>
+                                        <m:t>𝑠𝑖𝑔𝑚𝑎</m:t>
                                       </m:r>
-                                      <m:sSub>
-                                        <m:sSubPr>
-                                          <m:ctrlPr>
-                                            <a:rPr lang="en-US" sz="1100" b="0" i="1" dirty="0" err="1">
-                                              <a:solidFill>
-                                                <a:srgbClr val="B88600"/>
-                                              </a:solidFill>
-                                              <a:latin typeface="Cambria Math" panose="02040503050406030204" pitchFamily="18" charset="0"/>
-                                            </a:rPr>
-                                          </m:ctrlPr>
-                                        </m:sSubPr>
-                                        <m:e>
-                                          <m:r>
-                                            <a:rPr lang="en-US" sz="1100" b="0" i="1" dirty="0" err="1">
-                                              <a:solidFill>
-                                                <a:srgbClr val="B88600"/>
-                                              </a:solidFill>
-                                              <a:latin typeface="Cambria Math" panose="02040503050406030204" pitchFamily="18" charset="0"/>
-                                            </a:rPr>
-                                            <m:t>𝑡</m:t>
-                                          </m:r>
-                                        </m:e>
-                                        <m:sub>
-                                          <m:r>
-                                            <a:rPr lang="en-US" sz="1100" b="0" i="1" dirty="0" err="1">
-                                              <a:solidFill>
-                                                <a:srgbClr val="B88600"/>
-                                              </a:solidFill>
-                                              <a:latin typeface="Cambria Math" panose="02040503050406030204" pitchFamily="18" charset="0"/>
-                                            </a:rPr>
-                                            <m:t>𝑖</m:t>
-                                          </m:r>
-                                        </m:sub>
-                                      </m:sSub>
                                     </m:e>
                                   </m:d>
-                                </m:e>
-                                <m:sup>
-                                  <m:r>
-                                    <a:rPr lang="en-US" sz="1100" b="0" i="1" dirty="0">
-                                      <a:solidFill>
-                                        <a:srgbClr val="B88600"/>
-                                      </a:solidFill>
-                                      <a:latin typeface="Cambria Math" panose="02040503050406030204" pitchFamily="18" charset="0"/>
-                                    </a:rPr>
-                                    <m:t>2</m:t>
-                                  </m:r>
-                                </m:sup>
-                              </m:sSup>
-                              <m:r>
-                                <m:rPr>
-                                  <m:lit/>
-                                </m:rPr>
-                                <a:rPr lang="en-US" sz="1100" b="0" i="1" dirty="0">
-                                  <a:solidFill>
-                                    <a:srgbClr val="B88600"/>
-                                  </a:solidFill>
-                                  <a:latin typeface="Cambria Math" panose="02040503050406030204" pitchFamily="18" charset="0"/>
-                                </a:rPr>
-                                <m:t>/</m:t>
-                              </m:r>
-                              <m:r>
-                                <a:rPr lang="en-US" sz="1100" b="0" i="1" dirty="0">
-                                  <a:solidFill>
-                                    <a:srgbClr val="B88600"/>
-                                  </a:solidFill>
-                                  <a:latin typeface="Cambria Math" panose="02040503050406030204" pitchFamily="18" charset="0"/>
-                                </a:rPr>
-                                <m:t>2∗</m:t>
-                              </m:r>
-                              <m:r>
-                                <a:rPr lang="en-US" sz="1100" b="0" i="1" dirty="0">
-                                  <a:solidFill>
-                                    <a:srgbClr val="B88600"/>
-                                  </a:solidFill>
-                                  <a:latin typeface="Cambria Math" panose="02040503050406030204" pitchFamily="18" charset="0"/>
-                                </a:rPr>
-                                <m:t>𝑠𝑖𝑔𝑚</m:t>
-                              </m:r>
-                              <m:sSup>
-                                <m:sSupPr>
-                                  <m:ctrlPr>
-                                    <a:rPr lang="en-US" sz="1100" b="0" i="1" dirty="0">
-                                      <a:solidFill>
-                                        <a:srgbClr val="B88600"/>
-                                      </a:solidFill>
-                                      <a:latin typeface="Cambria Math" panose="02040503050406030204" pitchFamily="18" charset="0"/>
-                                    </a:rPr>
-                                  </m:ctrlPr>
-                                </m:sSupPr>
-                                <m:e>
-                                  <m:r>
-                                    <a:rPr lang="en-US" sz="1100" b="0" i="1" dirty="0">
-                                      <a:solidFill>
-                                        <a:srgbClr val="B88600"/>
-                                      </a:solidFill>
-                                      <a:latin typeface="Cambria Math" panose="02040503050406030204" pitchFamily="18" charset="0"/>
-                                    </a:rPr>
-                                    <m:t>𝑎</m:t>
-                                  </m:r>
                                 </m:e>
                                 <m:sup>
                                   <m:r>
@@ -7492,8 +7728,8 @@
             </p:nvSpPr>
             <p:spPr>
               <a:xfrm>
-                <a:off x="989154" y="3569612"/>
-                <a:ext cx="4056731" cy="430887"/>
+                <a:off x="1049887" y="3621023"/>
+                <a:ext cx="3935265" cy="517321"/>
               </a:xfrm>
               <a:prstGeom prst="rect">
                 <a:avLst/>
@@ -7501,7 +7737,7 @@
               <a:blipFill>
                 <a:blip r:embed="rId5"/>
                 <a:stretch>
-                  <a:fillRect b="-8824"/>
+                  <a:fillRect/>
                 </a:stretch>
               </a:blipFill>
             </p:spPr>
@@ -7734,8 +7970,8 @@
             </p:nvSpPr>
             <p:spPr>
               <a:xfrm>
-                <a:off x="6172200" y="3429000"/>
-                <a:ext cx="5486400" cy="600164"/>
+                <a:off x="6789420" y="3550567"/>
+                <a:ext cx="4251960" cy="598112"/>
               </a:xfrm>
               <a:prstGeom prst="rect">
                 <a:avLst/>
@@ -7756,25 +7992,254 @@
                     </m:oMathParaPr>
                     <m:oMath xmlns:m="http://schemas.openxmlformats.org/officeDocument/2006/math">
                       <m:r>
-                        <a:rPr lang="en-US" sz="1100" b="0" i="1" dirty="0" smtClean="0">
+                        <a:rPr lang="en-US" sz="1050" b="0" i="1" dirty="0" smtClean="0">
                           <a:solidFill>
                             <a:srgbClr val="B88600"/>
                           </a:solidFill>
                           <a:latin typeface="Cambria Math" panose="02040503050406030204" pitchFamily="18" charset="0"/>
                         </a:rPr>
-                        <m:t>𝑔</m:t>
+                        <m:t>𝑧</m:t>
                       </m:r>
                       <m:r>
-                        <a:rPr lang="en-US" sz="1100" b="0" i="1" dirty="0" smtClean="0">
+                        <a:rPr lang="en-US" sz="1050" b="0" i="1" dirty="0" smtClean="0">
                           <a:solidFill>
                             <a:srgbClr val="B88600"/>
                           </a:solidFill>
                           <a:latin typeface="Cambria Math" panose="02040503050406030204" pitchFamily="18" charset="0"/>
                         </a:rPr>
-                        <m:t>      =  </m:t>
+                        <m:t>=</m:t>
+                      </m:r>
+                      <m:d>
+                        <m:dPr>
+                          <m:begChr m:val="["/>
+                          <m:endChr m:val="]"/>
+                          <m:ctrlPr>
+                            <a:rPr lang="en-US" sz="1050" b="0" i="1" dirty="0" smtClean="0">
+                              <a:solidFill>
+                                <a:srgbClr val="B88600"/>
+                              </a:solidFill>
+                              <a:latin typeface="Cambria Math" panose="02040503050406030204" pitchFamily="18" charset="0"/>
+                            </a:rPr>
+                          </m:ctrlPr>
+                        </m:dPr>
+                        <m:e>
+                          <m:sSub>
+                            <m:sSubPr>
+                              <m:ctrlPr>
+                                <a:rPr lang="en-US" sz="1050" b="0" i="1" dirty="0" err="1">
+                                  <a:solidFill>
+                                    <a:srgbClr val="B88600"/>
+                                  </a:solidFill>
+                                  <a:latin typeface="Cambria Math" panose="02040503050406030204" pitchFamily="18" charset="0"/>
+                                </a:rPr>
+                              </m:ctrlPr>
+                            </m:sSubPr>
+                            <m:e>
+                              <m:r>
+                                <a:rPr lang="en-US" sz="1050" b="0" i="1" dirty="0" err="1">
+                                  <a:solidFill>
+                                    <a:srgbClr val="B88600"/>
+                                  </a:solidFill>
+                                  <a:latin typeface="Cambria Math" panose="02040503050406030204" pitchFamily="18" charset="0"/>
+                                </a:rPr>
+                                <m:t>𝑦</m:t>
+                              </m:r>
+                            </m:e>
+                            <m:sub>
+                              <m:r>
+                                <a:rPr lang="en-US" sz="1050" b="0" i="1" dirty="0" err="1">
+                                  <a:solidFill>
+                                    <a:srgbClr val="B88600"/>
+                                  </a:solidFill>
+                                  <a:latin typeface="Cambria Math" panose="02040503050406030204" pitchFamily="18" charset="0"/>
+                                </a:rPr>
+                                <m:t>𝑡</m:t>
+                              </m:r>
+                            </m:sub>
+                          </m:sSub>
+                          <m:r>
+                            <a:rPr lang="en-US" sz="1050" b="0" i="1" dirty="0" err="1">
+                              <a:solidFill>
+                                <a:srgbClr val="B88600"/>
+                              </a:solidFill>
+                              <a:latin typeface="Cambria Math" panose="02040503050406030204" pitchFamily="18" charset="0"/>
+                            </a:rPr>
+                            <m:t>𝑠</m:t>
+                          </m:r>
+                          <m:r>
+                            <a:rPr lang="en-US" sz="1050" b="0" i="1" dirty="0">
+                              <a:solidFill>
+                                <a:srgbClr val="B88600"/>
+                              </a:solidFill>
+                              <a:latin typeface="Cambria Math" panose="02040503050406030204" pitchFamily="18" charset="0"/>
+                            </a:rPr>
+                            <m:t>;</m:t>
+                          </m:r>
+                          <m:r>
+                            <a:rPr lang="en-US" sz="1050" b="0" i="1" dirty="0">
+                              <a:solidFill>
+                                <a:srgbClr val="B88600"/>
+                              </a:solidFill>
+                              <a:latin typeface="Cambria Math" panose="02040503050406030204" pitchFamily="18" charset="0"/>
+                            </a:rPr>
+                            <m:t>𝑒</m:t>
+                          </m:r>
+                        </m:e>
+                      </m:d>
+                      <m:d>
+                        <m:dPr>
+                          <m:ctrlPr>
+                            <a:rPr lang="en-US" sz="1050" b="0" i="1" dirty="0">
+                              <a:solidFill>
+                                <a:srgbClr val="B88600"/>
+                              </a:solidFill>
+                              <a:latin typeface="Cambria Math" panose="02040503050406030204" pitchFamily="18" charset="0"/>
+                            </a:rPr>
+                          </m:ctrlPr>
+                        </m:dPr>
+                        <m:e>
+                          <m:r>
+                            <a:rPr lang="en-US" sz="1050" b="0" i="1" dirty="0">
+                              <a:solidFill>
+                                <a:srgbClr val="B88600"/>
+                              </a:solidFill>
+                              <a:latin typeface="Cambria Math" panose="02040503050406030204" pitchFamily="18" charset="0"/>
+                            </a:rPr>
+                            <m:t>𝑓𝑜𝑟𝑒𝑐𝑎𝑠𝑡</m:t>
+                          </m:r>
+                          <m:r>
+                            <a:rPr lang="en-US" sz="1050" b="0" i="1" dirty="0">
+                              <a:solidFill>
+                                <a:srgbClr val="B88600"/>
+                              </a:solidFill>
+                              <a:latin typeface="Cambria Math" panose="02040503050406030204" pitchFamily="18" charset="0"/>
+                            </a:rPr>
+                            <m:t>+</m:t>
+                          </m:r>
+                          <m:r>
+                            <a:rPr lang="en-US" sz="1050" b="0" i="1" dirty="0">
+                              <a:solidFill>
+                                <a:srgbClr val="B88600"/>
+                              </a:solidFill>
+                              <a:latin typeface="Cambria Math" panose="02040503050406030204" pitchFamily="18" charset="0"/>
+                            </a:rPr>
+                            <m:t>𝑡𝑒𝑥𝑡𝑐𝑜𝑛𝑡𝑒𝑥𝑡</m:t>
+                          </m:r>
+                        </m:e>
+                      </m:d>
+                      <m:r>
+                        <a:rPr lang="en-US" sz="1050" b="0" i="1" dirty="0">
+                          <a:solidFill>
+                            <a:srgbClr val="B88600"/>
+                          </a:solidFill>
+                          <a:latin typeface="Cambria Math" panose="02040503050406030204" pitchFamily="18" charset="0"/>
+                        </a:rPr>
+                        <m:t>𝐻</m:t>
                       </m:r>
                       <m:r>
-                        <a:rPr lang="en-US" sz="1100" b="0" i="1" dirty="0" smtClean="0">
+                        <a:rPr lang="en-US" sz="1050" b="0" i="1" dirty="0">
+                          <a:solidFill>
+                            <a:srgbClr val="B88600"/>
+                          </a:solidFill>
+                          <a:latin typeface="Cambria Math" panose="02040503050406030204" pitchFamily="18" charset="0"/>
+                        </a:rPr>
+                        <m:t>=</m:t>
+                      </m:r>
+                      <m:r>
+                        <a:rPr lang="en-US" sz="1050" b="0" i="1" dirty="0" err="1">
+                          <a:solidFill>
+                            <a:srgbClr val="B88600"/>
+                          </a:solidFill>
+                          <a:latin typeface="Cambria Math" panose="02040503050406030204" pitchFamily="18" charset="0"/>
+                        </a:rPr>
+                        <m:t>𝑓𝑢𝑠𝑖𝑜</m:t>
+                      </m:r>
+                      <m:sSub>
+                        <m:sSubPr>
+                          <m:ctrlPr>
+                            <a:rPr lang="en-US" sz="1050" b="0" i="1" dirty="0" err="1">
+                              <a:solidFill>
+                                <a:srgbClr val="B88600"/>
+                              </a:solidFill>
+                              <a:latin typeface="Cambria Math" panose="02040503050406030204" pitchFamily="18" charset="0"/>
+                            </a:rPr>
+                          </m:ctrlPr>
+                        </m:sSubPr>
+                        <m:e>
+                          <m:r>
+                            <a:rPr lang="en-US" sz="1050" b="0" i="1" dirty="0" err="1">
+                              <a:solidFill>
+                                <a:srgbClr val="B88600"/>
+                              </a:solidFill>
+                              <a:latin typeface="Cambria Math" panose="02040503050406030204" pitchFamily="18" charset="0"/>
+                            </a:rPr>
+                            <m:t>𝑛</m:t>
+                          </m:r>
+                        </m:e>
+                        <m:sub>
+                          <m:r>
+                            <a:rPr lang="en-US" sz="1050" b="0" i="1" dirty="0" err="1">
+                              <a:solidFill>
+                                <a:srgbClr val="B88600"/>
+                              </a:solidFill>
+                              <a:latin typeface="Cambria Math" panose="02040503050406030204" pitchFamily="18" charset="0"/>
+                            </a:rPr>
+                            <m:t>𝐺</m:t>
+                          </m:r>
+                        </m:sub>
+                      </m:sSub>
+                      <m:r>
+                        <a:rPr lang="en-US" sz="1050" b="0" i="1" dirty="0" err="1">
+                          <a:solidFill>
+                            <a:srgbClr val="B88600"/>
+                          </a:solidFill>
+                          <a:latin typeface="Cambria Math" panose="02040503050406030204" pitchFamily="18" charset="0"/>
+                        </a:rPr>
+                        <m:t>𝑅𝑈</m:t>
+                      </m:r>
+                      <m:d>
+                        <m:dPr>
+                          <m:ctrlPr>
+                            <a:rPr lang="en-US" sz="1050" b="0" i="1" dirty="0">
+                              <a:solidFill>
+                                <a:srgbClr val="B88600"/>
+                              </a:solidFill>
+                              <a:latin typeface="Cambria Math" panose="02040503050406030204" pitchFamily="18" charset="0"/>
+                            </a:rPr>
+                          </m:ctrlPr>
+                        </m:dPr>
+                        <m:e>
+                          <m:r>
+                            <a:rPr lang="en-US" sz="1050" b="0" i="1" dirty="0">
+                              <a:solidFill>
+                                <a:srgbClr val="B88600"/>
+                              </a:solidFill>
+                              <a:latin typeface="Cambria Math" panose="02040503050406030204" pitchFamily="18" charset="0"/>
+                            </a:rPr>
+                            <m:t>𝑧</m:t>
+                          </m:r>
+                        </m:e>
+                      </m:d>
+                      <m:r>
+                        <a:rPr lang="en-US" sz="1050" b="0" i="1" dirty="0">
+                          <a:solidFill>
+                            <a:srgbClr val="B88600"/>
+                          </a:solidFill>
+                          <a:latin typeface="Cambria Math" panose="02040503050406030204" pitchFamily="18" charset="0"/>
+                        </a:rPr>
+                        <m:t>𝐺</m:t>
+                      </m:r>
+                      <m:r>
+                        <a:rPr lang="en-US" sz="1050" b="0" i="1" dirty="0">
+                          <a:solidFill>
+                            <a:srgbClr val="B88600"/>
+                          </a:solidFill>
+                          <a:latin typeface="Cambria Math" panose="02040503050406030204" pitchFamily="18" charset="0"/>
+                        </a:rPr>
+                        <m:t>=</m:t>
+                      </m:r>
+                      <m:r>
+                        <a:rPr lang="en-US" sz="1050" b="0" i="1" dirty="0">
                           <a:solidFill>
                             <a:srgbClr val="B88600"/>
                           </a:solidFill>
@@ -7782,150 +8247,74 @@
                         </a:rPr>
                         <m:t>𝑠𝑖𝑔𝑚𝑜𝑖𝑑</m:t>
                       </m:r>
+                      <m:d>
+                        <m:dPr>
+                          <m:ctrlPr>
+                            <a:rPr lang="en-US" sz="1050" b="0" i="1" dirty="0">
+                              <a:solidFill>
+                                <a:srgbClr val="B88600"/>
+                              </a:solidFill>
+                              <a:latin typeface="Cambria Math" panose="02040503050406030204" pitchFamily="18" charset="0"/>
+                            </a:rPr>
+                          </m:ctrlPr>
+                        </m:dPr>
+                        <m:e>
+                          <m:sSub>
+                            <m:sSubPr>
+                              <m:ctrlPr>
+                                <a:rPr lang="en-US" sz="1050" b="0" i="1" dirty="0" err="1">
+                                  <a:solidFill>
+                                    <a:srgbClr val="B88600"/>
+                                  </a:solidFill>
+                                  <a:latin typeface="Cambria Math" panose="02040503050406030204" pitchFamily="18" charset="0"/>
+                                </a:rPr>
+                              </m:ctrlPr>
+                            </m:sSubPr>
+                            <m:e>
+                              <m:r>
+                                <a:rPr lang="en-US" sz="1050" b="0" i="1" dirty="0" err="1">
+                                  <a:solidFill>
+                                    <a:srgbClr val="B88600"/>
+                                  </a:solidFill>
+                                  <a:latin typeface="Cambria Math" panose="02040503050406030204" pitchFamily="18" charset="0"/>
+                                </a:rPr>
+                                <m:t>𝑊</m:t>
+                              </m:r>
+                            </m:e>
+                            <m:sub>
+                              <m:r>
+                                <a:rPr lang="en-US" sz="1050" b="0" i="1" dirty="0" err="1">
+                                  <a:solidFill>
+                                    <a:srgbClr val="B88600"/>
+                                  </a:solidFill>
+                                  <a:latin typeface="Cambria Math" panose="02040503050406030204" pitchFamily="18" charset="0"/>
+                                </a:rPr>
+                                <m:t>𝑔</m:t>
+                              </m:r>
+                            </m:sub>
+                          </m:sSub>
+                          <m:r>
+                            <a:rPr lang="en-US" sz="1050" b="0" i="1" dirty="0">
+                              <a:solidFill>
+                                <a:srgbClr val="B88600"/>
+                              </a:solidFill>
+                              <a:latin typeface="Cambria Math" panose="02040503050406030204" pitchFamily="18" charset="0"/>
+                            </a:rPr>
+                            <m:t>∗</m:t>
+                          </m:r>
+                          <m:r>
+                            <a:rPr lang="en-US" sz="1050" b="0" i="1" dirty="0">
+                              <a:solidFill>
+                                <a:srgbClr val="B88600"/>
+                              </a:solidFill>
+                              <a:latin typeface="Cambria Math" panose="02040503050406030204" pitchFamily="18" charset="0"/>
+                            </a:rPr>
+                            <m:t>𝑧</m:t>
+                          </m:r>
+                        </m:e>
+                      </m:d>
                       <m:r>
-                        <a:rPr lang="en-US" sz="1100" b="0" i="1" dirty="0" smtClean="0">
-                          <a:solidFill>
-                            <a:srgbClr val="B88600"/>
-                          </a:solidFill>
-                          <a:latin typeface="Cambria Math" panose="02040503050406030204" pitchFamily="18" charset="0"/>
-                        </a:rPr>
-                        <m:t>( </m:t>
-                      </m:r>
-                      <m:r>
-                        <a:rPr lang="en-US" sz="1100" b="0" i="1" dirty="0" err="1">
-                          <a:solidFill>
-                            <a:srgbClr val="B88600"/>
-                          </a:solidFill>
-                          <a:latin typeface="Cambria Math" panose="02040503050406030204" pitchFamily="18" charset="0"/>
-                        </a:rPr>
-                        <m:t>𝑊</m:t>
-                      </m:r>
-                      <m:r>
-                        <a:rPr lang="en-US" sz="1100" b="0" i="1" dirty="0" err="1">
-                          <a:solidFill>
-                            <a:srgbClr val="B88600"/>
-                          </a:solidFill>
-                          <a:latin typeface="Cambria Math" panose="02040503050406030204" pitchFamily="18" charset="0"/>
-                        </a:rPr>
-                        <m:t>_</m:t>
-                      </m:r>
-                      <m:r>
-                        <a:rPr lang="en-US" sz="1100" b="0" i="1" dirty="0" err="1">
-                          <a:solidFill>
-                            <a:srgbClr val="B88600"/>
-                          </a:solidFill>
-                          <a:latin typeface="Cambria Math" panose="02040503050406030204" pitchFamily="18" charset="0"/>
-                        </a:rPr>
-                        <m:t>𝑔</m:t>
-                      </m:r>
-                      <m:r>
-                        <a:rPr lang="en-US" sz="1100" b="0" i="1" dirty="0">
-                          <a:solidFill>
-                            <a:srgbClr val="B88600"/>
-                          </a:solidFill>
-                          <a:latin typeface="Cambria Math" panose="02040503050406030204" pitchFamily="18" charset="0"/>
-                        </a:rPr>
-                        <m:t> ∗ [</m:t>
-                      </m:r>
-                      <m:r>
-                        <a:rPr lang="en-US" sz="1100" b="0" i="1" dirty="0" err="1">
-                          <a:solidFill>
-                            <a:srgbClr val="B88600"/>
-                          </a:solidFill>
-                          <a:latin typeface="Cambria Math" panose="02040503050406030204" pitchFamily="18" charset="0"/>
-                        </a:rPr>
-                        <m:t>h</m:t>
-                      </m:r>
-                      <m:r>
-                        <a:rPr lang="en-US" sz="1100" b="0" i="1" dirty="0" err="1">
-                          <a:solidFill>
-                            <a:srgbClr val="B88600"/>
-                          </a:solidFill>
-                          <a:latin typeface="Cambria Math" panose="02040503050406030204" pitchFamily="18" charset="0"/>
-                        </a:rPr>
-                        <m:t>_</m:t>
-                      </m:r>
-                      <m:r>
-                        <a:rPr lang="en-US" sz="1100" b="0" i="1" dirty="0" err="1">
-                          <a:solidFill>
-                            <a:srgbClr val="B88600"/>
-                          </a:solidFill>
-                          <a:latin typeface="Cambria Math" panose="02040503050406030204" pitchFamily="18" charset="0"/>
-                        </a:rPr>
-                        <m:t>𝑔𝑟𝑢</m:t>
-                      </m:r>
-                      <m:r>
-                        <a:rPr lang="en-US" sz="1100" b="0" i="1" dirty="0">
-                          <a:solidFill>
-                            <a:srgbClr val="B88600"/>
-                          </a:solidFill>
-                          <a:latin typeface="Cambria Math" panose="02040503050406030204" pitchFamily="18" charset="0"/>
-                        </a:rPr>
-                        <m:t> ; </m:t>
-                      </m:r>
-                      <m:r>
-                        <a:rPr lang="en-US" sz="1100" b="0" i="1" dirty="0">
-                          <a:solidFill>
-                            <a:srgbClr val="B88600"/>
-                          </a:solidFill>
-                          <a:latin typeface="Cambria Math" panose="02040503050406030204" pitchFamily="18" charset="0"/>
-                        </a:rPr>
-                        <m:t>𝑐</m:t>
-                      </m:r>
-                      <m:r>
-                        <a:rPr lang="en-US" sz="1100" b="0" i="1" dirty="0">
-                          <a:solidFill>
-                            <a:srgbClr val="B88600"/>
-                          </a:solidFill>
-                          <a:latin typeface="Cambria Math" panose="02040503050406030204" pitchFamily="18" charset="0"/>
-                        </a:rPr>
-                        <m:t>] + </m:t>
-                      </m:r>
-                      <m:r>
-                        <a:rPr lang="en-US" sz="1100" b="0" i="1" dirty="0" err="1">
-                          <a:solidFill>
-                            <a:srgbClr val="B88600"/>
-                          </a:solidFill>
-                          <a:latin typeface="Cambria Math" panose="02040503050406030204" pitchFamily="18" charset="0"/>
-                        </a:rPr>
-                        <m:t>𝑏</m:t>
-                      </m:r>
-                      <m:r>
-                        <a:rPr lang="en-US" sz="1100" b="0" i="1" dirty="0" err="1">
-                          <a:solidFill>
-                            <a:srgbClr val="B88600"/>
-                          </a:solidFill>
-                          <a:latin typeface="Cambria Math" panose="02040503050406030204" pitchFamily="18" charset="0"/>
-                        </a:rPr>
-                        <m:t>_</m:t>
-                      </m:r>
-                      <m:r>
-                        <a:rPr lang="en-US" sz="1100" b="0" i="1" dirty="0" err="1">
-                          <a:solidFill>
-                            <a:srgbClr val="B88600"/>
-                          </a:solidFill>
-                          <a:latin typeface="Cambria Math" panose="02040503050406030204" pitchFamily="18" charset="0"/>
-                        </a:rPr>
-                        <m:t>𝑔</m:t>
-                      </m:r>
-                      <m:r>
-                        <a:rPr lang="en-US" sz="1100" b="0" i="1" dirty="0">
-                          <a:solidFill>
-                            <a:srgbClr val="B88600"/>
-                          </a:solidFill>
-                          <a:latin typeface="Cambria Math" panose="02040503050406030204" pitchFamily="18" charset="0"/>
-                        </a:rPr>
-                        <m:t> )</m:t>
-                      </m:r>
-                    </m:oMath>
-                  </m:oMathPara>
-                  <m:oMathPara xmlns:m="http://schemas.openxmlformats.org/officeDocument/2006/math">
-                    <m:oMathParaPr>
-                      <m:jc m:val="centerGroup"/>
-                    </m:oMathParaPr>
-                    <m:oMath xmlns:m="http://schemas.openxmlformats.org/officeDocument/2006/math">
-                      <m:r>
-                        <a:rPr lang="en-US" sz="1100" b="0" i="1" dirty="0">
+                        <a:rPr lang="en-US" sz="1050" b="0" i="1" dirty="0">
                           <a:solidFill>
                             <a:srgbClr val="B88600"/>
                           </a:solidFill>
@@ -7934,267 +8323,345 @@
                         <m:t>𝑑𝑒𝑙𝑡𝑎</m:t>
                       </m:r>
                       <m:r>
-                        <a:rPr lang="en-US" sz="1100" b="0" i="1" dirty="0">
+                        <a:rPr lang="en-US" sz="1050" b="0" i="1" dirty="0">
                           <a:solidFill>
                             <a:srgbClr val="B88600"/>
                           </a:solidFill>
                           <a:latin typeface="Cambria Math" panose="02040503050406030204" pitchFamily="18" charset="0"/>
                         </a:rPr>
-                        <m:t>  =  </m:t>
+                        <m:t>=</m:t>
                       </m:r>
+                      <m:sSub>
+                        <m:sSubPr>
+                          <m:ctrlPr>
+                            <a:rPr lang="en-US" sz="1050" b="0" i="1" dirty="0" err="1">
+                              <a:solidFill>
+                                <a:srgbClr val="B88600"/>
+                              </a:solidFill>
+                              <a:latin typeface="Cambria Math" panose="02040503050406030204" pitchFamily="18" charset="0"/>
+                            </a:rPr>
+                          </m:ctrlPr>
+                        </m:sSubPr>
+                        <m:e>
+                          <m:r>
+                            <a:rPr lang="en-US" sz="1050" b="0" i="1" dirty="0" err="1">
+                              <a:solidFill>
+                                <a:srgbClr val="B88600"/>
+                              </a:solidFill>
+                              <a:latin typeface="Cambria Math" panose="02040503050406030204" pitchFamily="18" charset="0"/>
+                            </a:rPr>
+                            <m:t>𝑊</m:t>
+                          </m:r>
+                        </m:e>
+                        <m:sub>
+                          <m:r>
+                            <a:rPr lang="en-US" sz="1050" b="0" i="1" dirty="0" err="1">
+                              <a:solidFill>
+                                <a:srgbClr val="B88600"/>
+                              </a:solidFill>
+                              <a:latin typeface="Cambria Math" panose="02040503050406030204" pitchFamily="18" charset="0"/>
+                            </a:rPr>
+                            <m:t>𝑑</m:t>
+                          </m:r>
+                        </m:sub>
+                      </m:sSub>
                       <m:r>
-                        <m:rPr>
-                          <m:sty m:val="p"/>
-                        </m:rPr>
-                        <a:rPr lang="en-US" sz="1100" b="0" i="1" dirty="0">
+                        <a:rPr lang="en-US" sz="1050" b="0" i="1" dirty="0">
                           <a:solidFill>
                             <a:srgbClr val="B88600"/>
                           </a:solidFill>
                           <a:latin typeface="Cambria Math" panose="02040503050406030204" pitchFamily="18" charset="0"/>
                         </a:rPr>
-                        <m:t>tanh</m:t>
+                        <m:t>∗</m:t>
                       </m:r>
                       <m:r>
-                        <a:rPr lang="en-US" sz="1100" b="0" i="1" dirty="0">
+                        <a:rPr lang="en-US" sz="1050" b="0" i="1" dirty="0">
                           <a:solidFill>
                             <a:srgbClr val="B88600"/>
                           </a:solidFill>
                           <a:latin typeface="Cambria Math" panose="02040503050406030204" pitchFamily="18" charset="0"/>
                         </a:rPr>
-                        <m:t>⁡( </m:t>
+                        <m:t>𝐻</m:t>
                       </m:r>
+                      <m:d>
+                        <m:dPr>
+                          <m:ctrlPr>
+                            <a:rPr lang="en-US" sz="1050" b="0" i="1" dirty="0">
+                              <a:solidFill>
+                                <a:srgbClr val="B88600"/>
+                              </a:solidFill>
+                              <a:latin typeface="Cambria Math" panose="02040503050406030204" pitchFamily="18" charset="0"/>
+                            </a:rPr>
+                          </m:ctrlPr>
+                        </m:dPr>
+                        <m:e>
+                          <m:r>
+                            <a:rPr lang="en-US" sz="1050" b="0" i="1" dirty="0">
+                              <a:solidFill>
+                                <a:srgbClr val="B88600"/>
+                              </a:solidFill>
+                              <a:latin typeface="Cambria Math" panose="02040503050406030204" pitchFamily="18" charset="0"/>
+                            </a:rPr>
+                            <m:t>𝑙𝑖𝑛𝑒𝑎𝑟</m:t>
+                          </m:r>
+                          <m:r>
+                            <a:rPr lang="en-US" sz="1050" b="0" i="1" dirty="0">
+                              <a:solidFill>
+                                <a:srgbClr val="B88600"/>
+                              </a:solidFill>
+                              <a:latin typeface="Cambria Math" panose="02040503050406030204" pitchFamily="18" charset="0"/>
+                            </a:rPr>
+                            <m:t>—</m:t>
+                          </m:r>
+                          <m:r>
+                            <a:rPr lang="en-US" sz="1050" b="0" i="1" dirty="0">
+                              <a:solidFill>
+                                <a:srgbClr val="B88600"/>
+                              </a:solidFill>
+                              <a:latin typeface="Cambria Math" panose="02040503050406030204" pitchFamily="18" charset="0"/>
+                            </a:rPr>
+                            <m:t>𝑛𝑜𝑡𝑎𝑛h</m:t>
+                          </m:r>
+                        </m:e>
+                      </m:d>
+                      <m:sSub>
+                        <m:sSubPr>
+                          <m:ctrlPr>
+                            <a:rPr lang="en-US" sz="1050" b="0" i="1" dirty="0" err="1">
+                              <a:solidFill>
+                                <a:srgbClr val="B88600"/>
+                              </a:solidFill>
+                              <a:latin typeface="Cambria Math" panose="02040503050406030204" pitchFamily="18" charset="0"/>
+                            </a:rPr>
+                          </m:ctrlPr>
+                        </m:sSubPr>
+                        <m:e>
+                          <m:r>
+                            <a:rPr lang="en-US" sz="1050" b="0" i="1" dirty="0" err="1">
+                              <a:solidFill>
+                                <a:srgbClr val="B88600"/>
+                              </a:solidFill>
+                              <a:latin typeface="Cambria Math" panose="02040503050406030204" pitchFamily="18" charset="0"/>
+                            </a:rPr>
+                            <m:t>𝑦</m:t>
+                          </m:r>
+                        </m:e>
+                        <m:sub>
+                          <m:r>
+                            <a:rPr lang="en-US" sz="1050" b="0" i="1" dirty="0" err="1">
+                              <a:solidFill>
+                                <a:srgbClr val="B88600"/>
+                              </a:solidFill>
+                              <a:latin typeface="Cambria Math" panose="02040503050406030204" pitchFamily="18" charset="0"/>
+                            </a:rPr>
+                            <m:t>𝑜</m:t>
+                          </m:r>
+                        </m:sub>
+                      </m:sSub>
                       <m:r>
-                        <a:rPr lang="en-US" sz="1100" b="0" i="1" dirty="0" err="1">
+                        <a:rPr lang="en-US" sz="1050" b="0" i="1" dirty="0" err="1">
                           <a:solidFill>
                             <a:srgbClr val="B88600"/>
                           </a:solidFill>
                           <a:latin typeface="Cambria Math" panose="02040503050406030204" pitchFamily="18" charset="0"/>
                         </a:rPr>
-                        <m:t>𝑊</m:t>
+                        <m:t>𝑢𝑡</m:t>
                       </m:r>
                       <m:r>
-                        <a:rPr lang="en-US" sz="1100" b="0" i="1" dirty="0" err="1">
+                        <a:rPr lang="en-US" sz="1050" b="0" i="1" dirty="0">
                           <a:solidFill>
                             <a:srgbClr val="B88600"/>
                           </a:solidFill>
                           <a:latin typeface="Cambria Math" panose="02040503050406030204" pitchFamily="18" charset="0"/>
                         </a:rPr>
-                        <m:t>_</m:t>
+                        <m:t>=</m:t>
                       </m:r>
                       <m:r>
-                        <a:rPr lang="en-US" sz="1100" b="0" i="1" dirty="0" err="1">
+                        <a:rPr lang="en-US" sz="1050" b="0" i="1" dirty="0">
                           <a:solidFill>
                             <a:srgbClr val="B88600"/>
                           </a:solidFill>
                           <a:latin typeface="Cambria Math" panose="02040503050406030204" pitchFamily="18" charset="0"/>
                         </a:rPr>
-                        <m:t>𝑑</m:t>
+                        <m:t>𝐺</m:t>
                       </m:r>
                       <m:r>
-                        <a:rPr lang="en-US" sz="1100" b="0" i="1" dirty="0">
+                        <a:rPr lang="en-US" sz="1050" b="0" i="1" dirty="0">
                           <a:solidFill>
                             <a:srgbClr val="B88600"/>
                           </a:solidFill>
                           <a:latin typeface="Cambria Math" panose="02040503050406030204" pitchFamily="18" charset="0"/>
                         </a:rPr>
-                        <m:t> ∗ [</m:t>
+                        <m:t>∗</m:t>
                       </m:r>
+                      <m:sSub>
+                        <m:sSubPr>
+                          <m:ctrlPr>
+                            <a:rPr lang="en-US" sz="1050" b="0" i="1" dirty="0" err="1">
+                              <a:solidFill>
+                                <a:srgbClr val="B88600"/>
+                              </a:solidFill>
+                              <a:latin typeface="Cambria Math" panose="02040503050406030204" pitchFamily="18" charset="0"/>
+                            </a:rPr>
+                          </m:ctrlPr>
+                        </m:sSubPr>
+                        <m:e>
+                          <m:r>
+                            <a:rPr lang="en-US" sz="1050" b="0" i="1" dirty="0" err="1">
+                              <a:solidFill>
+                                <a:srgbClr val="B88600"/>
+                              </a:solidFill>
+                              <a:latin typeface="Cambria Math" panose="02040503050406030204" pitchFamily="18" charset="0"/>
+                            </a:rPr>
+                            <m:t>𝑦</m:t>
+                          </m:r>
+                        </m:e>
+                        <m:sub>
+                          <m:r>
+                            <a:rPr lang="en-US" sz="1050" b="0" i="1" dirty="0" err="1">
+                              <a:solidFill>
+                                <a:srgbClr val="B88600"/>
+                              </a:solidFill>
+                              <a:latin typeface="Cambria Math" panose="02040503050406030204" pitchFamily="18" charset="0"/>
+                            </a:rPr>
+                            <m:t>𝑡</m:t>
+                          </m:r>
+                        </m:sub>
+                      </m:sSub>
                       <m:r>
-                        <a:rPr lang="en-US" sz="1100" b="0" i="1" dirty="0" err="1">
+                        <a:rPr lang="en-US" sz="1050" b="0" i="1" dirty="0" err="1">
                           <a:solidFill>
                             <a:srgbClr val="B88600"/>
                           </a:solidFill>
                           <a:latin typeface="Cambria Math" panose="02040503050406030204" pitchFamily="18" charset="0"/>
                         </a:rPr>
-                        <m:t>h</m:t>
+                        <m:t>𝑠</m:t>
                       </m:r>
                       <m:r>
-                        <a:rPr lang="en-US" sz="1100" b="0" i="1" dirty="0" err="1">
+                        <a:rPr lang="en-US" sz="1050" b="0" i="1" dirty="0">
                           <a:solidFill>
                             <a:srgbClr val="B88600"/>
                           </a:solidFill>
                           <a:latin typeface="Cambria Math" panose="02040503050406030204" pitchFamily="18" charset="0"/>
                         </a:rPr>
-                        <m:t>_</m:t>
+                        <m:t>+</m:t>
                       </m:r>
+                      <m:d>
+                        <m:dPr>
+                          <m:ctrlPr>
+                            <a:rPr lang="en-US" sz="1050" b="0" i="1" dirty="0">
+                              <a:solidFill>
+                                <a:srgbClr val="B88600"/>
+                              </a:solidFill>
+                              <a:latin typeface="Cambria Math" panose="02040503050406030204" pitchFamily="18" charset="0"/>
+                            </a:rPr>
+                          </m:ctrlPr>
+                        </m:dPr>
+                        <m:e>
+                          <m:r>
+                            <a:rPr lang="en-US" sz="1050" b="0" i="1" dirty="0">
+                              <a:solidFill>
+                                <a:srgbClr val="B88600"/>
+                              </a:solidFill>
+                              <a:latin typeface="Cambria Math" panose="02040503050406030204" pitchFamily="18" charset="0"/>
+                            </a:rPr>
+                            <m:t>1−</m:t>
+                          </m:r>
+                          <m:r>
+                            <a:rPr lang="en-US" sz="1050" b="0" i="1" dirty="0">
+                              <a:solidFill>
+                                <a:srgbClr val="B88600"/>
+                              </a:solidFill>
+                              <a:latin typeface="Cambria Math" panose="02040503050406030204" pitchFamily="18" charset="0"/>
+                            </a:rPr>
+                            <m:t>𝐺</m:t>
+                          </m:r>
+                        </m:e>
+                      </m:d>
                       <m:r>
-                        <a:rPr lang="en-US" sz="1100" b="0" i="1" dirty="0" err="1">
+                        <a:rPr lang="en-US" sz="1050" b="0" i="1" dirty="0">
                           <a:solidFill>
                             <a:srgbClr val="B88600"/>
                           </a:solidFill>
                           <a:latin typeface="Cambria Math" panose="02040503050406030204" pitchFamily="18" charset="0"/>
                         </a:rPr>
-                        <m:t>𝑔𝑟𝑢</m:t>
+                        <m:t>∗</m:t>
                       </m:r>
-                      <m:r>
-                        <a:rPr lang="en-US" sz="1100" b="0" i="1" dirty="0">
-                          <a:solidFill>
-                            <a:srgbClr val="B88600"/>
-                          </a:solidFill>
-                          <a:latin typeface="Cambria Math" panose="02040503050406030204" pitchFamily="18" charset="0"/>
-                        </a:rPr>
-                        <m:t> ; </m:t>
-                      </m:r>
-                      <m:r>
-                        <a:rPr lang="en-US" sz="1100" b="0" i="1" dirty="0">
-                          <a:solidFill>
-                            <a:srgbClr val="B88600"/>
-                          </a:solidFill>
-                          <a:latin typeface="Cambria Math" panose="02040503050406030204" pitchFamily="18" charset="0"/>
-                        </a:rPr>
-                        <m:t>𝑐</m:t>
-                      </m:r>
-                      <m:r>
-                        <a:rPr lang="en-US" sz="1100" b="0" i="1" dirty="0">
-                          <a:solidFill>
-                            <a:srgbClr val="B88600"/>
-                          </a:solidFill>
-                          <a:latin typeface="Cambria Math" panose="02040503050406030204" pitchFamily="18" charset="0"/>
-                        </a:rPr>
-                        <m:t>] + </m:t>
-                      </m:r>
-                      <m:r>
-                        <a:rPr lang="en-US" sz="1100" b="0" i="1" dirty="0" err="1">
-                          <a:solidFill>
-                            <a:srgbClr val="B88600"/>
-                          </a:solidFill>
-                          <a:latin typeface="Cambria Math" panose="02040503050406030204" pitchFamily="18" charset="0"/>
-                        </a:rPr>
-                        <m:t>𝑏</m:t>
-                      </m:r>
-                      <m:r>
-                        <a:rPr lang="en-US" sz="1100" b="0" i="1" dirty="0" err="1">
-                          <a:solidFill>
-                            <a:srgbClr val="B88600"/>
-                          </a:solidFill>
-                          <a:latin typeface="Cambria Math" panose="02040503050406030204" pitchFamily="18" charset="0"/>
-                        </a:rPr>
-                        <m:t>_</m:t>
-                      </m:r>
-                      <m:r>
-                        <a:rPr lang="en-US" sz="1100" b="0" i="1" dirty="0" err="1">
-                          <a:solidFill>
-                            <a:srgbClr val="B88600"/>
-                          </a:solidFill>
-                          <a:latin typeface="Cambria Math" panose="02040503050406030204" pitchFamily="18" charset="0"/>
-                        </a:rPr>
-                        <m:t>𝑑</m:t>
-                      </m:r>
-                      <m:r>
-                        <a:rPr lang="en-US" sz="1100" b="0" i="1" dirty="0">
-                          <a:solidFill>
-                            <a:srgbClr val="B88600"/>
-                          </a:solidFill>
-                          <a:latin typeface="Cambria Math" panose="02040503050406030204" pitchFamily="18" charset="0"/>
-                        </a:rPr>
-                        <m:t> )</m:t>
-                      </m:r>
-                    </m:oMath>
-                  </m:oMathPara>
-                  <m:oMathPara xmlns:m="http://schemas.openxmlformats.org/officeDocument/2006/math">
-                    <m:oMathParaPr>
-                      <m:jc m:val="centerGroup"/>
-                    </m:oMathParaPr>
-                    <m:oMath xmlns:m="http://schemas.openxmlformats.org/officeDocument/2006/math">
-                      <m:r>
-                        <a:rPr lang="en-US" sz="1100" b="0" i="1" dirty="0" err="1">
-                          <a:solidFill>
-                            <a:srgbClr val="B88600"/>
-                          </a:solidFill>
-                          <a:latin typeface="Cambria Math" panose="02040503050406030204" pitchFamily="18" charset="0"/>
-                        </a:rPr>
-                        <m:t>h</m:t>
-                      </m:r>
-                      <m:r>
-                        <a:rPr lang="en-US" sz="1100" b="0" i="1" dirty="0" err="1">
-                          <a:solidFill>
-                            <a:srgbClr val="B88600"/>
-                          </a:solidFill>
-                          <a:latin typeface="Cambria Math" panose="02040503050406030204" pitchFamily="18" charset="0"/>
-                        </a:rPr>
-                        <m:t>_</m:t>
-                      </m:r>
-                      <m:r>
-                        <a:rPr lang="en-US" sz="1100" b="0" i="1" dirty="0" err="1">
-                          <a:solidFill>
-                            <a:srgbClr val="B88600"/>
-                          </a:solidFill>
-                          <a:latin typeface="Cambria Math" panose="02040503050406030204" pitchFamily="18" charset="0"/>
-                        </a:rPr>
-                        <m:t>𝑜𝑢𝑡</m:t>
-                      </m:r>
-                      <m:r>
-                        <a:rPr lang="en-US" sz="1100" b="0" i="1" dirty="0">
-                          <a:solidFill>
-                            <a:srgbClr val="B88600"/>
-                          </a:solidFill>
-                          <a:latin typeface="Cambria Math" panose="02040503050406030204" pitchFamily="18" charset="0"/>
-                        </a:rPr>
-                        <m:t>  =  </m:t>
-                      </m:r>
-                      <m:r>
-                        <a:rPr lang="en-US" sz="1100" b="0" i="1" dirty="0" err="1">
-                          <a:solidFill>
-                            <a:srgbClr val="B88600"/>
-                          </a:solidFill>
-                          <a:latin typeface="Cambria Math" panose="02040503050406030204" pitchFamily="18" charset="0"/>
-                        </a:rPr>
-                        <m:t>h</m:t>
-                      </m:r>
-                      <m:r>
-                        <a:rPr lang="en-US" sz="1100" b="0" i="1" dirty="0" err="1">
-                          <a:solidFill>
-                            <a:srgbClr val="B88600"/>
-                          </a:solidFill>
-                          <a:latin typeface="Cambria Math" panose="02040503050406030204" pitchFamily="18" charset="0"/>
-                        </a:rPr>
-                        <m:t>_</m:t>
-                      </m:r>
-                      <m:r>
-                        <a:rPr lang="en-US" sz="1100" b="0" i="1" dirty="0" err="1">
-                          <a:solidFill>
-                            <a:srgbClr val="B88600"/>
-                          </a:solidFill>
-                          <a:latin typeface="Cambria Math" panose="02040503050406030204" pitchFamily="18" charset="0"/>
-                        </a:rPr>
-                        <m:t>𝑔𝑟𝑢</m:t>
-                      </m:r>
-                      <m:r>
-                        <a:rPr lang="en-US" sz="1100" b="0" i="1" dirty="0">
-                          <a:solidFill>
-                            <a:srgbClr val="B88600"/>
-                          </a:solidFill>
-                          <a:latin typeface="Cambria Math" panose="02040503050406030204" pitchFamily="18" charset="0"/>
-                        </a:rPr>
-                        <m:t>  +  </m:t>
-                      </m:r>
-                      <m:r>
-                        <a:rPr lang="en-US" sz="1100" b="0" i="1" dirty="0">
-                          <a:solidFill>
-                            <a:srgbClr val="B88600"/>
-                          </a:solidFill>
-                          <a:latin typeface="Cambria Math" panose="02040503050406030204" pitchFamily="18" charset="0"/>
-                        </a:rPr>
-                        <m:t>𝑔</m:t>
-                      </m:r>
-                      <m:r>
-                        <a:rPr lang="en-US" sz="1100" b="0" i="1" dirty="0">
-                          <a:solidFill>
-                            <a:srgbClr val="B88600"/>
-                          </a:solidFill>
-                          <a:latin typeface="Cambria Math" panose="02040503050406030204" pitchFamily="18" charset="0"/>
-                        </a:rPr>
-                        <m:t> ∗ </m:t>
-                      </m:r>
-                      <m:r>
-                        <a:rPr lang="en-US" sz="1100" b="0" i="1" dirty="0">
-                          <a:solidFill>
-                            <a:srgbClr val="B88600"/>
-                          </a:solidFill>
-                          <a:latin typeface="Cambria Math" panose="02040503050406030204" pitchFamily="18" charset="0"/>
-                        </a:rPr>
-                        <m:t>𝑑𝑒𝑙𝑡𝑎</m:t>
-                      </m:r>
+                      <m:d>
+                        <m:dPr>
+                          <m:ctrlPr>
+                            <a:rPr lang="en-US" sz="1050" b="0" i="1" dirty="0">
+                              <a:solidFill>
+                                <a:srgbClr val="B88600"/>
+                              </a:solidFill>
+                              <a:latin typeface="Cambria Math" panose="02040503050406030204" pitchFamily="18" charset="0"/>
+                            </a:rPr>
+                          </m:ctrlPr>
+                        </m:dPr>
+                        <m:e>
+                          <m:sSub>
+                            <m:sSubPr>
+                              <m:ctrlPr>
+                                <a:rPr lang="en-US" sz="1050" b="0" i="1" dirty="0" err="1">
+                                  <a:solidFill>
+                                    <a:srgbClr val="B88600"/>
+                                  </a:solidFill>
+                                  <a:latin typeface="Cambria Math" panose="02040503050406030204" pitchFamily="18" charset="0"/>
+                                </a:rPr>
+                              </m:ctrlPr>
+                            </m:sSubPr>
+                            <m:e>
+                              <m:r>
+                                <a:rPr lang="en-US" sz="1050" b="0" i="1" dirty="0" err="1">
+                                  <a:solidFill>
+                                    <a:srgbClr val="B88600"/>
+                                  </a:solidFill>
+                                  <a:latin typeface="Cambria Math" panose="02040503050406030204" pitchFamily="18" charset="0"/>
+                                </a:rPr>
+                                <m:t>𝑦</m:t>
+                              </m:r>
+                            </m:e>
+                            <m:sub>
+                              <m:r>
+                                <a:rPr lang="en-US" sz="1050" b="0" i="1" dirty="0" err="1">
+                                  <a:solidFill>
+                                    <a:srgbClr val="B88600"/>
+                                  </a:solidFill>
+                                  <a:latin typeface="Cambria Math" panose="02040503050406030204" pitchFamily="18" charset="0"/>
+                                </a:rPr>
+                                <m:t>𝑡</m:t>
+                              </m:r>
+                            </m:sub>
+                          </m:sSub>
+                          <m:r>
+                            <a:rPr lang="en-US" sz="1050" b="0" i="1" dirty="0" err="1">
+                              <a:solidFill>
+                                <a:srgbClr val="B88600"/>
+                              </a:solidFill>
+                              <a:latin typeface="Cambria Math" panose="02040503050406030204" pitchFamily="18" charset="0"/>
+                            </a:rPr>
+                            <m:t>𝑠</m:t>
+                          </m:r>
+                          <m:r>
+                            <a:rPr lang="en-US" sz="1050" b="0" i="1" dirty="0">
+                              <a:solidFill>
+                                <a:srgbClr val="B88600"/>
+                              </a:solidFill>
+                              <a:latin typeface="Cambria Math" panose="02040503050406030204" pitchFamily="18" charset="0"/>
+                            </a:rPr>
+                            <m:t>+</m:t>
+                          </m:r>
+                          <m:r>
+                            <a:rPr lang="en-US" sz="1050" b="0" i="1" dirty="0">
+                              <a:solidFill>
+                                <a:srgbClr val="B88600"/>
+                              </a:solidFill>
+                              <a:latin typeface="Cambria Math" panose="02040503050406030204" pitchFamily="18" charset="0"/>
+                            </a:rPr>
+                            <m:t>𝑑𝑒𝑙𝑡𝑎</m:t>
+                          </m:r>
+                        </m:e>
+                      </m:d>
                     </m:oMath>
                   </m:oMathPara>
                 </a14:m>
@@ -8213,8 +8680,8 @@
             </p:nvSpPr>
             <p:spPr>
               <a:xfrm>
-                <a:off x="6172200" y="3429000"/>
-                <a:ext cx="5486400" cy="600164"/>
+                <a:off x="6789420" y="3550567"/>
+                <a:ext cx="4251960" cy="598112"/>
               </a:xfrm>
               <a:prstGeom prst="rect">
                 <a:avLst/>
@@ -8270,7 +8737,7 @@
                   <a:srgbClr val="222A3A"/>
                 </a:solidFill>
               </a:rPr>
-              <a:t>g (sigmoid) = gate: how much to trust the text signal.</a:t>
+              <a:t>Fusion GRU ingests [y_ts; e] — text inside the recurrence (paper eq. 12-16).</a:t>
             </a:r>
           </a:p>
           <a:p>
@@ -8281,7 +8748,7 @@
                   <a:srgbClr val="222A3A"/>
                 </a:solidFill>
               </a:rPr>
-              <a:t>delta (tanh) = direction + size of text correction.  65,222 parameters.</a:t>
+              <a:t>G gates the blend of base forecast vs text correction.  177,866 parameters.</a:t>
             </a:r>
           </a:p>
         </p:txBody>
@@ -9034,7 +9501,7 @@
                   <a:srgbClr val="222A3A"/>
                 </a:solidFill>
               </a:rPr>
-              <a:t>Overall MSE = 2.584  (clear winner)</a:t>
+              <a:t>Overall MSE = 2.678  (clear winner)</a:t>
             </a:r>
           </a:p>
         </p:txBody>
@@ -9146,7 +9613,7 @@
                   <a:srgbClr val="FFFFFF"/>
                 </a:solidFill>
               </a:rPr>
-              <a:t>Switching to full-context embeddings improved GR-Add from 2.872 to 2.584 — a 11.3% MSE reduction.</a:t>
+              <a:t>Switching to full-context embeddings improved GR-Add from 2.872 to 2.678 — a 6.8% MSE reduction.</a:t>
             </a:r>
           </a:p>
         </p:txBody>
@@ -9178,6 +9645,50 @@
       </p:grpSpPr>
       <p:sp>
         <p:nvSpPr>
+          <p:cNvPr id="2" name="Rectangle 1"/>
+          <p:cNvSpPr/>
+          <p:nvPr/>
+        </p:nvSpPr>
+        <p:spPr>
+          <a:xfrm>
+            <a:off x="0" y="0"/>
+            <a:ext cx="12188952" cy="6858000"/>
+          </a:xfrm>
+          <a:prstGeom prst="rect">
+            <a:avLst/>
+          </a:prstGeom>
+          <a:solidFill>
+            <a:srgbClr val="FFFFFF"/>
+          </a:solidFill>
+          <a:ln>
+            <a:noFill/>
+          </a:ln>
+        </p:spPr>
+        <p:style>
+          <a:lnRef idx="1">
+            <a:schemeClr val="accent1"/>
+          </a:lnRef>
+          <a:fillRef idx="3">
+            <a:schemeClr val="accent1"/>
+          </a:fillRef>
+          <a:effectRef idx="2">
+            <a:schemeClr val="accent1"/>
+          </a:effectRef>
+          <a:fontRef idx="minor">
+            <a:schemeClr val="lt1"/>
+          </a:fontRef>
+        </p:style>
+        <p:txBody>
+          <a:bodyPr rtlCol="0" anchor="ctr"/>
+          <a:lstStyle/>
+          <a:p>
+            <a:pPr algn="ctr"/>
+            <a:endParaRPr/>
+          </a:p>
+        </p:txBody>
+      </p:sp>
+      <p:sp>
+        <p:nvSpPr>
           <p:cNvPr id="3" name="Rectangle 2"/>
           <p:cNvSpPr/>
           <p:nvPr/>
@@ -9438,142 +9949,6 @@
       </p:sp>
       <p:sp>
         <p:nvSpPr>
-          <p:cNvPr id="10" name="TextBox 9"/>
-          <p:cNvSpPr txBox="1"/>
-          <p:nvPr/>
-        </p:nvSpPr>
-        <p:spPr>
-          <a:xfrm>
-            <a:off x="502920" y="1737360"/>
-            <a:ext cx="5120640" cy="292608"/>
-          </a:xfrm>
-          <a:prstGeom prst="rect">
-            <a:avLst/>
-          </a:prstGeom>
-          <a:noFill/>
-        </p:spPr>
-        <p:txBody>
-          <a:bodyPr wrap="square">
-            <a:spAutoFit/>
-          </a:bodyPr>
-          <a:lstStyle/>
-          <a:p>
-            <a:pPr algn="l"/>
-            <a:r>
-              <a:rPr sz="1000">
-                <a:solidFill>
-                  <a:srgbClr val="555555"/>
-                </a:solidFill>
-              </a:rPr>
-              <a:t>Model             GDP MSE   Inf MSE   Overall</a:t>
-            </a:r>
-          </a:p>
-        </p:txBody>
-      </p:sp>
-      <p:sp>
-        <p:nvSpPr>
-          <p:cNvPr id="11" name="TextBox 10"/>
-          <p:cNvSpPr txBox="1"/>
-          <p:nvPr/>
-        </p:nvSpPr>
-        <p:spPr>
-          <a:xfrm>
-            <a:off x="502920" y="2029968"/>
-            <a:ext cx="5120640" cy="256032"/>
-          </a:xfrm>
-          <a:prstGeom prst="rect">
-            <a:avLst/>
-          </a:prstGeom>
-          <a:noFill/>
-        </p:spPr>
-        <p:txBody>
-          <a:bodyPr wrap="square">
-            <a:spAutoFit/>
-          </a:bodyPr>
-          <a:lstStyle/>
-          <a:p>
-            <a:pPr algn="l"/>
-            <a:r>
-              <a:rPr sz="1050">
-                <a:solidFill>
-                  <a:srgbClr val="222A3A"/>
-                </a:solidFill>
-              </a:rPr>
-              <a:t>DLinear           1.797     4.234     3.015</a:t>
-            </a:r>
-          </a:p>
-        </p:txBody>
-      </p:sp>
-      <p:sp>
-        <p:nvSpPr>
-          <p:cNvPr id="12" name="TextBox 11"/>
-          <p:cNvSpPr txBox="1"/>
-          <p:nvPr/>
-        </p:nvSpPr>
-        <p:spPr>
-          <a:xfrm>
-            <a:off x="502920" y="2331720"/>
-            <a:ext cx="5120640" cy="256032"/>
-          </a:xfrm>
-          <a:prstGeom prst="rect">
-            <a:avLst/>
-          </a:prstGeom>
-          <a:noFill/>
-        </p:spPr>
-        <p:txBody>
-          <a:bodyPr wrap="square">
-            <a:spAutoFit/>
-          </a:bodyPr>
-          <a:lstStyle/>
-          <a:p>
-            <a:pPr algn="l"/>
-            <a:r>
-              <a:rPr sz="1050">
-                <a:solidFill>
-                  <a:srgbClr val="222A3A"/>
-                </a:solidFill>
-              </a:rPr>
-              <a:t>NumericalGRU      1.514     4.300     2.907</a:t>
-            </a:r>
-          </a:p>
-        </p:txBody>
-      </p:sp>
-      <p:sp>
-        <p:nvSpPr>
-          <p:cNvPr id="13" name="TextBox 12"/>
-          <p:cNvSpPr txBox="1"/>
-          <p:nvPr/>
-        </p:nvSpPr>
-        <p:spPr>
-          <a:xfrm>
-            <a:off x="502920" y="2633472"/>
-            <a:ext cx="5120640" cy="256032"/>
-          </a:xfrm>
-          <a:prstGeom prst="rect">
-            <a:avLst/>
-          </a:prstGeom>
-          <a:noFill/>
-        </p:spPr>
-        <p:txBody>
-          <a:bodyPr wrap="square">
-            <a:spAutoFit/>
-          </a:bodyPr>
-          <a:lstStyle/>
-          <a:p>
-            <a:pPr algn="l"/>
-            <a:r>
-              <a:rPr sz="1050" dirty="0">
-                <a:solidFill>
-                  <a:srgbClr val="00B050"/>
-                </a:solidFill>
-              </a:rPr>
-              <a:t>GR-Add MMF        1.495     4.250     2.872  &lt;-- best</a:t>
-            </a:r>
-          </a:p>
-        </p:txBody>
-      </p:sp>
-      <p:sp>
-        <p:nvSpPr>
           <p:cNvPr id="14" name="Rectangle 13"/>
           <p:cNvSpPr/>
           <p:nvPr/>
@@ -9722,142 +10097,6 @@
       </p:sp>
       <p:sp>
         <p:nvSpPr>
-          <p:cNvPr id="18" name="TextBox 17"/>
-          <p:cNvSpPr txBox="1"/>
-          <p:nvPr/>
-        </p:nvSpPr>
-        <p:spPr>
-          <a:xfrm>
-            <a:off x="6355080" y="1737360"/>
-            <a:ext cx="5303520" cy="292608"/>
-          </a:xfrm>
-          <a:prstGeom prst="rect">
-            <a:avLst/>
-          </a:prstGeom>
-          <a:noFill/>
-        </p:spPr>
-        <p:txBody>
-          <a:bodyPr wrap="square">
-            <a:spAutoFit/>
-          </a:bodyPr>
-          <a:lstStyle/>
-          <a:p>
-            <a:pPr algn="l"/>
-            <a:r>
-              <a:rPr sz="1000">
-                <a:solidFill>
-                  <a:srgbClr val="555555"/>
-                </a:solidFill>
-              </a:rPr>
-              <a:t>Model             GDP MSE   Inf MSE   Overall</a:t>
-            </a:r>
-          </a:p>
-        </p:txBody>
-      </p:sp>
-      <p:sp>
-        <p:nvSpPr>
-          <p:cNvPr id="19" name="TextBox 18"/>
-          <p:cNvSpPr txBox="1"/>
-          <p:nvPr/>
-        </p:nvSpPr>
-        <p:spPr>
-          <a:xfrm>
-            <a:off x="6355080" y="2029968"/>
-            <a:ext cx="5303520" cy="256032"/>
-          </a:xfrm>
-          <a:prstGeom prst="rect">
-            <a:avLst/>
-          </a:prstGeom>
-          <a:noFill/>
-        </p:spPr>
-        <p:txBody>
-          <a:bodyPr wrap="square">
-            <a:spAutoFit/>
-          </a:bodyPr>
-          <a:lstStyle/>
-          <a:p>
-            <a:pPr algn="l"/>
-            <a:r>
-              <a:rPr sz="1050">
-                <a:solidFill>
-                  <a:srgbClr val="222A3A"/>
-                </a:solidFill>
-              </a:rPr>
-              <a:t>DLinear           1.568     4.667     3.118</a:t>
-            </a:r>
-          </a:p>
-        </p:txBody>
-      </p:sp>
-      <p:sp>
-        <p:nvSpPr>
-          <p:cNvPr id="20" name="TextBox 19"/>
-          <p:cNvSpPr txBox="1"/>
-          <p:nvPr/>
-        </p:nvSpPr>
-        <p:spPr>
-          <a:xfrm>
-            <a:off x="6355080" y="2331720"/>
-            <a:ext cx="5303520" cy="256032"/>
-          </a:xfrm>
-          <a:prstGeom prst="rect">
-            <a:avLst/>
-          </a:prstGeom>
-          <a:noFill/>
-        </p:spPr>
-        <p:txBody>
-          <a:bodyPr wrap="square">
-            <a:spAutoFit/>
-          </a:bodyPr>
-          <a:lstStyle/>
-          <a:p>
-            <a:pPr algn="l"/>
-            <a:r>
-              <a:rPr sz="1050">
-                <a:solidFill>
-                  <a:srgbClr val="222A3A"/>
-                </a:solidFill>
-              </a:rPr>
-              <a:t>NumericalGRU      1.466     4.228     2.847</a:t>
-            </a:r>
-          </a:p>
-        </p:txBody>
-      </p:sp>
-      <p:sp>
-        <p:nvSpPr>
-          <p:cNvPr id="21" name="TextBox 20"/>
-          <p:cNvSpPr txBox="1"/>
-          <p:nvPr/>
-        </p:nvSpPr>
-        <p:spPr>
-          <a:xfrm>
-            <a:off x="6355080" y="2633472"/>
-            <a:ext cx="5303520" cy="256032"/>
-          </a:xfrm>
-          <a:prstGeom prst="rect">
-            <a:avLst/>
-          </a:prstGeom>
-          <a:noFill/>
-        </p:spPr>
-        <p:txBody>
-          <a:bodyPr wrap="square">
-            <a:spAutoFit/>
-          </a:bodyPr>
-          <a:lstStyle/>
-          <a:p>
-            <a:pPr algn="l"/>
-            <a:r>
-              <a:rPr sz="1050" dirty="0">
-                <a:solidFill>
-                  <a:srgbClr val="00B050"/>
-                </a:solidFill>
-              </a:rPr>
-              <a:t>GR-Add MMF        1.484     3.684     2.584  &lt;-- best</a:t>
-            </a:r>
-          </a:p>
-        </p:txBody>
-      </p:sp>
-      <p:sp>
-        <p:nvSpPr>
           <p:cNvPr id="22" name="Rectangle 21"/>
           <p:cNvSpPr/>
           <p:nvPr/>
@@ -9929,7 +10168,7 @@
                   <a:srgbClr val="FFFFFF"/>
                 </a:solidFill>
               </a:rPr>
-              <a:t>GR-Add advantage is concentrated in inflation:  MSE 3.684 vs 4.228 (NumericalGRU) — 12.9% reduction.</a:t>
+              <a:t>GR-Add advantage is concentrated in inflation:  MSE 3.909 vs 4.198 (NumericalGRU) — 6.9% reduction.</a:t>
             </a:r>
           </a:p>
         </p:txBody>
@@ -10007,7 +10246,7 @@
                   <a:srgbClr val="1A1A2E"/>
                 </a:solidFill>
               </a:rPr>
-              <a:t>GR-Add MMF wins with full-context OpenAI embeddings. GDP gain is modest (1.484 vs 1.466)</a:t>
+              <a:t>GR-Add MMF wins overall. GDP: DLinear best (1.344) &lt; GR-Add (1.447) &lt; NumericalGRU (1.483).</a:t>
             </a:r>
           </a:p>
           <a:p>
@@ -10018,7 +10257,7 @@
                   <a:srgbClr val="1A1A2E"/>
                 </a:solidFill>
               </a:rPr>
-              <a:t>but inflation gain is clear (3.684 vs 4.228). IMF text captures inflation dynamics</a:t>
+              <a:t>Inflation: GR-Add best (3.909) &lt; DLinear (4.027) &lt; NumericalGRU (4.198).</a:t>
             </a:r>
           </a:p>
           <a:p>
@@ -10029,45 +10268,2499 @@
                   <a:srgbClr val="1A1A2E"/>
                 </a:solidFill>
               </a:rPr>
-              <a:t>— exchange rate outlooks, price pressure commentary — that the numerical series misses.</a:t>
-            </a:r>
-          </a:p>
-        </p:txBody>
-      </p:sp>
-      <p:sp>
-        <p:nvSpPr>
-          <p:cNvPr id="26" name="TextBox 25"/>
-          <p:cNvSpPr txBox="1"/>
-          <p:nvPr/>
-        </p:nvSpPr>
-        <p:spPr>
-          <a:xfrm>
-            <a:off x="365760" y="6492240"/>
-            <a:ext cx="11430000" cy="256032"/>
-          </a:xfrm>
-          <a:prstGeom prst="rect">
-            <a:avLst/>
-          </a:prstGeom>
-          <a:noFill/>
-        </p:spPr>
-        <p:txBody>
-          <a:bodyPr wrap="square">
-            <a:spAutoFit/>
-          </a:bodyPr>
-          <a:lstStyle/>
-          <a:p>
-            <a:pPr algn="ctr"/>
-            <a:r>
-              <a:rPr sz="800" b="0" i="0" dirty="0">
-                <a:solidFill>
-                  <a:srgbClr val="555555"/>
-                </a:solidFill>
-              </a:rPr>
-              <a:t>STAT 8240 Data Mining II  ·  Kennesaw State University  ·  April 2025</a:t>
-            </a:r>
-          </a:p>
-        </p:txBody>
-      </p:sp>
+              <a:t>IMF text primarily helps inflation — exchange rate outlooks, price pressures not in WDI series.</a:t>
+            </a:r>
+          </a:p>
+        </p:txBody>
+      </p:sp>
+      <p:graphicFrame>
+        <p:nvGraphicFramePr>
+          <p:cNvPr id="27" name="Google Shape;250;p29">
+            <a:extLst>
+              <a:ext uri="{FF2B5EF4-FFF2-40B4-BE49-F238E27FC236}">
+                <a16:creationId xmlns:a16="http://schemas.microsoft.com/office/drawing/2014/main" id="{1E3E185D-AE25-C97B-20F4-D9D1CF9A1589}"/>
+              </a:ext>
+            </a:extLst>
+          </p:cNvPr>
+          <p:cNvGraphicFramePr/>
+          <p:nvPr>
+            <p:extLst>
+              <p:ext uri="{D42A27DB-BD31-4B8C-83A1-F6EECF244321}">
+                <p14:modId xmlns:p14="http://schemas.microsoft.com/office/powerpoint/2010/main" val="295328998"/>
+              </p:ext>
+            </p:extLst>
+          </p:nvPr>
+        </p:nvGraphicFramePr>
+        <p:xfrm>
+          <a:off x="530224" y="1803384"/>
+          <a:ext cx="4879976" cy="1733242"/>
+        </p:xfrm>
+        <a:graphic>
+          <a:graphicData uri="http://schemas.openxmlformats.org/drawingml/2006/table">
+            <a:tbl>
+              <a:tblPr>
+                <a:noFill/>
+              </a:tblPr>
+              <a:tblGrid>
+                <a:gridCol w="1219994">
+                  <a:extLst>
+                    <a:ext uri="{9D8B030D-6E8A-4147-A177-3AD203B41FA5}">
+                      <a16:colId xmlns:a16="http://schemas.microsoft.com/office/drawing/2014/main" val="20000"/>
+                    </a:ext>
+                  </a:extLst>
+                </a:gridCol>
+                <a:gridCol w="1219994">
+                  <a:extLst>
+                    <a:ext uri="{9D8B030D-6E8A-4147-A177-3AD203B41FA5}">
+                      <a16:colId xmlns:a16="http://schemas.microsoft.com/office/drawing/2014/main" val="20001"/>
+                    </a:ext>
+                  </a:extLst>
+                </a:gridCol>
+                <a:gridCol w="1219994">
+                  <a:extLst>
+                    <a:ext uri="{9D8B030D-6E8A-4147-A177-3AD203B41FA5}">
+                      <a16:colId xmlns:a16="http://schemas.microsoft.com/office/drawing/2014/main" val="20002"/>
+                    </a:ext>
+                  </a:extLst>
+                </a:gridCol>
+                <a:gridCol w="1219994">
+                  <a:extLst>
+                    <a:ext uri="{9D8B030D-6E8A-4147-A177-3AD203B41FA5}">
+                      <a16:colId xmlns:a16="http://schemas.microsoft.com/office/drawing/2014/main" val="20003"/>
+                    </a:ext>
+                  </a:extLst>
+                </a:gridCol>
+              </a:tblGrid>
+              <a:tr h="421070">
+                <a:tc>
+                  <a:txBody>
+                    <a:bodyPr/>
+                    <a:lstStyle/>
+                    <a:p>
+                      <a:pPr marL="0" lvl="0" indent="0" algn="l" rtl="0">
+                        <a:spcBef>
+                          <a:spcPts val="0"/>
+                        </a:spcBef>
+                        <a:spcAft>
+                          <a:spcPts val="0"/>
+                        </a:spcAft>
+                        <a:buNone/>
+                      </a:pPr>
+                      <a:r>
+                        <a:rPr lang="en" sz="1200" dirty="0"/>
+                        <a:t>Model</a:t>
+                      </a:r>
+                      <a:endParaRPr sz="1200" dirty="0"/>
+                    </a:p>
+                  </a:txBody>
+                  <a:tcPr marL="91425" marR="91425" marT="91425" marB="91425">
+                    <a:lnL w="9525" cap="flat" cmpd="sng">
+                      <a:solidFill>
+                        <a:schemeClr val="dk1"/>
+                      </a:solidFill>
+                      <a:prstDash val="solid"/>
+                      <a:round/>
+                      <a:headEnd type="none" w="sm" len="sm"/>
+                      <a:tailEnd type="none" w="sm" len="sm"/>
+                    </a:lnL>
+                    <a:lnR w="9525" cap="flat" cmpd="sng">
+                      <a:solidFill>
+                        <a:schemeClr val="dk1"/>
+                      </a:solidFill>
+                      <a:prstDash val="solid"/>
+                      <a:round/>
+                      <a:headEnd type="none" w="sm" len="sm"/>
+                      <a:tailEnd type="none" w="sm" len="sm"/>
+                    </a:lnR>
+                    <a:lnT w="9525" cap="flat" cmpd="sng">
+                      <a:solidFill>
+                        <a:schemeClr val="dk1"/>
+                      </a:solidFill>
+                      <a:prstDash val="solid"/>
+                      <a:round/>
+                      <a:headEnd type="none" w="sm" len="sm"/>
+                      <a:tailEnd type="none" w="sm" len="sm"/>
+                    </a:lnT>
+                    <a:lnB w="9525" cap="flat" cmpd="sng">
+                      <a:solidFill>
+                        <a:schemeClr val="dk1"/>
+                      </a:solidFill>
+                      <a:prstDash val="solid"/>
+                      <a:round/>
+                      <a:headEnd type="none" w="sm" len="sm"/>
+                      <a:tailEnd type="none" w="sm" len="sm"/>
+                    </a:lnB>
+                  </a:tcPr>
+                </a:tc>
+                <a:tc>
+                  <a:txBody>
+                    <a:bodyPr/>
+                    <a:lstStyle/>
+                    <a:p>
+                      <a:pPr marL="0" lvl="0" indent="0" algn="l" rtl="0">
+                        <a:spcBef>
+                          <a:spcPts val="0"/>
+                        </a:spcBef>
+                        <a:spcAft>
+                          <a:spcPts val="0"/>
+                        </a:spcAft>
+                        <a:buClr>
+                          <a:schemeClr val="dk1"/>
+                        </a:buClr>
+                        <a:buFont typeface="Arial"/>
+                        <a:buNone/>
+                      </a:pPr>
+                      <a:r>
+                        <a:rPr lang="en" sz="1100">
+                          <a:solidFill>
+                            <a:srgbClr val="555555"/>
+                          </a:solidFill>
+                          <a:latin typeface="Calibri"/>
+                          <a:ea typeface="Calibri"/>
+                          <a:cs typeface="Calibri"/>
+                          <a:sym typeface="Calibri"/>
+                        </a:rPr>
+                        <a:t>GDP MSE</a:t>
+                      </a:r>
+                      <a:endParaRPr sz="3200"/>
+                    </a:p>
+                  </a:txBody>
+                  <a:tcPr marL="91425" marR="91425" marT="91425" marB="91425">
+                    <a:lnL w="9525" cap="flat" cmpd="sng">
+                      <a:solidFill>
+                        <a:schemeClr val="dk1"/>
+                      </a:solidFill>
+                      <a:prstDash val="solid"/>
+                      <a:round/>
+                      <a:headEnd type="none" w="sm" len="sm"/>
+                      <a:tailEnd type="none" w="sm" len="sm"/>
+                    </a:lnL>
+                    <a:lnR w="9525" cap="flat" cmpd="sng">
+                      <a:solidFill>
+                        <a:schemeClr val="dk1"/>
+                      </a:solidFill>
+                      <a:prstDash val="solid"/>
+                      <a:round/>
+                      <a:headEnd type="none" w="sm" len="sm"/>
+                      <a:tailEnd type="none" w="sm" len="sm"/>
+                    </a:lnR>
+                    <a:lnT w="9525" cap="flat" cmpd="sng">
+                      <a:solidFill>
+                        <a:schemeClr val="dk1"/>
+                      </a:solidFill>
+                      <a:prstDash val="solid"/>
+                      <a:round/>
+                      <a:headEnd type="none" w="sm" len="sm"/>
+                      <a:tailEnd type="none" w="sm" len="sm"/>
+                    </a:lnT>
+                    <a:lnB w="9525" cap="flat" cmpd="sng">
+                      <a:solidFill>
+                        <a:schemeClr val="dk1"/>
+                      </a:solidFill>
+                      <a:prstDash val="solid"/>
+                      <a:round/>
+                      <a:headEnd type="none" w="sm" len="sm"/>
+                      <a:tailEnd type="none" w="sm" len="sm"/>
+                    </a:lnB>
+                  </a:tcPr>
+                </a:tc>
+                <a:tc>
+                  <a:txBody>
+                    <a:bodyPr/>
+                    <a:lstStyle/>
+                    <a:p>
+                      <a:pPr marL="0" lvl="0" indent="0" algn="l" rtl="0">
+                        <a:spcBef>
+                          <a:spcPts val="0"/>
+                        </a:spcBef>
+                        <a:spcAft>
+                          <a:spcPts val="0"/>
+                        </a:spcAft>
+                        <a:buClr>
+                          <a:schemeClr val="dk1"/>
+                        </a:buClr>
+                        <a:buFont typeface="Arial"/>
+                        <a:buNone/>
+                      </a:pPr>
+                      <a:r>
+                        <a:rPr lang="en" sz="1100">
+                          <a:solidFill>
+                            <a:srgbClr val="555555"/>
+                          </a:solidFill>
+                          <a:latin typeface="Calibri"/>
+                          <a:ea typeface="Calibri"/>
+                          <a:cs typeface="Calibri"/>
+                          <a:sym typeface="Calibri"/>
+                        </a:rPr>
+                        <a:t>Inf MSE</a:t>
+                      </a:r>
+                      <a:endParaRPr sz="3200"/>
+                    </a:p>
+                  </a:txBody>
+                  <a:tcPr marL="91425" marR="91425" marT="91425" marB="91425">
+                    <a:lnL w="9525" cap="flat" cmpd="sng">
+                      <a:solidFill>
+                        <a:schemeClr val="dk1"/>
+                      </a:solidFill>
+                      <a:prstDash val="solid"/>
+                      <a:round/>
+                      <a:headEnd type="none" w="sm" len="sm"/>
+                      <a:tailEnd type="none" w="sm" len="sm"/>
+                    </a:lnL>
+                    <a:lnR w="9525" cap="flat" cmpd="sng">
+                      <a:solidFill>
+                        <a:schemeClr val="dk1"/>
+                      </a:solidFill>
+                      <a:prstDash val="solid"/>
+                      <a:round/>
+                      <a:headEnd type="none" w="sm" len="sm"/>
+                      <a:tailEnd type="none" w="sm" len="sm"/>
+                    </a:lnR>
+                    <a:lnT w="9525" cap="flat" cmpd="sng">
+                      <a:solidFill>
+                        <a:schemeClr val="dk1"/>
+                      </a:solidFill>
+                      <a:prstDash val="solid"/>
+                      <a:round/>
+                      <a:headEnd type="none" w="sm" len="sm"/>
+                      <a:tailEnd type="none" w="sm" len="sm"/>
+                    </a:lnT>
+                    <a:lnB w="9525" cap="flat" cmpd="sng">
+                      <a:solidFill>
+                        <a:schemeClr val="dk1"/>
+                      </a:solidFill>
+                      <a:prstDash val="solid"/>
+                      <a:round/>
+                      <a:headEnd type="none" w="sm" len="sm"/>
+                      <a:tailEnd type="none" w="sm" len="sm"/>
+                    </a:lnB>
+                  </a:tcPr>
+                </a:tc>
+                <a:tc>
+                  <a:txBody>
+                    <a:bodyPr/>
+                    <a:lstStyle/>
+                    <a:p>
+                      <a:pPr marL="0" lvl="0" indent="0" algn="l" rtl="0">
+                        <a:spcBef>
+                          <a:spcPts val="0"/>
+                        </a:spcBef>
+                        <a:spcAft>
+                          <a:spcPts val="0"/>
+                        </a:spcAft>
+                        <a:buClr>
+                          <a:schemeClr val="dk1"/>
+                        </a:buClr>
+                        <a:buFont typeface="Arial"/>
+                        <a:buNone/>
+                      </a:pPr>
+                      <a:r>
+                        <a:rPr lang="en" sz="1100">
+                          <a:solidFill>
+                            <a:srgbClr val="555555"/>
+                          </a:solidFill>
+                          <a:latin typeface="Calibri"/>
+                          <a:ea typeface="Calibri"/>
+                          <a:cs typeface="Calibri"/>
+                          <a:sym typeface="Calibri"/>
+                        </a:rPr>
+                        <a:t>Overall</a:t>
+                      </a:r>
+                      <a:endParaRPr sz="3200"/>
+                    </a:p>
+                  </a:txBody>
+                  <a:tcPr marL="91425" marR="91425" marT="91425" marB="91425">
+                    <a:lnL w="9525" cap="flat" cmpd="sng">
+                      <a:solidFill>
+                        <a:schemeClr val="dk1"/>
+                      </a:solidFill>
+                      <a:prstDash val="solid"/>
+                      <a:round/>
+                      <a:headEnd type="none" w="sm" len="sm"/>
+                      <a:tailEnd type="none" w="sm" len="sm"/>
+                    </a:lnL>
+                    <a:lnR w="9525" cap="flat" cmpd="sng">
+                      <a:solidFill>
+                        <a:schemeClr val="dk1"/>
+                      </a:solidFill>
+                      <a:prstDash val="solid"/>
+                      <a:round/>
+                      <a:headEnd type="none" w="sm" len="sm"/>
+                      <a:tailEnd type="none" w="sm" len="sm"/>
+                    </a:lnR>
+                    <a:lnT w="9525" cap="flat" cmpd="sng">
+                      <a:solidFill>
+                        <a:schemeClr val="dk1"/>
+                      </a:solidFill>
+                      <a:prstDash val="solid"/>
+                      <a:round/>
+                      <a:headEnd type="none" w="sm" len="sm"/>
+                      <a:tailEnd type="none" w="sm" len="sm"/>
+                    </a:lnT>
+                    <a:lnB w="9525" cap="flat" cmpd="sng">
+                      <a:solidFill>
+                        <a:schemeClr val="dk1"/>
+                      </a:solidFill>
+                      <a:prstDash val="solid"/>
+                      <a:round/>
+                      <a:headEnd type="none" w="sm" len="sm"/>
+                      <a:tailEnd type="none" w="sm" len="sm"/>
+                    </a:lnB>
+                  </a:tcPr>
+                </a:tc>
+                <a:extLst>
+                  <a:ext uri="{0D108BD9-81ED-4DB2-BD59-A6C34878D82A}">
+                    <a16:rowId xmlns:a16="http://schemas.microsoft.com/office/drawing/2014/main" val="10000"/>
+                  </a:ext>
+                </a:extLst>
+              </a:tr>
+              <a:tr h="343448">
+                <a:tc>
+                  <a:txBody>
+                    <a:bodyPr/>
+                    <a:lstStyle/>
+                    <a:p>
+                      <a:pPr marL="0" lvl="0" indent="0" algn="l" rtl="0">
+                        <a:spcBef>
+                          <a:spcPts val="0"/>
+                        </a:spcBef>
+                        <a:spcAft>
+                          <a:spcPts val="0"/>
+                        </a:spcAft>
+                        <a:buClr>
+                          <a:schemeClr val="dk1"/>
+                        </a:buClr>
+                        <a:buFont typeface="Arial"/>
+                        <a:buNone/>
+                      </a:pPr>
+                      <a:r>
+                        <a:rPr lang="en" sz="1100" dirty="0" err="1">
+                          <a:solidFill>
+                            <a:srgbClr val="222A3A"/>
+                          </a:solidFill>
+                          <a:latin typeface="Calibri"/>
+                          <a:ea typeface="Calibri"/>
+                          <a:cs typeface="Calibri"/>
+                          <a:sym typeface="Calibri"/>
+                        </a:rPr>
+                        <a:t>DLinear</a:t>
+                      </a:r>
+                      <a:r>
+                        <a:rPr lang="en" sz="1100" dirty="0">
+                          <a:solidFill>
+                            <a:srgbClr val="222A3A"/>
+                          </a:solidFill>
+                          <a:latin typeface="Calibri"/>
+                          <a:ea typeface="Calibri"/>
+                          <a:cs typeface="Calibri"/>
+                          <a:sym typeface="Calibri"/>
+                        </a:rPr>
+                        <a:t>  </a:t>
+                      </a:r>
+                      <a:endParaRPr sz="3200" dirty="0"/>
+                    </a:p>
+                  </a:txBody>
+                  <a:tcPr marL="91425" marR="91425" marT="91425" marB="91425">
+                    <a:lnL w="9525" cap="flat" cmpd="sng">
+                      <a:solidFill>
+                        <a:schemeClr val="dk1"/>
+                      </a:solidFill>
+                      <a:prstDash val="solid"/>
+                      <a:round/>
+                      <a:headEnd type="none" w="sm" len="sm"/>
+                      <a:tailEnd type="none" w="sm" len="sm"/>
+                    </a:lnL>
+                    <a:lnR w="9525" cap="flat" cmpd="sng">
+                      <a:solidFill>
+                        <a:schemeClr val="dk1"/>
+                      </a:solidFill>
+                      <a:prstDash val="solid"/>
+                      <a:round/>
+                      <a:headEnd type="none" w="sm" len="sm"/>
+                      <a:tailEnd type="none" w="sm" len="sm"/>
+                    </a:lnR>
+                    <a:lnT w="9525" cap="flat" cmpd="sng">
+                      <a:solidFill>
+                        <a:schemeClr val="dk1"/>
+                      </a:solidFill>
+                      <a:prstDash val="solid"/>
+                      <a:round/>
+                      <a:headEnd type="none" w="sm" len="sm"/>
+                      <a:tailEnd type="none" w="sm" len="sm"/>
+                    </a:lnT>
+                    <a:lnB w="9525" cap="flat" cmpd="sng">
+                      <a:solidFill>
+                        <a:schemeClr val="dk1"/>
+                      </a:solidFill>
+                      <a:prstDash val="solid"/>
+                      <a:round/>
+                      <a:headEnd type="none" w="sm" len="sm"/>
+                      <a:tailEnd type="none" w="sm" len="sm"/>
+                    </a:lnB>
+                  </a:tcPr>
+                </a:tc>
+                <a:tc>
+                  <a:txBody>
+                    <a:bodyPr/>
+                    <a:lstStyle/>
+                    <a:p>
+                      <a:pPr marL="0" lvl="0" indent="0" algn="l" rtl="0">
+                        <a:spcBef>
+                          <a:spcPts val="0"/>
+                        </a:spcBef>
+                        <a:spcAft>
+                          <a:spcPts val="0"/>
+                        </a:spcAft>
+                        <a:buClr>
+                          <a:schemeClr val="dk1"/>
+                        </a:buClr>
+                        <a:buFont typeface="Arial"/>
+                        <a:buNone/>
+                      </a:pPr>
+                      <a:r>
+                        <a:rPr lang="en" sz="1100">
+                          <a:solidFill>
+                            <a:srgbClr val="222A3A"/>
+                          </a:solidFill>
+                          <a:latin typeface="Calibri"/>
+                          <a:ea typeface="Calibri"/>
+                          <a:cs typeface="Calibri"/>
+                          <a:sym typeface="Calibri"/>
+                        </a:rPr>
+                        <a:t>1.797 </a:t>
+                      </a:r>
+                      <a:endParaRPr sz="3200"/>
+                    </a:p>
+                  </a:txBody>
+                  <a:tcPr marL="91425" marR="91425" marT="91425" marB="91425">
+                    <a:lnL w="9525" cap="flat" cmpd="sng">
+                      <a:solidFill>
+                        <a:schemeClr val="dk1"/>
+                      </a:solidFill>
+                      <a:prstDash val="solid"/>
+                      <a:round/>
+                      <a:headEnd type="none" w="sm" len="sm"/>
+                      <a:tailEnd type="none" w="sm" len="sm"/>
+                    </a:lnL>
+                    <a:lnR w="9525" cap="flat" cmpd="sng">
+                      <a:solidFill>
+                        <a:schemeClr val="dk1"/>
+                      </a:solidFill>
+                      <a:prstDash val="solid"/>
+                      <a:round/>
+                      <a:headEnd type="none" w="sm" len="sm"/>
+                      <a:tailEnd type="none" w="sm" len="sm"/>
+                    </a:lnR>
+                    <a:lnT w="9525" cap="flat" cmpd="sng">
+                      <a:solidFill>
+                        <a:schemeClr val="dk1"/>
+                      </a:solidFill>
+                      <a:prstDash val="solid"/>
+                      <a:round/>
+                      <a:headEnd type="none" w="sm" len="sm"/>
+                      <a:tailEnd type="none" w="sm" len="sm"/>
+                    </a:lnT>
+                    <a:lnB w="9525" cap="flat" cmpd="sng">
+                      <a:solidFill>
+                        <a:schemeClr val="dk1"/>
+                      </a:solidFill>
+                      <a:prstDash val="solid"/>
+                      <a:round/>
+                      <a:headEnd type="none" w="sm" len="sm"/>
+                      <a:tailEnd type="none" w="sm" len="sm"/>
+                    </a:lnB>
+                  </a:tcPr>
+                </a:tc>
+                <a:tc>
+                  <a:txBody>
+                    <a:bodyPr/>
+                    <a:lstStyle/>
+                    <a:p>
+                      <a:pPr marL="0" lvl="0" indent="0" algn="l" rtl="0">
+                        <a:spcBef>
+                          <a:spcPts val="0"/>
+                        </a:spcBef>
+                        <a:spcAft>
+                          <a:spcPts val="0"/>
+                        </a:spcAft>
+                        <a:buClr>
+                          <a:schemeClr val="dk1"/>
+                        </a:buClr>
+                        <a:buFont typeface="Arial"/>
+                        <a:buNone/>
+                      </a:pPr>
+                      <a:r>
+                        <a:rPr lang="en" sz="1100">
+                          <a:solidFill>
+                            <a:srgbClr val="222A3A"/>
+                          </a:solidFill>
+                          <a:latin typeface="Calibri"/>
+                          <a:ea typeface="Calibri"/>
+                          <a:cs typeface="Calibri"/>
+                          <a:sym typeface="Calibri"/>
+                        </a:rPr>
+                        <a:t>4.234</a:t>
+                      </a:r>
+                      <a:endParaRPr sz="3200"/>
+                    </a:p>
+                  </a:txBody>
+                  <a:tcPr marL="91425" marR="91425" marT="91425" marB="91425">
+                    <a:lnL w="9525" cap="flat" cmpd="sng">
+                      <a:solidFill>
+                        <a:schemeClr val="dk1"/>
+                      </a:solidFill>
+                      <a:prstDash val="solid"/>
+                      <a:round/>
+                      <a:headEnd type="none" w="sm" len="sm"/>
+                      <a:tailEnd type="none" w="sm" len="sm"/>
+                    </a:lnL>
+                    <a:lnR w="9525" cap="flat" cmpd="sng">
+                      <a:solidFill>
+                        <a:schemeClr val="dk1"/>
+                      </a:solidFill>
+                      <a:prstDash val="solid"/>
+                      <a:round/>
+                      <a:headEnd type="none" w="sm" len="sm"/>
+                      <a:tailEnd type="none" w="sm" len="sm"/>
+                    </a:lnR>
+                    <a:lnT w="9525" cap="flat" cmpd="sng">
+                      <a:solidFill>
+                        <a:schemeClr val="dk1"/>
+                      </a:solidFill>
+                      <a:prstDash val="solid"/>
+                      <a:round/>
+                      <a:headEnd type="none" w="sm" len="sm"/>
+                      <a:tailEnd type="none" w="sm" len="sm"/>
+                    </a:lnT>
+                    <a:lnB w="9525" cap="flat" cmpd="sng">
+                      <a:solidFill>
+                        <a:schemeClr val="dk1"/>
+                      </a:solidFill>
+                      <a:prstDash val="solid"/>
+                      <a:round/>
+                      <a:headEnd type="none" w="sm" len="sm"/>
+                      <a:tailEnd type="none" w="sm" len="sm"/>
+                    </a:lnB>
+                  </a:tcPr>
+                </a:tc>
+                <a:tc>
+                  <a:txBody>
+                    <a:bodyPr/>
+                    <a:lstStyle/>
+                    <a:p>
+                      <a:pPr marL="0" lvl="0" indent="0" algn="l" rtl="0">
+                        <a:spcBef>
+                          <a:spcPts val="0"/>
+                        </a:spcBef>
+                        <a:spcAft>
+                          <a:spcPts val="0"/>
+                        </a:spcAft>
+                        <a:buClr>
+                          <a:schemeClr val="dk1"/>
+                        </a:buClr>
+                        <a:buFont typeface="Arial"/>
+                        <a:buNone/>
+                      </a:pPr>
+                      <a:r>
+                        <a:rPr lang="en" sz="1100">
+                          <a:solidFill>
+                            <a:srgbClr val="222A3A"/>
+                          </a:solidFill>
+                          <a:latin typeface="Calibri"/>
+                          <a:ea typeface="Calibri"/>
+                          <a:cs typeface="Calibri"/>
+                          <a:sym typeface="Calibri"/>
+                        </a:rPr>
+                        <a:t>3.015</a:t>
+                      </a:r>
+                      <a:endParaRPr sz="3200"/>
+                    </a:p>
+                  </a:txBody>
+                  <a:tcPr marL="91425" marR="91425" marT="91425" marB="91425">
+                    <a:lnL w="9525" cap="flat" cmpd="sng">
+                      <a:solidFill>
+                        <a:schemeClr val="dk1"/>
+                      </a:solidFill>
+                      <a:prstDash val="solid"/>
+                      <a:round/>
+                      <a:headEnd type="none" w="sm" len="sm"/>
+                      <a:tailEnd type="none" w="sm" len="sm"/>
+                    </a:lnL>
+                    <a:lnR w="9525" cap="flat" cmpd="sng">
+                      <a:solidFill>
+                        <a:schemeClr val="dk1"/>
+                      </a:solidFill>
+                      <a:prstDash val="solid"/>
+                      <a:round/>
+                      <a:headEnd type="none" w="sm" len="sm"/>
+                      <a:tailEnd type="none" w="sm" len="sm"/>
+                    </a:lnR>
+                    <a:lnT w="9525" cap="flat" cmpd="sng">
+                      <a:solidFill>
+                        <a:schemeClr val="dk1"/>
+                      </a:solidFill>
+                      <a:prstDash val="solid"/>
+                      <a:round/>
+                      <a:headEnd type="none" w="sm" len="sm"/>
+                      <a:tailEnd type="none" w="sm" len="sm"/>
+                    </a:lnT>
+                    <a:lnB w="9525" cap="flat" cmpd="sng">
+                      <a:solidFill>
+                        <a:schemeClr val="dk1"/>
+                      </a:solidFill>
+                      <a:prstDash val="solid"/>
+                      <a:round/>
+                      <a:headEnd type="none" w="sm" len="sm"/>
+                      <a:tailEnd type="none" w="sm" len="sm"/>
+                    </a:lnB>
+                  </a:tcPr>
+                </a:tc>
+                <a:extLst>
+                  <a:ext uri="{0D108BD9-81ED-4DB2-BD59-A6C34878D82A}">
+                    <a16:rowId xmlns:a16="http://schemas.microsoft.com/office/drawing/2014/main" val="10001"/>
+                  </a:ext>
+                </a:extLst>
+              </a:tr>
+              <a:tr h="480841">
+                <a:tc>
+                  <a:txBody>
+                    <a:bodyPr/>
+                    <a:lstStyle/>
+                    <a:p>
+                      <a:pPr marL="0" lvl="0" indent="0" algn="l" rtl="0">
+                        <a:spcBef>
+                          <a:spcPts val="0"/>
+                        </a:spcBef>
+                        <a:spcAft>
+                          <a:spcPts val="0"/>
+                        </a:spcAft>
+                        <a:buClr>
+                          <a:schemeClr val="dk1"/>
+                        </a:buClr>
+                        <a:buFont typeface="Arial"/>
+                        <a:buNone/>
+                      </a:pPr>
+                      <a:r>
+                        <a:rPr lang="en" sz="1100">
+                          <a:solidFill>
+                            <a:srgbClr val="222A3A"/>
+                          </a:solidFill>
+                          <a:latin typeface="Calibri"/>
+                          <a:ea typeface="Calibri"/>
+                          <a:cs typeface="Calibri"/>
+                          <a:sym typeface="Calibri"/>
+                        </a:rPr>
+                        <a:t>NumericalGRU </a:t>
+                      </a:r>
+                      <a:endParaRPr sz="3200"/>
+                    </a:p>
+                  </a:txBody>
+                  <a:tcPr marL="91425" marR="91425" marT="91425" marB="91425">
+                    <a:lnL w="9525" cap="flat" cmpd="sng">
+                      <a:solidFill>
+                        <a:schemeClr val="dk1"/>
+                      </a:solidFill>
+                      <a:prstDash val="solid"/>
+                      <a:round/>
+                      <a:headEnd type="none" w="sm" len="sm"/>
+                      <a:tailEnd type="none" w="sm" len="sm"/>
+                    </a:lnL>
+                    <a:lnR w="9525" cap="flat" cmpd="sng">
+                      <a:solidFill>
+                        <a:schemeClr val="dk1"/>
+                      </a:solidFill>
+                      <a:prstDash val="solid"/>
+                      <a:round/>
+                      <a:headEnd type="none" w="sm" len="sm"/>
+                      <a:tailEnd type="none" w="sm" len="sm"/>
+                    </a:lnR>
+                    <a:lnT w="9525" cap="flat" cmpd="sng">
+                      <a:solidFill>
+                        <a:schemeClr val="dk1"/>
+                      </a:solidFill>
+                      <a:prstDash val="solid"/>
+                      <a:round/>
+                      <a:headEnd type="none" w="sm" len="sm"/>
+                      <a:tailEnd type="none" w="sm" len="sm"/>
+                    </a:lnT>
+                    <a:lnB w="9525" cap="flat" cmpd="sng">
+                      <a:solidFill>
+                        <a:schemeClr val="dk1"/>
+                      </a:solidFill>
+                      <a:prstDash val="solid"/>
+                      <a:round/>
+                      <a:headEnd type="none" w="sm" len="sm"/>
+                      <a:tailEnd type="none" w="sm" len="sm"/>
+                    </a:lnB>
+                  </a:tcPr>
+                </a:tc>
+                <a:tc>
+                  <a:txBody>
+                    <a:bodyPr/>
+                    <a:lstStyle/>
+                    <a:p>
+                      <a:pPr marL="0" lvl="0" indent="0" algn="l" rtl="0">
+                        <a:spcBef>
+                          <a:spcPts val="0"/>
+                        </a:spcBef>
+                        <a:spcAft>
+                          <a:spcPts val="0"/>
+                        </a:spcAft>
+                        <a:buClr>
+                          <a:schemeClr val="dk1"/>
+                        </a:buClr>
+                        <a:buFont typeface="Arial"/>
+                        <a:buNone/>
+                      </a:pPr>
+                      <a:r>
+                        <a:rPr lang="en" sz="1100">
+                          <a:solidFill>
+                            <a:srgbClr val="222A3A"/>
+                          </a:solidFill>
+                          <a:latin typeface="Calibri"/>
+                          <a:ea typeface="Calibri"/>
+                          <a:cs typeface="Calibri"/>
+                          <a:sym typeface="Calibri"/>
+                        </a:rPr>
+                        <a:t> 1.514 </a:t>
+                      </a:r>
+                      <a:endParaRPr sz="3200"/>
+                    </a:p>
+                  </a:txBody>
+                  <a:tcPr marL="91425" marR="91425" marT="91425" marB="91425">
+                    <a:lnL w="9525" cap="flat" cmpd="sng">
+                      <a:solidFill>
+                        <a:schemeClr val="dk1"/>
+                      </a:solidFill>
+                      <a:prstDash val="solid"/>
+                      <a:round/>
+                      <a:headEnd type="none" w="sm" len="sm"/>
+                      <a:tailEnd type="none" w="sm" len="sm"/>
+                    </a:lnL>
+                    <a:lnR w="9525" cap="flat" cmpd="sng">
+                      <a:solidFill>
+                        <a:schemeClr val="dk1"/>
+                      </a:solidFill>
+                      <a:prstDash val="solid"/>
+                      <a:round/>
+                      <a:headEnd type="none" w="sm" len="sm"/>
+                      <a:tailEnd type="none" w="sm" len="sm"/>
+                    </a:lnR>
+                    <a:lnT w="9525" cap="flat" cmpd="sng">
+                      <a:solidFill>
+                        <a:schemeClr val="dk1"/>
+                      </a:solidFill>
+                      <a:prstDash val="solid"/>
+                      <a:round/>
+                      <a:headEnd type="none" w="sm" len="sm"/>
+                      <a:tailEnd type="none" w="sm" len="sm"/>
+                    </a:lnT>
+                    <a:lnB w="9525" cap="flat" cmpd="sng">
+                      <a:solidFill>
+                        <a:schemeClr val="dk1"/>
+                      </a:solidFill>
+                      <a:prstDash val="solid"/>
+                      <a:round/>
+                      <a:headEnd type="none" w="sm" len="sm"/>
+                      <a:tailEnd type="none" w="sm" len="sm"/>
+                    </a:lnB>
+                  </a:tcPr>
+                </a:tc>
+                <a:tc>
+                  <a:txBody>
+                    <a:bodyPr/>
+                    <a:lstStyle/>
+                    <a:p>
+                      <a:pPr marL="0" lvl="0" indent="0" algn="l" rtl="0">
+                        <a:spcBef>
+                          <a:spcPts val="0"/>
+                        </a:spcBef>
+                        <a:spcAft>
+                          <a:spcPts val="0"/>
+                        </a:spcAft>
+                        <a:buClr>
+                          <a:schemeClr val="dk1"/>
+                        </a:buClr>
+                        <a:buFont typeface="Arial"/>
+                        <a:buNone/>
+                      </a:pPr>
+                      <a:r>
+                        <a:rPr lang="en" sz="1100">
+                          <a:solidFill>
+                            <a:srgbClr val="222A3A"/>
+                          </a:solidFill>
+                          <a:latin typeface="Calibri"/>
+                          <a:ea typeface="Calibri"/>
+                          <a:cs typeface="Calibri"/>
+                          <a:sym typeface="Calibri"/>
+                        </a:rPr>
+                        <a:t> 4.300 </a:t>
+                      </a:r>
+                      <a:endParaRPr sz="3200"/>
+                    </a:p>
+                  </a:txBody>
+                  <a:tcPr marL="91425" marR="91425" marT="91425" marB="91425">
+                    <a:lnL w="9525" cap="flat" cmpd="sng">
+                      <a:solidFill>
+                        <a:schemeClr val="dk1"/>
+                      </a:solidFill>
+                      <a:prstDash val="solid"/>
+                      <a:round/>
+                      <a:headEnd type="none" w="sm" len="sm"/>
+                      <a:tailEnd type="none" w="sm" len="sm"/>
+                    </a:lnL>
+                    <a:lnR w="9525" cap="flat" cmpd="sng">
+                      <a:solidFill>
+                        <a:schemeClr val="dk1"/>
+                      </a:solidFill>
+                      <a:prstDash val="solid"/>
+                      <a:round/>
+                      <a:headEnd type="none" w="sm" len="sm"/>
+                      <a:tailEnd type="none" w="sm" len="sm"/>
+                    </a:lnR>
+                    <a:lnT w="9525" cap="flat" cmpd="sng">
+                      <a:solidFill>
+                        <a:schemeClr val="dk1"/>
+                      </a:solidFill>
+                      <a:prstDash val="solid"/>
+                      <a:round/>
+                      <a:headEnd type="none" w="sm" len="sm"/>
+                      <a:tailEnd type="none" w="sm" len="sm"/>
+                    </a:lnT>
+                    <a:lnB w="9525" cap="flat" cmpd="sng">
+                      <a:solidFill>
+                        <a:schemeClr val="dk1"/>
+                      </a:solidFill>
+                      <a:prstDash val="solid"/>
+                      <a:round/>
+                      <a:headEnd type="none" w="sm" len="sm"/>
+                      <a:tailEnd type="none" w="sm" len="sm"/>
+                    </a:lnB>
+                  </a:tcPr>
+                </a:tc>
+                <a:tc>
+                  <a:txBody>
+                    <a:bodyPr/>
+                    <a:lstStyle/>
+                    <a:p>
+                      <a:pPr marL="0" lvl="0" indent="0" algn="l" rtl="0">
+                        <a:spcBef>
+                          <a:spcPts val="0"/>
+                        </a:spcBef>
+                        <a:spcAft>
+                          <a:spcPts val="0"/>
+                        </a:spcAft>
+                        <a:buClr>
+                          <a:schemeClr val="dk1"/>
+                        </a:buClr>
+                        <a:buFont typeface="Arial"/>
+                        <a:buNone/>
+                      </a:pPr>
+                      <a:r>
+                        <a:rPr lang="en" sz="1100" dirty="0">
+                          <a:solidFill>
+                            <a:srgbClr val="222A3A"/>
+                          </a:solidFill>
+                          <a:latin typeface="Calibri"/>
+                          <a:ea typeface="Calibri"/>
+                          <a:cs typeface="Calibri"/>
+                          <a:sym typeface="Calibri"/>
+                        </a:rPr>
+                        <a:t>2.907</a:t>
+                      </a:r>
+                      <a:endParaRPr sz="3200" dirty="0"/>
+                    </a:p>
+                  </a:txBody>
+                  <a:tcPr marL="91425" marR="91425" marT="91425" marB="91425">
+                    <a:lnL w="9525" cap="flat" cmpd="sng">
+                      <a:solidFill>
+                        <a:schemeClr val="dk1"/>
+                      </a:solidFill>
+                      <a:prstDash val="solid"/>
+                      <a:round/>
+                      <a:headEnd type="none" w="sm" len="sm"/>
+                      <a:tailEnd type="none" w="sm" len="sm"/>
+                    </a:lnL>
+                    <a:lnR w="9525" cap="flat" cmpd="sng">
+                      <a:solidFill>
+                        <a:schemeClr val="dk1"/>
+                      </a:solidFill>
+                      <a:prstDash val="solid"/>
+                      <a:round/>
+                      <a:headEnd type="none" w="sm" len="sm"/>
+                      <a:tailEnd type="none" w="sm" len="sm"/>
+                    </a:lnR>
+                    <a:lnT w="9525" cap="flat" cmpd="sng">
+                      <a:solidFill>
+                        <a:schemeClr val="dk1"/>
+                      </a:solidFill>
+                      <a:prstDash val="solid"/>
+                      <a:round/>
+                      <a:headEnd type="none" w="sm" len="sm"/>
+                      <a:tailEnd type="none" w="sm" len="sm"/>
+                    </a:lnT>
+                    <a:lnB w="9525" cap="flat" cmpd="sng">
+                      <a:solidFill>
+                        <a:schemeClr val="dk1"/>
+                      </a:solidFill>
+                      <a:prstDash val="solid"/>
+                      <a:round/>
+                      <a:headEnd type="none" w="sm" len="sm"/>
+                      <a:tailEnd type="none" w="sm" len="sm"/>
+                    </a:lnB>
+                  </a:tcPr>
+                </a:tc>
+                <a:extLst>
+                  <a:ext uri="{0D108BD9-81ED-4DB2-BD59-A6C34878D82A}">
+                    <a16:rowId xmlns:a16="http://schemas.microsoft.com/office/drawing/2014/main" val="10002"/>
+                  </a:ext>
+                </a:extLst>
+              </a:tr>
+              <a:tr h="480841">
+                <a:tc>
+                  <a:txBody>
+                    <a:bodyPr/>
+                    <a:lstStyle/>
+                    <a:p>
+                      <a:pPr marL="0" lvl="0" indent="0" algn="l" rtl="0">
+                        <a:spcBef>
+                          <a:spcPts val="0"/>
+                        </a:spcBef>
+                        <a:spcAft>
+                          <a:spcPts val="0"/>
+                        </a:spcAft>
+                        <a:buClr>
+                          <a:schemeClr val="dk1"/>
+                        </a:buClr>
+                        <a:buFont typeface="Arial"/>
+                        <a:buNone/>
+                      </a:pPr>
+                      <a:r>
+                        <a:rPr lang="en" sz="1100">
+                          <a:solidFill>
+                            <a:srgbClr val="00B050"/>
+                          </a:solidFill>
+                          <a:latin typeface="Calibri"/>
+                          <a:ea typeface="Calibri"/>
+                          <a:cs typeface="Calibri"/>
+                          <a:sym typeface="Calibri"/>
+                        </a:rPr>
+                        <a:t>GR-Add MMF </a:t>
+                      </a:r>
+                      <a:endParaRPr sz="1100">
+                        <a:solidFill>
+                          <a:srgbClr val="222A3A"/>
+                        </a:solidFill>
+                        <a:latin typeface="Calibri"/>
+                        <a:ea typeface="Calibri"/>
+                        <a:cs typeface="Calibri"/>
+                        <a:sym typeface="Calibri"/>
+                      </a:endParaRPr>
+                    </a:p>
+                  </a:txBody>
+                  <a:tcPr marL="91425" marR="91425" marT="91425" marB="91425">
+                    <a:lnL w="9525" cap="flat" cmpd="sng">
+                      <a:solidFill>
+                        <a:schemeClr val="dk1"/>
+                      </a:solidFill>
+                      <a:prstDash val="solid"/>
+                      <a:round/>
+                      <a:headEnd type="none" w="sm" len="sm"/>
+                      <a:tailEnd type="none" w="sm" len="sm"/>
+                    </a:lnL>
+                    <a:lnR w="9525" cap="flat" cmpd="sng">
+                      <a:solidFill>
+                        <a:schemeClr val="dk1"/>
+                      </a:solidFill>
+                      <a:prstDash val="solid"/>
+                      <a:round/>
+                      <a:headEnd type="none" w="sm" len="sm"/>
+                      <a:tailEnd type="none" w="sm" len="sm"/>
+                    </a:lnR>
+                    <a:lnT w="9525" cap="flat" cmpd="sng">
+                      <a:solidFill>
+                        <a:schemeClr val="dk1"/>
+                      </a:solidFill>
+                      <a:prstDash val="solid"/>
+                      <a:round/>
+                      <a:headEnd type="none" w="sm" len="sm"/>
+                      <a:tailEnd type="none" w="sm" len="sm"/>
+                    </a:lnT>
+                    <a:lnB w="9525" cap="flat" cmpd="sng">
+                      <a:solidFill>
+                        <a:schemeClr val="dk1"/>
+                      </a:solidFill>
+                      <a:prstDash val="solid"/>
+                      <a:round/>
+                      <a:headEnd type="none" w="sm" len="sm"/>
+                      <a:tailEnd type="none" w="sm" len="sm"/>
+                    </a:lnB>
+                  </a:tcPr>
+                </a:tc>
+                <a:tc>
+                  <a:txBody>
+                    <a:bodyPr/>
+                    <a:lstStyle/>
+                    <a:p>
+                      <a:pPr marL="0" lvl="0" indent="0" algn="l" rtl="0">
+                        <a:spcBef>
+                          <a:spcPts val="0"/>
+                        </a:spcBef>
+                        <a:spcAft>
+                          <a:spcPts val="0"/>
+                        </a:spcAft>
+                        <a:buClr>
+                          <a:schemeClr val="dk1"/>
+                        </a:buClr>
+                        <a:buFont typeface="Arial"/>
+                        <a:buNone/>
+                      </a:pPr>
+                      <a:r>
+                        <a:rPr lang="en" sz="1100">
+                          <a:solidFill>
+                            <a:srgbClr val="00B050"/>
+                          </a:solidFill>
+                          <a:latin typeface="Calibri"/>
+                          <a:ea typeface="Calibri"/>
+                          <a:cs typeface="Calibri"/>
+                          <a:sym typeface="Calibri"/>
+                        </a:rPr>
+                        <a:t>1.495</a:t>
+                      </a:r>
+                      <a:endParaRPr sz="1100">
+                        <a:solidFill>
+                          <a:srgbClr val="222A3A"/>
+                        </a:solidFill>
+                        <a:latin typeface="Calibri"/>
+                        <a:ea typeface="Calibri"/>
+                        <a:cs typeface="Calibri"/>
+                        <a:sym typeface="Calibri"/>
+                      </a:endParaRPr>
+                    </a:p>
+                  </a:txBody>
+                  <a:tcPr marL="91425" marR="91425" marT="91425" marB="91425">
+                    <a:lnL w="9525" cap="flat" cmpd="sng">
+                      <a:solidFill>
+                        <a:schemeClr val="dk1"/>
+                      </a:solidFill>
+                      <a:prstDash val="solid"/>
+                      <a:round/>
+                      <a:headEnd type="none" w="sm" len="sm"/>
+                      <a:tailEnd type="none" w="sm" len="sm"/>
+                    </a:lnL>
+                    <a:lnR w="9525" cap="flat" cmpd="sng">
+                      <a:solidFill>
+                        <a:schemeClr val="dk1"/>
+                      </a:solidFill>
+                      <a:prstDash val="solid"/>
+                      <a:round/>
+                      <a:headEnd type="none" w="sm" len="sm"/>
+                      <a:tailEnd type="none" w="sm" len="sm"/>
+                    </a:lnR>
+                    <a:lnT w="9525" cap="flat" cmpd="sng">
+                      <a:solidFill>
+                        <a:schemeClr val="dk1"/>
+                      </a:solidFill>
+                      <a:prstDash val="solid"/>
+                      <a:round/>
+                      <a:headEnd type="none" w="sm" len="sm"/>
+                      <a:tailEnd type="none" w="sm" len="sm"/>
+                    </a:lnT>
+                    <a:lnB w="9525" cap="flat" cmpd="sng">
+                      <a:solidFill>
+                        <a:schemeClr val="dk1"/>
+                      </a:solidFill>
+                      <a:prstDash val="solid"/>
+                      <a:round/>
+                      <a:headEnd type="none" w="sm" len="sm"/>
+                      <a:tailEnd type="none" w="sm" len="sm"/>
+                    </a:lnB>
+                  </a:tcPr>
+                </a:tc>
+                <a:tc>
+                  <a:txBody>
+                    <a:bodyPr/>
+                    <a:lstStyle/>
+                    <a:p>
+                      <a:pPr marL="0" lvl="0" indent="0" algn="l" rtl="0">
+                        <a:spcBef>
+                          <a:spcPts val="0"/>
+                        </a:spcBef>
+                        <a:spcAft>
+                          <a:spcPts val="0"/>
+                        </a:spcAft>
+                        <a:buClr>
+                          <a:schemeClr val="dk1"/>
+                        </a:buClr>
+                        <a:buFont typeface="Arial"/>
+                        <a:buNone/>
+                      </a:pPr>
+                      <a:r>
+                        <a:rPr lang="en" sz="1100">
+                          <a:solidFill>
+                            <a:srgbClr val="00B050"/>
+                          </a:solidFill>
+                          <a:latin typeface="Calibri"/>
+                          <a:ea typeface="Calibri"/>
+                          <a:cs typeface="Calibri"/>
+                          <a:sym typeface="Calibri"/>
+                        </a:rPr>
+                        <a:t> 4.250</a:t>
+                      </a:r>
+                      <a:endParaRPr sz="1100">
+                        <a:solidFill>
+                          <a:srgbClr val="222A3A"/>
+                        </a:solidFill>
+                        <a:latin typeface="Calibri"/>
+                        <a:ea typeface="Calibri"/>
+                        <a:cs typeface="Calibri"/>
+                        <a:sym typeface="Calibri"/>
+                      </a:endParaRPr>
+                    </a:p>
+                  </a:txBody>
+                  <a:tcPr marL="91425" marR="91425" marT="91425" marB="91425">
+                    <a:lnL w="9525" cap="flat" cmpd="sng">
+                      <a:solidFill>
+                        <a:schemeClr val="dk1"/>
+                      </a:solidFill>
+                      <a:prstDash val="solid"/>
+                      <a:round/>
+                      <a:headEnd type="none" w="sm" len="sm"/>
+                      <a:tailEnd type="none" w="sm" len="sm"/>
+                    </a:lnL>
+                    <a:lnR w="9525" cap="flat" cmpd="sng">
+                      <a:solidFill>
+                        <a:schemeClr val="dk1"/>
+                      </a:solidFill>
+                      <a:prstDash val="solid"/>
+                      <a:round/>
+                      <a:headEnd type="none" w="sm" len="sm"/>
+                      <a:tailEnd type="none" w="sm" len="sm"/>
+                    </a:lnR>
+                    <a:lnT w="9525" cap="flat" cmpd="sng">
+                      <a:solidFill>
+                        <a:schemeClr val="dk1"/>
+                      </a:solidFill>
+                      <a:prstDash val="solid"/>
+                      <a:round/>
+                      <a:headEnd type="none" w="sm" len="sm"/>
+                      <a:tailEnd type="none" w="sm" len="sm"/>
+                    </a:lnT>
+                    <a:lnB w="9525" cap="flat" cmpd="sng">
+                      <a:solidFill>
+                        <a:schemeClr val="dk1"/>
+                      </a:solidFill>
+                      <a:prstDash val="solid"/>
+                      <a:round/>
+                      <a:headEnd type="none" w="sm" len="sm"/>
+                      <a:tailEnd type="none" w="sm" len="sm"/>
+                    </a:lnB>
+                  </a:tcPr>
+                </a:tc>
+                <a:tc>
+                  <a:txBody>
+                    <a:bodyPr/>
+                    <a:lstStyle/>
+                    <a:p>
+                      <a:pPr marL="0" lvl="0" indent="0" algn="l" rtl="0">
+                        <a:spcBef>
+                          <a:spcPts val="0"/>
+                        </a:spcBef>
+                        <a:spcAft>
+                          <a:spcPts val="0"/>
+                        </a:spcAft>
+                        <a:buClr>
+                          <a:schemeClr val="dk1"/>
+                        </a:buClr>
+                        <a:buFont typeface="Arial"/>
+                        <a:buNone/>
+                      </a:pPr>
+                      <a:r>
+                        <a:rPr lang="en" sz="1100" dirty="0">
+                          <a:solidFill>
+                            <a:srgbClr val="00B050"/>
+                          </a:solidFill>
+                          <a:latin typeface="Calibri"/>
+                          <a:ea typeface="Calibri"/>
+                          <a:cs typeface="Calibri"/>
+                          <a:sym typeface="Calibri"/>
+                        </a:rPr>
+                        <a:t>  2.872  &lt;-- best</a:t>
+                      </a:r>
+                      <a:endParaRPr sz="1100" dirty="0">
+                        <a:solidFill>
+                          <a:srgbClr val="222A3A"/>
+                        </a:solidFill>
+                        <a:latin typeface="Calibri"/>
+                        <a:ea typeface="Calibri"/>
+                        <a:cs typeface="Calibri"/>
+                        <a:sym typeface="Calibri"/>
+                      </a:endParaRPr>
+                    </a:p>
+                  </a:txBody>
+                  <a:tcPr marL="91425" marR="91425" marT="91425" marB="91425">
+                    <a:lnL w="9525" cap="flat" cmpd="sng">
+                      <a:solidFill>
+                        <a:schemeClr val="dk1"/>
+                      </a:solidFill>
+                      <a:prstDash val="solid"/>
+                      <a:round/>
+                      <a:headEnd type="none" w="sm" len="sm"/>
+                      <a:tailEnd type="none" w="sm" len="sm"/>
+                    </a:lnL>
+                    <a:lnR w="9525" cap="flat" cmpd="sng">
+                      <a:solidFill>
+                        <a:schemeClr val="dk1"/>
+                      </a:solidFill>
+                      <a:prstDash val="solid"/>
+                      <a:round/>
+                      <a:headEnd type="none" w="sm" len="sm"/>
+                      <a:tailEnd type="none" w="sm" len="sm"/>
+                    </a:lnR>
+                    <a:lnT w="9525" cap="flat" cmpd="sng">
+                      <a:solidFill>
+                        <a:schemeClr val="dk1"/>
+                      </a:solidFill>
+                      <a:prstDash val="solid"/>
+                      <a:round/>
+                      <a:headEnd type="none" w="sm" len="sm"/>
+                      <a:tailEnd type="none" w="sm" len="sm"/>
+                    </a:lnT>
+                    <a:lnB w="9525" cap="flat" cmpd="sng">
+                      <a:solidFill>
+                        <a:schemeClr val="dk1"/>
+                      </a:solidFill>
+                      <a:prstDash val="solid"/>
+                      <a:round/>
+                      <a:headEnd type="none" w="sm" len="sm"/>
+                      <a:tailEnd type="none" w="sm" len="sm"/>
+                    </a:lnB>
+                  </a:tcPr>
+                </a:tc>
+                <a:extLst>
+                  <a:ext uri="{0D108BD9-81ED-4DB2-BD59-A6C34878D82A}">
+                    <a16:rowId xmlns:a16="http://schemas.microsoft.com/office/drawing/2014/main" val="10003"/>
+                  </a:ext>
+                </a:extLst>
+              </a:tr>
+            </a:tbl>
+          </a:graphicData>
+        </a:graphic>
+      </p:graphicFrame>
+      <p:graphicFrame>
+        <p:nvGraphicFramePr>
+          <p:cNvPr id="28" name="Google Shape;251;p29">
+            <a:extLst>
+              <a:ext uri="{FF2B5EF4-FFF2-40B4-BE49-F238E27FC236}">
+                <a16:creationId xmlns:a16="http://schemas.microsoft.com/office/drawing/2014/main" id="{E14B9814-8899-8594-3681-9F4B85F97CB2}"/>
+              </a:ext>
+            </a:extLst>
+          </p:cNvPr>
+          <p:cNvGraphicFramePr/>
+          <p:nvPr>
+            <p:extLst>
+              <p:ext uri="{D42A27DB-BD31-4B8C-83A1-F6EECF244321}">
+                <p14:modId xmlns:p14="http://schemas.microsoft.com/office/powerpoint/2010/main" val="779150241"/>
+              </p:ext>
+            </p:extLst>
+          </p:nvPr>
+        </p:nvGraphicFramePr>
+        <p:xfrm>
+          <a:off x="6440029" y="1785454"/>
+          <a:ext cx="5035692" cy="1744130"/>
+        </p:xfrm>
+        <a:graphic>
+          <a:graphicData uri="http://schemas.openxmlformats.org/drawingml/2006/table">
+            <a:tbl>
+              <a:tblPr>
+                <a:noFill/>
+              </a:tblPr>
+              <a:tblGrid>
+                <a:gridCol w="1258923">
+                  <a:extLst>
+                    <a:ext uri="{9D8B030D-6E8A-4147-A177-3AD203B41FA5}">
+                      <a16:colId xmlns:a16="http://schemas.microsoft.com/office/drawing/2014/main" val="20000"/>
+                    </a:ext>
+                  </a:extLst>
+                </a:gridCol>
+                <a:gridCol w="1258923">
+                  <a:extLst>
+                    <a:ext uri="{9D8B030D-6E8A-4147-A177-3AD203B41FA5}">
+                      <a16:colId xmlns:a16="http://schemas.microsoft.com/office/drawing/2014/main" val="20001"/>
+                    </a:ext>
+                  </a:extLst>
+                </a:gridCol>
+                <a:gridCol w="1258923">
+                  <a:extLst>
+                    <a:ext uri="{9D8B030D-6E8A-4147-A177-3AD203B41FA5}">
+                      <a16:colId xmlns:a16="http://schemas.microsoft.com/office/drawing/2014/main" val="20002"/>
+                    </a:ext>
+                  </a:extLst>
+                </a:gridCol>
+                <a:gridCol w="1258923">
+                  <a:extLst>
+                    <a:ext uri="{9D8B030D-6E8A-4147-A177-3AD203B41FA5}">
+                      <a16:colId xmlns:a16="http://schemas.microsoft.com/office/drawing/2014/main" val="20003"/>
+                    </a:ext>
+                  </a:extLst>
+                </a:gridCol>
+              </a:tblGrid>
+              <a:tr h="406605">
+                <a:tc>
+                  <a:txBody>
+                    <a:bodyPr/>
+                    <a:lstStyle/>
+                    <a:p>
+                      <a:pPr marL="0" lvl="0" indent="0" algn="l" rtl="0">
+                        <a:spcBef>
+                          <a:spcPts val="0"/>
+                        </a:spcBef>
+                        <a:spcAft>
+                          <a:spcPts val="0"/>
+                        </a:spcAft>
+                        <a:buNone/>
+                      </a:pPr>
+                      <a:r>
+                        <a:rPr lang="en" sz="1200" dirty="0"/>
+                        <a:t>Model</a:t>
+                      </a:r>
+                      <a:endParaRPr sz="1100" dirty="0"/>
+                    </a:p>
+                  </a:txBody>
+                  <a:tcPr marL="91425" marR="91425" marT="91425" marB="91425">
+                    <a:lnL w="9525" cap="flat" cmpd="sng">
+                      <a:solidFill>
+                        <a:schemeClr val="dk1"/>
+                      </a:solidFill>
+                      <a:prstDash val="solid"/>
+                      <a:round/>
+                      <a:headEnd type="none" w="sm" len="sm"/>
+                      <a:tailEnd type="none" w="sm" len="sm"/>
+                    </a:lnL>
+                    <a:lnR w="9525" cap="flat" cmpd="sng">
+                      <a:solidFill>
+                        <a:schemeClr val="dk1"/>
+                      </a:solidFill>
+                      <a:prstDash val="solid"/>
+                      <a:round/>
+                      <a:headEnd type="none" w="sm" len="sm"/>
+                      <a:tailEnd type="none" w="sm" len="sm"/>
+                    </a:lnR>
+                    <a:lnT w="9525" cap="flat" cmpd="sng">
+                      <a:solidFill>
+                        <a:schemeClr val="dk1"/>
+                      </a:solidFill>
+                      <a:prstDash val="solid"/>
+                      <a:round/>
+                      <a:headEnd type="none" w="sm" len="sm"/>
+                      <a:tailEnd type="none" w="sm" len="sm"/>
+                    </a:lnT>
+                    <a:lnB w="9525" cap="flat" cmpd="sng">
+                      <a:solidFill>
+                        <a:schemeClr val="dk1"/>
+                      </a:solidFill>
+                      <a:prstDash val="solid"/>
+                      <a:round/>
+                      <a:headEnd type="none" w="sm" len="sm"/>
+                      <a:tailEnd type="none" w="sm" len="sm"/>
+                    </a:lnB>
+                  </a:tcPr>
+                </a:tc>
+                <a:tc>
+                  <a:txBody>
+                    <a:bodyPr/>
+                    <a:lstStyle/>
+                    <a:p>
+                      <a:pPr marL="0" lvl="0" indent="0" algn="l" rtl="0">
+                        <a:spcBef>
+                          <a:spcPts val="0"/>
+                        </a:spcBef>
+                        <a:spcAft>
+                          <a:spcPts val="0"/>
+                        </a:spcAft>
+                        <a:buNone/>
+                      </a:pPr>
+                      <a:r>
+                        <a:rPr lang="en" sz="1200" dirty="0">
+                          <a:solidFill>
+                            <a:srgbClr val="555555"/>
+                          </a:solidFill>
+                          <a:latin typeface="Calibri"/>
+                          <a:ea typeface="Calibri"/>
+                          <a:cs typeface="Calibri"/>
+                          <a:sym typeface="Calibri"/>
+                        </a:rPr>
+                        <a:t>GDP MSE</a:t>
+                      </a:r>
+                      <a:endParaRPr sz="1200" dirty="0"/>
+                    </a:p>
+                  </a:txBody>
+                  <a:tcPr marL="91425" marR="91425" marT="91425" marB="91425">
+                    <a:lnL w="9525" cap="flat" cmpd="sng">
+                      <a:solidFill>
+                        <a:schemeClr val="dk1"/>
+                      </a:solidFill>
+                      <a:prstDash val="solid"/>
+                      <a:round/>
+                      <a:headEnd type="none" w="sm" len="sm"/>
+                      <a:tailEnd type="none" w="sm" len="sm"/>
+                    </a:lnL>
+                    <a:lnR w="9525" cap="flat" cmpd="sng">
+                      <a:solidFill>
+                        <a:schemeClr val="dk1"/>
+                      </a:solidFill>
+                      <a:prstDash val="solid"/>
+                      <a:round/>
+                      <a:headEnd type="none" w="sm" len="sm"/>
+                      <a:tailEnd type="none" w="sm" len="sm"/>
+                    </a:lnR>
+                    <a:lnT w="9525" cap="flat" cmpd="sng">
+                      <a:solidFill>
+                        <a:schemeClr val="dk1"/>
+                      </a:solidFill>
+                      <a:prstDash val="solid"/>
+                      <a:round/>
+                      <a:headEnd type="none" w="sm" len="sm"/>
+                      <a:tailEnd type="none" w="sm" len="sm"/>
+                    </a:lnT>
+                    <a:lnB w="9525" cap="flat" cmpd="sng">
+                      <a:solidFill>
+                        <a:schemeClr val="dk1"/>
+                      </a:solidFill>
+                      <a:prstDash val="solid"/>
+                      <a:round/>
+                      <a:headEnd type="none" w="sm" len="sm"/>
+                      <a:tailEnd type="none" w="sm" len="sm"/>
+                    </a:lnB>
+                  </a:tcPr>
+                </a:tc>
+                <a:tc>
+                  <a:txBody>
+                    <a:bodyPr/>
+                    <a:lstStyle/>
+                    <a:p>
+                      <a:pPr marL="0" lvl="0" indent="0" algn="l" rtl="0">
+                        <a:spcBef>
+                          <a:spcPts val="0"/>
+                        </a:spcBef>
+                        <a:spcAft>
+                          <a:spcPts val="0"/>
+                        </a:spcAft>
+                        <a:buNone/>
+                      </a:pPr>
+                      <a:r>
+                        <a:rPr lang="en" sz="1200">
+                          <a:solidFill>
+                            <a:srgbClr val="555555"/>
+                          </a:solidFill>
+                          <a:latin typeface="Calibri"/>
+                          <a:ea typeface="Calibri"/>
+                          <a:cs typeface="Calibri"/>
+                          <a:sym typeface="Calibri"/>
+                        </a:rPr>
+                        <a:t>Inf MSE</a:t>
+                      </a:r>
+                      <a:endParaRPr sz="1200"/>
+                    </a:p>
+                  </a:txBody>
+                  <a:tcPr marL="91425" marR="91425" marT="91425" marB="91425">
+                    <a:lnL w="9525" cap="flat" cmpd="sng">
+                      <a:solidFill>
+                        <a:schemeClr val="dk1"/>
+                      </a:solidFill>
+                      <a:prstDash val="solid"/>
+                      <a:round/>
+                      <a:headEnd type="none" w="sm" len="sm"/>
+                      <a:tailEnd type="none" w="sm" len="sm"/>
+                    </a:lnL>
+                    <a:lnR w="9525" cap="flat" cmpd="sng">
+                      <a:solidFill>
+                        <a:schemeClr val="dk1"/>
+                      </a:solidFill>
+                      <a:prstDash val="solid"/>
+                      <a:round/>
+                      <a:headEnd type="none" w="sm" len="sm"/>
+                      <a:tailEnd type="none" w="sm" len="sm"/>
+                    </a:lnR>
+                    <a:lnT w="9525" cap="flat" cmpd="sng">
+                      <a:solidFill>
+                        <a:schemeClr val="dk1"/>
+                      </a:solidFill>
+                      <a:prstDash val="solid"/>
+                      <a:round/>
+                      <a:headEnd type="none" w="sm" len="sm"/>
+                      <a:tailEnd type="none" w="sm" len="sm"/>
+                    </a:lnT>
+                    <a:lnB w="9525" cap="flat" cmpd="sng">
+                      <a:solidFill>
+                        <a:schemeClr val="dk1"/>
+                      </a:solidFill>
+                      <a:prstDash val="solid"/>
+                      <a:round/>
+                      <a:headEnd type="none" w="sm" len="sm"/>
+                      <a:tailEnd type="none" w="sm" len="sm"/>
+                    </a:lnB>
+                  </a:tcPr>
+                </a:tc>
+                <a:tc>
+                  <a:txBody>
+                    <a:bodyPr/>
+                    <a:lstStyle/>
+                    <a:p>
+                      <a:pPr marL="0" lvl="0" indent="0" algn="l" rtl="0">
+                        <a:spcBef>
+                          <a:spcPts val="0"/>
+                        </a:spcBef>
+                        <a:spcAft>
+                          <a:spcPts val="0"/>
+                        </a:spcAft>
+                        <a:buNone/>
+                      </a:pPr>
+                      <a:r>
+                        <a:rPr lang="en" sz="1200" dirty="0">
+                          <a:solidFill>
+                            <a:srgbClr val="555555"/>
+                          </a:solidFill>
+                          <a:latin typeface="Calibri"/>
+                          <a:ea typeface="Calibri"/>
+                          <a:cs typeface="Calibri"/>
+                          <a:sym typeface="Calibri"/>
+                        </a:rPr>
+                        <a:t>Overall</a:t>
+                      </a:r>
+                      <a:endParaRPr sz="1200" dirty="0"/>
+                    </a:p>
+                  </a:txBody>
+                  <a:tcPr marL="91425" marR="91425" marT="91425" marB="91425">
+                    <a:lnL w="9525" cap="flat" cmpd="sng">
+                      <a:solidFill>
+                        <a:schemeClr val="dk1"/>
+                      </a:solidFill>
+                      <a:prstDash val="solid"/>
+                      <a:round/>
+                      <a:headEnd type="none" w="sm" len="sm"/>
+                      <a:tailEnd type="none" w="sm" len="sm"/>
+                    </a:lnL>
+                    <a:lnR w="9525" cap="flat" cmpd="sng">
+                      <a:solidFill>
+                        <a:schemeClr val="dk1"/>
+                      </a:solidFill>
+                      <a:prstDash val="solid"/>
+                      <a:round/>
+                      <a:headEnd type="none" w="sm" len="sm"/>
+                      <a:tailEnd type="none" w="sm" len="sm"/>
+                    </a:lnR>
+                    <a:lnT w="9525" cap="flat" cmpd="sng">
+                      <a:solidFill>
+                        <a:schemeClr val="dk1"/>
+                      </a:solidFill>
+                      <a:prstDash val="solid"/>
+                      <a:round/>
+                      <a:headEnd type="none" w="sm" len="sm"/>
+                      <a:tailEnd type="none" w="sm" len="sm"/>
+                    </a:lnT>
+                    <a:lnB w="9525" cap="flat" cmpd="sng">
+                      <a:solidFill>
+                        <a:schemeClr val="dk1"/>
+                      </a:solidFill>
+                      <a:prstDash val="solid"/>
+                      <a:round/>
+                      <a:headEnd type="none" w="sm" len="sm"/>
+                      <a:tailEnd type="none" w="sm" len="sm"/>
+                    </a:lnB>
+                  </a:tcPr>
+                </a:tc>
+                <a:extLst>
+                  <a:ext uri="{0D108BD9-81ED-4DB2-BD59-A6C34878D82A}">
+                    <a16:rowId xmlns:a16="http://schemas.microsoft.com/office/drawing/2014/main" val="10000"/>
+                  </a:ext>
+                </a:extLst>
+              </a:tr>
+              <a:tr h="351973">
+                <a:tc>
+                  <a:txBody>
+                    <a:bodyPr/>
+                    <a:lstStyle/>
+                    <a:p>
+                      <a:pPr marL="0" lvl="0" indent="0" algn="l" rtl="0">
+                        <a:spcBef>
+                          <a:spcPts val="0"/>
+                        </a:spcBef>
+                        <a:spcAft>
+                          <a:spcPts val="0"/>
+                        </a:spcAft>
+                        <a:buNone/>
+                      </a:pPr>
+                      <a:r>
+                        <a:rPr lang="en" sz="1100">
+                          <a:solidFill>
+                            <a:srgbClr val="222A3A"/>
+                          </a:solidFill>
+                          <a:latin typeface="Calibri"/>
+                          <a:ea typeface="Calibri"/>
+                          <a:cs typeface="Calibri"/>
+                          <a:sym typeface="Calibri"/>
+                        </a:rPr>
+                        <a:t>DLinear  </a:t>
+                      </a:r>
+                      <a:endParaRPr sz="1100"/>
+                    </a:p>
+                  </a:txBody>
+                  <a:tcPr marL="91425" marR="91425" marT="91425" marB="91425">
+                    <a:lnL w="9525" cap="flat" cmpd="sng">
+                      <a:solidFill>
+                        <a:schemeClr val="dk1"/>
+                      </a:solidFill>
+                      <a:prstDash val="solid"/>
+                      <a:round/>
+                      <a:headEnd type="none" w="sm" len="sm"/>
+                      <a:tailEnd type="none" w="sm" len="sm"/>
+                    </a:lnL>
+                    <a:lnR w="9525" cap="flat" cmpd="sng">
+                      <a:solidFill>
+                        <a:schemeClr val="dk1"/>
+                      </a:solidFill>
+                      <a:prstDash val="solid"/>
+                      <a:round/>
+                      <a:headEnd type="none" w="sm" len="sm"/>
+                      <a:tailEnd type="none" w="sm" len="sm"/>
+                    </a:lnR>
+                    <a:lnT w="9525" cap="flat" cmpd="sng">
+                      <a:solidFill>
+                        <a:schemeClr val="dk1"/>
+                      </a:solidFill>
+                      <a:prstDash val="solid"/>
+                      <a:round/>
+                      <a:headEnd type="none" w="sm" len="sm"/>
+                      <a:tailEnd type="none" w="sm" len="sm"/>
+                    </a:lnT>
+                    <a:lnB w="9525" cap="flat" cmpd="sng">
+                      <a:solidFill>
+                        <a:schemeClr val="dk1"/>
+                      </a:solidFill>
+                      <a:prstDash val="solid"/>
+                      <a:round/>
+                      <a:headEnd type="none" w="sm" len="sm"/>
+                      <a:tailEnd type="none" w="sm" len="sm"/>
+                    </a:lnB>
+                  </a:tcPr>
+                </a:tc>
+                <a:tc>
+                  <a:txBody>
+                    <a:bodyPr/>
+                    <a:lstStyle/>
+                    <a:p>
+                      <a:pPr marL="0" lvl="0" indent="0" algn="l" rtl="0">
+                        <a:spcBef>
+                          <a:spcPts val="0"/>
+                        </a:spcBef>
+                        <a:spcAft>
+                          <a:spcPts val="0"/>
+                        </a:spcAft>
+                        <a:buNone/>
+                      </a:pPr>
+                      <a:r>
+                        <a:rPr lang="en" sz="1100">
+                          <a:solidFill>
+                            <a:srgbClr val="222A3A"/>
+                          </a:solidFill>
+                          <a:latin typeface="Calibri"/>
+                          <a:ea typeface="Calibri"/>
+                          <a:cs typeface="Calibri"/>
+                          <a:sym typeface="Calibri"/>
+                        </a:rPr>
+                        <a:t>1.344 </a:t>
+                      </a:r>
+                      <a:endParaRPr sz="1100"/>
+                    </a:p>
+                  </a:txBody>
+                  <a:tcPr marL="91425" marR="91425" marT="91425" marB="91425">
+                    <a:lnL w="9525" cap="flat" cmpd="sng">
+                      <a:solidFill>
+                        <a:schemeClr val="dk1"/>
+                      </a:solidFill>
+                      <a:prstDash val="solid"/>
+                      <a:round/>
+                      <a:headEnd type="none" w="sm" len="sm"/>
+                      <a:tailEnd type="none" w="sm" len="sm"/>
+                    </a:lnL>
+                    <a:lnR w="9525" cap="flat" cmpd="sng">
+                      <a:solidFill>
+                        <a:schemeClr val="dk1"/>
+                      </a:solidFill>
+                      <a:prstDash val="solid"/>
+                      <a:round/>
+                      <a:headEnd type="none" w="sm" len="sm"/>
+                      <a:tailEnd type="none" w="sm" len="sm"/>
+                    </a:lnR>
+                    <a:lnT w="9525" cap="flat" cmpd="sng">
+                      <a:solidFill>
+                        <a:schemeClr val="dk1"/>
+                      </a:solidFill>
+                      <a:prstDash val="solid"/>
+                      <a:round/>
+                      <a:headEnd type="none" w="sm" len="sm"/>
+                      <a:tailEnd type="none" w="sm" len="sm"/>
+                    </a:lnT>
+                    <a:lnB w="9525" cap="flat" cmpd="sng">
+                      <a:solidFill>
+                        <a:schemeClr val="dk1"/>
+                      </a:solidFill>
+                      <a:prstDash val="solid"/>
+                      <a:round/>
+                      <a:headEnd type="none" w="sm" len="sm"/>
+                      <a:tailEnd type="none" w="sm" len="sm"/>
+                    </a:lnB>
+                  </a:tcPr>
+                </a:tc>
+                <a:tc>
+                  <a:txBody>
+                    <a:bodyPr/>
+                    <a:lstStyle/>
+                    <a:p>
+                      <a:pPr marL="0" lvl="0" indent="0" algn="l" rtl="0">
+                        <a:spcBef>
+                          <a:spcPts val="0"/>
+                        </a:spcBef>
+                        <a:spcAft>
+                          <a:spcPts val="0"/>
+                        </a:spcAft>
+                        <a:buNone/>
+                      </a:pPr>
+                      <a:r>
+                        <a:rPr lang="en" sz="1100">
+                          <a:solidFill>
+                            <a:srgbClr val="222A3A"/>
+                          </a:solidFill>
+                          <a:latin typeface="Calibri"/>
+                          <a:ea typeface="Calibri"/>
+                          <a:cs typeface="Calibri"/>
+                          <a:sym typeface="Calibri"/>
+                        </a:rPr>
+                        <a:t>4.027</a:t>
+                      </a:r>
+                      <a:endParaRPr sz="1100"/>
+                    </a:p>
+                  </a:txBody>
+                  <a:tcPr marL="91425" marR="91425" marT="91425" marB="91425">
+                    <a:lnL w="9525" cap="flat" cmpd="sng">
+                      <a:solidFill>
+                        <a:schemeClr val="dk1"/>
+                      </a:solidFill>
+                      <a:prstDash val="solid"/>
+                      <a:round/>
+                      <a:headEnd type="none" w="sm" len="sm"/>
+                      <a:tailEnd type="none" w="sm" len="sm"/>
+                    </a:lnL>
+                    <a:lnR w="9525" cap="flat" cmpd="sng">
+                      <a:solidFill>
+                        <a:schemeClr val="dk1"/>
+                      </a:solidFill>
+                      <a:prstDash val="solid"/>
+                      <a:round/>
+                      <a:headEnd type="none" w="sm" len="sm"/>
+                      <a:tailEnd type="none" w="sm" len="sm"/>
+                    </a:lnR>
+                    <a:lnT w="9525" cap="flat" cmpd="sng">
+                      <a:solidFill>
+                        <a:schemeClr val="dk1"/>
+                      </a:solidFill>
+                      <a:prstDash val="solid"/>
+                      <a:round/>
+                      <a:headEnd type="none" w="sm" len="sm"/>
+                      <a:tailEnd type="none" w="sm" len="sm"/>
+                    </a:lnT>
+                    <a:lnB w="9525" cap="flat" cmpd="sng">
+                      <a:solidFill>
+                        <a:schemeClr val="dk1"/>
+                      </a:solidFill>
+                      <a:prstDash val="solid"/>
+                      <a:round/>
+                      <a:headEnd type="none" w="sm" len="sm"/>
+                      <a:tailEnd type="none" w="sm" len="sm"/>
+                    </a:lnB>
+                  </a:tcPr>
+                </a:tc>
+                <a:tc>
+                  <a:txBody>
+                    <a:bodyPr/>
+                    <a:lstStyle/>
+                    <a:p>
+                      <a:pPr marL="0" lvl="0" indent="0" algn="l" rtl="0">
+                        <a:spcBef>
+                          <a:spcPts val="0"/>
+                        </a:spcBef>
+                        <a:spcAft>
+                          <a:spcPts val="0"/>
+                        </a:spcAft>
+                        <a:buClr>
+                          <a:schemeClr val="dk1"/>
+                        </a:buClr>
+                        <a:buFont typeface="Arial"/>
+                        <a:buNone/>
+                      </a:pPr>
+                      <a:r>
+                        <a:rPr lang="en" sz="1100">
+                          <a:solidFill>
+                            <a:srgbClr val="222A3A"/>
+                          </a:solidFill>
+                          <a:latin typeface="Calibri"/>
+                          <a:ea typeface="Calibri"/>
+                          <a:cs typeface="Calibri"/>
+                          <a:sym typeface="Calibri"/>
+                        </a:rPr>
+                        <a:t>2.685</a:t>
+                      </a:r>
+                      <a:endParaRPr sz="1100"/>
+                    </a:p>
+                  </a:txBody>
+                  <a:tcPr marL="91425" marR="91425" marT="91425" marB="91425">
+                    <a:lnL w="9525" cap="flat" cmpd="sng">
+                      <a:solidFill>
+                        <a:schemeClr val="dk1"/>
+                      </a:solidFill>
+                      <a:prstDash val="solid"/>
+                      <a:round/>
+                      <a:headEnd type="none" w="sm" len="sm"/>
+                      <a:tailEnd type="none" w="sm" len="sm"/>
+                    </a:lnL>
+                    <a:lnR w="9525" cap="flat" cmpd="sng">
+                      <a:solidFill>
+                        <a:schemeClr val="dk1"/>
+                      </a:solidFill>
+                      <a:prstDash val="solid"/>
+                      <a:round/>
+                      <a:headEnd type="none" w="sm" len="sm"/>
+                      <a:tailEnd type="none" w="sm" len="sm"/>
+                    </a:lnR>
+                    <a:lnT w="9525" cap="flat" cmpd="sng">
+                      <a:solidFill>
+                        <a:schemeClr val="dk1"/>
+                      </a:solidFill>
+                      <a:prstDash val="solid"/>
+                      <a:round/>
+                      <a:headEnd type="none" w="sm" len="sm"/>
+                      <a:tailEnd type="none" w="sm" len="sm"/>
+                    </a:lnT>
+                    <a:lnB w="9525" cap="flat" cmpd="sng">
+                      <a:solidFill>
+                        <a:schemeClr val="dk1"/>
+                      </a:solidFill>
+                      <a:prstDash val="solid"/>
+                      <a:round/>
+                      <a:headEnd type="none" w="sm" len="sm"/>
+                      <a:tailEnd type="none" w="sm" len="sm"/>
+                    </a:lnB>
+                  </a:tcPr>
+                </a:tc>
+                <a:extLst>
+                  <a:ext uri="{0D108BD9-81ED-4DB2-BD59-A6C34878D82A}">
+                    <a16:rowId xmlns:a16="http://schemas.microsoft.com/office/drawing/2014/main" val="10001"/>
+                  </a:ext>
+                </a:extLst>
+              </a:tr>
+              <a:tr h="492776">
+                <a:tc>
+                  <a:txBody>
+                    <a:bodyPr/>
+                    <a:lstStyle/>
+                    <a:p>
+                      <a:pPr marL="0" lvl="0" indent="0" algn="l" rtl="0">
+                        <a:spcBef>
+                          <a:spcPts val="0"/>
+                        </a:spcBef>
+                        <a:spcAft>
+                          <a:spcPts val="0"/>
+                        </a:spcAft>
+                        <a:buNone/>
+                      </a:pPr>
+                      <a:r>
+                        <a:rPr lang="en" sz="1100">
+                          <a:solidFill>
+                            <a:srgbClr val="222A3A"/>
+                          </a:solidFill>
+                          <a:latin typeface="Calibri"/>
+                          <a:ea typeface="Calibri"/>
+                          <a:cs typeface="Calibri"/>
+                          <a:sym typeface="Calibri"/>
+                        </a:rPr>
+                        <a:t>NumericalGRU </a:t>
+                      </a:r>
+                      <a:endParaRPr sz="1100"/>
+                    </a:p>
+                  </a:txBody>
+                  <a:tcPr marL="91425" marR="91425" marT="91425" marB="91425">
+                    <a:lnL w="9525" cap="flat" cmpd="sng">
+                      <a:solidFill>
+                        <a:schemeClr val="dk1"/>
+                      </a:solidFill>
+                      <a:prstDash val="solid"/>
+                      <a:round/>
+                      <a:headEnd type="none" w="sm" len="sm"/>
+                      <a:tailEnd type="none" w="sm" len="sm"/>
+                    </a:lnL>
+                    <a:lnR w="9525" cap="flat" cmpd="sng">
+                      <a:solidFill>
+                        <a:schemeClr val="dk1"/>
+                      </a:solidFill>
+                      <a:prstDash val="solid"/>
+                      <a:round/>
+                      <a:headEnd type="none" w="sm" len="sm"/>
+                      <a:tailEnd type="none" w="sm" len="sm"/>
+                    </a:lnR>
+                    <a:lnT w="9525" cap="flat" cmpd="sng">
+                      <a:solidFill>
+                        <a:schemeClr val="dk1"/>
+                      </a:solidFill>
+                      <a:prstDash val="solid"/>
+                      <a:round/>
+                      <a:headEnd type="none" w="sm" len="sm"/>
+                      <a:tailEnd type="none" w="sm" len="sm"/>
+                    </a:lnT>
+                    <a:lnB w="9525" cap="flat" cmpd="sng">
+                      <a:solidFill>
+                        <a:schemeClr val="dk1"/>
+                      </a:solidFill>
+                      <a:prstDash val="solid"/>
+                      <a:round/>
+                      <a:headEnd type="none" w="sm" len="sm"/>
+                      <a:tailEnd type="none" w="sm" len="sm"/>
+                    </a:lnB>
+                  </a:tcPr>
+                </a:tc>
+                <a:tc>
+                  <a:txBody>
+                    <a:bodyPr/>
+                    <a:lstStyle/>
+                    <a:p>
+                      <a:pPr marL="0" lvl="0" indent="0" algn="l" rtl="0">
+                        <a:spcBef>
+                          <a:spcPts val="0"/>
+                        </a:spcBef>
+                        <a:spcAft>
+                          <a:spcPts val="0"/>
+                        </a:spcAft>
+                        <a:buNone/>
+                      </a:pPr>
+                      <a:r>
+                        <a:rPr lang="en" sz="1100" dirty="0">
+                          <a:solidFill>
+                            <a:srgbClr val="222A3A"/>
+                          </a:solidFill>
+                          <a:latin typeface="Calibri"/>
+                          <a:ea typeface="Calibri"/>
+                          <a:cs typeface="Calibri"/>
+                          <a:sym typeface="Calibri"/>
+                        </a:rPr>
+                        <a:t> 1.483</a:t>
+                      </a:r>
+                      <a:endParaRPr sz="1100" dirty="0"/>
+                    </a:p>
+                  </a:txBody>
+                  <a:tcPr marL="91425" marR="91425" marT="91425" marB="91425">
+                    <a:lnL w="9525" cap="flat" cmpd="sng">
+                      <a:solidFill>
+                        <a:schemeClr val="dk1"/>
+                      </a:solidFill>
+                      <a:prstDash val="solid"/>
+                      <a:round/>
+                      <a:headEnd type="none" w="sm" len="sm"/>
+                      <a:tailEnd type="none" w="sm" len="sm"/>
+                    </a:lnL>
+                    <a:lnR w="9525" cap="flat" cmpd="sng">
+                      <a:solidFill>
+                        <a:schemeClr val="dk1"/>
+                      </a:solidFill>
+                      <a:prstDash val="solid"/>
+                      <a:round/>
+                      <a:headEnd type="none" w="sm" len="sm"/>
+                      <a:tailEnd type="none" w="sm" len="sm"/>
+                    </a:lnR>
+                    <a:lnT w="9525" cap="flat" cmpd="sng">
+                      <a:solidFill>
+                        <a:schemeClr val="dk1"/>
+                      </a:solidFill>
+                      <a:prstDash val="solid"/>
+                      <a:round/>
+                      <a:headEnd type="none" w="sm" len="sm"/>
+                      <a:tailEnd type="none" w="sm" len="sm"/>
+                    </a:lnT>
+                    <a:lnB w="9525" cap="flat" cmpd="sng">
+                      <a:solidFill>
+                        <a:schemeClr val="dk1"/>
+                      </a:solidFill>
+                      <a:prstDash val="solid"/>
+                      <a:round/>
+                      <a:headEnd type="none" w="sm" len="sm"/>
+                      <a:tailEnd type="none" w="sm" len="sm"/>
+                    </a:lnB>
+                  </a:tcPr>
+                </a:tc>
+                <a:tc>
+                  <a:txBody>
+                    <a:bodyPr/>
+                    <a:lstStyle/>
+                    <a:p>
+                      <a:pPr marL="0" lvl="0" indent="0" algn="l" rtl="0">
+                        <a:spcBef>
+                          <a:spcPts val="0"/>
+                        </a:spcBef>
+                        <a:spcAft>
+                          <a:spcPts val="0"/>
+                        </a:spcAft>
+                        <a:buClr>
+                          <a:schemeClr val="dk1"/>
+                        </a:buClr>
+                        <a:buFont typeface="Arial"/>
+                        <a:buNone/>
+                      </a:pPr>
+                      <a:r>
+                        <a:rPr lang="en" sz="1100">
+                          <a:solidFill>
+                            <a:srgbClr val="222A3A"/>
+                          </a:solidFill>
+                          <a:latin typeface="Calibri"/>
+                          <a:ea typeface="Calibri"/>
+                          <a:cs typeface="Calibri"/>
+                          <a:sym typeface="Calibri"/>
+                        </a:rPr>
+                        <a:t>4.198 </a:t>
+                      </a:r>
+                      <a:endParaRPr sz="1100"/>
+                    </a:p>
+                  </a:txBody>
+                  <a:tcPr marL="91425" marR="91425" marT="91425" marB="91425">
+                    <a:lnL w="9525" cap="flat" cmpd="sng">
+                      <a:solidFill>
+                        <a:schemeClr val="dk1"/>
+                      </a:solidFill>
+                      <a:prstDash val="solid"/>
+                      <a:round/>
+                      <a:headEnd type="none" w="sm" len="sm"/>
+                      <a:tailEnd type="none" w="sm" len="sm"/>
+                    </a:lnL>
+                    <a:lnR w="9525" cap="flat" cmpd="sng">
+                      <a:solidFill>
+                        <a:schemeClr val="dk1"/>
+                      </a:solidFill>
+                      <a:prstDash val="solid"/>
+                      <a:round/>
+                      <a:headEnd type="none" w="sm" len="sm"/>
+                      <a:tailEnd type="none" w="sm" len="sm"/>
+                    </a:lnR>
+                    <a:lnT w="9525" cap="flat" cmpd="sng">
+                      <a:solidFill>
+                        <a:schemeClr val="dk1"/>
+                      </a:solidFill>
+                      <a:prstDash val="solid"/>
+                      <a:round/>
+                      <a:headEnd type="none" w="sm" len="sm"/>
+                      <a:tailEnd type="none" w="sm" len="sm"/>
+                    </a:lnT>
+                    <a:lnB w="9525" cap="flat" cmpd="sng">
+                      <a:solidFill>
+                        <a:schemeClr val="dk1"/>
+                      </a:solidFill>
+                      <a:prstDash val="solid"/>
+                      <a:round/>
+                      <a:headEnd type="none" w="sm" len="sm"/>
+                      <a:tailEnd type="none" w="sm" len="sm"/>
+                    </a:lnB>
+                  </a:tcPr>
+                </a:tc>
+                <a:tc>
+                  <a:txBody>
+                    <a:bodyPr/>
+                    <a:lstStyle/>
+                    <a:p>
+                      <a:pPr marL="0" lvl="0" indent="0" algn="l" rtl="0">
+                        <a:spcBef>
+                          <a:spcPts val="0"/>
+                        </a:spcBef>
+                        <a:spcAft>
+                          <a:spcPts val="0"/>
+                        </a:spcAft>
+                        <a:buClr>
+                          <a:schemeClr val="dk1"/>
+                        </a:buClr>
+                        <a:buFont typeface="Arial"/>
+                        <a:buNone/>
+                      </a:pPr>
+                      <a:r>
+                        <a:rPr lang="en" sz="1100" dirty="0">
+                          <a:solidFill>
+                            <a:srgbClr val="222A3A"/>
+                          </a:solidFill>
+                          <a:latin typeface="Calibri"/>
+                          <a:ea typeface="Calibri"/>
+                          <a:cs typeface="Calibri"/>
+                          <a:sym typeface="Calibri"/>
+                        </a:rPr>
+                        <a:t>  2.841</a:t>
+                      </a:r>
+                      <a:endParaRPr sz="1100" dirty="0"/>
+                    </a:p>
+                  </a:txBody>
+                  <a:tcPr marL="91425" marR="91425" marT="91425" marB="91425">
+                    <a:lnL w="9525" cap="flat" cmpd="sng">
+                      <a:solidFill>
+                        <a:schemeClr val="dk1"/>
+                      </a:solidFill>
+                      <a:prstDash val="solid"/>
+                      <a:round/>
+                      <a:headEnd type="none" w="sm" len="sm"/>
+                      <a:tailEnd type="none" w="sm" len="sm"/>
+                    </a:lnL>
+                    <a:lnR w="9525" cap="flat" cmpd="sng">
+                      <a:solidFill>
+                        <a:schemeClr val="dk1"/>
+                      </a:solidFill>
+                      <a:prstDash val="solid"/>
+                      <a:round/>
+                      <a:headEnd type="none" w="sm" len="sm"/>
+                      <a:tailEnd type="none" w="sm" len="sm"/>
+                    </a:lnR>
+                    <a:lnT w="9525" cap="flat" cmpd="sng">
+                      <a:solidFill>
+                        <a:schemeClr val="dk1"/>
+                      </a:solidFill>
+                      <a:prstDash val="solid"/>
+                      <a:round/>
+                      <a:headEnd type="none" w="sm" len="sm"/>
+                      <a:tailEnd type="none" w="sm" len="sm"/>
+                    </a:lnT>
+                    <a:lnB w="9525" cap="flat" cmpd="sng">
+                      <a:solidFill>
+                        <a:schemeClr val="dk1"/>
+                      </a:solidFill>
+                      <a:prstDash val="solid"/>
+                      <a:round/>
+                      <a:headEnd type="none" w="sm" len="sm"/>
+                      <a:tailEnd type="none" w="sm" len="sm"/>
+                    </a:lnB>
+                  </a:tcPr>
+                </a:tc>
+                <a:extLst>
+                  <a:ext uri="{0D108BD9-81ED-4DB2-BD59-A6C34878D82A}">
+                    <a16:rowId xmlns:a16="http://schemas.microsoft.com/office/drawing/2014/main" val="10002"/>
+                  </a:ext>
+                </a:extLst>
+              </a:tr>
+              <a:tr h="492776">
+                <a:tc>
+                  <a:txBody>
+                    <a:bodyPr/>
+                    <a:lstStyle/>
+                    <a:p>
+                      <a:pPr marL="0" lvl="0" indent="0" algn="l" rtl="0">
+                        <a:spcBef>
+                          <a:spcPts val="0"/>
+                        </a:spcBef>
+                        <a:spcAft>
+                          <a:spcPts val="0"/>
+                        </a:spcAft>
+                        <a:buNone/>
+                      </a:pPr>
+                      <a:r>
+                        <a:rPr lang="en" sz="1100">
+                          <a:solidFill>
+                            <a:srgbClr val="00B050"/>
+                          </a:solidFill>
+                          <a:latin typeface="Calibri"/>
+                          <a:ea typeface="Calibri"/>
+                          <a:cs typeface="Calibri"/>
+                          <a:sym typeface="Calibri"/>
+                        </a:rPr>
+                        <a:t>GR-Add MMF </a:t>
+                      </a:r>
+                      <a:endParaRPr sz="1100">
+                        <a:solidFill>
+                          <a:srgbClr val="222A3A"/>
+                        </a:solidFill>
+                        <a:latin typeface="Calibri"/>
+                        <a:ea typeface="Calibri"/>
+                        <a:cs typeface="Calibri"/>
+                        <a:sym typeface="Calibri"/>
+                      </a:endParaRPr>
+                    </a:p>
+                  </a:txBody>
+                  <a:tcPr marL="91425" marR="91425" marT="91425" marB="91425">
+                    <a:lnL w="9525" cap="flat" cmpd="sng">
+                      <a:solidFill>
+                        <a:schemeClr val="dk1"/>
+                      </a:solidFill>
+                      <a:prstDash val="solid"/>
+                      <a:round/>
+                      <a:headEnd type="none" w="sm" len="sm"/>
+                      <a:tailEnd type="none" w="sm" len="sm"/>
+                    </a:lnL>
+                    <a:lnR w="9525" cap="flat" cmpd="sng">
+                      <a:solidFill>
+                        <a:schemeClr val="dk1"/>
+                      </a:solidFill>
+                      <a:prstDash val="solid"/>
+                      <a:round/>
+                      <a:headEnd type="none" w="sm" len="sm"/>
+                      <a:tailEnd type="none" w="sm" len="sm"/>
+                    </a:lnR>
+                    <a:lnT w="9525" cap="flat" cmpd="sng">
+                      <a:solidFill>
+                        <a:schemeClr val="dk1"/>
+                      </a:solidFill>
+                      <a:prstDash val="solid"/>
+                      <a:round/>
+                      <a:headEnd type="none" w="sm" len="sm"/>
+                      <a:tailEnd type="none" w="sm" len="sm"/>
+                    </a:lnT>
+                    <a:lnB w="9525" cap="flat" cmpd="sng">
+                      <a:solidFill>
+                        <a:schemeClr val="dk1"/>
+                      </a:solidFill>
+                      <a:prstDash val="solid"/>
+                      <a:round/>
+                      <a:headEnd type="none" w="sm" len="sm"/>
+                      <a:tailEnd type="none" w="sm" len="sm"/>
+                    </a:lnB>
+                  </a:tcPr>
+                </a:tc>
+                <a:tc>
+                  <a:txBody>
+                    <a:bodyPr/>
+                    <a:lstStyle/>
+                    <a:p>
+                      <a:pPr marL="0" lvl="0" indent="0" algn="l" rtl="0">
+                        <a:spcBef>
+                          <a:spcPts val="0"/>
+                        </a:spcBef>
+                        <a:spcAft>
+                          <a:spcPts val="0"/>
+                        </a:spcAft>
+                        <a:buNone/>
+                      </a:pPr>
+                      <a:r>
+                        <a:rPr lang="en" sz="1100" dirty="0">
+                          <a:solidFill>
+                            <a:srgbClr val="00B050"/>
+                          </a:solidFill>
+                          <a:latin typeface="Calibri"/>
+                          <a:ea typeface="Calibri"/>
+                          <a:cs typeface="Calibri"/>
+                          <a:sym typeface="Calibri"/>
+                        </a:rPr>
+                        <a:t>1.447</a:t>
+                      </a:r>
+                      <a:endParaRPr sz="1100" dirty="0">
+                        <a:solidFill>
+                          <a:srgbClr val="222A3A"/>
+                        </a:solidFill>
+                        <a:latin typeface="Calibri"/>
+                        <a:ea typeface="Calibri"/>
+                        <a:cs typeface="Calibri"/>
+                        <a:sym typeface="Calibri"/>
+                      </a:endParaRPr>
+                    </a:p>
+                  </a:txBody>
+                  <a:tcPr marL="91425" marR="91425" marT="91425" marB="91425">
+                    <a:lnL w="9525" cap="flat" cmpd="sng">
+                      <a:solidFill>
+                        <a:schemeClr val="dk1"/>
+                      </a:solidFill>
+                      <a:prstDash val="solid"/>
+                      <a:round/>
+                      <a:headEnd type="none" w="sm" len="sm"/>
+                      <a:tailEnd type="none" w="sm" len="sm"/>
+                    </a:lnL>
+                    <a:lnR w="9525" cap="flat" cmpd="sng">
+                      <a:solidFill>
+                        <a:schemeClr val="dk1"/>
+                      </a:solidFill>
+                      <a:prstDash val="solid"/>
+                      <a:round/>
+                      <a:headEnd type="none" w="sm" len="sm"/>
+                      <a:tailEnd type="none" w="sm" len="sm"/>
+                    </a:lnR>
+                    <a:lnT w="9525" cap="flat" cmpd="sng">
+                      <a:solidFill>
+                        <a:schemeClr val="dk1"/>
+                      </a:solidFill>
+                      <a:prstDash val="solid"/>
+                      <a:round/>
+                      <a:headEnd type="none" w="sm" len="sm"/>
+                      <a:tailEnd type="none" w="sm" len="sm"/>
+                    </a:lnT>
+                    <a:lnB w="9525" cap="flat" cmpd="sng">
+                      <a:solidFill>
+                        <a:schemeClr val="dk1"/>
+                      </a:solidFill>
+                      <a:prstDash val="solid"/>
+                      <a:round/>
+                      <a:headEnd type="none" w="sm" len="sm"/>
+                      <a:tailEnd type="none" w="sm" len="sm"/>
+                    </a:lnB>
+                  </a:tcPr>
+                </a:tc>
+                <a:tc>
+                  <a:txBody>
+                    <a:bodyPr/>
+                    <a:lstStyle/>
+                    <a:p>
+                      <a:pPr marL="0" lvl="0" indent="0" algn="l" rtl="0">
+                        <a:spcBef>
+                          <a:spcPts val="0"/>
+                        </a:spcBef>
+                        <a:spcAft>
+                          <a:spcPts val="0"/>
+                        </a:spcAft>
+                        <a:buNone/>
+                      </a:pPr>
+                      <a:r>
+                        <a:rPr lang="en" sz="1100" dirty="0">
+                          <a:solidFill>
+                            <a:srgbClr val="00B050"/>
+                          </a:solidFill>
+                          <a:latin typeface="Calibri"/>
+                          <a:ea typeface="Calibri"/>
+                          <a:cs typeface="Calibri"/>
+                          <a:sym typeface="Calibri"/>
+                        </a:rPr>
+                        <a:t> 3.909</a:t>
+                      </a:r>
+                      <a:endParaRPr sz="1100" dirty="0">
+                        <a:solidFill>
+                          <a:srgbClr val="222A3A"/>
+                        </a:solidFill>
+                        <a:latin typeface="Calibri"/>
+                        <a:ea typeface="Calibri"/>
+                        <a:cs typeface="Calibri"/>
+                        <a:sym typeface="Calibri"/>
+                      </a:endParaRPr>
+                    </a:p>
+                  </a:txBody>
+                  <a:tcPr marL="91425" marR="91425" marT="91425" marB="91425">
+                    <a:lnL w="9525" cap="flat" cmpd="sng">
+                      <a:solidFill>
+                        <a:schemeClr val="dk1"/>
+                      </a:solidFill>
+                      <a:prstDash val="solid"/>
+                      <a:round/>
+                      <a:headEnd type="none" w="sm" len="sm"/>
+                      <a:tailEnd type="none" w="sm" len="sm"/>
+                    </a:lnL>
+                    <a:lnR w="9525" cap="flat" cmpd="sng">
+                      <a:solidFill>
+                        <a:schemeClr val="dk1"/>
+                      </a:solidFill>
+                      <a:prstDash val="solid"/>
+                      <a:round/>
+                      <a:headEnd type="none" w="sm" len="sm"/>
+                      <a:tailEnd type="none" w="sm" len="sm"/>
+                    </a:lnR>
+                    <a:lnT w="9525" cap="flat" cmpd="sng">
+                      <a:solidFill>
+                        <a:schemeClr val="dk1"/>
+                      </a:solidFill>
+                      <a:prstDash val="solid"/>
+                      <a:round/>
+                      <a:headEnd type="none" w="sm" len="sm"/>
+                      <a:tailEnd type="none" w="sm" len="sm"/>
+                    </a:lnT>
+                    <a:lnB w="9525" cap="flat" cmpd="sng">
+                      <a:solidFill>
+                        <a:schemeClr val="dk1"/>
+                      </a:solidFill>
+                      <a:prstDash val="solid"/>
+                      <a:round/>
+                      <a:headEnd type="none" w="sm" len="sm"/>
+                      <a:tailEnd type="none" w="sm" len="sm"/>
+                    </a:lnB>
+                  </a:tcPr>
+                </a:tc>
+                <a:tc>
+                  <a:txBody>
+                    <a:bodyPr/>
+                    <a:lstStyle/>
+                    <a:p>
+                      <a:pPr marL="0" lvl="0" indent="0" algn="l" rtl="0">
+                        <a:spcBef>
+                          <a:spcPts val="0"/>
+                        </a:spcBef>
+                        <a:spcAft>
+                          <a:spcPts val="0"/>
+                        </a:spcAft>
+                        <a:buNone/>
+                      </a:pPr>
+                      <a:r>
+                        <a:rPr lang="en" sz="1100" dirty="0">
+                          <a:solidFill>
+                            <a:srgbClr val="00B050"/>
+                          </a:solidFill>
+                          <a:latin typeface="Calibri"/>
+                          <a:ea typeface="Calibri"/>
+                          <a:cs typeface="Calibri"/>
+                          <a:sym typeface="Calibri"/>
+                        </a:rPr>
+                        <a:t>  2.678  &lt;-- best</a:t>
+                      </a:r>
+                      <a:endParaRPr sz="1100" dirty="0">
+                        <a:solidFill>
+                          <a:srgbClr val="222A3A"/>
+                        </a:solidFill>
+                        <a:latin typeface="Calibri"/>
+                        <a:ea typeface="Calibri"/>
+                        <a:cs typeface="Calibri"/>
+                        <a:sym typeface="Calibri"/>
+                      </a:endParaRPr>
+                    </a:p>
+                  </a:txBody>
+                  <a:tcPr marL="91425" marR="91425" marT="91425" marB="91425">
+                    <a:lnL w="9525" cap="flat" cmpd="sng">
+                      <a:solidFill>
+                        <a:schemeClr val="dk1"/>
+                      </a:solidFill>
+                      <a:prstDash val="solid"/>
+                      <a:round/>
+                      <a:headEnd type="none" w="sm" len="sm"/>
+                      <a:tailEnd type="none" w="sm" len="sm"/>
+                    </a:lnL>
+                    <a:lnR w="9525" cap="flat" cmpd="sng">
+                      <a:solidFill>
+                        <a:schemeClr val="dk1"/>
+                      </a:solidFill>
+                      <a:prstDash val="solid"/>
+                      <a:round/>
+                      <a:headEnd type="none" w="sm" len="sm"/>
+                      <a:tailEnd type="none" w="sm" len="sm"/>
+                    </a:lnR>
+                    <a:lnT w="9525" cap="flat" cmpd="sng">
+                      <a:solidFill>
+                        <a:schemeClr val="dk1"/>
+                      </a:solidFill>
+                      <a:prstDash val="solid"/>
+                      <a:round/>
+                      <a:headEnd type="none" w="sm" len="sm"/>
+                      <a:tailEnd type="none" w="sm" len="sm"/>
+                    </a:lnT>
+                    <a:lnB w="9525" cap="flat" cmpd="sng">
+                      <a:solidFill>
+                        <a:schemeClr val="dk1"/>
+                      </a:solidFill>
+                      <a:prstDash val="solid"/>
+                      <a:round/>
+                      <a:headEnd type="none" w="sm" len="sm"/>
+                      <a:tailEnd type="none" w="sm" len="sm"/>
+                    </a:lnB>
+                  </a:tcPr>
+                </a:tc>
+                <a:extLst>
+                  <a:ext uri="{0D108BD9-81ED-4DB2-BD59-A6C34878D82A}">
+                    <a16:rowId xmlns:a16="http://schemas.microsoft.com/office/drawing/2014/main" val="10003"/>
+                  </a:ext>
+                </a:extLst>
+              </a:tr>
+            </a:tbl>
+          </a:graphicData>
+        </a:graphic>
+      </p:graphicFrame>
     </p:spTree>
   </p:cSld>
   <p:clrMapOvr>
@@ -10518,7 +13211,7 @@
                   <a:srgbClr val="222A3A"/>
                 </a:solidFill>
               </a:rPr>
-              <a:t>DLinear          3.12</a:t>
+              <a:t>DLinear          2.69</a:t>
             </a:r>
           </a:p>
         </p:txBody>
@@ -10552,7 +13245,7 @@
                   <a:srgbClr val="222A3A"/>
                 </a:solidFill>
               </a:rPr>
-              <a:t>NumericalGRU     2.85</a:t>
+              <a:t>NumericalGRU     2.84</a:t>
             </a:r>
           </a:p>
         </p:txBody>
@@ -10586,7 +13279,7 @@
                   <a:srgbClr val="00B050"/>
                 </a:solidFill>
               </a:rPr>
-              <a:t>GR-Add MMF       2.58</a:t>
+              <a:t>GR-Add MMF       2.68</a:t>
             </a:r>
           </a:p>
         </p:txBody>
@@ -10675,7 +13368,7 @@
                   <a:srgbClr val="FFFFFF"/>
                 </a:solidFill>
               </a:rPr>
-              <a:t>97.6% vs persistence</a:t>
+              <a:t>97.5% vs persistence</a:t>
             </a:r>
           </a:p>
         </p:txBody>
@@ -10764,7 +13457,7 @@
                   <a:srgbClr val="1A1A2E"/>
                 </a:solidFill>
               </a:rPr>
-              <a:t>GR-Add MMF (2.584) beats persistence (105.44) by 97.6% — a strong result given only 102 training samples.</a:t>
+              <a:t>GR-Add MMF (2.678) beats persistence (105.44) by 97.5% — a strong result given only 102 training samples.</a:t>
             </a:r>
           </a:p>
         </p:txBody>
@@ -10945,7 +13638,7 @@
                   <a:srgbClr val="BBCCDD"/>
                 </a:solidFill>
               </a:rPr>
-              <a:t>Text missingness = % of years with no Article IV report  ·  GR-Add MMF vs NumericalGRU  ·  OpenAI embeddings</a:t>
+              <a:t>Two definitions of 'gappy'  ·  GR-Add MMF vs DLinear / NumericalGRU  ·  OpenAI embeddings</a:t>
             </a:r>
           </a:p>
         </p:txBody>
@@ -10959,7 +13652,51 @@
         <p:spPr>
           <a:xfrm>
             <a:off x="365760" y="1325880"/>
-            <a:ext cx="11430000" cy="457200"/>
+            <a:ext cx="11430000" cy="1554480"/>
+          </a:xfrm>
+          <a:prstGeom prst="rect">
+            <a:avLst/>
+          </a:prstGeom>
+          <a:solidFill>
+            <a:srgbClr val="F0F4F8"/>
+          </a:solidFill>
+          <a:ln>
+            <a:noFill/>
+          </a:ln>
+        </p:spPr>
+        <p:style>
+          <a:lnRef idx="1">
+            <a:schemeClr val="accent1"/>
+          </a:lnRef>
+          <a:fillRef idx="3">
+            <a:schemeClr val="accent1"/>
+          </a:fillRef>
+          <a:effectRef idx="2">
+            <a:schemeClr val="accent1"/>
+          </a:effectRef>
+          <a:fontRef idx="minor">
+            <a:schemeClr val="lt1"/>
+          </a:fontRef>
+        </p:style>
+        <p:txBody>
+          <a:bodyPr rtlCol="0" anchor="ctr"/>
+          <a:lstStyle/>
+          <a:p>
+            <a:pPr algn="ctr"/>
+            <a:endParaRPr/>
+          </a:p>
+        </p:txBody>
+      </p:sp>
+      <p:sp>
+        <p:nvSpPr>
+          <p:cNvPr id="7" name="Rectangle 6"/>
+          <p:cNvSpPr/>
+          <p:nvPr/>
+        </p:nvSpPr>
+        <p:spPr>
+          <a:xfrm>
+            <a:off x="365760" y="1325880"/>
+            <a:ext cx="11430000" cy="329184"/>
           </a:xfrm>
           <a:prstGeom prst="rect">
             <a:avLst/>
@@ -10996,14 +13733,14 @@
       </p:sp>
       <p:sp>
         <p:nvSpPr>
-          <p:cNvPr id="7" name="TextBox 6"/>
+          <p:cNvPr id="8" name="TextBox 7"/>
           <p:cNvSpPr txBox="1"/>
           <p:nvPr/>
         </p:nvSpPr>
         <p:spPr>
           <a:xfrm>
-            <a:off x="502920" y="1389888"/>
-            <a:ext cx="11155680" cy="347472"/>
+            <a:off x="457200" y="1371600"/>
+            <a:ext cx="11292840" cy="256032"/>
           </a:xfrm>
           <a:prstGeom prst="rect">
             <a:avLst/>
@@ -11018,26 +13755,320 @@
           <a:p>
             <a:pPr algn="l"/>
             <a:r>
-              <a:rPr sz="1100" b="0" i="1">
+              <a:rPr sz="1000" b="1" i="0">
                 <a:solidFill>
                   <a:srgbClr val="FFFFFF"/>
                 </a:solidFill>
               </a:rPr>
-              <a:t>Hypothesis: countries with fewer Article IV texts benefit more from the text fusion signal.</a:t>
-            </a:r>
-          </a:p>
-        </p:txBody>
-      </p:sp>
-      <p:sp>
-        <p:nvSpPr>
-          <p:cNvPr id="8" name="Rectangle 7"/>
+              <a:t>DEFINITION 1 — WDI Numerical Missingness  (fraction of indicator-year cells missing in context window)</a:t>
+            </a:r>
+          </a:p>
+        </p:txBody>
+      </p:sp>
+      <p:sp>
+        <p:nvSpPr>
+          <p:cNvPr id="9" name="TextBox 8"/>
+          <p:cNvSpPr txBox="1"/>
+          <p:nvPr/>
+        </p:nvSpPr>
+        <p:spPr>
+          <a:xfrm>
+            <a:off x="457200" y="1709928"/>
+            <a:ext cx="11292840" cy="1115568"/>
+          </a:xfrm>
+          <a:prstGeom prst="rect">
+            <a:avLst/>
+          </a:prstGeom>
+          <a:noFill/>
+        </p:spPr>
+        <p:txBody>
+          <a:bodyPr wrap="square">
+            <a:spAutoFit/>
+          </a:bodyPr>
+          <a:lstStyle/>
+          <a:p>
+            <a:endParaRPr/>
+          </a:p>
+        </p:txBody>
+      </p:sp>
+      <p:sp>
+        <p:nvSpPr>
+          <p:cNvPr id="10" name="TextBox 9"/>
+          <p:cNvSpPr txBox="1"/>
+          <p:nvPr/>
+        </p:nvSpPr>
+        <p:spPr>
+          <a:xfrm>
+            <a:off x="502920" y="1746504"/>
+            <a:ext cx="11155680" cy="256032"/>
+          </a:xfrm>
+          <a:prstGeom prst="rect">
+            <a:avLst/>
+          </a:prstGeom>
+          <a:noFill/>
+        </p:spPr>
+        <p:txBody>
+          <a:bodyPr wrap="square">
+            <a:spAutoFit/>
+          </a:bodyPr>
+          <a:lstStyle/>
+          <a:p>
+            <a:pPr algn="l"/>
+            <a:r>
+              <a:rPr sz="950">
+                <a:solidFill>
+                  <a:srgbClr val="555555"/>
+                </a:solidFill>
+              </a:rPr>
+              <a:t>Stratified by median sample-level WDI mask fill rate  ·  GR-Add vs DLinear  ·  test set 2022-2023</a:t>
+            </a:r>
+          </a:p>
+        </p:txBody>
+      </p:sp>
+      <p:sp>
+        <p:nvSpPr>
+          <p:cNvPr id="11" name="Rectangle 10"/>
           <p:cNvSpPr/>
           <p:nvPr/>
         </p:nvSpPr>
         <p:spPr>
           <a:xfrm>
-            <a:off x="365760" y="1965960"/>
-            <a:ext cx="5394960" cy="3108960"/>
+            <a:off x="502920" y="2029968"/>
+            <a:ext cx="5212080" cy="457200"/>
+          </a:xfrm>
+          <a:prstGeom prst="rect">
+            <a:avLst/>
+          </a:prstGeom>
+          <a:solidFill>
+            <a:srgbClr val="FFEBEB"/>
+          </a:solidFill>
+          <a:ln>
+            <a:noFill/>
+          </a:ln>
+        </p:spPr>
+        <p:style>
+          <a:lnRef idx="1">
+            <a:schemeClr val="accent1"/>
+          </a:lnRef>
+          <a:fillRef idx="3">
+            <a:schemeClr val="accent1"/>
+          </a:fillRef>
+          <a:effectRef idx="2">
+            <a:schemeClr val="accent1"/>
+          </a:effectRef>
+          <a:fontRef idx="minor">
+            <a:schemeClr val="lt1"/>
+          </a:fontRef>
+        </p:style>
+        <p:txBody>
+          <a:bodyPr rtlCol="0" anchor="ctr"/>
+          <a:lstStyle/>
+          <a:p>
+            <a:pPr algn="ctr"/>
+            <a:endParaRPr/>
+          </a:p>
+        </p:txBody>
+      </p:sp>
+      <p:sp>
+        <p:nvSpPr>
+          <p:cNvPr id="12" name="TextBox 11"/>
+          <p:cNvSpPr txBox="1"/>
+          <p:nvPr/>
+        </p:nvSpPr>
+        <p:spPr>
+          <a:xfrm>
+            <a:off x="621792" y="2103120"/>
+            <a:ext cx="4974336" cy="329184"/>
+          </a:xfrm>
+          <a:prstGeom prst="rect">
+            <a:avLst/>
+          </a:prstGeom>
+          <a:noFill/>
+        </p:spPr>
+        <p:txBody>
+          <a:bodyPr wrap="square">
+            <a:spAutoFit/>
+          </a:bodyPr>
+          <a:lstStyle/>
+          <a:p>
+            <a:pPr algn="l"/>
+            <a:r>
+              <a:rPr sz="1050">
+                <a:solidFill>
+                  <a:srgbClr val="8B0000"/>
+                </a:solidFill>
+              </a:rPr>
+              <a:t>LOW numerical miss (&lt;=median):  DLinear=4.835   GR-Add=4.871   improvement = -0.8%</a:t>
+            </a:r>
+          </a:p>
+        </p:txBody>
+      </p:sp>
+      <p:sp>
+        <p:nvSpPr>
+          <p:cNvPr id="13" name="Rectangle 12"/>
+          <p:cNvSpPr/>
+          <p:nvPr/>
+        </p:nvSpPr>
+        <p:spPr>
+          <a:xfrm>
+            <a:off x="6080760" y="2029968"/>
+            <a:ext cx="5212080" cy="457200"/>
+          </a:xfrm>
+          <a:prstGeom prst="rect">
+            <a:avLst/>
+          </a:prstGeom>
+          <a:solidFill>
+            <a:srgbClr val="E8F5E9"/>
+          </a:solidFill>
+          <a:ln>
+            <a:noFill/>
+          </a:ln>
+        </p:spPr>
+        <p:style>
+          <a:lnRef idx="1">
+            <a:schemeClr val="accent1"/>
+          </a:lnRef>
+          <a:fillRef idx="3">
+            <a:schemeClr val="accent1"/>
+          </a:fillRef>
+          <a:effectRef idx="2">
+            <a:schemeClr val="accent1"/>
+          </a:effectRef>
+          <a:fontRef idx="minor">
+            <a:schemeClr val="lt1"/>
+          </a:fontRef>
+        </p:style>
+        <p:txBody>
+          <a:bodyPr rtlCol="0" anchor="ctr"/>
+          <a:lstStyle/>
+          <a:p>
+            <a:pPr algn="ctr"/>
+            <a:endParaRPr/>
+          </a:p>
+        </p:txBody>
+      </p:sp>
+      <p:sp>
+        <p:nvSpPr>
+          <p:cNvPr id="14" name="TextBox 13"/>
+          <p:cNvSpPr txBox="1"/>
+          <p:nvPr/>
+        </p:nvSpPr>
+        <p:spPr>
+          <a:xfrm>
+            <a:off x="6199632" y="2103120"/>
+            <a:ext cx="4974336" cy="329184"/>
+          </a:xfrm>
+          <a:prstGeom prst="rect">
+            <a:avLst/>
+          </a:prstGeom>
+          <a:noFill/>
+        </p:spPr>
+        <p:txBody>
+          <a:bodyPr wrap="square">
+            <a:spAutoFit/>
+          </a:bodyPr>
+          <a:lstStyle/>
+          <a:p>
+            <a:pPr algn="l"/>
+            <a:r>
+              <a:rPr sz="1050">
+                <a:solidFill>
+                  <a:srgbClr val="0A6A2E"/>
+                </a:solidFill>
+              </a:rPr>
+              <a:t>HIGH numerical miss (&gt;median):  DLinear=0.536   GR-Add=0.485   improvement = +9.4%</a:t>
+            </a:r>
+          </a:p>
+        </p:txBody>
+      </p:sp>
+      <p:sp>
+        <p:nvSpPr>
+          <p:cNvPr id="15" name="Rectangle 14"/>
+          <p:cNvSpPr/>
+          <p:nvPr/>
+        </p:nvSpPr>
+        <p:spPr>
+          <a:xfrm>
+            <a:off x="365760" y="2560320"/>
+            <a:ext cx="11430000" cy="256032"/>
+          </a:xfrm>
+          <a:prstGeom prst="rect">
+            <a:avLst/>
+          </a:prstGeom>
+          <a:solidFill>
+            <a:srgbClr val="2D4A7A"/>
+          </a:solidFill>
+          <a:ln>
+            <a:noFill/>
+          </a:ln>
+        </p:spPr>
+        <p:style>
+          <a:lnRef idx="1">
+            <a:schemeClr val="accent1"/>
+          </a:lnRef>
+          <a:fillRef idx="3">
+            <a:schemeClr val="accent1"/>
+          </a:fillRef>
+          <a:effectRef idx="2">
+            <a:schemeClr val="accent1"/>
+          </a:effectRef>
+          <a:fontRef idx="minor">
+            <a:schemeClr val="lt1"/>
+          </a:fontRef>
+        </p:style>
+        <p:txBody>
+          <a:bodyPr rtlCol="0" anchor="ctr"/>
+          <a:lstStyle/>
+          <a:p>
+            <a:pPr algn="ctr"/>
+            <a:endParaRPr/>
+          </a:p>
+        </p:txBody>
+      </p:sp>
+      <p:sp>
+        <p:nvSpPr>
+          <p:cNvPr id="16" name="TextBox 15"/>
+          <p:cNvSpPr txBox="1"/>
+          <p:nvPr/>
+        </p:nvSpPr>
+        <p:spPr>
+          <a:xfrm>
+            <a:off x="502920" y="2596896"/>
+            <a:ext cx="11155680" cy="201168"/>
+          </a:xfrm>
+          <a:prstGeom prst="rect">
+            <a:avLst/>
+          </a:prstGeom>
+          <a:noFill/>
+        </p:spPr>
+        <p:txBody>
+          <a:bodyPr wrap="square">
+            <a:spAutoFit/>
+          </a:bodyPr>
+          <a:lstStyle/>
+          <a:p>
+            <a:pPr algn="l"/>
+            <a:r>
+              <a:rPr sz="950" b="1" i="0">
+                <a:solidFill>
+                  <a:srgbClr val="FFFFFF"/>
+                </a:solidFill>
+              </a:rPr>
+              <a:t>Hypothesis CONFIRMED for WDI gaps: text adds +9.4% when numerical data is sparse; hurts slightly (-0.8%) when data is complete.</a:t>
+            </a:r>
+          </a:p>
+        </p:txBody>
+      </p:sp>
+      <p:sp>
+        <p:nvSpPr>
+          <p:cNvPr id="17" name="Rectangle 16"/>
+          <p:cNvSpPr/>
+          <p:nvPr/>
+        </p:nvSpPr>
+        <p:spPr>
+          <a:xfrm>
+            <a:off x="365760" y="2999232"/>
+            <a:ext cx="5394960" cy="2651760"/>
           </a:xfrm>
           <a:prstGeom prst="rect">
             <a:avLst/>
@@ -11074,13 +14105,13 @@
       </p:sp>
       <p:sp>
         <p:nvSpPr>
-          <p:cNvPr id="9" name="Rectangle 8"/>
+          <p:cNvPr id="18" name="Rectangle 17"/>
           <p:cNvSpPr/>
           <p:nvPr/>
         </p:nvSpPr>
         <p:spPr>
           <a:xfrm>
-            <a:off x="365760" y="1965960"/>
+            <a:off x="365760" y="2999232"/>
             <a:ext cx="5394960" cy="329184"/>
           </a:xfrm>
           <a:prstGeom prst="rect">
@@ -11118,13 +14149,13 @@
       </p:sp>
       <p:sp>
         <p:nvSpPr>
-          <p:cNvPr id="10" name="TextBox 9"/>
+          <p:cNvPr id="19" name="TextBox 18"/>
           <p:cNvSpPr txBox="1"/>
           <p:nvPr/>
         </p:nvSpPr>
         <p:spPr>
           <a:xfrm>
-            <a:off x="457200" y="2011679"/>
+            <a:off x="457200" y="3044951"/>
             <a:ext cx="5257800" cy="256032"/>
           </a:xfrm>
           <a:prstGeom prst="rect">
@@ -11145,21 +14176,21 @@
                   <a:srgbClr val="FFFFFF"/>
                 </a:solidFill>
               </a:rPr>
-              <a:t>LOW MISSINGNESS  (&lt;=37% of years have no Article IV report)</a:t>
-            </a:r>
-          </a:p>
-        </p:txBody>
-      </p:sp>
-      <p:sp>
-        <p:nvSpPr>
-          <p:cNvPr id="11" name="TextBox 10"/>
+              <a:t>DEFINITION 2 — LOW Text Coverage  (&lt;=37% years missing Article IV)</a:t>
+            </a:r>
+          </a:p>
+        </p:txBody>
+      </p:sp>
+      <p:sp>
+        <p:nvSpPr>
+          <p:cNvPr id="20" name="TextBox 19"/>
           <p:cNvSpPr txBox="1"/>
           <p:nvPr/>
         </p:nvSpPr>
         <p:spPr>
           <a:xfrm>
-            <a:off x="457200" y="2350008"/>
-            <a:ext cx="5257800" cy="2670048"/>
+            <a:off x="457200" y="3383279"/>
+            <a:ext cx="5257800" cy="2212848"/>
           </a:xfrm>
           <a:prstGeom prst="rect">
             <a:avLst/>
@@ -11178,13 +14209,13 @@
       </p:sp>
       <p:sp>
         <p:nvSpPr>
-          <p:cNvPr id="12" name="TextBox 11"/>
+          <p:cNvPr id="21" name="TextBox 20"/>
           <p:cNvSpPr txBox="1"/>
           <p:nvPr/>
         </p:nvSpPr>
         <p:spPr>
           <a:xfrm>
-            <a:off x="502920" y="2377440"/>
+            <a:off x="502920" y="3410712"/>
             <a:ext cx="5120640" cy="256032"/>
           </a:xfrm>
           <a:prstGeom prst="rect">
@@ -11212,13 +14243,13 @@
       </p:sp>
       <p:sp>
         <p:nvSpPr>
-          <p:cNvPr id="13" name="TextBox 12"/>
+          <p:cNvPr id="22" name="TextBox 21"/>
           <p:cNvSpPr txBox="1"/>
           <p:nvPr/>
         </p:nvSpPr>
         <p:spPr>
           <a:xfrm>
-            <a:off x="502920" y="2670048"/>
+            <a:off x="502920" y="3703320"/>
             <a:ext cx="5120640" cy="238527"/>
           </a:xfrm>
           <a:prstGeom prst="rect">
@@ -11239,20 +14270,20 @@
                   <a:srgbClr val="00B050"/>
                 </a:solidFill>
               </a:rPr>
-              <a:t>JPN       16%     16    0.123    0.006   +94.9%</a:t>
-            </a:r>
-          </a:p>
-        </p:txBody>
-      </p:sp>
-      <p:sp>
-        <p:nvSpPr>
-          <p:cNvPr id="14" name="TextBox 13"/>
+              <a:t>JPN       16%     16    0.031    0.004   +86.3%</a:t>
+            </a:r>
+          </a:p>
+        </p:txBody>
+      </p:sp>
+      <p:sp>
+        <p:nvSpPr>
+          <p:cNvPr id="23" name="TextBox 22"/>
           <p:cNvSpPr txBox="1"/>
           <p:nvPr/>
         </p:nvSpPr>
         <p:spPr>
           <a:xfrm>
-            <a:off x="502920" y="3008376"/>
+            <a:off x="502920" y="4023359"/>
             <a:ext cx="5120640" cy="238527"/>
           </a:xfrm>
           <a:prstGeom prst="rect">
@@ -11273,21 +14304,21 @@
                   <a:srgbClr val="00B050"/>
                 </a:solidFill>
               </a:rPr>
-              <a:t>KAZ       11%     17    0.650    0.426   +34.4%</a:t>
-            </a:r>
-          </a:p>
-        </p:txBody>
-      </p:sp>
-      <p:sp>
-        <p:nvSpPr>
-          <p:cNvPr id="15" name="TextBox 14"/>
+              <a:t>KAZ       11%     17    0.636    0.347   +45.5%</a:t>
+            </a:r>
+          </a:p>
+        </p:txBody>
+      </p:sp>
+      <p:sp>
+        <p:nvSpPr>
+          <p:cNvPr id="24" name="TextBox 23"/>
           <p:cNvSpPr txBox="1"/>
           <p:nvPr/>
         </p:nvSpPr>
         <p:spPr>
           <a:xfrm>
-            <a:off x="502920" y="3346704"/>
-            <a:ext cx="5120640" cy="274320"/>
+            <a:off x="502920" y="4343400"/>
+            <a:ext cx="5120640" cy="256032"/>
           </a:xfrm>
           <a:prstGeom prst="rect">
             <a:avLst/>
@@ -11307,21 +14338,89 @@
                   <a:srgbClr val="222A3A"/>
                 </a:solidFill>
               </a:rPr>
-              <a:t>HRV       26%     14    0.408    0.643   -57.7%</a:t>
-            </a:r>
-          </a:p>
-        </p:txBody>
-      </p:sp>
-      <p:sp>
-        <p:nvSpPr>
-          <p:cNvPr id="16" name="TextBox 15"/>
+              <a:t>HRV       26%     14    0.568    0.678   -19.5%</a:t>
+            </a:r>
+          </a:p>
+        </p:txBody>
+      </p:sp>
+      <p:sp>
+        <p:nvSpPr>
+          <p:cNvPr id="25" name="TextBox 24"/>
           <p:cNvSpPr txBox="1"/>
           <p:nvPr/>
         </p:nvSpPr>
         <p:spPr>
           <a:xfrm>
-            <a:off x="502920" y="3685031"/>
-            <a:ext cx="5120640" cy="274320"/>
+            <a:off x="502920" y="4663440"/>
+            <a:ext cx="5120640" cy="238527"/>
+          </a:xfrm>
+          <a:prstGeom prst="rect">
+            <a:avLst/>
+          </a:prstGeom>
+          <a:noFill/>
+        </p:spPr>
+        <p:txBody>
+          <a:bodyPr wrap="square">
+            <a:spAutoFit/>
+          </a:bodyPr>
+          <a:lstStyle/>
+          <a:p>
+            <a:pPr algn="l"/>
+            <a:r>
+              <a:rPr sz="950">
+                <a:solidFill>
+                  <a:srgbClr val="00B050"/>
+                </a:solidFill>
+              </a:rPr>
+              <a:t>MKD       26%     14    1.121    1.076    +4.0%</a:t>
+            </a:r>
+          </a:p>
+        </p:txBody>
+      </p:sp>
+      <p:sp>
+        <p:nvSpPr>
+          <p:cNvPr id="26" name="TextBox 25"/>
+          <p:cNvSpPr txBox="1"/>
+          <p:nvPr/>
+        </p:nvSpPr>
+        <p:spPr>
+          <a:xfrm>
+            <a:off x="502920" y="4983479"/>
+            <a:ext cx="5120640" cy="238527"/>
+          </a:xfrm>
+          <a:prstGeom prst="rect">
+            <a:avLst/>
+          </a:prstGeom>
+          <a:noFill/>
+        </p:spPr>
+        <p:txBody>
+          <a:bodyPr wrap="square">
+            <a:spAutoFit/>
+          </a:bodyPr>
+          <a:lstStyle/>
+          <a:p>
+            <a:pPr algn="l"/>
+            <a:r>
+              <a:rPr sz="950" dirty="0">
+                <a:solidFill>
+                  <a:srgbClr val="00B050"/>
+                </a:solidFill>
+              </a:rPr>
+              <a:t>BGR       32%     13    0.726    0.722    +0.6%</a:t>
+            </a:r>
+          </a:p>
+        </p:txBody>
+      </p:sp>
+      <p:sp>
+        <p:nvSpPr>
+          <p:cNvPr id="27" name="TextBox 26"/>
+          <p:cNvSpPr txBox="1"/>
+          <p:nvPr/>
+        </p:nvSpPr>
+        <p:spPr>
+          <a:xfrm>
+            <a:off x="502920" y="5303520"/>
+            <a:ext cx="5120640" cy="256032"/>
           </a:xfrm>
           <a:prstGeom prst="rect">
             <a:avLst/>
@@ -11341,89 +14440,21 @@
                   <a:srgbClr val="222A3A"/>
                 </a:solidFill>
               </a:rPr>
-              <a:t>MKD       26%     14    0.776    1.092   -40.7%</a:t>
-            </a:r>
-          </a:p>
-        </p:txBody>
-      </p:sp>
-      <p:sp>
-        <p:nvSpPr>
-          <p:cNvPr id="17" name="TextBox 16"/>
-          <p:cNvSpPr txBox="1"/>
-          <p:nvPr/>
-        </p:nvSpPr>
-        <p:spPr>
-          <a:xfrm>
-            <a:off x="502920" y="4023360"/>
-            <a:ext cx="5120640" cy="274320"/>
-          </a:xfrm>
-          <a:prstGeom prst="rect">
-            <a:avLst/>
-          </a:prstGeom>
-          <a:noFill/>
-        </p:spPr>
-        <p:txBody>
-          <a:bodyPr wrap="square">
-            <a:spAutoFit/>
-          </a:bodyPr>
-          <a:lstStyle/>
-          <a:p>
-            <a:pPr algn="l"/>
-            <a:r>
-              <a:rPr sz="950">
-                <a:solidFill>
-                  <a:srgbClr val="222A3A"/>
-                </a:solidFill>
-              </a:rPr>
-              <a:t>BGR       32%     13    0.562    0.848   -51.1%</a:t>
-            </a:r>
-          </a:p>
-        </p:txBody>
-      </p:sp>
-      <p:sp>
-        <p:nvSpPr>
-          <p:cNvPr id="18" name="TextBox 17"/>
-          <p:cNvSpPr txBox="1"/>
-          <p:nvPr/>
-        </p:nvSpPr>
-        <p:spPr>
-          <a:xfrm>
-            <a:off x="502920" y="4361688"/>
-            <a:ext cx="5120640" cy="274320"/>
-          </a:xfrm>
-          <a:prstGeom prst="rect">
-            <a:avLst/>
-          </a:prstGeom>
-          <a:noFill/>
-        </p:spPr>
-        <p:txBody>
-          <a:bodyPr wrap="square">
-            <a:spAutoFit/>
-          </a:bodyPr>
-          <a:lstStyle/>
-          <a:p>
-            <a:pPr algn="l"/>
-            <a:r>
-              <a:rPr sz="950">
-                <a:solidFill>
-                  <a:srgbClr val="222A3A"/>
-                </a:solidFill>
-              </a:rPr>
-              <a:t>USA        0%     19    0.065    0.216  -231.4%</a:t>
-            </a:r>
-          </a:p>
-        </p:txBody>
-      </p:sp>
-      <p:sp>
-        <p:nvSpPr>
-          <p:cNvPr id="19" name="Rectangle 18"/>
+              <a:t>USA        0%     19    0.160    0.252   -57.6%</a:t>
+            </a:r>
+          </a:p>
+        </p:txBody>
+      </p:sp>
+      <p:sp>
+        <p:nvSpPr>
+          <p:cNvPr id="28" name="Rectangle 27"/>
           <p:cNvSpPr/>
           <p:nvPr/>
         </p:nvSpPr>
         <p:spPr>
           <a:xfrm>
-            <a:off x="6217920" y="1965960"/>
-            <a:ext cx="5577840" cy="3108960"/>
+            <a:off x="6217920" y="2999232"/>
+            <a:ext cx="5577840" cy="2651760"/>
           </a:xfrm>
           <a:prstGeom prst="rect">
             <a:avLst/>
@@ -11460,13 +14491,13 @@
       </p:sp>
       <p:sp>
         <p:nvSpPr>
-          <p:cNvPr id="20" name="Rectangle 19"/>
+          <p:cNvPr id="29" name="Rectangle 28"/>
           <p:cNvSpPr/>
           <p:nvPr/>
         </p:nvSpPr>
         <p:spPr>
           <a:xfrm>
-            <a:off x="6217920" y="1965960"/>
+            <a:off x="6217920" y="2999232"/>
             <a:ext cx="5577840" cy="329184"/>
           </a:xfrm>
           <a:prstGeom prst="rect">
@@ -11504,13 +14535,13 @@
       </p:sp>
       <p:sp>
         <p:nvSpPr>
-          <p:cNvPr id="21" name="TextBox 20"/>
+          <p:cNvPr id="30" name="TextBox 29"/>
           <p:cNvSpPr txBox="1"/>
           <p:nvPr/>
         </p:nvSpPr>
         <p:spPr>
           <a:xfrm>
-            <a:off x="6309359" y="2011679"/>
+            <a:off x="6309359" y="3044951"/>
             <a:ext cx="5440679" cy="256032"/>
           </a:xfrm>
           <a:prstGeom prst="rect">
@@ -11531,21 +14562,21 @@
                   <a:srgbClr val="FFFFFF"/>
                 </a:solidFill>
               </a:rPr>
-              <a:t>HIGH MISSINGNESS  (&gt;37% of years have no Article IV report)</a:t>
-            </a:r>
-          </a:p>
-        </p:txBody>
-      </p:sp>
-      <p:sp>
-        <p:nvSpPr>
-          <p:cNvPr id="22" name="TextBox 21"/>
+              <a:t>DEFINITION 2 — HIGH Text Coverage  (&gt;37% years missing Article IV)</a:t>
+            </a:r>
+          </a:p>
+        </p:txBody>
+      </p:sp>
+      <p:sp>
+        <p:nvSpPr>
+          <p:cNvPr id="31" name="TextBox 30"/>
           <p:cNvSpPr txBox="1"/>
           <p:nvPr/>
         </p:nvSpPr>
         <p:spPr>
           <a:xfrm>
-            <a:off x="6309359" y="2350008"/>
-            <a:ext cx="5440679" cy="2670048"/>
+            <a:off x="6309359" y="3383279"/>
+            <a:ext cx="5440679" cy="2212848"/>
           </a:xfrm>
           <a:prstGeom prst="rect">
             <a:avLst/>
@@ -11564,13 +14595,13 @@
       </p:sp>
       <p:sp>
         <p:nvSpPr>
-          <p:cNvPr id="23" name="TextBox 22"/>
+          <p:cNvPr id="32" name="TextBox 31"/>
           <p:cNvSpPr txBox="1"/>
           <p:nvPr/>
         </p:nvSpPr>
         <p:spPr>
           <a:xfrm>
-            <a:off x="6355080" y="2377440"/>
+            <a:off x="6355080" y="3410712"/>
             <a:ext cx="5303520" cy="256032"/>
           </a:xfrm>
           <a:prstGeom prst="rect">
@@ -11598,13 +14629,149 @@
       </p:sp>
       <p:sp>
         <p:nvSpPr>
-          <p:cNvPr id="24" name="TextBox 23"/>
+          <p:cNvPr id="33" name="TextBox 32"/>
           <p:cNvSpPr txBox="1"/>
           <p:nvPr/>
         </p:nvSpPr>
         <p:spPr>
           <a:xfrm>
-            <a:off x="6355080" y="2670048"/>
+            <a:off x="6355080" y="3703320"/>
+            <a:ext cx="5303520" cy="238527"/>
+          </a:xfrm>
+          <a:prstGeom prst="rect">
+            <a:avLst/>
+          </a:prstGeom>
+          <a:noFill/>
+        </p:spPr>
+        <p:txBody>
+          <a:bodyPr wrap="square">
+            <a:spAutoFit/>
+          </a:bodyPr>
+          <a:lstStyle/>
+          <a:p>
+            <a:pPr algn="l"/>
+            <a:r>
+              <a:rPr sz="950">
+                <a:solidFill>
+                  <a:srgbClr val="00B050"/>
+                </a:solidFill>
+              </a:rPr>
+              <a:t>UZB       63%      7    0.273    0.167   +38.8%</a:t>
+            </a:r>
+          </a:p>
+        </p:txBody>
+      </p:sp>
+      <p:sp>
+        <p:nvSpPr>
+          <p:cNvPr id="34" name="TextBox 33"/>
+          <p:cNvSpPr txBox="1"/>
+          <p:nvPr/>
+        </p:nvSpPr>
+        <p:spPr>
+          <a:xfrm>
+            <a:off x="6355080" y="4023359"/>
+            <a:ext cx="5303520" cy="256032"/>
+          </a:xfrm>
+          <a:prstGeom prst="rect">
+            <a:avLst/>
+          </a:prstGeom>
+          <a:noFill/>
+        </p:spPr>
+        <p:txBody>
+          <a:bodyPr wrap="square">
+            <a:spAutoFit/>
+          </a:bodyPr>
+          <a:lstStyle/>
+          <a:p>
+            <a:pPr algn="l"/>
+            <a:r>
+              <a:rPr sz="950">
+                <a:solidFill>
+                  <a:srgbClr val="222A3A"/>
+                </a:solidFill>
+              </a:rPr>
+              <a:t>KGZ       53%      9    0.802    0.879    -9.6%</a:t>
+            </a:r>
+          </a:p>
+        </p:txBody>
+      </p:sp>
+      <p:sp>
+        <p:nvSpPr>
+          <p:cNvPr id="35" name="TextBox 34"/>
+          <p:cNvSpPr txBox="1"/>
+          <p:nvPr/>
+        </p:nvSpPr>
+        <p:spPr>
+          <a:xfrm>
+            <a:off x="6355080" y="4343400"/>
+            <a:ext cx="5303520" cy="256032"/>
+          </a:xfrm>
+          <a:prstGeom prst="rect">
+            <a:avLst/>
+          </a:prstGeom>
+          <a:noFill/>
+        </p:spPr>
+        <p:txBody>
+          <a:bodyPr wrap="square">
+            <a:spAutoFit/>
+          </a:bodyPr>
+          <a:lstStyle/>
+          <a:p>
+            <a:pPr algn="l"/>
+            <a:r>
+              <a:rPr sz="950">
+                <a:solidFill>
+                  <a:srgbClr val="222A3A"/>
+                </a:solidFill>
+              </a:rPr>
+              <a:t>ARM       53%      9    1.239    1.307    -5.5%</a:t>
+            </a:r>
+          </a:p>
+        </p:txBody>
+      </p:sp>
+      <p:sp>
+        <p:nvSpPr>
+          <p:cNvPr id="36" name="TextBox 35"/>
+          <p:cNvSpPr txBox="1"/>
+          <p:nvPr/>
+        </p:nvSpPr>
+        <p:spPr>
+          <a:xfrm>
+            <a:off x="6355080" y="4663440"/>
+            <a:ext cx="5303520" cy="256032"/>
+          </a:xfrm>
+          <a:prstGeom prst="rect">
+            <a:avLst/>
+          </a:prstGeom>
+          <a:noFill/>
+        </p:spPr>
+        <p:txBody>
+          <a:bodyPr wrap="square">
+            <a:spAutoFit/>
+          </a:bodyPr>
+          <a:lstStyle/>
+          <a:p>
+            <a:pPr algn="l"/>
+            <a:r>
+              <a:rPr sz="950">
+                <a:solidFill>
+                  <a:srgbClr val="222A3A"/>
+                </a:solidFill>
+              </a:rPr>
+              <a:t>GEO       68%      6    0.977    1.022    -4.7%</a:t>
+            </a:r>
+          </a:p>
+        </p:txBody>
+      </p:sp>
+      <p:sp>
+        <p:nvSpPr>
+          <p:cNvPr id="37" name="TextBox 36"/>
+          <p:cNvSpPr txBox="1"/>
+          <p:nvPr/>
+        </p:nvSpPr>
+        <p:spPr>
+          <a:xfrm>
+            <a:off x="6355080" y="4983479"/>
             <a:ext cx="5303520" cy="238527"/>
           </a:xfrm>
           <a:prstGeom prst="rect">
@@ -11625,88 +14792,20 @@
                   <a:srgbClr val="00B050"/>
                 </a:solidFill>
               </a:rPr>
-              <a:t>UZB       63%      7    0.310    0.153   +50.4%</a:t>
-            </a:r>
-          </a:p>
-        </p:txBody>
-      </p:sp>
-      <p:sp>
-        <p:nvSpPr>
-          <p:cNvPr id="25" name="TextBox 24"/>
+              <a:t>UKR       63%      7   11.842   11.070    +6.5%</a:t>
+            </a:r>
+          </a:p>
+        </p:txBody>
+      </p:sp>
+      <p:sp>
+        <p:nvSpPr>
+          <p:cNvPr id="38" name="TextBox 37"/>
           <p:cNvSpPr txBox="1"/>
           <p:nvPr/>
         </p:nvSpPr>
         <p:spPr>
           <a:xfrm>
-            <a:off x="6355080" y="3008376"/>
-            <a:ext cx="5303520" cy="238527"/>
-          </a:xfrm>
-          <a:prstGeom prst="rect">
-            <a:avLst/>
-          </a:prstGeom>
-          <a:noFill/>
-        </p:spPr>
-        <p:txBody>
-          <a:bodyPr wrap="square">
-            <a:spAutoFit/>
-          </a:bodyPr>
-          <a:lstStyle/>
-          <a:p>
-            <a:pPr algn="l"/>
-            <a:r>
-              <a:rPr sz="950" dirty="0">
-                <a:solidFill>
-                  <a:srgbClr val="00B050"/>
-                </a:solidFill>
-              </a:rPr>
-              <a:t>KGZ       53%      9    1.168    0.881   +24.6%</a:t>
-            </a:r>
-          </a:p>
-        </p:txBody>
-      </p:sp>
-      <p:sp>
-        <p:nvSpPr>
-          <p:cNvPr id="26" name="TextBox 25"/>
-          <p:cNvSpPr txBox="1"/>
-          <p:nvPr/>
-        </p:nvSpPr>
-        <p:spPr>
-          <a:xfrm>
-            <a:off x="6355080" y="3346704"/>
-            <a:ext cx="5303520" cy="238527"/>
-          </a:xfrm>
-          <a:prstGeom prst="rect">
-            <a:avLst/>
-          </a:prstGeom>
-          <a:noFill/>
-        </p:spPr>
-        <p:txBody>
-          <a:bodyPr wrap="square">
-            <a:spAutoFit/>
-          </a:bodyPr>
-          <a:lstStyle/>
-          <a:p>
-            <a:pPr algn="l"/>
-            <a:r>
-              <a:rPr sz="950" dirty="0">
-                <a:solidFill>
-                  <a:srgbClr val="00B050"/>
-                </a:solidFill>
-              </a:rPr>
-              <a:t>ARM       53%      9    1.297    1.232    +5.0%</a:t>
-            </a:r>
-          </a:p>
-        </p:txBody>
-      </p:sp>
-      <p:sp>
-        <p:nvSpPr>
-          <p:cNvPr id="27" name="TextBox 26"/>
-          <p:cNvSpPr txBox="1"/>
-          <p:nvPr/>
-        </p:nvSpPr>
-        <p:spPr>
-          <a:xfrm>
-            <a:off x="6355080" y="3685031"/>
+            <a:off x="6355080" y="5303520"/>
             <a:ext cx="5303520" cy="238527"/>
           </a:xfrm>
           <a:prstGeom prst="rect">
@@ -11727,89 +14826,21 @@
                   <a:srgbClr val="00B050"/>
                 </a:solidFill>
               </a:rPr>
-              <a:t>GEO       68%      6    1.054    0.956    +9.2%</a:t>
-            </a:r>
-          </a:p>
-        </p:txBody>
-      </p:sp>
-      <p:sp>
-        <p:nvSpPr>
-          <p:cNvPr id="28" name="TextBox 27"/>
-          <p:cNvSpPr txBox="1"/>
-          <p:nvPr/>
-        </p:nvSpPr>
-        <p:spPr>
-          <a:xfrm>
-            <a:off x="6355080" y="4023360"/>
-            <a:ext cx="5303520" cy="238527"/>
-          </a:xfrm>
-          <a:prstGeom prst="rect">
-            <a:avLst/>
-          </a:prstGeom>
-          <a:noFill/>
-        </p:spPr>
-        <p:txBody>
-          <a:bodyPr wrap="square">
-            <a:spAutoFit/>
-          </a:bodyPr>
-          <a:lstStyle/>
-          <a:p>
-            <a:pPr algn="l"/>
-            <a:r>
-              <a:rPr sz="950">
-                <a:solidFill>
-                  <a:srgbClr val="00B050"/>
-                </a:solidFill>
-              </a:rPr>
-              <a:t>UKR       63%      7   11.359   11.163    +1.7%</a:t>
-            </a:r>
-          </a:p>
-        </p:txBody>
-      </p:sp>
-      <p:sp>
-        <p:nvSpPr>
-          <p:cNvPr id="29" name="TextBox 28"/>
-          <p:cNvSpPr txBox="1"/>
-          <p:nvPr/>
-        </p:nvSpPr>
-        <p:spPr>
-          <a:xfrm>
-            <a:off x="6355080" y="4361688"/>
-            <a:ext cx="5303520" cy="274320"/>
-          </a:xfrm>
-          <a:prstGeom prst="rect">
-            <a:avLst/>
-          </a:prstGeom>
-          <a:noFill/>
-        </p:spPr>
-        <p:txBody>
-          <a:bodyPr wrap="square">
-            <a:spAutoFit/>
-          </a:bodyPr>
-          <a:lstStyle/>
-          <a:p>
-            <a:pPr algn="l"/>
-            <a:r>
-              <a:rPr sz="950">
-                <a:solidFill>
-                  <a:srgbClr val="222A3A"/>
-                </a:solidFill>
-              </a:rPr>
-              <a:t>SRB       47%     10    0.595    0.904   -52.0%</a:t>
-            </a:r>
-          </a:p>
-        </p:txBody>
-      </p:sp>
-      <p:sp>
-        <p:nvSpPr>
-          <p:cNvPr id="30" name="Rectangle 29"/>
+              <a:t>SRB       47%     10    0.840    0.779    +7.3%</a:t>
+            </a:r>
+          </a:p>
+        </p:txBody>
+      </p:sp>
+      <p:sp>
+        <p:nvSpPr>
+          <p:cNvPr id="39" name="Rectangle 38"/>
           <p:cNvSpPr/>
           <p:nvPr/>
         </p:nvSpPr>
         <p:spPr>
           <a:xfrm>
-            <a:off x="365760" y="5257800"/>
-            <a:ext cx="11430000" cy="822960"/>
+            <a:off x="365760" y="5733288"/>
+            <a:ext cx="11430000" cy="502920"/>
           </a:xfrm>
           <a:prstGeom prst="rect">
             <a:avLst/>
@@ -11846,14 +14877,14 @@
       </p:sp>
       <p:sp>
         <p:nvSpPr>
-          <p:cNvPr id="31" name="TextBox 30"/>
+          <p:cNvPr id="40" name="TextBox 39"/>
           <p:cNvSpPr txBox="1"/>
           <p:nvPr/>
         </p:nvSpPr>
         <p:spPr>
           <a:xfrm>
-            <a:off x="502920" y="5349240"/>
-            <a:ext cx="11155680" cy="640080"/>
+            <a:off x="502920" y="5797296"/>
+            <a:ext cx="11155680" cy="365760"/>
           </a:xfrm>
           <a:prstGeom prst="rect">
             <a:avLst/>
@@ -11868,23 +14899,12 @@
           <a:p>
             <a:pPr algn="l"/>
             <a:r>
-              <a:rPr sz="1100">
+              <a:rPr sz="1050">
                 <a:solidFill>
                   <a:srgbClr val="1A1A2E"/>
                 </a:solidFill>
               </a:rPr>
-              <a:t>Result: HIGH-miss countries show consistent gains (5 of 6 positive) vs mixed results for LOW-miss.</a:t>
-            </a:r>
-          </a:p>
-          <a:p>
-            <a:pPr algn="l"/>
-            <a:r>
-              <a:rPr sz="1100">
-                <a:solidFill>
-                  <a:srgbClr val="1A1A2E"/>
-                </a:solidFill>
-              </a:rPr>
-              <a:t>Hypothesis confirmed with OpenAI embeddings. With BERT the pattern was absent.</a:t>
+              <a:t>Text coverage gaps: mixed — 4/6 LOW-miss positive (JPN +86.3%, KAZ +45.5%), 3/6 HIGH-miss positive (UZB +38.8%). Not confirmed.</a:t>
             </a:r>
           </a:p>
         </p:txBody>
@@ -12143,7 +15163,7 @@
                   <a:srgbClr val="222A3A"/>
                 </a:solidFill>
               </a:rPr>
-              <a:t>GR-Add MMF (OpenAI) achieves the best overall MSE (2.584), beating NumericalGRU (2.847) and DLinear (3.118). Main gain is in inflation (3.684 vs 4.228). BERT truncation limited text signal — OpenAI full-context embeddings are necessary.</a:t>
+              <a:t>GR-Add MMF (OpenAI) achieves the best overall MSE (2.678), beating NumericalGRU (2.841) by 6.0% and narrowly beating DLinear (2.685). Main gain is in inflation (3.909 vs 4.198, 6.9% reduction). BERT truncation limited text signal — OpenAI full-context embeddings are necessary.</a:t>
             </a:r>
           </a:p>
         </p:txBody>
@@ -12221,7 +15241,7 @@
                   <a:srgbClr val="0A6A2E"/>
                 </a:solidFill>
               </a:rPr>
-              <a:t>2.  All models beat the persistence baseline by ~98%</a:t>
+              <a:t>2.  All models beat the persistence baseline by ~97-98%</a:t>
             </a:r>
           </a:p>
         </p:txBody>
@@ -12255,7 +15275,7 @@
                   <a:srgbClr val="222A3A"/>
                 </a:solidFill>
               </a:rPr>
-              <a:t>Persistence (random walk) MSE = 105.44. GR-Add MSE = 2.584. This 97.6% reduction shows the WDI numerical panel is highly informative. Text adds an additional 9.2% reduction in inflation MSE on top of the numerical-only GRU.</a:t>
+              <a:t>Persistence (random walk) MSE = 105.44. GR-Add MSE = 2.678. This 97.5% reduction shows the WDI numerical panel is highly informative. Text adds an additional 6.9% reduction in inflation MSE on top of the numerical-only GRU.</a:t>
             </a:r>
           </a:p>
         </p:txBody>
@@ -12333,7 +15353,7 @@
                   <a:srgbClr val="0A6A2E"/>
                 </a:solidFill>
               </a:rPr>
-              <a:t>3.  Gappier countries benefit more from text</a:t>
+              <a:t>3.  Gappiness hypothesis confirmed for WDI gaps, not for text coverage gaps</a:t>
             </a:r>
           </a:p>
         </p:txBody>
@@ -12367,7 +15387,7 @@
                   <a:srgbClr val="222A3A"/>
                 </a:solidFill>
               </a:rPr>
-              <a:t>Countries with &gt;37% missing Article IV texts (UZB, KGZ, ARM, GEO) show consistent GR-Add gains (5/6 positive). Low-missingness countries are mixed — when numerical data is dense, text provides diminishing returns.</a:t>
+              <a:t>WDI numerical gaps: HIGH-miss samples +9.4% (GR-Add vs DLinear), LOW-miss -0.8% — hypothesis confirmed. Text coverage gaps: 4/6 LOW-miss positive (JPN +86.3%, KAZ +45.5%), 3/6 HIGH-miss positive (UZB +38.8%) — mixed, not confirmed. Text substitutes for missing indicators; it does not substitute for missing reports.</a:t>
             </a:r>
           </a:p>
         </p:txBody>
